--- a/PPTs/Lecture 5.3 - Link-State.pptx
+++ b/PPTs/Lecture 5.3 - Link-State.pptx
@@ -5,7 +5,7 @@
     <p:sldMasterId id="2147483670" r:id="rId1"/>
   </p:sldMasterIdLst>
   <p:notesMasterIdLst>
-    <p:notesMasterId r:id="rId22"/>
+    <p:notesMasterId r:id="rId23"/>
   </p:notesMasterIdLst>
   <p:sldIdLst>
     <p:sldId id="256" r:id="rId2"/>
@@ -28,30 +28,31 @@
     <p:sldId id="273" r:id="rId19"/>
     <p:sldId id="274" r:id="rId20"/>
     <p:sldId id="275" r:id="rId21"/>
+    <p:sldId id="500" r:id="rId22"/>
   </p:sldIdLst>
   <p:sldSz cx="9144000" cy="5143500" type="screen16x9"/>
   <p:notesSz cx="6858000" cy="9144000"/>
   <p:embeddedFontLst>
     <p:embeddedFont>
       <p:font typeface="Roboto" panose="02000000000000000000" pitchFamily="2" charset="0"/>
-      <p:regular r:id="rId23"/>
-      <p:bold r:id="rId24"/>
-      <p:italic r:id="rId25"/>
-      <p:boldItalic r:id="rId26"/>
+      <p:regular r:id="rId24"/>
+      <p:bold r:id="rId25"/>
+      <p:italic r:id="rId26"/>
+      <p:boldItalic r:id="rId27"/>
     </p:embeddedFont>
     <p:embeddedFont>
       <p:font typeface="Roboto Light" panose="02000000000000000000" pitchFamily="2" charset="0"/>
-      <p:regular r:id="rId27"/>
-      <p:bold r:id="rId28"/>
-      <p:italic r:id="rId29"/>
-      <p:boldItalic r:id="rId30"/>
+      <p:regular r:id="rId28"/>
+      <p:bold r:id="rId29"/>
+      <p:italic r:id="rId30"/>
+      <p:boldItalic r:id="rId31"/>
     </p:embeddedFont>
     <p:embeddedFont>
       <p:font typeface="Roboto Medium" panose="02000000000000000000" pitchFamily="2" charset="0"/>
-      <p:regular r:id="rId31"/>
-      <p:bold r:id="rId32"/>
-      <p:italic r:id="rId33"/>
-      <p:boldItalic r:id="rId34"/>
+      <p:regular r:id="rId32"/>
+      <p:bold r:id="rId33"/>
+      <p:italic r:id="rId34"/>
+      <p:boldItalic r:id="rId35"/>
     </p:embeddedFont>
   </p:embeddedFontLst>
   <p:defaultTextStyle>
@@ -1175,7 +1176,7 @@
         </p:nvSpPr>
         <p:spPr>
           <a:xfrm>
-            <a:off x="381300" y="685800"/>
+            <a:off x="381000" y="685800"/>
             <a:ext cx="6096000" cy="3429000"/>
           </a:xfrm>
           <a:custGeom>
@@ -1747,7 +1748,7 @@
         </p:nvSpPr>
         <p:spPr>
           <a:xfrm>
-            <a:off x="381300" y="685800"/>
+            <a:off x="381000" y="685800"/>
             <a:ext cx="6096000" cy="3429000"/>
           </a:xfrm>
           <a:custGeom>
@@ -1897,7 +1898,7 @@
         </p:nvSpPr>
         <p:spPr>
           <a:xfrm>
-            <a:off x="381300" y="685800"/>
+            <a:off x="381000" y="685800"/>
             <a:ext cx="6096000" cy="3429000"/>
           </a:xfrm>
           <a:custGeom>
@@ -2801,7 +2802,7 @@
         </p:nvSpPr>
         <p:spPr>
           <a:xfrm>
-            <a:off x="381300" y="685800"/>
+            <a:off x="381000" y="685800"/>
             <a:ext cx="6096000" cy="3429000"/>
           </a:xfrm>
           <a:custGeom>
@@ -3514,7 +3515,7 @@
         </p:nvSpPr>
         <p:spPr>
           <a:xfrm>
-            <a:off x="381300" y="685800"/>
+            <a:off x="381000" y="685800"/>
             <a:ext cx="6096000" cy="3429000"/>
           </a:xfrm>
           <a:custGeom>
@@ -4017,7 +4018,7 @@
         </p:nvSpPr>
         <p:spPr>
           <a:xfrm>
-            <a:off x="381300" y="685800"/>
+            <a:off x="381000" y="685800"/>
             <a:ext cx="6096000" cy="3429000"/>
           </a:xfrm>
           <a:custGeom>
@@ -4856,7 +4857,7 @@
         </p:nvSpPr>
         <p:spPr>
           <a:xfrm>
-            <a:off x="381300" y="685800"/>
+            <a:off x="381000" y="685800"/>
             <a:ext cx="6096000" cy="3429000"/>
           </a:xfrm>
           <a:custGeom>
@@ -5384,7 +5385,7 @@
         </p:nvSpPr>
         <p:spPr>
           <a:xfrm>
-            <a:off x="381300" y="685800"/>
+            <a:off x="381000" y="685800"/>
             <a:ext cx="6096000" cy="3429000"/>
           </a:xfrm>
           <a:custGeom>
@@ -5952,7 +5953,7 @@
         </p:nvSpPr>
         <p:spPr>
           <a:xfrm>
-            <a:off x="381300" y="685800"/>
+            <a:off x="381000" y="685800"/>
             <a:ext cx="6096000" cy="3429000"/>
           </a:xfrm>
           <a:custGeom>
@@ -6623,7 +6624,7 @@
         </p:nvSpPr>
         <p:spPr>
           <a:xfrm>
-            <a:off x="381300" y="685800"/>
+            <a:off x="381000" y="685800"/>
             <a:ext cx="6096000" cy="3429000"/>
           </a:xfrm>
           <a:custGeom>
@@ -6692,10 +6693,10 @@
               <a:buNone/>
             </a:pPr>
             <a:r>
-              <a:rPr lang="en"/>
+              <a:rPr lang="en" dirty="0"/>
               <a:t>23:02</a:t>
             </a:r>
-            <a:endParaRPr/>
+            <a:endParaRPr dirty="0"/>
           </a:p>
           <a:p>
             <a:pPr marL="0" lvl="0" indent="0" algn="l" rtl="0">
@@ -6713,10 +6714,10 @@
               <a:buNone/>
             </a:pPr>
             <a:r>
-              <a:rPr lang="en"/>
+              <a:rPr lang="en" dirty="0"/>
               <a:t>we'll quickly talk about convergence because remember that the network topology can change links can go down</a:t>
             </a:r>
-            <a:endParaRPr/>
+            <a:endParaRPr dirty="0"/>
           </a:p>
           <a:p>
             <a:pPr marL="0" lvl="0" indent="0" algn="l" rtl="0">
@@ -6734,10 +6735,10 @@
               <a:buNone/>
             </a:pPr>
             <a:r>
-              <a:rPr lang="en"/>
+              <a:rPr lang="en" dirty="0"/>
               <a:t>23:09</a:t>
             </a:r>
-            <a:endParaRPr/>
+            <a:endParaRPr dirty="0"/>
           </a:p>
           <a:p>
             <a:pPr marL="0" lvl="0" indent="0" algn="l" rtl="0">
@@ -6755,10 +6756,10 @@
               <a:buNone/>
             </a:pPr>
             <a:r>
-              <a:rPr lang="en"/>
+              <a:rPr lang="en" dirty="0"/>
               <a:t>new hosts can join they can leave and this can actually cause routes to temporarily be invalid it's kind of</a:t>
             </a:r>
-            <a:endParaRPr/>
+            <a:endParaRPr dirty="0"/>
           </a:p>
           <a:p>
             <a:pPr marL="0" lvl="0" indent="0" algn="l" rtl="0">
@@ -6776,10 +6777,10 @@
               <a:buNone/>
             </a:pPr>
             <a:r>
-              <a:rPr lang="en"/>
+              <a:rPr lang="en" dirty="0"/>
               <a:t>23:15</a:t>
             </a:r>
-            <a:endParaRPr/>
+            <a:endParaRPr dirty="0"/>
           </a:p>
           <a:p>
             <a:pPr marL="0" lvl="0" indent="0" algn="l" rtl="0">
@@ -6797,10 +6798,10 @@
               <a:buNone/>
             </a:pPr>
             <a:r>
-              <a:rPr lang="en"/>
+              <a:rPr lang="en" dirty="0"/>
               <a:t>similar to what you saw on the distance Vector protocol when something changes about the network the routing state</a:t>
             </a:r>
-            <a:endParaRPr/>
+            <a:endParaRPr dirty="0"/>
           </a:p>
           <a:p>
             <a:pPr marL="0" lvl="0" indent="0" algn="l" rtl="0">
@@ -6818,10 +6819,10 @@
               <a:buNone/>
             </a:pPr>
             <a:r>
-              <a:rPr lang="en"/>
+              <a:rPr lang="en" dirty="0"/>
               <a:t>23:21</a:t>
             </a:r>
-            <a:endParaRPr/>
+            <a:endParaRPr dirty="0"/>
           </a:p>
           <a:p>
             <a:pPr marL="0" lvl="0" indent="0" algn="l" rtl="0">
@@ -6839,10 +6840,10 @@
               <a:buNone/>
             </a:pPr>
             <a:r>
-              <a:rPr lang="en"/>
+              <a:rPr lang="en" dirty="0"/>
               <a:t>becomes invalid and we have to wait a little bit for the routing to converge again to a new valid state so when</a:t>
             </a:r>
-            <a:endParaRPr/>
+            <a:endParaRPr dirty="0"/>
           </a:p>
           <a:p>
             <a:pPr marL="0" lvl="0" indent="0" algn="l" rtl="0">
@@ -6860,10 +6861,10 @@
               <a:buNone/>
             </a:pPr>
             <a:r>
-              <a:rPr lang="en"/>
+              <a:rPr lang="en" dirty="0"/>
               <a:t>23:27</a:t>
             </a:r>
-            <a:endParaRPr/>
+            <a:endParaRPr dirty="0"/>
           </a:p>
           <a:p>
             <a:pPr marL="0" lvl="0" indent="0" algn="l" rtl="0">
@@ -6881,10 +6882,10 @@
               <a:buNone/>
             </a:pPr>
             <a:r>
-              <a:rPr lang="en"/>
+              <a:rPr lang="en" dirty="0"/>
               <a:t>something breaks everyone has to take some time to adjust to the failure and only after everyone</a:t>
             </a:r>
-            <a:endParaRPr/>
+            <a:endParaRPr dirty="0"/>
           </a:p>
           <a:p>
             <a:pPr marL="0" lvl="0" indent="0" algn="l" rtl="0">
@@ -6902,10 +6903,10 @@
               <a:buNone/>
             </a:pPr>
             <a:r>
-              <a:rPr lang="en"/>
+              <a:rPr lang="en" dirty="0"/>
               <a:t>23:33</a:t>
             </a:r>
-            <a:endParaRPr/>
+            <a:endParaRPr dirty="0"/>
           </a:p>
           <a:p>
             <a:pPr marL="0" lvl="0" indent="0" algn="l" rtl="0">
@@ -6923,10 +6924,10 @@
               <a:buNone/>
             </a:pPr>
             <a:r>
-              <a:rPr lang="en"/>
+              <a:rPr lang="en" dirty="0"/>
               <a:t>adjusts do we arrive at a new steady state and a new valid routing State and</a:t>
             </a:r>
-            <a:endParaRPr/>
+            <a:endParaRPr dirty="0"/>
           </a:p>
           <a:p>
             <a:pPr marL="0" lvl="0" indent="0" algn="l" rtl="0">
@@ -6944,10 +6945,10 @@
               <a:buNone/>
             </a:pPr>
             <a:r>
-              <a:rPr lang="en"/>
+              <a:rPr lang="en" dirty="0"/>
               <a:t>23:38</a:t>
             </a:r>
-            <a:endParaRPr/>
+            <a:endParaRPr dirty="0"/>
           </a:p>
           <a:p>
             <a:pPr marL="0" lvl="0" indent="0" algn="l" rtl="0">
@@ -6965,10 +6966,10 @@
               <a:buNone/>
             </a:pPr>
             <a:r>
-              <a:rPr lang="en"/>
+              <a:rPr lang="en" dirty="0"/>
               <a:t>that exact same pattern happens in link State protocols so for example let's say that the a to R3 link goes down and</a:t>
             </a:r>
-            <a:endParaRPr/>
+            <a:endParaRPr dirty="0"/>
           </a:p>
           <a:p>
             <a:pPr marL="0" lvl="0" indent="0" algn="l" rtl="0">
@@ -6986,10 +6987,10 @@
               <a:buNone/>
             </a:pPr>
             <a:r>
-              <a:rPr lang="en"/>
+              <a:rPr lang="en" dirty="0"/>
               <a:t>23:46</a:t>
             </a:r>
-            <a:endParaRPr/>
+            <a:endParaRPr dirty="0"/>
           </a:p>
           <a:p>
             <a:pPr marL="0" lvl="0" indent="0" algn="l" rtl="0">
@@ -7007,10 +7008,10 @@
               <a:buNone/>
             </a:pPr>
             <a:r>
-              <a:rPr lang="en"/>
+              <a:rPr lang="en" dirty="0"/>
               <a:t>let's say R3 knows about it but at this point R1 doesn't know about it yet maybe r1's further away and it hasn't heard</a:t>
             </a:r>
-            <a:endParaRPr/>
+            <a:endParaRPr dirty="0"/>
           </a:p>
           <a:p>
             <a:pPr marL="0" lvl="0" indent="0" algn="l" rtl="0">
@@ -7028,10 +7029,10 @@
               <a:buNone/>
             </a:pPr>
             <a:r>
-              <a:rPr lang="en"/>
+              <a:rPr lang="en" dirty="0"/>
               <a:t>23:52</a:t>
             </a:r>
-            <a:endParaRPr/>
+            <a:endParaRPr dirty="0"/>
           </a:p>
           <a:p>
             <a:pPr marL="0" lvl="0" indent="0" algn="l" rtl="0">
@@ -7049,10 +7050,10 @@
               <a:buNone/>
             </a:pPr>
             <a:r>
-              <a:rPr lang="en"/>
+              <a:rPr lang="en" dirty="0"/>
               <a:t>about the link going down yet so r1's picture is that all four links are valid</a:t>
             </a:r>
-            <a:endParaRPr/>
+            <a:endParaRPr dirty="0"/>
           </a:p>
           <a:p>
             <a:pPr marL="0" lvl="0" indent="0" algn="l" rtl="0">
@@ -7070,10 +7071,10 @@
               <a:buNone/>
             </a:pPr>
             <a:r>
-              <a:rPr lang="en"/>
+              <a:rPr lang="en" dirty="0"/>
               <a:t>23:57</a:t>
             </a:r>
-            <a:endParaRPr/>
+            <a:endParaRPr dirty="0"/>
           </a:p>
           <a:p>
             <a:pPr marL="0" lvl="0" indent="0" algn="l" rtl="0">
@@ -7091,10 +7092,10 @@
               <a:buNone/>
             </a:pPr>
             <a:r>
-              <a:rPr lang="en"/>
+              <a:rPr lang="en" dirty="0"/>
               <a:t>and in that case if it needs to compute the shortest path to a it might perhaps compute R1 R3 a the path in blue so</a:t>
             </a:r>
-            <a:endParaRPr/>
+            <a:endParaRPr dirty="0"/>
           </a:p>
           <a:p>
             <a:pPr marL="0" lvl="0" indent="0" algn="l" rtl="0">
@@ -7112,10 +7113,10 @@
               <a:buNone/>
             </a:pPr>
             <a:r>
-              <a:rPr lang="en"/>
+              <a:rPr lang="en" dirty="0"/>
               <a:t>24:05</a:t>
             </a:r>
-            <a:endParaRPr/>
+            <a:endParaRPr dirty="0"/>
           </a:p>
           <a:p>
             <a:pPr marL="0" lvl="0" indent="0" algn="l" rtl="0">
@@ -7133,10 +7134,10 @@
               <a:buNone/>
             </a:pPr>
             <a:r>
-              <a:rPr lang="en"/>
+              <a:rPr lang="en" dirty="0"/>
               <a:t>we'll forward packets to R3 by contrast R3 knows that the link has gone down</a:t>
             </a:r>
-            <a:endParaRPr/>
+            <a:endParaRPr dirty="0"/>
           </a:p>
           <a:p>
             <a:pPr marL="0" lvl="0" indent="0" algn="l" rtl="0">
@@ -7154,10 +7155,10 @@
               <a:buNone/>
             </a:pPr>
             <a:r>
-              <a:rPr lang="en"/>
+              <a:rPr lang="en" dirty="0"/>
               <a:t>24:10</a:t>
             </a:r>
-            <a:endParaRPr/>
+            <a:endParaRPr dirty="0"/>
           </a:p>
           <a:p>
             <a:pPr marL="0" lvl="0" indent="0" algn="l" rtl="0">
@@ -7175,10 +7176,10 @@
               <a:buNone/>
             </a:pPr>
             <a:r>
-              <a:rPr lang="en"/>
+              <a:rPr lang="en" dirty="0"/>
               <a:t>because it knows about that fact so it will instead using its full information</a:t>
             </a:r>
-            <a:endParaRPr/>
+            <a:endParaRPr dirty="0"/>
           </a:p>
           <a:p>
             <a:pPr marL="0" lvl="0" indent="0" algn="l" rtl="0">
@@ -7196,10 +7197,10 @@
               <a:buNone/>
             </a:pPr>
             <a:r>
-              <a:rPr lang="en"/>
+              <a:rPr lang="en" dirty="0"/>
               <a:t>24:16</a:t>
             </a:r>
-            <a:endParaRPr/>
+            <a:endParaRPr dirty="0"/>
           </a:p>
           <a:p>
             <a:pPr marL="0" lvl="0" indent="0" algn="l" rtl="0">
@@ -7217,10 +7218,10 @@
               <a:buNone/>
             </a:pPr>
             <a:r>
-              <a:rPr lang="en"/>
+              <a:rPr lang="en" dirty="0"/>
               <a:t>about the network compute this path in red and its next top will be R1 and we are once again in a loop R1 sends</a:t>
             </a:r>
-            <a:endParaRPr/>
+            <a:endParaRPr dirty="0"/>
           </a:p>
           <a:p>
             <a:pPr marL="0" lvl="0" indent="0" algn="l" rtl="0">
@@ -7238,10 +7239,10 @@
               <a:buNone/>
             </a:pPr>
             <a:r>
-              <a:rPr lang="en"/>
+              <a:rPr lang="en" dirty="0"/>
               <a:t>24:23</a:t>
             </a:r>
-            <a:endParaRPr/>
+            <a:endParaRPr dirty="0"/>
           </a:p>
           <a:p>
             <a:pPr marL="0" lvl="0" indent="0" algn="l" rtl="0">
@@ -7259,10 +7260,10 @@
               <a:buNone/>
             </a:pPr>
             <a:r>
-              <a:rPr lang="en"/>
+              <a:rPr lang="en" dirty="0"/>
               <a:t>packets to R3 R3 sends packets to R1 this will eventually get fixed once the</a:t>
             </a:r>
-            <a:endParaRPr/>
+            <a:endParaRPr dirty="0"/>
           </a:p>
           <a:p>
             <a:pPr marL="0" lvl="0" indent="0" algn="l" rtl="0">
@@ -7280,10 +7281,10 @@
               <a:buNone/>
             </a:pPr>
             <a:r>
-              <a:rPr lang="en"/>
+              <a:rPr lang="en" dirty="0"/>
               <a:t>24:29</a:t>
             </a:r>
-            <a:endParaRPr/>
+            <a:endParaRPr dirty="0"/>
           </a:p>
           <a:p>
             <a:pPr marL="0" lvl="0" indent="0" algn="l" rtl="0">
@@ -7301,10 +7302,10 @@
               <a:buNone/>
             </a:pPr>
             <a:r>
-              <a:rPr lang="en"/>
+              <a:rPr lang="en" dirty="0"/>
               <a:t>information about this dead link propagates to everyone else but for now it is not fixed and we have a routing</a:t>
             </a:r>
-            <a:endParaRPr/>
+            <a:endParaRPr dirty="0"/>
           </a:p>
           <a:p>
             <a:pPr marL="0" lvl="0" indent="0" algn="l" rtl="0">
@@ -7322,10 +7323,10 @@
               <a:buNone/>
             </a:pPr>
             <a:r>
-              <a:rPr lang="en"/>
+              <a:rPr lang="en" dirty="0"/>
               <a:t>24:35</a:t>
             </a:r>
-            <a:endParaRPr/>
+            <a:endParaRPr dirty="0"/>
           </a:p>
           <a:p>
             <a:pPr marL="0" lvl="0" indent="0" algn="l" rtl="0">
@@ -7343,10 +7344,10 @@
               <a:buNone/>
             </a:pPr>
             <a:r>
-              <a:rPr lang="en"/>
+              <a:rPr lang="en" dirty="0"/>
               <a:t>Loop until everyone reestablishes agreement of what the network graph looks like so this can happen sometimes</a:t>
             </a:r>
-            <a:endParaRPr/>
+            <a:endParaRPr dirty="0"/>
           </a:p>
           <a:p>
             <a:pPr marL="0" lvl="0" indent="0" algn="l" rtl="0">
@@ -7364,10 +7365,10 @@
               <a:buNone/>
             </a:pPr>
             <a:r>
-              <a:rPr lang="en"/>
+              <a:rPr lang="en" dirty="0"/>
               <a:t>24:42</a:t>
             </a:r>
-            <a:endParaRPr/>
+            <a:endParaRPr dirty="0"/>
           </a:p>
           <a:p>
             <a:pPr marL="0" lvl="0" indent="0" algn="l" rtl="0">
@@ -7385,10 +7386,10 @@
               <a:buNone/>
             </a:pPr>
             <a:r>
-              <a:rPr lang="en"/>
+              <a:rPr lang="en" dirty="0"/>
               <a:t>just like in the distance Vector protocol and we have to deal with</a:t>
             </a:r>
-            <a:endParaRPr/>
+            <a:endParaRPr dirty="0"/>
           </a:p>
           <a:p>
             <a:pPr marL="0" lvl="0" indent="0" algn="l" rtl="0">
@@ -7406,10 +7407,10 @@
               <a:buNone/>
             </a:pPr>
             <a:r>
-              <a:rPr lang="en"/>
+              <a:rPr lang="en" dirty="0"/>
               <a:t>24:48</a:t>
             </a:r>
-            <a:endParaRPr/>
+            <a:endParaRPr dirty="0"/>
           </a:p>
           <a:p>
             <a:pPr marL="0" lvl="0" indent="0" algn="l" rtl="0">
@@ -7427,22 +7428,22 @@
               <a:buNone/>
             </a:pPr>
             <a:r>
-              <a:rPr lang="en"/>
+              <a:rPr lang="en" dirty="0"/>
               <a:t>it so</a:t>
             </a:r>
-            <a:endParaRPr/>
-          </a:p>
-          <a:p>
-            <a:pPr marL="0" lvl="0" indent="0" algn="l" rtl="0">
-              <a:spcBef>
-                <a:spcPts val="0"/>
-              </a:spcBef>
-              <a:spcAft>
-                <a:spcPts val="0"/>
-              </a:spcAft>
-              <a:buNone/>
-            </a:pPr>
-            <a:endParaRPr/>
+            <a:endParaRPr dirty="0"/>
+          </a:p>
+          <a:p>
+            <a:pPr marL="0" lvl="0" indent="0" algn="l" rtl="0">
+              <a:spcBef>
+                <a:spcPts val="0"/>
+              </a:spcBef>
+              <a:spcAft>
+                <a:spcPts val="0"/>
+              </a:spcAft>
+              <a:buNone/>
+            </a:pPr>
+            <a:endParaRPr dirty="0"/>
           </a:p>
         </p:txBody>
       </p:sp>
@@ -7633,7 +7634,7 @@
         </p:nvSpPr>
         <p:spPr>
           <a:xfrm>
-            <a:off x="381300" y="685800"/>
+            <a:off x="381000" y="685800"/>
             <a:ext cx="6096000" cy="3429000"/>
           </a:xfrm>
           <a:custGeom>
@@ -8972,6 +8973,72 @@
 </p:notes>
 </file>
 
+<file path=ppt/notesSlides/notesSlide21.xml><?xml version="1.0" encoding="utf-8"?>
+<p:notes xmlns:a="http://schemas.openxmlformats.org/drawingml/2006/main" xmlns:r="http://schemas.openxmlformats.org/officeDocument/2006/relationships" xmlns:p="http://schemas.openxmlformats.org/presentationml/2006/main">
+  <p:cSld>
+    <p:spTree>
+      <p:nvGrpSpPr>
+        <p:cNvPr id="1" name=""/>
+        <p:cNvGrpSpPr/>
+        <p:nvPr/>
+      </p:nvGrpSpPr>
+      <p:grpSpPr>
+        <a:xfrm>
+          <a:off x="0" y="0"/>
+          <a:ext cx="0" cy="0"/>
+          <a:chOff x="0" y="0"/>
+          <a:chExt cx="0" cy="0"/>
+        </a:xfrm>
+      </p:grpSpPr>
+      <p:sp>
+        <p:nvSpPr>
+          <p:cNvPr id="2" name="Slide Image Placeholder 1"/>
+          <p:cNvSpPr>
+            <a:spLocks noGrp="1" noRot="1" noChangeAspect="1"/>
+          </p:cNvSpPr>
+          <p:nvPr>
+            <p:ph type="sldImg"/>
+          </p:nvPr>
+        </p:nvSpPr>
+        <p:spPr>
+          <a:xfrm>
+            <a:off x="381000" y="685800"/>
+            <a:ext cx="6096000" cy="3429000"/>
+          </a:xfrm>
+        </p:spPr>
+      </p:sp>
+      <p:sp>
+        <p:nvSpPr>
+          <p:cNvPr id="3" name="Notes Placeholder 2"/>
+          <p:cNvSpPr>
+            <a:spLocks noGrp="1"/>
+          </p:cNvSpPr>
+          <p:nvPr>
+            <p:ph type="body" idx="1"/>
+          </p:nvPr>
+        </p:nvSpPr>
+        <p:spPr/>
+        <p:txBody>
+          <a:bodyPr/>
+          <a:lstStyle/>
+          <a:p>
+            <a:endParaRPr lang="zh-CN" altLang="en-US" dirty="0"/>
+          </a:p>
+        </p:txBody>
+      </p:sp>
+    </p:spTree>
+    <p:extLst>
+      <p:ext uri="{BB962C8B-B14F-4D97-AF65-F5344CB8AC3E}">
+        <p14:creationId xmlns:p14="http://schemas.microsoft.com/office/powerpoint/2010/main" val="2839430483"/>
+      </p:ext>
+    </p:extLst>
+  </p:cSld>
+  <p:clrMapOvr>
+    <a:masterClrMapping/>
+  </p:clrMapOvr>
+</p:notes>
+</file>
+
 <file path=ppt/notesSlides/notesSlide3.xml><?xml version="1.0" encoding="utf-8"?>
 <p:notes xmlns:a="http://schemas.openxmlformats.org/drawingml/2006/main" xmlns:r="http://schemas.openxmlformats.org/officeDocument/2006/relationships" xmlns:p="http://schemas.openxmlformats.org/presentationml/2006/main" showMasterSp="0" showMasterPhAnim="0">
   <p:cSld>
@@ -9001,7 +9068,7 @@
         </p:nvSpPr>
         <p:spPr>
           <a:xfrm>
-            <a:off x="381300" y="685800"/>
+            <a:off x="381000" y="685800"/>
             <a:ext cx="6096000" cy="3429000"/>
           </a:xfrm>
           <a:custGeom>
@@ -9796,7 +9863,7 @@
         </p:nvSpPr>
         <p:spPr>
           <a:xfrm>
-            <a:off x="381300" y="685800"/>
+            <a:off x="381000" y="685800"/>
             <a:ext cx="6096000" cy="3429000"/>
           </a:xfrm>
           <a:custGeom>
@@ -9850,7 +9917,10 @@
           </a:bodyPr>
           <a:lstStyle/>
           <a:p>
-            <a:pPr marL="0" lvl="0" indent="0" algn="l" rtl="0">
+            <a:pPr marL="0" marR="0" lvl="0" indent="0" algn="l" defTabSz="914400" rtl="0" eaLnBrk="1" fontAlgn="auto" latinLnBrk="0" hangingPunct="1">
+              <a:lnSpc>
+                <a:spcPct val="100000"/>
+              </a:lnSpc>
               <a:spcBef>
                 <a:spcPts val="0"/>
               </a:spcBef>
@@ -9863,12 +9933,20 @@
               <a:buSzPts val="1100"/>
               <a:buFont typeface="Arial"/>
               <a:buNone/>
-            </a:pPr>
-            <a:r>
-              <a:rPr lang="en"/>
-              <a:t>so the link State protocols</a:t>
-            </a:r>
-            <a:endParaRPr/>
+              <a:tabLst/>
+              <a:defRPr/>
+            </a:pPr>
+            <a:r>
+              <a:rPr lang="en-US" altLang="zh-CN" dirty="0"/>
+              <a:t>Distance Vector is local knowledge plus distributed computation.</a:t>
+            </a:r>
+            <a:br>
+              <a:rPr lang="en-US" altLang="zh-CN" dirty="0"/>
+            </a:br>
+            <a:r>
+              <a:rPr lang="en-US" altLang="zh-CN" dirty="0"/>
+              <a:t>Link State is global knowledge plus local computation.</a:t>
+            </a:r>
           </a:p>
           <a:p>
             <a:pPr marL="0" lvl="0" indent="0" algn="l" rtl="0">
@@ -9885,11 +9963,7 @@
               <a:buFont typeface="Arial"/>
               <a:buNone/>
             </a:pPr>
-            <a:r>
-              <a:rPr lang="en"/>
-              <a:t>2:00</a:t>
-            </a:r>
-            <a:endParaRPr/>
+            <a:endParaRPr lang="en" dirty="0"/>
           </a:p>
           <a:p>
             <a:pPr marL="0" lvl="0" indent="0" algn="l" rtl="0">
@@ -9907,10 +9981,10 @@
               <a:buNone/>
             </a:pPr>
             <a:r>
-              <a:rPr lang="en"/>
-              <a:t>actually relatively simple compared to its cousin the distance Vector protocol there's only two things you have to do</a:t>
-            </a:r>
-            <a:endParaRPr/>
+              <a:rPr lang="en" dirty="0"/>
+              <a:t>so the link State protocols</a:t>
+            </a:r>
+            <a:endParaRPr dirty="0"/>
           </a:p>
           <a:p>
             <a:pPr marL="0" lvl="0" indent="0" algn="l" rtl="0">
@@ -9928,10 +10002,10 @@
               <a:buNone/>
             </a:pPr>
             <a:r>
-              <a:rPr lang="en"/>
-              <a:t>2:06</a:t>
-            </a:r>
-            <a:endParaRPr/>
+              <a:rPr lang="en" dirty="0"/>
+              <a:t>2:00</a:t>
+            </a:r>
+            <a:endParaRPr dirty="0"/>
           </a:p>
           <a:p>
             <a:pPr marL="0" lvl="0" indent="0" algn="l" rtl="0">
@@ -9949,10 +10023,10 @@
               <a:buNone/>
             </a:pPr>
             <a:r>
-              <a:rPr lang="en"/>
-              <a:t>step one it's step two and you're done so the first step is have every router</a:t>
-            </a:r>
-            <a:endParaRPr/>
+              <a:rPr lang="en" dirty="0"/>
+              <a:t>actually relatively simple compared to its cousin the distance Vector protocol there's only two things you have to do</a:t>
+            </a:r>
+            <a:endParaRPr dirty="0"/>
           </a:p>
           <a:p>
             <a:pPr marL="0" lvl="0" indent="0" algn="l" rtl="0">
@@ -9970,10 +10044,10 @@
               <a:buNone/>
             </a:pPr>
             <a:r>
-              <a:rPr lang="en"/>
-              <a:t>2:11</a:t>
-            </a:r>
-            <a:endParaRPr/>
+              <a:rPr lang="en" dirty="0"/>
+              <a:t>2:06</a:t>
+            </a:r>
+            <a:endParaRPr dirty="0"/>
           </a:p>
           <a:p>
             <a:pPr marL="0" lvl="0" indent="0" algn="l" rtl="0">
@@ -9991,10 +10065,10 @@
               <a:buNone/>
             </a:pPr>
             <a:r>
-              <a:rPr lang="en"/>
-              <a:t>learn the entire network graph this is different from distance Vector you're going to give every router a global</a:t>
-            </a:r>
-            <a:endParaRPr/>
+              <a:rPr lang="en" dirty="0"/>
+              <a:t>step one it's step two and you're done so the first step is have every router</a:t>
+            </a:r>
+            <a:endParaRPr dirty="0"/>
           </a:p>
           <a:p>
             <a:pPr marL="0" lvl="0" indent="0" algn="l" rtl="0">
@@ -10012,10 +10086,10 @@
               <a:buNone/>
             </a:pPr>
             <a:r>
-              <a:rPr lang="en"/>
-              <a:t>2:18</a:t>
-            </a:r>
-            <a:endParaRPr/>
+              <a:rPr lang="en" dirty="0"/>
+              <a:t>2:11</a:t>
+            </a:r>
+            <a:endParaRPr dirty="0"/>
           </a:p>
           <a:p>
             <a:pPr marL="0" lvl="0" indent="0" algn="l" rtl="0">
@@ -10033,10 +10107,10 @@
               <a:buNone/>
             </a:pPr>
             <a:r>
-              <a:rPr lang="en"/>
-              <a:t>picture of what the network looks like and how you do that is an open question that will solve coming up and once every</a:t>
-            </a:r>
-            <a:endParaRPr/>
+              <a:rPr lang="en" dirty="0"/>
+              <a:t>learn the entire network graph this is different from distance Vector you're going to give every router a global</a:t>
+            </a:r>
+            <a:endParaRPr dirty="0"/>
           </a:p>
           <a:p>
             <a:pPr marL="0" lvl="0" indent="0" algn="l" rtl="0">
@@ -10054,10 +10128,10 @@
               <a:buNone/>
             </a:pPr>
             <a:r>
-              <a:rPr lang="en"/>
-              <a:t>2:25</a:t>
-            </a:r>
-            <a:endParaRPr/>
+              <a:rPr lang="en" dirty="0"/>
+              <a:t>2:18</a:t>
+            </a:r>
+            <a:endParaRPr dirty="0"/>
           </a:p>
           <a:p>
             <a:pPr marL="0" lvl="0" indent="0" algn="l" rtl="0">
@@ -10075,10 +10149,10 @@
               <a:buNone/>
             </a:pPr>
             <a:r>
-              <a:rPr lang="en"/>
-              <a:t>router has the whole network graph in front of them they can just run their favorite shortest path algorithm to</a:t>
-            </a:r>
-            <a:endParaRPr/>
+              <a:rPr lang="en" dirty="0"/>
+              <a:t>picture of what the network looks like and how you do that is an open question that will solve coming up and once every</a:t>
+            </a:r>
+            <a:endParaRPr dirty="0"/>
           </a:p>
           <a:p>
             <a:pPr marL="0" lvl="0" indent="0" algn="l" rtl="0">
@@ -10096,10 +10170,10 @@
               <a:buNone/>
             </a:pPr>
             <a:r>
-              <a:rPr lang="en"/>
-              <a:t>2:31</a:t>
-            </a:r>
-            <a:endParaRPr/>
+              <a:rPr lang="en" dirty="0"/>
+              <a:t>2:25</a:t>
+            </a:r>
+            <a:endParaRPr dirty="0"/>
           </a:p>
           <a:p>
             <a:pPr marL="0" lvl="0" indent="0" algn="l" rtl="0">
@@ -10117,10 +10191,10 @@
               <a:buNone/>
             </a:pPr>
             <a:r>
-              <a:rPr lang="en"/>
-              <a:t>populate the forwarding table if you know everything there is to know about the network you can just run your favorite shortest paths algorithm and</a:t>
-            </a:r>
-            <a:endParaRPr/>
+              <a:rPr lang="en" dirty="0"/>
+              <a:t>router has the whole network graph in front of them they can just run their favorite shortest path algorithm to</a:t>
+            </a:r>
+            <a:endParaRPr dirty="0"/>
           </a:p>
           <a:p>
             <a:pPr marL="0" lvl="0" indent="0" algn="l" rtl="0">
@@ -10138,10 +10212,10 @@
               <a:buNone/>
             </a:pPr>
             <a:r>
-              <a:rPr lang="en"/>
-              <a:t>2:38</a:t>
-            </a:r>
-            <a:endParaRPr/>
+              <a:rPr lang="en" dirty="0"/>
+              <a:t>2:31</a:t>
+            </a:r>
+            <a:endParaRPr dirty="0"/>
           </a:p>
           <a:p>
             <a:pPr marL="0" lvl="0" indent="0" algn="l" rtl="0">
@@ -10159,10 +10233,10 @@
               <a:buNone/>
             </a:pPr>
             <a:r>
-              <a:rPr lang="en"/>
-              <a:t>that will give you pass through the network so it's just two steps and we'll break them down coming up but before we</a:t>
-            </a:r>
-            <a:endParaRPr/>
+              <a:rPr lang="en" dirty="0"/>
+              <a:t>populate the forwarding table if you know everything there is to know about the network you can just run your favorite shortest paths algorithm and</a:t>
+            </a:r>
+            <a:endParaRPr dirty="0"/>
           </a:p>
           <a:p>
             <a:pPr marL="0" lvl="0" indent="0" algn="l" rtl="0">
@@ -10180,10 +10254,10 @@
               <a:buNone/>
             </a:pPr>
             <a:r>
-              <a:rPr lang="en"/>
-              <a:t>2:44</a:t>
-            </a:r>
-            <a:endParaRPr/>
+              <a:rPr lang="en" dirty="0"/>
+              <a:t>2:38</a:t>
+            </a:r>
+            <a:endParaRPr dirty="0"/>
           </a:p>
           <a:p>
             <a:pPr marL="0" lvl="0" indent="0" algn="l" rtl="0">
@@ -10201,10 +10275,10 @@
               <a:buNone/>
             </a:pPr>
             <a:r>
-              <a:rPr lang="en"/>
-              <a:t>do I want to contrast distance vector and Link State protocols so in distance</a:t>
-            </a:r>
-            <a:endParaRPr/>
+              <a:rPr lang="en" dirty="0"/>
+              <a:t>that will give you pass through the network so it's just two steps and we'll break them down coming up but before we</a:t>
+            </a:r>
+            <a:endParaRPr dirty="0"/>
           </a:p>
           <a:p>
             <a:pPr marL="0" lvl="0" indent="0" algn="l" rtl="0">
@@ -10222,10 +10296,10 @@
               <a:buNone/>
             </a:pPr>
             <a:r>
-              <a:rPr lang="en"/>
-              <a:t>2:49</a:t>
-            </a:r>
-            <a:endParaRPr/>
+              <a:rPr lang="en" dirty="0"/>
+              <a:t>2:44</a:t>
+            </a:r>
+            <a:endParaRPr dirty="0"/>
           </a:p>
           <a:p>
             <a:pPr marL="0" lvl="0" indent="0" algn="l" rtl="0">
@@ -10243,10 +10317,10 @@
               <a:buNone/>
             </a:pPr>
             <a:r>
-              <a:rPr lang="en"/>
-              <a:t>Vector everyone had a little piece of the solution remember how each router didn't know the entire state of the</a:t>
-            </a:r>
-            <a:endParaRPr/>
+              <a:rPr lang="en" dirty="0"/>
+              <a:t>do I want to contrast distance vector and Link State protocols so in distance</a:t>
+            </a:r>
+            <a:endParaRPr dirty="0"/>
           </a:p>
           <a:p>
             <a:pPr marL="0" lvl="0" indent="0" algn="l" rtl="0">
@@ -10264,10 +10338,10 @@
               <a:buNone/>
             </a:pPr>
             <a:r>
-              <a:rPr lang="en"/>
-              <a:t>2:55</a:t>
-            </a:r>
-            <a:endParaRPr/>
+              <a:rPr lang="en" dirty="0"/>
+              <a:t>2:49</a:t>
+            </a:r>
+            <a:endParaRPr dirty="0"/>
           </a:p>
           <a:p>
             <a:pPr marL="0" lvl="0" indent="0" algn="l" rtl="0">
@@ -10285,10 +10359,10 @@
               <a:buNone/>
             </a:pPr>
             <a:r>
-              <a:rPr lang="en"/>
-              <a:t>network they only knew advertisements coming in from their neighbors and that's all that they could use to build</a:t>
-            </a:r>
-            <a:endParaRPr/>
+              <a:rPr lang="en" dirty="0"/>
+              <a:t>Vector everyone had a little piece of the solution remember how each router didn't know the entire state of the</a:t>
+            </a:r>
+            <a:endParaRPr dirty="0"/>
           </a:p>
           <a:p>
             <a:pPr marL="0" lvl="0" indent="0" algn="l" rtl="0">
@@ -10306,10 +10380,10 @@
               <a:buNone/>
             </a:pPr>
             <a:r>
-              <a:rPr lang="en"/>
-              <a:t>3:01</a:t>
-            </a:r>
-            <a:endParaRPr/>
+              <a:rPr lang="en" dirty="0"/>
+              <a:t>2:55</a:t>
+            </a:r>
+            <a:endParaRPr dirty="0"/>
           </a:p>
           <a:p>
             <a:pPr marL="0" lvl="0" indent="0" algn="l" rtl="0">
@@ -10327,370 +10401,10 @@
               <a:buNone/>
             </a:pPr>
             <a:r>
-              <a:rPr lang="en"/>
-              <a:t>their forwarding table so everyone only had little pieces of information about the network in link State protocols</a:t>
-            </a:r>
-            <a:endParaRPr/>
-          </a:p>
-          <a:p>
-            <a:pPr marL="0" lvl="0" indent="0" algn="l" rtl="0">
-              <a:spcBef>
-                <a:spcPts val="0"/>
-              </a:spcBef>
-              <a:spcAft>
-                <a:spcPts val="0"/>
-              </a:spcAft>
-              <a:buNone/>
-            </a:pPr>
-            <a:r>
-              <a:rPr lang="en"/>
-              <a:t>3:07</a:t>
-            </a:r>
-            <a:endParaRPr/>
-          </a:p>
-          <a:p>
-            <a:pPr marL="0" lvl="0" indent="0" algn="l" rtl="0">
-              <a:spcBef>
-                <a:spcPts val="0"/>
-              </a:spcBef>
-              <a:spcAft>
-                <a:spcPts val="0"/>
-              </a:spcAft>
-              <a:buNone/>
-            </a:pPr>
-            <a:r>
-              <a:rPr lang="en"/>
-              <a:t>we're instead going to give every node Global Information every router is going to know everything there is to know</a:t>
-            </a:r>
-            <a:endParaRPr/>
-          </a:p>
-          <a:p>
-            <a:pPr marL="0" lvl="0" indent="0" algn="l" rtl="0">
-              <a:spcBef>
-                <a:spcPts val="0"/>
-              </a:spcBef>
-              <a:spcAft>
-                <a:spcPts val="0"/>
-              </a:spcAft>
-              <a:buNone/>
-            </a:pPr>
-            <a:r>
-              <a:rPr lang="en"/>
-              <a:t>3:13</a:t>
-            </a:r>
-            <a:endParaRPr/>
-          </a:p>
-          <a:p>
-            <a:pPr marL="0" lvl="0" indent="0" algn="l" rtl="0">
-              <a:spcBef>
-                <a:spcPts val="0"/>
-              </a:spcBef>
-              <a:spcAft>
-                <a:spcPts val="0"/>
-              </a:spcAft>
-              <a:buNone/>
-            </a:pPr>
-            <a:r>
-              <a:rPr lang="en"/>
-              <a:t>about the network graph the other thing we can contrast is distance Vector ends</a:t>
-            </a:r>
-            <a:endParaRPr/>
-          </a:p>
-          <a:p>
-            <a:pPr marL="0" lvl="0" indent="0" algn="l" rtl="0">
-              <a:spcBef>
-                <a:spcPts val="0"/>
-              </a:spcBef>
-              <a:spcAft>
-                <a:spcPts val="0"/>
-              </a:spcAft>
-              <a:buNone/>
-            </a:pPr>
-            <a:r>
-              <a:rPr lang="en"/>
-              <a:t>3:18</a:t>
-            </a:r>
-            <a:endParaRPr/>
-          </a:p>
-          <a:p>
-            <a:pPr marL="0" lvl="0" indent="0" algn="l" rtl="0">
-              <a:spcBef>
-                <a:spcPts val="0"/>
-              </a:spcBef>
-              <a:spcAft>
-                <a:spcPts val="0"/>
-              </a:spcAft>
-              <a:buNone/>
-            </a:pPr>
-            <a:r>
-              <a:rPr lang="en"/>
-              <a:t>up Computing things globally and the way I think of that is every node confuses a</a:t>
-            </a:r>
-            <a:endParaRPr/>
-          </a:p>
-          <a:p>
-            <a:pPr marL="0" lvl="0" indent="0" algn="l" rtl="0">
-              <a:spcBef>
-                <a:spcPts val="0"/>
-              </a:spcBef>
-              <a:spcAft>
-                <a:spcPts val="0"/>
-              </a:spcAft>
-              <a:buNone/>
-            </a:pPr>
-            <a:r>
-              <a:rPr lang="en"/>
-              <a:t>3:24</a:t>
-            </a:r>
-            <a:endParaRPr/>
-          </a:p>
-          <a:p>
-            <a:pPr marL="0" lvl="0" indent="0" algn="l" rtl="0">
-              <a:spcBef>
-                <a:spcPts val="0"/>
-              </a:spcBef>
-              <a:spcAft>
-                <a:spcPts val="0"/>
-              </a:spcAft>
-              <a:buNone/>
-            </a:pPr>
-            <a:r>
-              <a:rPr lang="en"/>
-              <a:t>little piece of the solution and if you take everyone solution and put it all together you get a full solution to the</a:t>
-            </a:r>
-            <a:endParaRPr/>
-          </a:p>
-          <a:p>
-            <a:pPr marL="0" lvl="0" indent="0" algn="l" rtl="0">
-              <a:spcBef>
-                <a:spcPts val="0"/>
-              </a:spcBef>
-              <a:spcAft>
-                <a:spcPts val="0"/>
-              </a:spcAft>
-              <a:buNone/>
-            </a:pPr>
-            <a:endParaRPr/>
-          </a:p>
-          <a:p>
-            <a:pPr marL="0" lvl="0" indent="0" algn="l" rtl="0">
-              <a:spcBef>
-                <a:spcPts val="0"/>
-              </a:spcBef>
-              <a:spcAft>
-                <a:spcPts val="0"/>
-              </a:spcAft>
-              <a:buNone/>
-            </a:pPr>
-            <a:r>
-              <a:rPr lang="en"/>
-              <a:t>routing protocol so each person contributes a fraction and if you put it</a:t>
-            </a:r>
-            <a:endParaRPr/>
-          </a:p>
-          <a:p>
-            <a:pPr marL="0" lvl="0" indent="0" algn="l" rtl="0">
-              <a:spcBef>
-                <a:spcPts val="0"/>
-              </a:spcBef>
-              <a:spcAft>
-                <a:spcPts val="0"/>
-              </a:spcAft>
-              <a:buNone/>
-            </a:pPr>
-            <a:r>
-              <a:rPr lang="en"/>
-              <a:t>3:35</a:t>
-            </a:r>
-            <a:endParaRPr/>
-          </a:p>
-          <a:p>
-            <a:pPr marL="0" lvl="0" indent="0" algn="l" rtl="0">
-              <a:spcBef>
-                <a:spcPts val="0"/>
-              </a:spcBef>
-              <a:spcAft>
-                <a:spcPts val="0"/>
-              </a:spcAft>
-              <a:buNone/>
-            </a:pPr>
-            <a:r>
-              <a:rPr lang="en"/>
-              <a:t>together you get the whole by contrast in link State protocols each node will</a:t>
-            </a:r>
-            <a:endParaRPr/>
-          </a:p>
-          <a:p>
-            <a:pPr marL="0" lvl="0" indent="0" algn="l" rtl="0">
-              <a:spcBef>
-                <a:spcPts val="0"/>
-              </a:spcBef>
-              <a:spcAft>
-                <a:spcPts val="0"/>
-              </a:spcAft>
-              <a:buNone/>
-            </a:pPr>
-            <a:r>
-              <a:rPr lang="en"/>
-              <a:t>3:41</a:t>
-            </a:r>
-            <a:endParaRPr/>
-          </a:p>
-          <a:p>
-            <a:pPr marL="0" lvl="0" indent="0" algn="l" rtl="0">
-              <a:spcBef>
-                <a:spcPts val="0"/>
-              </a:spcBef>
-              <a:spcAft>
-                <a:spcPts val="0"/>
-              </a:spcAft>
-              <a:buNone/>
-            </a:pPr>
-            <a:r>
-              <a:rPr lang="en"/>
-              <a:t>compute the full Solution by itself so it's a little bit redundant but</a:t>
-            </a:r>
-            <a:endParaRPr/>
-          </a:p>
-          <a:p>
-            <a:pPr marL="0" lvl="0" indent="0" algn="l" rtl="0">
-              <a:spcBef>
-                <a:spcPts val="0"/>
-              </a:spcBef>
-              <a:spcAft>
-                <a:spcPts val="0"/>
-              </a:spcAft>
-              <a:buNone/>
-            </a:pPr>
-            <a:r>
-              <a:rPr lang="en"/>
-              <a:t>3:46</a:t>
-            </a:r>
-            <a:endParaRPr/>
-          </a:p>
-          <a:p>
-            <a:pPr marL="0" lvl="0" indent="0" algn="l" rtl="0">
-              <a:spcBef>
-                <a:spcPts val="0"/>
-              </a:spcBef>
-              <a:spcAft>
-                <a:spcPts val="0"/>
-              </a:spcAft>
-              <a:buNone/>
-            </a:pPr>
-            <a:r>
-              <a:rPr lang="en"/>
-              <a:t>everyone's going to get a copy of the full solution so that's the key difference distance Vector everyone has</a:t>
-            </a:r>
-            <a:endParaRPr/>
-          </a:p>
-          <a:p>
-            <a:pPr marL="0" lvl="0" indent="0" algn="l" rtl="0">
-              <a:spcBef>
-                <a:spcPts val="0"/>
-              </a:spcBef>
-              <a:spcAft>
-                <a:spcPts val="0"/>
-              </a:spcAft>
-              <a:buNone/>
-            </a:pPr>
-            <a:r>
-              <a:rPr lang="en"/>
-              <a:t>3:51</a:t>
-            </a:r>
-            <a:endParaRPr/>
-          </a:p>
-          <a:p>
-            <a:pPr marL="0" lvl="0" indent="0" algn="l" rtl="0">
-              <a:spcBef>
-                <a:spcPts val="0"/>
-              </a:spcBef>
-              <a:spcAft>
-                <a:spcPts val="0"/>
-              </a:spcAft>
-              <a:buNone/>
-            </a:pPr>
-            <a:r>
-              <a:rPr lang="en"/>
-              <a:t>little pieces that form a whole solution and Link State everyone has all the information and computes the entire</a:t>
-            </a:r>
-            <a:endParaRPr/>
-          </a:p>
-          <a:p>
-            <a:pPr marL="0" lvl="0" indent="0" algn="l" rtl="0">
-              <a:spcBef>
-                <a:spcPts val="0"/>
-              </a:spcBef>
-              <a:spcAft>
-                <a:spcPts val="0"/>
-              </a:spcAft>
-              <a:buNone/>
-            </a:pPr>
-            <a:r>
-              <a:rPr lang="en"/>
-              <a:t>3:58</a:t>
-            </a:r>
-            <a:endParaRPr/>
-          </a:p>
-          <a:p>
-            <a:pPr marL="0" lvl="0" indent="0" algn="l" rtl="0">
-              <a:spcBef>
-                <a:spcPts val="0"/>
-              </a:spcBef>
-              <a:spcAft>
-                <a:spcPts val="0"/>
-              </a:spcAft>
-              <a:buNone/>
-            </a:pPr>
-            <a:r>
-              <a:rPr lang="en"/>
-              <a:t>solution by themselves so with this High Lev picture we just have to solve the</a:t>
-            </a:r>
-            <a:endParaRPr/>
-          </a:p>
-          <a:p>
-            <a:pPr marL="0" lvl="0" indent="0" algn="l" rtl="0">
-              <a:spcBef>
-                <a:spcPts val="0"/>
-              </a:spcBef>
-              <a:spcAft>
-                <a:spcPts val="0"/>
-              </a:spcAft>
-              <a:buNone/>
-            </a:pPr>
-            <a:r>
-              <a:rPr lang="en"/>
-              <a:t>4:04</a:t>
-            </a:r>
-            <a:endParaRPr/>
-          </a:p>
-          <a:p>
-            <a:pPr marL="0" lvl="0" indent="0" algn="l" rtl="0">
-              <a:spcBef>
-                <a:spcPts val="0"/>
-              </a:spcBef>
-              <a:spcAft>
-                <a:spcPts val="0"/>
-              </a:spcAft>
-              <a:buNone/>
-            </a:pPr>
-            <a:r>
-              <a:rPr lang="en"/>
-              <a:t>questions of how to do step one how to do step two and that's it to this protocol</a:t>
-            </a:r>
-            <a:endParaRPr/>
-          </a:p>
-          <a:p>
-            <a:pPr marL="0" lvl="0" indent="0" algn="l" rtl="0">
-              <a:spcBef>
-                <a:spcPts val="0"/>
-              </a:spcBef>
-              <a:spcAft>
-                <a:spcPts val="0"/>
-              </a:spcAft>
-              <a:buNone/>
-            </a:pPr>
-            <a:endParaRPr/>
+              <a:rPr lang="en" dirty="0"/>
+              <a:t>network they only knew advertisements coming in from their neighbors and that's all that they could use to build</a:t>
+            </a:r>
+            <a:endParaRPr dirty="0"/>
           </a:p>
           <a:p>
             <a:pPr marL="0" lvl="0" indent="0" algn="l" rtl="0">
@@ -10707,7 +10421,11 @@
               <a:buFont typeface="Arial"/>
               <a:buNone/>
             </a:pPr>
-            <a:endParaRPr/>
+            <a:r>
+              <a:rPr lang="en" dirty="0"/>
+              <a:t>3:01</a:t>
+            </a:r>
+            <a:endParaRPr dirty="0"/>
           </a:p>
           <a:p>
             <a:pPr marL="0" lvl="0" indent="0" algn="l" rtl="0">
@@ -10724,19 +10442,417 @@
               <a:buFont typeface="Arial"/>
               <a:buNone/>
             </a:pPr>
-            <a:endParaRPr/>
-          </a:p>
-          <a:p>
-            <a:pPr marL="0" lvl="0" indent="0" algn="l" rtl="0">
-              <a:spcBef>
-                <a:spcPts val="0"/>
-              </a:spcBef>
-              <a:spcAft>
-                <a:spcPts val="0"/>
-              </a:spcAft>
-              <a:buNone/>
-            </a:pPr>
-            <a:endParaRPr/>
+            <a:r>
+              <a:rPr lang="en" dirty="0"/>
+              <a:t>their forwarding table so everyone only had little pieces of information about the network in link State protocols</a:t>
+            </a:r>
+            <a:endParaRPr dirty="0"/>
+          </a:p>
+          <a:p>
+            <a:pPr marL="0" lvl="0" indent="0" algn="l" rtl="0">
+              <a:spcBef>
+                <a:spcPts val="0"/>
+              </a:spcBef>
+              <a:spcAft>
+                <a:spcPts val="0"/>
+              </a:spcAft>
+              <a:buNone/>
+            </a:pPr>
+            <a:r>
+              <a:rPr lang="en" dirty="0"/>
+              <a:t>3:07</a:t>
+            </a:r>
+            <a:endParaRPr dirty="0"/>
+          </a:p>
+          <a:p>
+            <a:pPr marL="0" lvl="0" indent="0" algn="l" rtl="0">
+              <a:spcBef>
+                <a:spcPts val="0"/>
+              </a:spcBef>
+              <a:spcAft>
+                <a:spcPts val="0"/>
+              </a:spcAft>
+              <a:buNone/>
+            </a:pPr>
+            <a:r>
+              <a:rPr lang="en" dirty="0"/>
+              <a:t>we're instead going to give every node Global Information every router is going to know everything there is to know</a:t>
+            </a:r>
+            <a:endParaRPr dirty="0"/>
+          </a:p>
+          <a:p>
+            <a:pPr marL="0" lvl="0" indent="0" algn="l" rtl="0">
+              <a:spcBef>
+                <a:spcPts val="0"/>
+              </a:spcBef>
+              <a:spcAft>
+                <a:spcPts val="0"/>
+              </a:spcAft>
+              <a:buNone/>
+            </a:pPr>
+            <a:r>
+              <a:rPr lang="en" dirty="0"/>
+              <a:t>3:13</a:t>
+            </a:r>
+            <a:endParaRPr dirty="0"/>
+          </a:p>
+          <a:p>
+            <a:pPr marL="0" lvl="0" indent="0" algn="l" rtl="0">
+              <a:spcBef>
+                <a:spcPts val="0"/>
+              </a:spcBef>
+              <a:spcAft>
+                <a:spcPts val="0"/>
+              </a:spcAft>
+              <a:buNone/>
+            </a:pPr>
+            <a:r>
+              <a:rPr lang="en" dirty="0"/>
+              <a:t>about the network graph the other thing we can contrast is distance Vector ends</a:t>
+            </a:r>
+            <a:endParaRPr dirty="0"/>
+          </a:p>
+          <a:p>
+            <a:pPr marL="0" lvl="0" indent="0" algn="l" rtl="0">
+              <a:spcBef>
+                <a:spcPts val="0"/>
+              </a:spcBef>
+              <a:spcAft>
+                <a:spcPts val="0"/>
+              </a:spcAft>
+              <a:buNone/>
+            </a:pPr>
+            <a:r>
+              <a:rPr lang="en" dirty="0"/>
+              <a:t>3:18</a:t>
+            </a:r>
+            <a:endParaRPr dirty="0"/>
+          </a:p>
+          <a:p>
+            <a:pPr marL="0" lvl="0" indent="0" algn="l" rtl="0">
+              <a:spcBef>
+                <a:spcPts val="0"/>
+              </a:spcBef>
+              <a:spcAft>
+                <a:spcPts val="0"/>
+              </a:spcAft>
+              <a:buNone/>
+            </a:pPr>
+            <a:r>
+              <a:rPr lang="en" dirty="0"/>
+              <a:t>up Computing things globally and the way I think of that is every node confuses a</a:t>
+            </a:r>
+            <a:endParaRPr dirty="0"/>
+          </a:p>
+          <a:p>
+            <a:pPr marL="0" lvl="0" indent="0" algn="l" rtl="0">
+              <a:spcBef>
+                <a:spcPts val="0"/>
+              </a:spcBef>
+              <a:spcAft>
+                <a:spcPts val="0"/>
+              </a:spcAft>
+              <a:buNone/>
+            </a:pPr>
+            <a:r>
+              <a:rPr lang="en" dirty="0"/>
+              <a:t>3:24</a:t>
+            </a:r>
+            <a:endParaRPr dirty="0"/>
+          </a:p>
+          <a:p>
+            <a:pPr marL="0" lvl="0" indent="0" algn="l" rtl="0">
+              <a:spcBef>
+                <a:spcPts val="0"/>
+              </a:spcBef>
+              <a:spcAft>
+                <a:spcPts val="0"/>
+              </a:spcAft>
+              <a:buNone/>
+            </a:pPr>
+            <a:r>
+              <a:rPr lang="en" dirty="0"/>
+              <a:t>little piece of the solution and if you take everyone solution and put it all together you get a full solution to the</a:t>
+            </a:r>
+            <a:endParaRPr dirty="0"/>
+          </a:p>
+          <a:p>
+            <a:pPr marL="0" lvl="0" indent="0" algn="l" rtl="0">
+              <a:spcBef>
+                <a:spcPts val="0"/>
+              </a:spcBef>
+              <a:spcAft>
+                <a:spcPts val="0"/>
+              </a:spcAft>
+              <a:buNone/>
+            </a:pPr>
+            <a:endParaRPr dirty="0"/>
+          </a:p>
+          <a:p>
+            <a:pPr marL="0" lvl="0" indent="0" algn="l" rtl="0">
+              <a:spcBef>
+                <a:spcPts val="0"/>
+              </a:spcBef>
+              <a:spcAft>
+                <a:spcPts val="0"/>
+              </a:spcAft>
+              <a:buNone/>
+            </a:pPr>
+            <a:r>
+              <a:rPr lang="en" dirty="0"/>
+              <a:t>routing protocol so each person contributes a fraction and if you put it</a:t>
+            </a:r>
+            <a:endParaRPr dirty="0"/>
+          </a:p>
+          <a:p>
+            <a:pPr marL="0" lvl="0" indent="0" algn="l" rtl="0">
+              <a:spcBef>
+                <a:spcPts val="0"/>
+              </a:spcBef>
+              <a:spcAft>
+                <a:spcPts val="0"/>
+              </a:spcAft>
+              <a:buNone/>
+            </a:pPr>
+            <a:r>
+              <a:rPr lang="en" dirty="0"/>
+              <a:t>3:35</a:t>
+            </a:r>
+            <a:endParaRPr dirty="0"/>
+          </a:p>
+          <a:p>
+            <a:pPr marL="0" lvl="0" indent="0" algn="l" rtl="0">
+              <a:spcBef>
+                <a:spcPts val="0"/>
+              </a:spcBef>
+              <a:spcAft>
+                <a:spcPts val="0"/>
+              </a:spcAft>
+              <a:buNone/>
+            </a:pPr>
+            <a:r>
+              <a:rPr lang="en" dirty="0"/>
+              <a:t>together you get the whole by contrast in link State protocols each node will</a:t>
+            </a:r>
+            <a:endParaRPr dirty="0"/>
+          </a:p>
+          <a:p>
+            <a:pPr marL="0" lvl="0" indent="0" algn="l" rtl="0">
+              <a:spcBef>
+                <a:spcPts val="0"/>
+              </a:spcBef>
+              <a:spcAft>
+                <a:spcPts val="0"/>
+              </a:spcAft>
+              <a:buNone/>
+            </a:pPr>
+            <a:r>
+              <a:rPr lang="en" dirty="0"/>
+              <a:t>3:41</a:t>
+            </a:r>
+            <a:endParaRPr dirty="0"/>
+          </a:p>
+          <a:p>
+            <a:pPr marL="0" lvl="0" indent="0" algn="l" rtl="0">
+              <a:spcBef>
+                <a:spcPts val="0"/>
+              </a:spcBef>
+              <a:spcAft>
+                <a:spcPts val="0"/>
+              </a:spcAft>
+              <a:buNone/>
+            </a:pPr>
+            <a:r>
+              <a:rPr lang="en" dirty="0"/>
+              <a:t>compute the full Solution by itself so it's a little bit redundant but</a:t>
+            </a:r>
+            <a:endParaRPr dirty="0"/>
+          </a:p>
+          <a:p>
+            <a:pPr marL="0" lvl="0" indent="0" algn="l" rtl="0">
+              <a:spcBef>
+                <a:spcPts val="0"/>
+              </a:spcBef>
+              <a:spcAft>
+                <a:spcPts val="0"/>
+              </a:spcAft>
+              <a:buNone/>
+            </a:pPr>
+            <a:r>
+              <a:rPr lang="en" dirty="0"/>
+              <a:t>3:46</a:t>
+            </a:r>
+            <a:endParaRPr dirty="0"/>
+          </a:p>
+          <a:p>
+            <a:pPr marL="0" lvl="0" indent="0" algn="l" rtl="0">
+              <a:spcBef>
+                <a:spcPts val="0"/>
+              </a:spcBef>
+              <a:spcAft>
+                <a:spcPts val="0"/>
+              </a:spcAft>
+              <a:buNone/>
+            </a:pPr>
+            <a:r>
+              <a:rPr lang="en" dirty="0"/>
+              <a:t>everyone's going to get a copy of the full solution so that's the key difference distance Vector everyone has</a:t>
+            </a:r>
+            <a:endParaRPr dirty="0"/>
+          </a:p>
+          <a:p>
+            <a:pPr marL="0" lvl="0" indent="0" algn="l" rtl="0">
+              <a:spcBef>
+                <a:spcPts val="0"/>
+              </a:spcBef>
+              <a:spcAft>
+                <a:spcPts val="0"/>
+              </a:spcAft>
+              <a:buNone/>
+            </a:pPr>
+            <a:r>
+              <a:rPr lang="en" dirty="0"/>
+              <a:t>3:51</a:t>
+            </a:r>
+            <a:endParaRPr dirty="0"/>
+          </a:p>
+          <a:p>
+            <a:pPr marL="0" lvl="0" indent="0" algn="l" rtl="0">
+              <a:spcBef>
+                <a:spcPts val="0"/>
+              </a:spcBef>
+              <a:spcAft>
+                <a:spcPts val="0"/>
+              </a:spcAft>
+              <a:buNone/>
+            </a:pPr>
+            <a:r>
+              <a:rPr lang="en" dirty="0"/>
+              <a:t>little pieces that form a whole solution and Link State everyone has all the information and computes the entire</a:t>
+            </a:r>
+            <a:endParaRPr dirty="0"/>
+          </a:p>
+          <a:p>
+            <a:pPr marL="0" lvl="0" indent="0" algn="l" rtl="0">
+              <a:spcBef>
+                <a:spcPts val="0"/>
+              </a:spcBef>
+              <a:spcAft>
+                <a:spcPts val="0"/>
+              </a:spcAft>
+              <a:buNone/>
+            </a:pPr>
+            <a:r>
+              <a:rPr lang="en" dirty="0"/>
+              <a:t>3:58</a:t>
+            </a:r>
+            <a:endParaRPr dirty="0"/>
+          </a:p>
+          <a:p>
+            <a:pPr marL="0" lvl="0" indent="0" algn="l" rtl="0">
+              <a:spcBef>
+                <a:spcPts val="0"/>
+              </a:spcBef>
+              <a:spcAft>
+                <a:spcPts val="0"/>
+              </a:spcAft>
+              <a:buNone/>
+            </a:pPr>
+            <a:r>
+              <a:rPr lang="en" dirty="0"/>
+              <a:t>solution by themselves so with this High Lev picture we just have to solve the</a:t>
+            </a:r>
+            <a:endParaRPr dirty="0"/>
+          </a:p>
+          <a:p>
+            <a:pPr marL="0" lvl="0" indent="0" algn="l" rtl="0">
+              <a:spcBef>
+                <a:spcPts val="0"/>
+              </a:spcBef>
+              <a:spcAft>
+                <a:spcPts val="0"/>
+              </a:spcAft>
+              <a:buNone/>
+            </a:pPr>
+            <a:r>
+              <a:rPr lang="en" dirty="0"/>
+              <a:t>4:04</a:t>
+            </a:r>
+            <a:endParaRPr dirty="0"/>
+          </a:p>
+          <a:p>
+            <a:pPr marL="0" lvl="0" indent="0" algn="l" rtl="0">
+              <a:spcBef>
+                <a:spcPts val="0"/>
+              </a:spcBef>
+              <a:spcAft>
+                <a:spcPts val="0"/>
+              </a:spcAft>
+              <a:buNone/>
+            </a:pPr>
+            <a:r>
+              <a:rPr lang="en" dirty="0"/>
+              <a:t>questions of how to do step one how to do step two and that's it to this protocol</a:t>
+            </a:r>
+            <a:endParaRPr dirty="0"/>
+          </a:p>
+          <a:p>
+            <a:pPr marL="0" lvl="0" indent="0" algn="l" rtl="0">
+              <a:spcBef>
+                <a:spcPts val="0"/>
+              </a:spcBef>
+              <a:spcAft>
+                <a:spcPts val="0"/>
+              </a:spcAft>
+              <a:buNone/>
+            </a:pPr>
+            <a:endParaRPr dirty="0"/>
+          </a:p>
+          <a:p>
+            <a:pPr marL="0" lvl="0" indent="0" algn="l" rtl="0">
+              <a:spcBef>
+                <a:spcPts val="0"/>
+              </a:spcBef>
+              <a:spcAft>
+                <a:spcPts val="0"/>
+              </a:spcAft>
+              <a:buClr>
+                <a:schemeClr val="dk1"/>
+              </a:buClr>
+              <a:buSzPts val="1100"/>
+              <a:buFont typeface="Arial"/>
+              <a:buNone/>
+            </a:pPr>
+            <a:endParaRPr dirty="0"/>
+          </a:p>
+          <a:p>
+            <a:pPr marL="0" lvl="0" indent="0" algn="l" rtl="0">
+              <a:spcBef>
+                <a:spcPts val="0"/>
+              </a:spcBef>
+              <a:spcAft>
+                <a:spcPts val="0"/>
+              </a:spcAft>
+              <a:buClr>
+                <a:schemeClr val="dk1"/>
+              </a:buClr>
+              <a:buSzPts val="1100"/>
+              <a:buFont typeface="Arial"/>
+              <a:buNone/>
+            </a:pPr>
+            <a:endParaRPr dirty="0"/>
+          </a:p>
+          <a:p>
+            <a:pPr marL="0" lvl="0" indent="0" algn="l" rtl="0">
+              <a:spcBef>
+                <a:spcPts val="0"/>
+              </a:spcBef>
+              <a:spcAft>
+                <a:spcPts val="0"/>
+              </a:spcAft>
+              <a:buNone/>
+            </a:pPr>
+            <a:endParaRPr dirty="0"/>
           </a:p>
         </p:txBody>
       </p:sp>
@@ -10777,7 +10893,7 @@
         </p:nvSpPr>
         <p:spPr>
           <a:xfrm>
-            <a:off x="381300" y="685800"/>
+            <a:off x="381000" y="685800"/>
             <a:ext cx="6096000" cy="3429000"/>
           </a:xfrm>
           <a:custGeom>
@@ -11491,7 +11607,7 @@
         </p:nvSpPr>
         <p:spPr>
           <a:xfrm>
-            <a:off x="381300" y="685800"/>
+            <a:off x="381000" y="685800"/>
             <a:ext cx="6096000" cy="3429000"/>
           </a:xfrm>
           <a:custGeom>
@@ -11545,6 +11661,70 @@
           </a:bodyPr>
           <a:lstStyle/>
           <a:p>
+            <a:pPr marL="457200" lvl="0" indent="-342900" algn="l" rtl="0">
+              <a:spcBef>
+                <a:spcPts val="0"/>
+              </a:spcBef>
+              <a:spcAft>
+                <a:spcPts val="0"/>
+              </a:spcAft>
+              <a:buSzPts val="1800"/>
+              <a:buChar char="●"/>
+            </a:pPr>
+            <a:r>
+              <a:rPr lang="en-US" altLang="zh-CN" dirty="0"/>
+              <a:t>Breadth-first search.</a:t>
+            </a:r>
+          </a:p>
+          <a:p>
+            <a:pPr marL="457200" lvl="0" indent="-342900" algn="l" rtl="0">
+              <a:spcBef>
+                <a:spcPts val="0"/>
+              </a:spcBef>
+              <a:spcAft>
+                <a:spcPts val="0"/>
+              </a:spcAft>
+              <a:buSzPts val="1800"/>
+              <a:buChar char="●"/>
+            </a:pPr>
+            <a:r>
+              <a:rPr lang="en-US" altLang="zh-CN" dirty="0"/>
+              <a:t>Dynamic shortest path.</a:t>
+            </a:r>
+          </a:p>
+          <a:p>
+            <a:pPr marL="457200" lvl="0" indent="-342900" algn="l" rtl="0">
+              <a:spcBef>
+                <a:spcPts val="0"/>
+              </a:spcBef>
+              <a:spcAft>
+                <a:spcPts val="0"/>
+              </a:spcAft>
+              <a:buSzPts val="1800"/>
+              <a:buChar char="●"/>
+            </a:pPr>
+            <a:r>
+              <a:rPr lang="en-US" altLang="zh-CN" dirty="0"/>
+              <a:t>Approximate shortest path.</a:t>
+            </a:r>
+          </a:p>
+          <a:p>
+            <a:pPr marL="457200" lvl="0" indent="-342900" algn="l" rtl="0">
+              <a:spcBef>
+                <a:spcPts val="0"/>
+              </a:spcBef>
+              <a:spcAft>
+                <a:spcPts val="0"/>
+              </a:spcAft>
+              <a:buSzPts val="1800"/>
+              <a:buChar char="●"/>
+            </a:pPr>
+            <a:r>
+              <a:rPr lang="en-US" altLang="zh-CN" dirty="0"/>
+              <a:t>Parallel single-source shortest path.</a:t>
+            </a:r>
+          </a:p>
+          <a:p>
             <a:pPr marL="0" lvl="0" indent="0" algn="l" rtl="0">
               <a:spcBef>
                 <a:spcPts val="0"/>
@@ -11559,11 +11739,7 @@
               <a:buFont typeface="Arial"/>
               <a:buNone/>
             </a:pPr>
-            <a:r>
-              <a:rPr lang="en"/>
-              <a:t>the first question is what graph algorithm</a:t>
-            </a:r>
-            <a:endParaRPr/>
+            <a:endParaRPr lang="en" dirty="0"/>
           </a:p>
           <a:p>
             <a:pPr marL="0" lvl="0" indent="0" algn="l" rtl="0">
@@ -11581,10 +11757,10 @@
               <a:buNone/>
             </a:pPr>
             <a:r>
-              <a:rPr lang="en"/>
-              <a:t>6:09</a:t>
-            </a:r>
-            <a:endParaRPr/>
+              <a:rPr lang="en" dirty="0"/>
+              <a:t>the first question is what graph algorithm</a:t>
+            </a:r>
+            <a:endParaRPr dirty="0"/>
           </a:p>
           <a:p>
             <a:pPr marL="0" lvl="0" indent="0" algn="l" rtl="0">
@@ -11602,10 +11778,10 @@
               <a:buNone/>
             </a:pPr>
             <a:r>
-              <a:rPr lang="en"/>
-              <a:t>do you use and it turns out you have a lot of choices you just need some shortest path algorithm that allows you</a:t>
-            </a:r>
-            <a:endParaRPr/>
+              <a:rPr lang="en" dirty="0"/>
+              <a:t>6:09</a:t>
+            </a:r>
+            <a:endParaRPr dirty="0"/>
           </a:p>
           <a:p>
             <a:pPr marL="0" lvl="0" indent="0" algn="l" rtl="0">
@@ -11623,10 +11799,10 @@
               <a:buNone/>
             </a:pPr>
             <a:r>
-              <a:rPr lang="en"/>
-              <a:t>6:15</a:t>
-            </a:r>
-            <a:endParaRPr/>
+              <a:rPr lang="en" dirty="0"/>
+              <a:t>do you use and it turns out you have a lot of choices you just need some shortest path algorithm that allows you</a:t>
+            </a:r>
+            <a:endParaRPr dirty="0"/>
           </a:p>
           <a:p>
             <a:pPr marL="0" lvl="0" indent="0" algn="l" rtl="0">
@@ -11644,10 +11820,10 @@
               <a:buNone/>
             </a:pPr>
             <a:r>
-              <a:rPr lang="en"/>
-              <a:t>to find all the paths from you the router to all the other hosts that are out there and you have all these</a:t>
-            </a:r>
-            <a:endParaRPr/>
+              <a:rPr lang="en" dirty="0"/>
+              <a:t>6:15</a:t>
+            </a:r>
+            <a:endParaRPr dirty="0"/>
           </a:p>
           <a:p>
             <a:pPr marL="0" lvl="0" indent="0" algn="l" rtl="0">
@@ -11665,10 +11841,10 @@
               <a:buNone/>
             </a:pPr>
             <a:r>
-              <a:rPr lang="en"/>
-              <a:t>6:21</a:t>
-            </a:r>
-            <a:endParaRPr/>
+              <a:rPr lang="en" dirty="0"/>
+              <a:t>to find all the paths from you the router to all the other hosts that are out there and you have all these</a:t>
+            </a:r>
+            <a:endParaRPr dirty="0"/>
           </a:p>
           <a:p>
             <a:pPr marL="0" lvl="0" indent="0" algn="l" rtl="0">
@@ -11686,10 +11862,10 @@
               <a:buNone/>
             </a:pPr>
             <a:r>
-              <a:rPr lang="en"/>
-              <a:t>different choices you could use the original version of bellman Ford you don't have to do all the Distributing</a:t>
-            </a:r>
-            <a:endParaRPr/>
+              <a:rPr lang="en" dirty="0"/>
+              <a:t>6:21</a:t>
+            </a:r>
+            <a:endParaRPr dirty="0"/>
           </a:p>
           <a:p>
             <a:pPr marL="0" lvl="0" indent="0" algn="l" rtl="0">
@@ -11707,10 +11883,10 @@
               <a:buNone/>
             </a:pPr>
             <a:r>
-              <a:rPr lang="en"/>
-              <a:t>6:26</a:t>
-            </a:r>
-            <a:endParaRPr/>
+              <a:rPr lang="en" dirty="0"/>
+              <a:t>different choices you could use the original version of bellman Ford you don't have to do all the Distributing</a:t>
+            </a:r>
+            <a:endParaRPr dirty="0"/>
           </a:p>
           <a:p>
             <a:pPr marL="0" lvl="0" indent="0" algn="l" rtl="0">
@@ -11728,10 +11904,10 @@
               <a:buNone/>
             </a:pPr>
             <a:r>
-              <a:rPr lang="en"/>
-              <a:t>that we did last time you can just use the Bellman Ford that you learn from any data structor class you could use D for</a:t>
-            </a:r>
-            <a:endParaRPr/>
+              <a:rPr lang="en" dirty="0"/>
+              <a:t>6:26</a:t>
+            </a:r>
+            <a:endParaRPr dirty="0"/>
           </a:p>
           <a:p>
             <a:pPr marL="0" lvl="0" indent="0" algn="l" rtl="0">
@@ -11749,10 +11925,10 @@
               <a:buNone/>
             </a:pPr>
             <a:r>
-              <a:rPr lang="en"/>
-              <a:t>6:33</a:t>
-            </a:r>
-            <a:endParaRPr/>
+              <a:rPr lang="en" dirty="0"/>
+              <a:t>that we did last time you can just use the Bellman Ford that you learn from any data structor class you could use D for</a:t>
+            </a:r>
+            <a:endParaRPr dirty="0"/>
           </a:p>
           <a:p>
             <a:pPr marL="0" lvl="0" indent="0" algn="l" rtl="0">
@@ -11770,10 +11946,10 @@
               <a:buNone/>
             </a:pPr>
             <a:r>
-              <a:rPr lang="en"/>
-              <a:t>algorithm breadth for search any variation of a shortest paths algorithm it's really up to you what you want to</a:t>
-            </a:r>
-            <a:endParaRPr/>
+              <a:rPr lang="en" dirty="0"/>
+              <a:t>6:33</a:t>
+            </a:r>
+            <a:endParaRPr dirty="0"/>
           </a:p>
           <a:p>
             <a:pPr marL="0" lvl="0" indent="0" algn="l" rtl="0">
@@ -11791,10 +11967,10 @@
               <a:buNone/>
             </a:pPr>
             <a:r>
-              <a:rPr lang="en"/>
-              <a:t>6:39</a:t>
-            </a:r>
-            <a:endParaRPr/>
+              <a:rPr lang="en" dirty="0"/>
+              <a:t>algorithm breadth for search any variation of a shortest paths algorithm it's really up to you what you want to</a:t>
+            </a:r>
+            <a:endParaRPr dirty="0"/>
           </a:p>
           <a:p>
             <a:pPr marL="0" lvl="0" indent="0" algn="l" rtl="0">
@@ -11812,22 +11988,43 @@
               <a:buNone/>
             </a:pPr>
             <a:r>
-              <a:rPr lang="en"/>
+              <a:rPr lang="en" dirty="0"/>
+              <a:t>6:39</a:t>
+            </a:r>
+            <a:endParaRPr dirty="0"/>
+          </a:p>
+          <a:p>
+            <a:pPr marL="0" lvl="0" indent="0" algn="l" rtl="0">
+              <a:spcBef>
+                <a:spcPts val="0"/>
+              </a:spcBef>
+              <a:spcAft>
+                <a:spcPts val="0"/>
+              </a:spcAft>
+              <a:buClr>
+                <a:schemeClr val="dk1"/>
+              </a:buClr>
+              <a:buSzPts val="1100"/>
+              <a:buFont typeface="Arial"/>
+              <a:buNone/>
+            </a:pPr>
+            <a:r>
+              <a:rPr lang="en" dirty="0"/>
               <a:t>use any of these would work just fine</a:t>
             </a:r>
-            <a:endParaRPr/>
-          </a:p>
-          <a:p>
-            <a:pPr marL="0" lvl="0" indent="0" algn="l" rtl="0">
-              <a:spcBef>
-                <a:spcPts val="0"/>
-              </a:spcBef>
-              <a:spcAft>
-                <a:spcPts val="0"/>
-              </a:spcAft>
-              <a:buNone/>
-            </a:pPr>
-            <a:endParaRPr/>
+            <a:endParaRPr dirty="0"/>
+          </a:p>
+          <a:p>
+            <a:pPr marL="0" lvl="0" indent="0" algn="l" rtl="0">
+              <a:spcBef>
+                <a:spcPts val="0"/>
+              </a:spcBef>
+              <a:spcAft>
+                <a:spcPts val="0"/>
+              </a:spcAft>
+              <a:buNone/>
+            </a:pPr>
+            <a:endParaRPr dirty="0"/>
           </a:p>
         </p:txBody>
       </p:sp>
@@ -11868,7 +12065,7 @@
         </p:nvSpPr>
         <p:spPr>
           <a:xfrm>
-            <a:off x="381300" y="685800"/>
+            <a:off x="381000" y="685800"/>
             <a:ext cx="6096000" cy="3429000"/>
           </a:xfrm>
           <a:custGeom>
@@ -12816,7 +13013,7 @@
         </p:nvSpPr>
         <p:spPr>
           <a:xfrm>
-            <a:off x="381300" y="685800"/>
+            <a:off x="381000" y="685800"/>
             <a:ext cx="6096000" cy="3429000"/>
           </a:xfrm>
           <a:custGeom>
@@ -25213,7 +25410,7 @@
     <p:sldLayoutId id="2147483668" r:id="rId20"/>
     <p:sldLayoutId id="2147483669" r:id="rId21"/>
   </p:sldLayoutIdLst>
-  <p:hf sldNum="0" hdr="0" ftr="0" dt="0"/>
+  <p:hf hdr="0" ftr="0" dt="0"/>
   <p:txStyles>
     <p:titleStyle>
       <a:defPPr marR="0" lvl="0" algn="l" rtl="0">
@@ -27851,6 +28048,44 @@
           </a:p>
         </p:txBody>
       </p:sp>
+      <p:sp>
+        <p:nvSpPr>
+          <p:cNvPr id="2" name="Slide Number Placeholder 1">
+            <a:extLst>
+              <a:ext uri="{FF2B5EF4-FFF2-40B4-BE49-F238E27FC236}">
+                <a16:creationId xmlns:a16="http://schemas.microsoft.com/office/drawing/2014/main" id="{8FEE7685-1350-59D7-F57B-04382E1FF876}"/>
+              </a:ext>
+            </a:extLst>
+          </p:cNvPr>
+          <p:cNvSpPr>
+            <a:spLocks noGrp="1"/>
+          </p:cNvSpPr>
+          <p:nvPr>
+            <p:ph type="sldNum" idx="12"/>
+          </p:nvPr>
+        </p:nvSpPr>
+        <p:spPr/>
+        <p:txBody>
+          <a:bodyPr/>
+          <a:lstStyle/>
+          <a:p>
+            <a:pPr marL="0" lvl="0" indent="0" algn="r" rtl="0">
+              <a:spcBef>
+                <a:spcPts val="0"/>
+              </a:spcBef>
+              <a:spcAft>
+                <a:spcPts val="0"/>
+              </a:spcAft>
+              <a:buNone/>
+            </a:pPr>
+            <a:fld id="{00000000-1234-1234-1234-123412341234}" type="slidenum">
+              <a:rPr lang="en" smtClean="0"/>
+              <a:t>10</a:t>
+            </a:fld>
+            <a:endParaRPr lang="en"/>
+          </a:p>
+        </p:txBody>
+      </p:sp>
     </p:spTree>
   </p:cSld>
   <p:clrMapOvr>
@@ -28120,6 +28355,44 @@
               <a:cs typeface="Roboto"/>
               <a:sym typeface="Roboto"/>
             </a:endParaRPr>
+          </a:p>
+        </p:txBody>
+      </p:sp>
+      <p:sp>
+        <p:nvSpPr>
+          <p:cNvPr id="2" name="Slide Number Placeholder 1">
+            <a:extLst>
+              <a:ext uri="{FF2B5EF4-FFF2-40B4-BE49-F238E27FC236}">
+                <a16:creationId xmlns:a16="http://schemas.microsoft.com/office/drawing/2014/main" id="{5696498E-57CF-8A81-D13E-71842D24E309}"/>
+              </a:ext>
+            </a:extLst>
+          </p:cNvPr>
+          <p:cNvSpPr>
+            <a:spLocks noGrp="1"/>
+          </p:cNvSpPr>
+          <p:nvPr>
+            <p:ph type="sldNum" idx="12"/>
+          </p:nvPr>
+        </p:nvSpPr>
+        <p:spPr/>
+        <p:txBody>
+          <a:bodyPr/>
+          <a:lstStyle/>
+          <a:p>
+            <a:pPr marL="0" lvl="0" indent="0" algn="r" rtl="0">
+              <a:spcBef>
+                <a:spcPts val="0"/>
+              </a:spcBef>
+              <a:spcAft>
+                <a:spcPts val="0"/>
+              </a:spcAft>
+              <a:buNone/>
+            </a:pPr>
+            <a:fld id="{00000000-1234-1234-1234-123412341234}" type="slidenum">
+              <a:rPr lang="en" smtClean="0"/>
+              <a:t>11</a:t>
+            </a:fld>
+            <a:endParaRPr lang="en"/>
           </a:p>
         </p:txBody>
       </p:sp>
@@ -29108,6 +29381,44 @@
               <a:cs typeface="Roboto"/>
               <a:sym typeface="Roboto"/>
             </a:endParaRPr>
+          </a:p>
+        </p:txBody>
+      </p:sp>
+      <p:sp>
+        <p:nvSpPr>
+          <p:cNvPr id="2" name="Slide Number Placeholder 1">
+            <a:extLst>
+              <a:ext uri="{FF2B5EF4-FFF2-40B4-BE49-F238E27FC236}">
+                <a16:creationId xmlns:a16="http://schemas.microsoft.com/office/drawing/2014/main" id="{40F3766B-EA70-903C-A2FB-FB0F78B258C0}"/>
+              </a:ext>
+            </a:extLst>
+          </p:cNvPr>
+          <p:cNvSpPr>
+            <a:spLocks noGrp="1"/>
+          </p:cNvSpPr>
+          <p:nvPr>
+            <p:ph type="sldNum" idx="12"/>
+          </p:nvPr>
+        </p:nvSpPr>
+        <p:spPr/>
+        <p:txBody>
+          <a:bodyPr/>
+          <a:lstStyle/>
+          <a:p>
+            <a:pPr marL="0" lvl="0" indent="0" algn="r" rtl="0">
+              <a:spcBef>
+                <a:spcPts val="0"/>
+              </a:spcBef>
+              <a:spcAft>
+                <a:spcPts val="0"/>
+              </a:spcAft>
+              <a:buNone/>
+            </a:pPr>
+            <a:fld id="{00000000-1234-1234-1234-123412341234}" type="slidenum">
+              <a:rPr lang="en" smtClean="0"/>
+              <a:t>12</a:t>
+            </a:fld>
+            <a:endParaRPr lang="en"/>
           </a:p>
         </p:txBody>
       </p:sp>
@@ -30660,6 +30971,44 @@
           </a:p>
         </p:txBody>
       </p:sp>
+      <p:sp>
+        <p:nvSpPr>
+          <p:cNvPr id="2" name="Slide Number Placeholder 1">
+            <a:extLst>
+              <a:ext uri="{FF2B5EF4-FFF2-40B4-BE49-F238E27FC236}">
+                <a16:creationId xmlns:a16="http://schemas.microsoft.com/office/drawing/2014/main" id="{A3BDD7F0-C43A-34B2-E7A3-665462BD5FBF}"/>
+              </a:ext>
+            </a:extLst>
+          </p:cNvPr>
+          <p:cNvSpPr>
+            <a:spLocks noGrp="1"/>
+          </p:cNvSpPr>
+          <p:nvPr>
+            <p:ph type="sldNum" idx="12"/>
+          </p:nvPr>
+        </p:nvSpPr>
+        <p:spPr/>
+        <p:txBody>
+          <a:bodyPr/>
+          <a:lstStyle/>
+          <a:p>
+            <a:pPr marL="0" lvl="0" indent="0" algn="r" rtl="0">
+              <a:spcBef>
+                <a:spcPts val="0"/>
+              </a:spcBef>
+              <a:spcAft>
+                <a:spcPts val="0"/>
+              </a:spcAft>
+              <a:buNone/>
+            </a:pPr>
+            <a:fld id="{00000000-1234-1234-1234-123412341234}" type="slidenum">
+              <a:rPr lang="en" smtClean="0"/>
+              <a:t>13</a:t>
+            </a:fld>
+            <a:endParaRPr lang="en"/>
+          </a:p>
+        </p:txBody>
+      </p:sp>
     </p:spTree>
   </p:cSld>
   <p:clrMapOvr>
@@ -31548,6 +31897,44 @@
               <a:cs typeface="Roboto"/>
               <a:sym typeface="Roboto"/>
             </a:endParaRPr>
+          </a:p>
+        </p:txBody>
+      </p:sp>
+      <p:sp>
+        <p:nvSpPr>
+          <p:cNvPr id="2" name="Slide Number Placeholder 1">
+            <a:extLst>
+              <a:ext uri="{FF2B5EF4-FFF2-40B4-BE49-F238E27FC236}">
+                <a16:creationId xmlns:a16="http://schemas.microsoft.com/office/drawing/2014/main" id="{965828FB-07C6-B1F1-5DF7-109A6023EE76}"/>
+              </a:ext>
+            </a:extLst>
+          </p:cNvPr>
+          <p:cNvSpPr>
+            <a:spLocks noGrp="1"/>
+          </p:cNvSpPr>
+          <p:nvPr>
+            <p:ph type="sldNum" idx="12"/>
+          </p:nvPr>
+        </p:nvSpPr>
+        <p:spPr/>
+        <p:txBody>
+          <a:bodyPr/>
+          <a:lstStyle/>
+          <a:p>
+            <a:pPr marL="0" lvl="0" indent="0" algn="r" rtl="0">
+              <a:spcBef>
+                <a:spcPts val="0"/>
+              </a:spcBef>
+              <a:spcAft>
+                <a:spcPts val="0"/>
+              </a:spcAft>
+              <a:buNone/>
+            </a:pPr>
+            <a:fld id="{00000000-1234-1234-1234-123412341234}" type="slidenum">
+              <a:rPr lang="en" smtClean="0"/>
+              <a:t>14</a:t>
+            </a:fld>
+            <a:endParaRPr lang="en"/>
           </a:p>
         </p:txBody>
       </p:sp>
@@ -33100,6 +33487,44 @@
           </a:ln>
         </p:spPr>
       </p:cxnSp>
+      <p:sp>
+        <p:nvSpPr>
+          <p:cNvPr id="2" name="Slide Number Placeholder 1">
+            <a:extLst>
+              <a:ext uri="{FF2B5EF4-FFF2-40B4-BE49-F238E27FC236}">
+                <a16:creationId xmlns:a16="http://schemas.microsoft.com/office/drawing/2014/main" id="{5B2EC2B3-DABE-DE5D-06A1-A538982503C0}"/>
+              </a:ext>
+            </a:extLst>
+          </p:cNvPr>
+          <p:cNvSpPr>
+            <a:spLocks noGrp="1"/>
+          </p:cNvSpPr>
+          <p:nvPr>
+            <p:ph type="sldNum" idx="12"/>
+          </p:nvPr>
+        </p:nvSpPr>
+        <p:spPr/>
+        <p:txBody>
+          <a:bodyPr/>
+          <a:lstStyle/>
+          <a:p>
+            <a:pPr marL="0" lvl="0" indent="0" algn="r" rtl="0">
+              <a:spcBef>
+                <a:spcPts val="0"/>
+              </a:spcBef>
+              <a:spcAft>
+                <a:spcPts val="0"/>
+              </a:spcAft>
+              <a:buNone/>
+            </a:pPr>
+            <a:fld id="{00000000-1234-1234-1234-123412341234}" type="slidenum">
+              <a:rPr lang="en" smtClean="0"/>
+              <a:t>15</a:t>
+            </a:fld>
+            <a:endParaRPr lang="en"/>
+          </a:p>
+        </p:txBody>
+      </p:sp>
     </p:spTree>
   </p:cSld>
   <p:clrMapOvr>
@@ -38178,6 +38603,44 @@
               <a:cs typeface="Roboto"/>
               <a:sym typeface="Roboto"/>
             </a:endParaRPr>
+          </a:p>
+        </p:txBody>
+      </p:sp>
+      <p:sp>
+        <p:nvSpPr>
+          <p:cNvPr id="2" name="Slide Number Placeholder 1">
+            <a:extLst>
+              <a:ext uri="{FF2B5EF4-FFF2-40B4-BE49-F238E27FC236}">
+                <a16:creationId xmlns:a16="http://schemas.microsoft.com/office/drawing/2014/main" id="{8B0354D5-BFCB-6922-B804-D36AC13B5F18}"/>
+              </a:ext>
+            </a:extLst>
+          </p:cNvPr>
+          <p:cNvSpPr>
+            <a:spLocks noGrp="1"/>
+          </p:cNvSpPr>
+          <p:nvPr>
+            <p:ph type="sldNum" idx="12"/>
+          </p:nvPr>
+        </p:nvSpPr>
+        <p:spPr/>
+        <p:txBody>
+          <a:bodyPr/>
+          <a:lstStyle/>
+          <a:p>
+            <a:pPr marL="0" lvl="0" indent="0" algn="r" rtl="0">
+              <a:spcBef>
+                <a:spcPts val="0"/>
+              </a:spcBef>
+              <a:spcAft>
+                <a:spcPts val="0"/>
+              </a:spcAft>
+              <a:buNone/>
+            </a:pPr>
+            <a:fld id="{00000000-1234-1234-1234-123412341234}" type="slidenum">
+              <a:rPr lang="en" smtClean="0"/>
+              <a:t>16</a:t>
+            </a:fld>
+            <a:endParaRPr lang="en"/>
           </a:p>
         </p:txBody>
       </p:sp>
@@ -41035,7 +41498,7 @@
         </p:spPr>
         <p:txBody>
           <a:bodyPr spcFirstLastPara="1" wrap="square" lIns="91425" tIns="91425" rIns="91425" bIns="91425" anchor="t" anchorCtr="0">
-            <a:noAutofit/>
+            <a:normAutofit fontScale="92500" lnSpcReduction="10000"/>
           </a:bodyPr>
           <a:lstStyle/>
           <a:p>
@@ -41049,10 +41512,10 @@
               <a:buNone/>
             </a:pPr>
             <a:r>
-              <a:rPr lang="en"/>
+              <a:rPr lang="en" dirty="0"/>
               <a:t>Problem: Naive solution (send to all neighbors) causes amplification.</a:t>
             </a:r>
-            <a:endParaRPr/>
+            <a:endParaRPr dirty="0"/>
           </a:p>
           <a:p>
             <a:pPr marL="0" lvl="0" indent="0" algn="l" rtl="0">
@@ -41065,10 +41528,10 @@
               <a:buNone/>
             </a:pPr>
             <a:r>
-              <a:rPr lang="en"/>
+              <a:rPr lang="en" dirty="0"/>
               <a:t>Solution:</a:t>
             </a:r>
-            <a:endParaRPr/>
+            <a:endParaRPr dirty="0"/>
           </a:p>
           <a:p>
             <a:pPr marL="457200" lvl="0" indent="-342900" algn="l" rtl="0">
@@ -41082,10 +41545,10 @@
               <a:buChar char="●"/>
             </a:pPr>
             <a:r>
-              <a:rPr lang="en"/>
+              <a:rPr lang="en" dirty="0"/>
               <a:t>When local information (about yourself) changes, send it to all neighbors.</a:t>
             </a:r>
-            <a:endParaRPr/>
+            <a:endParaRPr dirty="0"/>
           </a:p>
           <a:p>
             <a:pPr marL="457200" lvl="0" indent="-342900" algn="l" rtl="0">
@@ -41099,10 +41562,10 @@
               <a:buChar char="●"/>
             </a:pPr>
             <a:r>
-              <a:rPr lang="en"/>
+              <a:rPr lang="en" dirty="0"/>
               <a:t>When you receive a packet from a neighbor, send it to all neighbors...</a:t>
             </a:r>
-            <a:endParaRPr/>
+            <a:endParaRPr dirty="0"/>
           </a:p>
           <a:p>
             <a:pPr marL="457200" lvl="0" indent="-342900" algn="l" rtl="0">
@@ -41116,26 +41579,24 @@
               <a:buChar char="●"/>
             </a:pPr>
             <a:r>
-              <a:rPr lang="en"/>
+              <a:rPr lang="en" dirty="0"/>
               <a:t>...unless you've already seen the packet before.</a:t>
             </a:r>
-            <a:endParaRPr/>
-          </a:p>
-          <a:p>
-            <a:pPr marL="0" lvl="0" indent="0" algn="l" rtl="0">
-              <a:spcBef>
-                <a:spcPts val="600"/>
-              </a:spcBef>
-              <a:spcAft>
-                <a:spcPts val="0"/>
-              </a:spcAft>
-              <a:buNone/>
-            </a:pPr>
-            <a:r>
-              <a:rPr lang="en"/>
-              <a:t>To identify packets you've seen before, add a timestamp.</a:t>
-            </a:r>
-            <a:endParaRPr/>
+            <a:endParaRPr dirty="0"/>
+          </a:p>
+          <a:p>
+            <a:pPr marL="0" lvl="0" indent="0">
+              <a:buNone/>
+            </a:pPr>
+            <a:r>
+              <a:rPr lang="en" dirty="0"/>
+              <a:t>To identify packets you've seen before, add a timestamp. </a:t>
+            </a:r>
+            <a:r>
+              <a:rPr lang="en-US" altLang="zh-CN" dirty="0"/>
+              <a:t>Each router keeps the most recent version per origin router</a:t>
+            </a:r>
+            <a:endParaRPr dirty="0"/>
           </a:p>
           <a:p>
             <a:pPr marL="457200" lvl="0" indent="-342900" algn="l" rtl="0">
@@ -41149,10 +41610,10 @@
               <a:buChar char="●"/>
             </a:pPr>
             <a:r>
-              <a:rPr lang="en"/>
+              <a:rPr lang="en" dirty="0"/>
               <a:t>Or some other unique identifier, e.g. strictly increasing sequence numbers.</a:t>
             </a:r>
-            <a:endParaRPr/>
+            <a:endParaRPr dirty="0"/>
           </a:p>
         </p:txBody>
       </p:sp>
@@ -41744,6 +42205,44 @@
               <a:cs typeface="Roboto"/>
               <a:sym typeface="Roboto"/>
             </a:endParaRPr>
+          </a:p>
+        </p:txBody>
+      </p:sp>
+      <p:sp>
+        <p:nvSpPr>
+          <p:cNvPr id="2" name="Slide Number Placeholder 1">
+            <a:extLst>
+              <a:ext uri="{FF2B5EF4-FFF2-40B4-BE49-F238E27FC236}">
+                <a16:creationId xmlns:a16="http://schemas.microsoft.com/office/drawing/2014/main" id="{91B3BD17-831A-D4D8-C305-B8549F8899A1}"/>
+              </a:ext>
+            </a:extLst>
+          </p:cNvPr>
+          <p:cNvSpPr>
+            <a:spLocks noGrp="1"/>
+          </p:cNvSpPr>
+          <p:nvPr>
+            <p:ph type="sldNum" idx="12"/>
+          </p:nvPr>
+        </p:nvSpPr>
+        <p:spPr/>
+        <p:txBody>
+          <a:bodyPr/>
+          <a:lstStyle/>
+          <a:p>
+            <a:pPr marL="0" lvl="0" indent="0" algn="r" rtl="0">
+              <a:spcBef>
+                <a:spcPts val="0"/>
+              </a:spcBef>
+              <a:spcAft>
+                <a:spcPts val="0"/>
+              </a:spcAft>
+              <a:buNone/>
+            </a:pPr>
+            <a:fld id="{00000000-1234-1234-1234-123412341234}" type="slidenum">
+              <a:rPr lang="en" smtClean="0"/>
+              <a:t>17</a:t>
+            </a:fld>
+            <a:endParaRPr lang="en"/>
           </a:p>
         </p:txBody>
       </p:sp>
@@ -42230,10 +42729,10 @@
               <a:buNone/>
             </a:pPr>
             <a:r>
-              <a:rPr lang="en"/>
+              <a:rPr lang="en" dirty="0"/>
               <a:t>The network is still best-effort. Updates could get dropped.</a:t>
             </a:r>
-            <a:endParaRPr/>
+            <a:endParaRPr dirty="0"/>
           </a:p>
           <a:p>
             <a:pPr marL="457200" lvl="0" indent="-342900" algn="l" rtl="0">
@@ -42247,10 +42746,10 @@
               <a:buChar char="●"/>
             </a:pPr>
             <a:r>
-              <a:rPr lang="en"/>
+              <a:rPr lang="en" dirty="0"/>
               <a:t>Recall: We need all routers to agree on topology, or else paths might be invalid.</a:t>
             </a:r>
-            <a:endParaRPr/>
+            <a:endParaRPr dirty="0"/>
           </a:p>
           <a:p>
             <a:pPr marL="0" lvl="0" indent="0" algn="l" rtl="0">
@@ -42263,10 +42762,52 @@
               <a:buNone/>
             </a:pPr>
             <a:r>
-              <a:rPr lang="en"/>
-              <a:t>Solution: Periodically re-send the update.</a:t>
-            </a:r>
-            <a:endParaRPr/>
+              <a:rPr lang="en" dirty="0"/>
+              <a:t>Solution: Periodically re-send the update. </a:t>
+            </a:r>
+            <a:r>
+              <a:rPr lang="en-US" altLang="zh-CN" dirty="0"/>
+              <a:t>In OSPF, LSAs are refreshed every 30 minutes by default.</a:t>
+            </a:r>
+            <a:endParaRPr dirty="0"/>
+          </a:p>
+        </p:txBody>
+      </p:sp>
+      <p:sp>
+        <p:nvSpPr>
+          <p:cNvPr id="2" name="Slide Number Placeholder 1">
+            <a:extLst>
+              <a:ext uri="{FF2B5EF4-FFF2-40B4-BE49-F238E27FC236}">
+                <a16:creationId xmlns:a16="http://schemas.microsoft.com/office/drawing/2014/main" id="{3DF8F30A-8868-B200-291E-1C62374B2059}"/>
+              </a:ext>
+            </a:extLst>
+          </p:cNvPr>
+          <p:cNvSpPr>
+            <a:spLocks noGrp="1"/>
+          </p:cNvSpPr>
+          <p:nvPr>
+            <p:ph type="sldNum" idx="12"/>
+          </p:nvPr>
+        </p:nvSpPr>
+        <p:spPr/>
+        <p:txBody>
+          <a:bodyPr/>
+          <a:lstStyle/>
+          <a:p>
+            <a:pPr marL="0" lvl="0" indent="0" algn="r" rtl="0">
+              <a:spcBef>
+                <a:spcPts val="0"/>
+              </a:spcBef>
+              <a:spcAft>
+                <a:spcPts val="0"/>
+              </a:spcAft>
+              <a:buNone/>
+            </a:pPr>
+            <a:fld id="{00000000-1234-1234-1234-123412341234}" type="slidenum">
+              <a:rPr lang="en" smtClean="0"/>
+              <a:t>18</a:t>
+            </a:fld>
+            <a:endParaRPr lang="en"/>
           </a:p>
         </p:txBody>
       </p:sp>
@@ -42358,7 +42899,7 @@
         </p:spPr>
         <p:txBody>
           <a:bodyPr spcFirstLastPara="1" wrap="square" lIns="91425" tIns="91425" rIns="91425" bIns="91425" anchor="t" anchorCtr="0">
-            <a:noAutofit/>
+            <a:normAutofit fontScale="92500"/>
           </a:bodyPr>
           <a:lstStyle/>
           <a:p>
@@ -42372,10 +42913,10 @@
               <a:buNone/>
             </a:pPr>
             <a:r>
-              <a:rPr lang="en"/>
+              <a:rPr lang="en" dirty="0"/>
               <a:t>The network could change. What happens if a link goes down?</a:t>
             </a:r>
-            <a:endParaRPr/>
+            <a:endParaRPr dirty="0"/>
           </a:p>
           <a:p>
             <a:pPr marL="457200" lvl="0" indent="-342900" algn="l" rtl="0">
@@ -42389,10 +42930,10 @@
               <a:buChar char="●"/>
             </a:pPr>
             <a:r>
-              <a:rPr lang="en"/>
+              <a:rPr lang="en" dirty="0"/>
               <a:t>Wait for routers to detect the failure.</a:t>
             </a:r>
-            <a:endParaRPr/>
+            <a:endParaRPr dirty="0"/>
           </a:p>
           <a:p>
             <a:pPr marL="457200" lvl="0" indent="-342900" algn="l" rtl="0">
@@ -42406,10 +42947,10 @@
               <a:buChar char="●"/>
             </a:pPr>
             <a:r>
-              <a:rPr lang="en"/>
+              <a:rPr lang="en" dirty="0"/>
               <a:t>Wait to flood new information.</a:t>
             </a:r>
-            <a:endParaRPr/>
+            <a:endParaRPr dirty="0"/>
           </a:p>
           <a:p>
             <a:pPr marL="457200" lvl="0" indent="-342900" algn="l" rtl="0">
@@ -42423,10 +42964,10 @@
               <a:buChar char="●"/>
             </a:pPr>
             <a:r>
-              <a:rPr lang="en"/>
+              <a:rPr lang="en" dirty="0"/>
               <a:t>Wait to recompute paths.</a:t>
             </a:r>
-            <a:endParaRPr/>
+            <a:endParaRPr dirty="0"/>
           </a:p>
           <a:p>
             <a:pPr marL="0" lvl="0" indent="0" algn="l" rtl="0">
@@ -42439,10 +42980,10 @@
               <a:buNone/>
             </a:pPr>
             <a:r>
-              <a:rPr lang="en"/>
+              <a:rPr lang="en" dirty="0"/>
               <a:t>While waiting for convergence, the routing state might be invalid.</a:t>
             </a:r>
-            <a:endParaRPr/>
+            <a:endParaRPr dirty="0"/>
           </a:p>
           <a:p>
             <a:pPr marL="457200" lvl="0" indent="-342900" algn="l" rtl="0">
@@ -42456,10 +42997,10 @@
               <a:buChar char="●"/>
             </a:pPr>
             <a:r>
-              <a:rPr lang="en"/>
-              <a:t>Dead ends and loops. Packets using longer routes.</a:t>
-            </a:r>
-            <a:endParaRPr/>
+              <a:rPr lang="en" dirty="0"/>
+              <a:t>Dead ends and loops. Packets using longer routes. Below is example of a routing loop.</a:t>
+            </a:r>
+            <a:endParaRPr dirty="0"/>
           </a:p>
         </p:txBody>
       </p:sp>
@@ -42703,8 +43244,8 @@
         </p:nvSpPr>
         <p:spPr>
           <a:xfrm>
-            <a:off x="1084750" y="4361900"/>
-            <a:ext cx="2852100" cy="559200"/>
+            <a:off x="864159" y="4361900"/>
+            <a:ext cx="3155182" cy="559127"/>
           </a:xfrm>
           <a:prstGeom prst="rect">
             <a:avLst/>
@@ -42730,7 +43271,7 @@
               <a:buNone/>
             </a:pPr>
             <a:r>
-              <a:rPr lang="en">
+              <a:rPr lang="en" dirty="0">
                 <a:solidFill>
                   <a:schemeClr val="dk1"/>
                 </a:solidFill>
@@ -42739,9 +43280,9 @@
                 <a:cs typeface="Roboto"/>
                 <a:sym typeface="Roboto"/>
               </a:rPr>
-              <a:t>Link is down, but R1 doesn't know!</a:t>
-            </a:r>
-            <a:endParaRPr>
+              <a:t>A-R3 Link is down, but R1 doesn't know!</a:t>
+            </a:r>
+            <a:endParaRPr dirty="0">
               <a:solidFill>
                 <a:schemeClr val="dk1"/>
               </a:solidFill>
@@ -42762,7 +43303,7 @@
               <a:buNone/>
             </a:pPr>
             <a:r>
-              <a:rPr lang="en">
+              <a:rPr lang="en" dirty="0">
                 <a:solidFill>
                   <a:srgbClr val="0000FF"/>
                 </a:solidFill>
@@ -42773,7 +43314,7 @@
               </a:rPr>
               <a:t>R1 forwards to R3.</a:t>
             </a:r>
-            <a:endParaRPr>
+            <a:endParaRPr dirty="0">
               <a:solidFill>
                 <a:srgbClr val="0000FF"/>
               </a:solidFill>
@@ -42820,7 +43361,7 @@
               <a:buNone/>
             </a:pPr>
             <a:r>
-              <a:rPr lang="en">
+              <a:rPr lang="en" dirty="0">
                 <a:solidFill>
                   <a:schemeClr val="dk1"/>
                 </a:solidFill>
@@ -42831,7 +43372,7 @@
               </a:rPr>
               <a:t>R3 knows about the link failure!</a:t>
             </a:r>
-            <a:endParaRPr>
+            <a:endParaRPr dirty="0">
               <a:solidFill>
                 <a:schemeClr val="dk1"/>
               </a:solidFill>
@@ -42852,7 +43393,7 @@
               <a:buNone/>
             </a:pPr>
             <a:r>
-              <a:rPr lang="en">
+              <a:rPr lang="en" dirty="0">
                 <a:solidFill>
                   <a:schemeClr val="accent2"/>
                 </a:solidFill>
@@ -42863,7 +43404,7 @@
               </a:rPr>
               <a:t>R3 forwards to R1.</a:t>
             </a:r>
-            <a:endParaRPr>
+            <a:endParaRPr dirty="0">
               <a:solidFill>
                 <a:schemeClr val="accent2"/>
               </a:solidFill>
@@ -43352,6 +43893,44 @@
               <a:cs typeface="Roboto"/>
               <a:sym typeface="Roboto"/>
             </a:endParaRPr>
+          </a:p>
+        </p:txBody>
+      </p:sp>
+      <p:sp>
+        <p:nvSpPr>
+          <p:cNvPr id="2" name="Slide Number Placeholder 1">
+            <a:extLst>
+              <a:ext uri="{FF2B5EF4-FFF2-40B4-BE49-F238E27FC236}">
+                <a16:creationId xmlns:a16="http://schemas.microsoft.com/office/drawing/2014/main" id="{F30F1865-688C-2703-F915-62D030926A6A}"/>
+              </a:ext>
+            </a:extLst>
+          </p:cNvPr>
+          <p:cNvSpPr>
+            <a:spLocks noGrp="1"/>
+          </p:cNvSpPr>
+          <p:nvPr>
+            <p:ph type="sldNum" idx="12"/>
+          </p:nvPr>
+        </p:nvSpPr>
+        <p:spPr/>
+        <p:txBody>
+          <a:bodyPr/>
+          <a:lstStyle/>
+          <a:p>
+            <a:pPr marL="0" lvl="0" indent="0" algn="r" rtl="0">
+              <a:spcBef>
+                <a:spcPts val="0"/>
+              </a:spcBef>
+              <a:spcAft>
+                <a:spcPts val="0"/>
+              </a:spcAft>
+              <a:buNone/>
+            </a:pPr>
+            <a:fld id="{00000000-1234-1234-1234-123412341234}" type="slidenum">
+              <a:rPr lang="en" smtClean="0"/>
+              <a:t>19</a:t>
+            </a:fld>
+            <a:endParaRPr lang="en"/>
           </a:p>
         </p:txBody>
       </p:sp>
@@ -43779,6 +44358,44 @@
           </a:p>
         </p:txBody>
       </p:sp>
+      <p:sp>
+        <p:nvSpPr>
+          <p:cNvPr id="2" name="Slide Number Placeholder 1">
+            <a:extLst>
+              <a:ext uri="{FF2B5EF4-FFF2-40B4-BE49-F238E27FC236}">
+                <a16:creationId xmlns:a16="http://schemas.microsoft.com/office/drawing/2014/main" id="{75C3C0CD-D223-FD51-6F3E-96794D767A7D}"/>
+              </a:ext>
+            </a:extLst>
+          </p:cNvPr>
+          <p:cNvSpPr>
+            <a:spLocks noGrp="1"/>
+          </p:cNvSpPr>
+          <p:nvPr>
+            <p:ph type="sldNum" idx="12"/>
+          </p:nvPr>
+        </p:nvSpPr>
+        <p:spPr/>
+        <p:txBody>
+          <a:bodyPr/>
+          <a:lstStyle/>
+          <a:p>
+            <a:pPr marL="0" lvl="0" indent="0" algn="r" rtl="0">
+              <a:spcBef>
+                <a:spcPts val="0"/>
+              </a:spcBef>
+              <a:spcAft>
+                <a:spcPts val="0"/>
+              </a:spcAft>
+              <a:buNone/>
+            </a:pPr>
+            <a:fld id="{00000000-1234-1234-1234-123412341234}" type="slidenum">
+              <a:rPr lang="en" smtClean="0"/>
+              <a:t>2</a:t>
+            </a:fld>
+            <a:endParaRPr lang="en"/>
+          </a:p>
+        </p:txBody>
+      </p:sp>
     </p:spTree>
   </p:cSld>
   <p:clrMapOvr>
@@ -43839,10 +44456,10 @@
               <a:buNone/>
             </a:pPr>
             <a:r>
-              <a:rPr lang="en"/>
+              <a:rPr lang="en" dirty="0"/>
               <a:t>Link-State vs. Distance-Vector</a:t>
             </a:r>
-            <a:endParaRPr/>
+            <a:endParaRPr dirty="0"/>
           </a:p>
         </p:txBody>
       </p:sp>
@@ -43881,10 +44498,10 @@
               <a:buNone/>
             </a:pPr>
             <a:r>
-              <a:rPr lang="en"/>
-              <a:t>Link-state is relatively simple. All the complexity is in the details!</a:t>
-            </a:r>
-            <a:endParaRPr/>
+              <a:rPr lang="en" dirty="0"/>
+              <a:t>Link-state is relatively simple. </a:t>
+            </a:r>
+            <a:endParaRPr lang="en-US" dirty="0"/>
           </a:p>
           <a:p>
             <a:pPr marL="457200" lvl="0" indent="-342900" algn="l" rtl="0">
@@ -43898,10 +44515,9 @@
               <a:buChar char="●"/>
             </a:pPr>
             <a:r>
-              <a:rPr lang="en"/>
+              <a:rPr lang="en-US" dirty="0"/>
               <a:t>Everyone floods link/destination information.</a:t>
             </a:r>
-            <a:endParaRPr/>
           </a:p>
           <a:p>
             <a:pPr marL="457200" lvl="0" indent="-342900" algn="l" rtl="0">
@@ -43915,10 +44531,10 @@
               <a:buChar char="●"/>
             </a:pPr>
             <a:r>
-              <a:rPr lang="en"/>
+              <a:rPr lang="en" dirty="0"/>
               <a:t>Everyone has a global map of the network.</a:t>
             </a:r>
-            <a:endParaRPr/>
+            <a:endParaRPr dirty="0"/>
           </a:p>
           <a:p>
             <a:pPr marL="457200" lvl="0" indent="-342900" algn="l" rtl="0">
@@ -43932,10 +44548,10 @@
               <a:buChar char="●"/>
             </a:pPr>
             <a:r>
-              <a:rPr lang="en"/>
+              <a:rPr lang="en" dirty="0"/>
               <a:t>Everyone independently computes next-hops.</a:t>
             </a:r>
-            <a:endParaRPr/>
+            <a:endParaRPr dirty="0"/>
           </a:p>
           <a:p>
             <a:pPr marL="0" lvl="0" indent="0" algn="l" rtl="0">
@@ -43948,10 +44564,10 @@
               <a:buNone/>
             </a:pPr>
             <a:r>
-              <a:rPr lang="en"/>
+              <a:rPr lang="en" dirty="0"/>
               <a:t>Why might we want to use link-state over distance-vector?</a:t>
             </a:r>
-            <a:endParaRPr/>
+            <a:endParaRPr dirty="0"/>
           </a:p>
           <a:p>
             <a:pPr marL="457200" lvl="0" indent="-342900" algn="l" rtl="0">
@@ -43965,10 +44581,10 @@
               <a:buChar char="●"/>
             </a:pPr>
             <a:r>
-              <a:rPr lang="en"/>
+              <a:rPr lang="en" dirty="0"/>
               <a:t>Link-state gives routers more control over the path they choose.</a:t>
             </a:r>
-            <a:endParaRPr/>
+            <a:endParaRPr dirty="0"/>
           </a:p>
           <a:p>
             <a:pPr marL="914400" lvl="1" indent="-342900" algn="l" rtl="0">
@@ -43982,10 +44598,10 @@
               <a:buChar char="○"/>
             </a:pPr>
             <a:r>
-              <a:rPr lang="en"/>
+              <a:rPr lang="en" dirty="0"/>
               <a:t>Distance-vector: We have to trust what our neighbor says, and we don't know the path they're using.</a:t>
             </a:r>
-            <a:endParaRPr/>
+            <a:endParaRPr dirty="0"/>
           </a:p>
           <a:p>
             <a:pPr marL="457200" lvl="0" indent="-342900" algn="l" rtl="0">
@@ -43999,10 +44615,10 @@
               <a:buChar char="●"/>
             </a:pPr>
             <a:r>
-              <a:rPr lang="en"/>
+              <a:rPr lang="en" dirty="0"/>
               <a:t>Link-state might be better at converging.</a:t>
             </a:r>
-            <a:endParaRPr/>
+            <a:endParaRPr dirty="0"/>
           </a:p>
           <a:p>
             <a:pPr marL="914400" lvl="1" indent="-342900" algn="l" rtl="0">
@@ -44016,10 +44632,10 @@
               <a:buChar char="○"/>
             </a:pPr>
             <a:r>
-              <a:rPr lang="en"/>
+              <a:rPr lang="en" dirty="0"/>
               <a:t>Distance-vector: Wait for neighbor to recompute and re-advertise path.</a:t>
             </a:r>
-            <a:endParaRPr/>
+            <a:endParaRPr dirty="0"/>
           </a:p>
           <a:p>
             <a:pPr marL="914400" lvl="1" indent="-342900" algn="l" rtl="0">
@@ -44033,10 +44649,10 @@
               <a:buChar char="○"/>
             </a:pPr>
             <a:r>
-              <a:rPr lang="en"/>
+              <a:rPr lang="en" dirty="0"/>
               <a:t>Link-state: Flood information before recomputing.</a:t>
             </a:r>
-            <a:endParaRPr/>
+            <a:endParaRPr dirty="0"/>
           </a:p>
           <a:p>
             <a:pPr marL="0" lvl="0" indent="0" algn="l" rtl="0">
@@ -44049,14 +44665,727 @@
               <a:buNone/>
             </a:pPr>
             <a:r>
-              <a:rPr lang="en"/>
+              <a:rPr lang="en" dirty="0"/>
               <a:t>Real networks often use a combination of path/distance-vector and link-state.</a:t>
             </a:r>
-            <a:endParaRPr/>
+            <a:endParaRPr dirty="0"/>
+          </a:p>
+        </p:txBody>
+      </p:sp>
+      <p:sp>
+        <p:nvSpPr>
+          <p:cNvPr id="2" name="Slide Number Placeholder 1">
+            <a:extLst>
+              <a:ext uri="{FF2B5EF4-FFF2-40B4-BE49-F238E27FC236}">
+                <a16:creationId xmlns:a16="http://schemas.microsoft.com/office/drawing/2014/main" id="{70971501-1DAD-60CD-1A44-C3462DAB7688}"/>
+              </a:ext>
+            </a:extLst>
+          </p:cNvPr>
+          <p:cNvSpPr>
+            <a:spLocks noGrp="1"/>
+          </p:cNvSpPr>
+          <p:nvPr>
+            <p:ph type="sldNum" idx="12"/>
+          </p:nvPr>
+        </p:nvSpPr>
+        <p:spPr/>
+        <p:txBody>
+          <a:bodyPr/>
+          <a:lstStyle/>
+          <a:p>
+            <a:pPr marL="0" lvl="0" indent="0" algn="r" rtl="0">
+              <a:spcBef>
+                <a:spcPts val="0"/>
+              </a:spcBef>
+              <a:spcAft>
+                <a:spcPts val="0"/>
+              </a:spcAft>
+              <a:buNone/>
+            </a:pPr>
+            <a:fld id="{00000000-1234-1234-1234-123412341234}" type="slidenum">
+              <a:rPr lang="en" smtClean="0"/>
+              <a:t>20</a:t>
+            </a:fld>
+            <a:endParaRPr lang="en"/>
           </a:p>
         </p:txBody>
       </p:sp>
     </p:spTree>
+  </p:cSld>
+  <p:clrMapOvr>
+    <a:masterClrMapping/>
+  </p:clrMapOvr>
+</p:sld>
+</file>
+
+<file path=ppt/slides/slide21.xml><?xml version="1.0" encoding="utf-8"?>
+<p:sld xmlns:a="http://schemas.openxmlformats.org/drawingml/2006/main" xmlns:r="http://schemas.openxmlformats.org/officeDocument/2006/relationships" xmlns:p="http://schemas.openxmlformats.org/presentationml/2006/main">
+  <p:cSld>
+    <p:spTree>
+      <p:nvGrpSpPr>
+        <p:cNvPr id="1" name=""/>
+        <p:cNvGrpSpPr/>
+        <p:nvPr/>
+      </p:nvGrpSpPr>
+      <p:grpSpPr>
+        <a:xfrm>
+          <a:off x="0" y="0"/>
+          <a:ext cx="0" cy="0"/>
+          <a:chOff x="0" y="0"/>
+          <a:chExt cx="0" cy="0"/>
+        </a:xfrm>
+      </p:grpSpPr>
+      <p:sp>
+        <p:nvSpPr>
+          <p:cNvPr id="2" name="Title 1">
+            <a:extLst>
+              <a:ext uri="{FF2B5EF4-FFF2-40B4-BE49-F238E27FC236}">
+                <a16:creationId xmlns:a16="http://schemas.microsoft.com/office/drawing/2014/main" id="{41681470-7D48-4DB5-9E9F-07CCE23BD0B5}"/>
+              </a:ext>
+            </a:extLst>
+          </p:cNvPr>
+          <p:cNvSpPr>
+            <a:spLocks noGrp="1"/>
+          </p:cNvSpPr>
+          <p:nvPr>
+            <p:ph type="title"/>
+          </p:nvPr>
+        </p:nvSpPr>
+        <p:spPr/>
+        <p:txBody>
+          <a:bodyPr/>
+          <a:lstStyle/>
+          <a:p>
+            <a:r>
+              <a:rPr lang="en" altLang="zh-CN" dirty="0"/>
+              <a:t>Link-State vs. Distance-Vector</a:t>
+            </a:r>
+            <a:endParaRPr lang="zh-CN" altLang="en-US" dirty="0"/>
+          </a:p>
+        </p:txBody>
+      </p:sp>
+      <p:sp>
+        <p:nvSpPr>
+          <p:cNvPr id="4" name="Slide Number Placeholder 3">
+            <a:extLst>
+              <a:ext uri="{FF2B5EF4-FFF2-40B4-BE49-F238E27FC236}">
+                <a16:creationId xmlns:a16="http://schemas.microsoft.com/office/drawing/2014/main" id="{DA6EA2FF-723A-55A5-C498-75C31877B691}"/>
+              </a:ext>
+            </a:extLst>
+          </p:cNvPr>
+          <p:cNvSpPr>
+            <a:spLocks noGrp="1"/>
+          </p:cNvSpPr>
+          <p:nvPr>
+            <p:ph type="sldNum" idx="12"/>
+          </p:nvPr>
+        </p:nvSpPr>
+        <p:spPr/>
+        <p:txBody>
+          <a:bodyPr/>
+          <a:lstStyle/>
+          <a:p>
+            <a:pPr marL="0" lvl="0" indent="0" algn="r" rtl="0">
+              <a:spcBef>
+                <a:spcPts val="0"/>
+              </a:spcBef>
+              <a:spcAft>
+                <a:spcPts val="0"/>
+              </a:spcAft>
+              <a:buNone/>
+            </a:pPr>
+            <a:fld id="{00000000-1234-1234-1234-123412341234}" type="slidenum">
+              <a:rPr lang="en" smtClean="0"/>
+              <a:t>21</a:t>
+            </a:fld>
+            <a:endParaRPr lang="en"/>
+          </a:p>
+        </p:txBody>
+      </p:sp>
+      <p:graphicFrame>
+        <p:nvGraphicFramePr>
+          <p:cNvPr id="5" name="Content Placeholder 3">
+            <a:extLst>
+              <a:ext uri="{FF2B5EF4-FFF2-40B4-BE49-F238E27FC236}">
+                <a16:creationId xmlns:a16="http://schemas.microsoft.com/office/drawing/2014/main" id="{CD775E96-F5FE-788C-C5AE-806DC374D528}"/>
+              </a:ext>
+            </a:extLst>
+          </p:cNvPr>
+          <p:cNvGraphicFramePr>
+            <a:graphicFrameLocks/>
+          </p:cNvGraphicFramePr>
+          <p:nvPr>
+            <p:extLst>
+              <p:ext uri="{D42A27DB-BD31-4B8C-83A1-F6EECF244321}">
+                <p14:modId xmlns:p14="http://schemas.microsoft.com/office/powerpoint/2010/main" val="2686119124"/>
+              </p:ext>
+            </p:extLst>
+          </p:nvPr>
+        </p:nvGraphicFramePr>
+        <p:xfrm>
+          <a:off x="457200" y="436295"/>
+          <a:ext cx="8229600" cy="4663440"/>
+        </p:xfrm>
+        <a:graphic>
+          <a:graphicData uri="http://schemas.openxmlformats.org/drawingml/2006/table">
+            <a:tbl>
+              <a:tblPr>
+                <a:tableStyleId>{5940675A-B579-460E-94D1-54222C63F5DA}</a:tableStyleId>
+              </a:tblPr>
+              <a:tblGrid>
+                <a:gridCol w="1423866">
+                  <a:extLst>
+                    <a:ext uri="{9D8B030D-6E8A-4147-A177-3AD203B41FA5}">
+                      <a16:colId xmlns:a16="http://schemas.microsoft.com/office/drawing/2014/main" val="63366681"/>
+                    </a:ext>
+                  </a:extLst>
+                </a:gridCol>
+                <a:gridCol w="3334931">
+                  <a:extLst>
+                    <a:ext uri="{9D8B030D-6E8A-4147-A177-3AD203B41FA5}">
+                      <a16:colId xmlns:a16="http://schemas.microsoft.com/office/drawing/2014/main" val="1132787301"/>
+                    </a:ext>
+                  </a:extLst>
+                </a:gridCol>
+                <a:gridCol w="3470803">
+                  <a:extLst>
+                    <a:ext uri="{9D8B030D-6E8A-4147-A177-3AD203B41FA5}">
+                      <a16:colId xmlns:a16="http://schemas.microsoft.com/office/drawing/2014/main" val="2588551543"/>
+                    </a:ext>
+                  </a:extLst>
+                </a:gridCol>
+              </a:tblGrid>
+              <a:tr h="239849">
+                <a:tc>
+                  <a:txBody>
+                    <a:bodyPr/>
+                    <a:lstStyle/>
+                    <a:p>
+                      <a:pPr>
+                        <a:buNone/>
+                      </a:pPr>
+                      <a:r>
+                        <a:rPr lang="en-US" sz="1400"/>
+                        <a:t>Parameter</a:t>
+                      </a:r>
+                    </a:p>
+                  </a:txBody>
+                  <a:tcPr anchor="ctr">
+                    <a:solidFill>
+                      <a:schemeClr val="bg1">
+                        <a:lumMod val="85000"/>
+                      </a:schemeClr>
+                    </a:solidFill>
+                  </a:tcPr>
+                </a:tc>
+                <a:tc>
+                  <a:txBody>
+                    <a:bodyPr/>
+                    <a:lstStyle/>
+                    <a:p>
+                      <a:pPr>
+                        <a:buNone/>
+                      </a:pPr>
+                      <a:r>
+                        <a:rPr lang="en-US" sz="1400"/>
+                        <a:t>Distance Vector Routing</a:t>
+                      </a:r>
+                    </a:p>
+                  </a:txBody>
+                  <a:tcPr anchor="ctr">
+                    <a:solidFill>
+                      <a:schemeClr val="bg1">
+                        <a:lumMod val="85000"/>
+                      </a:schemeClr>
+                    </a:solidFill>
+                  </a:tcPr>
+                </a:tc>
+                <a:tc>
+                  <a:txBody>
+                    <a:bodyPr/>
+                    <a:lstStyle/>
+                    <a:p>
+                      <a:pPr>
+                        <a:buNone/>
+                      </a:pPr>
+                      <a:r>
+                        <a:rPr lang="en-US" sz="1400"/>
+                        <a:t>Link State Routing</a:t>
+                      </a:r>
+                    </a:p>
+                  </a:txBody>
+                  <a:tcPr anchor="ctr">
+                    <a:solidFill>
+                      <a:schemeClr val="bg1">
+                        <a:lumMod val="85000"/>
+                      </a:schemeClr>
+                    </a:solidFill>
+                  </a:tcPr>
+                </a:tc>
+                <a:extLst>
+                  <a:ext uri="{0D108BD9-81ED-4DB2-BD59-A6C34878D82A}">
+                    <a16:rowId xmlns:a16="http://schemas.microsoft.com/office/drawing/2014/main" val="542823175"/>
+                  </a:ext>
+                </a:extLst>
+              </a:tr>
+              <a:tr h="558066">
+                <a:tc>
+                  <a:txBody>
+                    <a:bodyPr/>
+                    <a:lstStyle/>
+                    <a:p>
+                      <a:pPr>
+                        <a:buNone/>
+                      </a:pPr>
+                      <a:r>
+                        <a:rPr lang="en-US" sz="1400" b="1"/>
+                        <a:t>Routing Information Exchanged</a:t>
+                      </a:r>
+                      <a:endParaRPr lang="en-US" sz="1400"/>
+                    </a:p>
+                  </a:txBody>
+                  <a:tcPr anchor="ctr"/>
+                </a:tc>
+                <a:tc>
+                  <a:txBody>
+                    <a:bodyPr/>
+                    <a:lstStyle/>
+                    <a:p>
+                      <a:pPr>
+                        <a:buNone/>
+                      </a:pPr>
+                      <a:r>
+                        <a:rPr lang="en-US" sz="1400"/>
+                        <a:t>Routers send distance vectors (cost to each destination) to neighbors.</a:t>
+                      </a:r>
+                    </a:p>
+                  </a:txBody>
+                  <a:tcPr anchor="ctr"/>
+                </a:tc>
+                <a:tc>
+                  <a:txBody>
+                    <a:bodyPr/>
+                    <a:lstStyle/>
+                    <a:p>
+                      <a:pPr>
+                        <a:buNone/>
+                      </a:pPr>
+                      <a:r>
+                        <a:rPr lang="en-US" sz="1400"/>
+                        <a:t>Routers flood link-state advertisements describing their directly connected links and costs.</a:t>
+                      </a:r>
+                    </a:p>
+                  </a:txBody>
+                  <a:tcPr anchor="ctr"/>
+                </a:tc>
+                <a:extLst>
+                  <a:ext uri="{0D108BD9-81ED-4DB2-BD59-A6C34878D82A}">
+                    <a16:rowId xmlns:a16="http://schemas.microsoft.com/office/drawing/2014/main" val="3148860572"/>
+                  </a:ext>
+                </a:extLst>
+              </a:tr>
+              <a:tr h="398619">
+                <a:tc>
+                  <a:txBody>
+                    <a:bodyPr/>
+                    <a:lstStyle/>
+                    <a:p>
+                      <a:pPr>
+                        <a:buNone/>
+                      </a:pPr>
+                      <a:r>
+                        <a:rPr lang="en-US" sz="1400" b="1"/>
+                        <a:t>Knowledge Scope</a:t>
+                      </a:r>
+                      <a:endParaRPr lang="en-US" sz="1400"/>
+                    </a:p>
+                  </a:txBody>
+                  <a:tcPr anchor="ctr"/>
+                </a:tc>
+                <a:tc>
+                  <a:txBody>
+                    <a:bodyPr/>
+                    <a:lstStyle/>
+                    <a:p>
+                      <a:pPr>
+                        <a:buNone/>
+                      </a:pPr>
+                      <a:r>
+                        <a:rPr lang="en-US" sz="1400" dirty="0"/>
+                        <a:t>Each router knows only the best next-hop and cost to each destination.</a:t>
+                      </a:r>
+                    </a:p>
+                  </a:txBody>
+                  <a:tcPr anchor="ctr"/>
+                </a:tc>
+                <a:tc>
+                  <a:txBody>
+                    <a:bodyPr/>
+                    <a:lstStyle/>
+                    <a:p>
+                      <a:pPr>
+                        <a:buNone/>
+                      </a:pPr>
+                      <a:r>
+                        <a:rPr lang="en-US" sz="1400"/>
+                        <a:t>Each router builds a full topology database of the entire network.</a:t>
+                      </a:r>
+                    </a:p>
+                  </a:txBody>
+                  <a:tcPr anchor="ctr"/>
+                </a:tc>
+                <a:extLst>
+                  <a:ext uri="{0D108BD9-81ED-4DB2-BD59-A6C34878D82A}">
+                    <a16:rowId xmlns:a16="http://schemas.microsoft.com/office/drawing/2014/main" val="3082385933"/>
+                  </a:ext>
+                </a:extLst>
+              </a:tr>
+              <a:tr h="398619">
+                <a:tc>
+                  <a:txBody>
+                    <a:bodyPr/>
+                    <a:lstStyle/>
+                    <a:p>
+                      <a:pPr>
+                        <a:buNone/>
+                      </a:pPr>
+                      <a:r>
+                        <a:rPr lang="en-US" sz="1400" b="1"/>
+                        <a:t>Computation Model</a:t>
+                      </a:r>
+                      <a:endParaRPr lang="en-US" sz="1400"/>
+                    </a:p>
+                  </a:txBody>
+                  <a:tcPr anchor="ctr"/>
+                </a:tc>
+                <a:tc>
+                  <a:txBody>
+                    <a:bodyPr/>
+                    <a:lstStyle/>
+                    <a:p>
+                      <a:pPr>
+                        <a:buNone/>
+                      </a:pPr>
+                      <a:r>
+                        <a:rPr lang="en-US" sz="1400" dirty="0"/>
+                        <a:t>Distributed computation (iterative Bellman-Ford across neighbors).</a:t>
+                      </a:r>
+                    </a:p>
+                  </a:txBody>
+                  <a:tcPr anchor="ctr"/>
+                </a:tc>
+                <a:tc>
+                  <a:txBody>
+                    <a:bodyPr/>
+                    <a:lstStyle/>
+                    <a:p>
+                      <a:pPr>
+                        <a:buNone/>
+                      </a:pPr>
+                      <a:r>
+                        <a:rPr lang="en-US" sz="1400"/>
+                        <a:t>Local computation (runs shortest-path algorithm on global topology).</a:t>
+                      </a:r>
+                    </a:p>
+                  </a:txBody>
+                  <a:tcPr anchor="ctr"/>
+                </a:tc>
+                <a:extLst>
+                  <a:ext uri="{0D108BD9-81ED-4DB2-BD59-A6C34878D82A}">
+                    <a16:rowId xmlns:a16="http://schemas.microsoft.com/office/drawing/2014/main" val="2033302490"/>
+                  </a:ext>
+                </a:extLst>
+              </a:tr>
+              <a:tr h="398619">
+                <a:tc>
+                  <a:txBody>
+                    <a:bodyPr/>
+                    <a:lstStyle/>
+                    <a:p>
+                      <a:pPr>
+                        <a:buNone/>
+                      </a:pPr>
+                      <a:r>
+                        <a:rPr lang="en-US" sz="1400" b="1"/>
+                        <a:t>Algorithm Used</a:t>
+                      </a:r>
+                      <a:endParaRPr lang="en-US" sz="1400"/>
+                    </a:p>
+                  </a:txBody>
+                  <a:tcPr anchor="ctr"/>
+                </a:tc>
+                <a:tc>
+                  <a:txBody>
+                    <a:bodyPr/>
+                    <a:lstStyle/>
+                    <a:p>
+                      <a:pPr>
+                        <a:buNone/>
+                      </a:pPr>
+                      <a:r>
+                        <a:rPr lang="en-US" sz="1400" dirty="0"/>
+                        <a:t>Distributed Bellman-Ford (e.g., RIP).</a:t>
+                      </a:r>
+                    </a:p>
+                  </a:txBody>
+                  <a:tcPr anchor="ctr"/>
+                </a:tc>
+                <a:tc>
+                  <a:txBody>
+                    <a:bodyPr/>
+                    <a:lstStyle/>
+                    <a:p>
+                      <a:pPr>
+                        <a:buNone/>
+                      </a:pPr>
+                      <a:r>
+                        <a:rPr lang="en-US" sz="1400"/>
+                        <a:t>Dijkstra’s single-source shortest path (e.g., OSPF, IS-IS).</a:t>
+                      </a:r>
+                    </a:p>
+                  </a:txBody>
+                  <a:tcPr anchor="ctr"/>
+                </a:tc>
+                <a:extLst>
+                  <a:ext uri="{0D108BD9-81ED-4DB2-BD59-A6C34878D82A}">
+                    <a16:rowId xmlns:a16="http://schemas.microsoft.com/office/drawing/2014/main" val="3412629455"/>
+                  </a:ext>
+                </a:extLst>
+              </a:tr>
+              <a:tr h="398619">
+                <a:tc>
+                  <a:txBody>
+                    <a:bodyPr/>
+                    <a:lstStyle/>
+                    <a:p>
+                      <a:pPr>
+                        <a:buNone/>
+                      </a:pPr>
+                      <a:r>
+                        <a:rPr lang="en-US" sz="1400" b="1"/>
+                        <a:t>Updates</a:t>
+                      </a:r>
+                      <a:endParaRPr lang="en-US" sz="1400"/>
+                    </a:p>
+                  </a:txBody>
+                  <a:tcPr anchor="ctr"/>
+                </a:tc>
+                <a:tc>
+                  <a:txBody>
+                    <a:bodyPr/>
+                    <a:lstStyle/>
+                    <a:p>
+                      <a:pPr>
+                        <a:buNone/>
+                      </a:pPr>
+                      <a:r>
+                        <a:rPr lang="en-US" sz="1400"/>
+                        <a:t>Periodic updates plus triggered updates when changes occur.</a:t>
+                      </a:r>
+                    </a:p>
+                  </a:txBody>
+                  <a:tcPr anchor="ctr"/>
+                </a:tc>
+                <a:tc>
+                  <a:txBody>
+                    <a:bodyPr/>
+                    <a:lstStyle/>
+                    <a:p>
+                      <a:pPr>
+                        <a:buNone/>
+                      </a:pPr>
+                      <a:r>
+                        <a:rPr lang="en-US" sz="1400" dirty="0"/>
+                        <a:t>Triggered flooding of LSAs plus periodic refresh for reliability.</a:t>
+                      </a:r>
+                    </a:p>
+                  </a:txBody>
+                  <a:tcPr anchor="ctr"/>
+                </a:tc>
+                <a:extLst>
+                  <a:ext uri="{0D108BD9-81ED-4DB2-BD59-A6C34878D82A}">
+                    <a16:rowId xmlns:a16="http://schemas.microsoft.com/office/drawing/2014/main" val="1038138894"/>
+                  </a:ext>
+                </a:extLst>
+              </a:tr>
+              <a:tr h="398619">
+                <a:tc>
+                  <a:txBody>
+                    <a:bodyPr/>
+                    <a:lstStyle/>
+                    <a:p>
+                      <a:pPr>
+                        <a:buNone/>
+                      </a:pPr>
+                      <a:r>
+                        <a:rPr lang="en-US" sz="1400" b="1"/>
+                        <a:t>Convergence Behavior</a:t>
+                      </a:r>
+                      <a:endParaRPr lang="en-US" sz="1400"/>
+                    </a:p>
+                  </a:txBody>
+                  <a:tcPr anchor="ctr"/>
+                </a:tc>
+                <a:tc>
+                  <a:txBody>
+                    <a:bodyPr/>
+                    <a:lstStyle/>
+                    <a:p>
+                      <a:pPr>
+                        <a:buNone/>
+                      </a:pPr>
+                      <a:r>
+                        <a:rPr lang="en-US" sz="1400"/>
+                        <a:t>Typically slower; may suffer from count-to-infinity problems.</a:t>
+                      </a:r>
+                    </a:p>
+                  </a:txBody>
+                  <a:tcPr anchor="ctr"/>
+                </a:tc>
+                <a:tc>
+                  <a:txBody>
+                    <a:bodyPr/>
+                    <a:lstStyle/>
+                    <a:p>
+                      <a:pPr>
+                        <a:buNone/>
+                      </a:pPr>
+                      <a:r>
+                        <a:rPr lang="en-US" sz="1400"/>
+                        <a:t>Typically faster; transient loops possible during convergence.</a:t>
+                      </a:r>
+                    </a:p>
+                  </a:txBody>
+                  <a:tcPr anchor="ctr"/>
+                </a:tc>
+                <a:extLst>
+                  <a:ext uri="{0D108BD9-81ED-4DB2-BD59-A6C34878D82A}">
+                    <a16:rowId xmlns:a16="http://schemas.microsoft.com/office/drawing/2014/main" val="3143180665"/>
+                  </a:ext>
+                </a:extLst>
+              </a:tr>
+              <a:tr h="398619">
+                <a:tc>
+                  <a:txBody>
+                    <a:bodyPr/>
+                    <a:lstStyle/>
+                    <a:p>
+                      <a:pPr>
+                        <a:buNone/>
+                      </a:pPr>
+                      <a:r>
+                        <a:rPr lang="en-US" sz="1400" b="1"/>
+                        <a:t>Overhead</a:t>
+                      </a:r>
+                      <a:endParaRPr lang="en-US" sz="1400"/>
+                    </a:p>
+                  </a:txBody>
+                  <a:tcPr anchor="ctr"/>
+                </a:tc>
+                <a:tc>
+                  <a:txBody>
+                    <a:bodyPr/>
+                    <a:lstStyle/>
+                    <a:p>
+                      <a:pPr>
+                        <a:buNone/>
+                      </a:pPr>
+                      <a:r>
+                        <a:rPr lang="en-US" sz="1400"/>
+                        <a:t>Lower CPU and memory usage; smaller control messages.</a:t>
+                      </a:r>
+                    </a:p>
+                  </a:txBody>
+                  <a:tcPr anchor="ctr"/>
+                </a:tc>
+                <a:tc>
+                  <a:txBody>
+                    <a:bodyPr/>
+                    <a:lstStyle/>
+                    <a:p>
+                      <a:pPr>
+                        <a:buNone/>
+                      </a:pPr>
+                      <a:r>
+                        <a:rPr lang="en-US" sz="1400"/>
+                        <a:t>Higher CPU and memory usage; flooding generates more control traffic.</a:t>
+                      </a:r>
+                    </a:p>
+                  </a:txBody>
+                  <a:tcPr anchor="ctr"/>
+                </a:tc>
+                <a:extLst>
+                  <a:ext uri="{0D108BD9-81ED-4DB2-BD59-A6C34878D82A}">
+                    <a16:rowId xmlns:a16="http://schemas.microsoft.com/office/drawing/2014/main" val="3837083101"/>
+                  </a:ext>
+                </a:extLst>
+              </a:tr>
+              <a:tr h="431727">
+                <a:tc>
+                  <a:txBody>
+                    <a:bodyPr/>
+                    <a:lstStyle/>
+                    <a:p>
+                      <a:pPr>
+                        <a:buNone/>
+                      </a:pPr>
+                      <a:r>
+                        <a:rPr lang="en-US" sz="1400" b="1"/>
+                        <a:t>Path Control</a:t>
+                      </a:r>
+                      <a:endParaRPr lang="en-US" sz="1400"/>
+                    </a:p>
+                  </a:txBody>
+                  <a:tcPr anchor="ctr"/>
+                </a:tc>
+                <a:tc>
+                  <a:txBody>
+                    <a:bodyPr/>
+                    <a:lstStyle/>
+                    <a:p>
+                      <a:pPr>
+                        <a:buNone/>
+                      </a:pPr>
+                      <a:r>
+                        <a:rPr lang="en-US" sz="1400"/>
+                        <a:t>Limited visibility into full path.</a:t>
+                      </a:r>
+                    </a:p>
+                  </a:txBody>
+                  <a:tcPr anchor="ctr"/>
+                </a:tc>
+                <a:tc>
+                  <a:txBody>
+                    <a:bodyPr/>
+                    <a:lstStyle/>
+                    <a:p>
+                      <a:pPr>
+                        <a:buNone/>
+                      </a:pPr>
+                      <a:r>
+                        <a:rPr lang="en-US" sz="1400" dirty="0"/>
+                        <a:t>Full visibility allows precise path selection and policy control.</a:t>
+                      </a:r>
+                    </a:p>
+                  </a:txBody>
+                  <a:tcPr anchor="ctr"/>
+                </a:tc>
+                <a:extLst>
+                  <a:ext uri="{0D108BD9-81ED-4DB2-BD59-A6C34878D82A}">
+                    <a16:rowId xmlns:a16="http://schemas.microsoft.com/office/drawing/2014/main" val="2988458033"/>
+                  </a:ext>
+                </a:extLst>
+              </a:tr>
+            </a:tbl>
+          </a:graphicData>
+        </a:graphic>
+      </p:graphicFrame>
+    </p:spTree>
+    <p:extLst>
+      <p:ext uri="{BB962C8B-B14F-4D97-AF65-F5344CB8AC3E}">
+        <p14:creationId xmlns:p14="http://schemas.microsoft.com/office/powerpoint/2010/main" val="2687007587"/>
+      </p:ext>
+    </p:extLst>
   </p:cSld>
   <p:clrMapOvr>
     <a:masterClrMapping/>
@@ -44307,7 +45636,7 @@
         </p:nvGraphicFramePr>
         <p:xfrm>
           <a:off x="1340413" y="3473500"/>
-          <a:ext cx="3000000" cy="3000000"/>
+          <a:ext cx="6463150" cy="1432400"/>
         </p:xfrm>
         <a:graphic>
           <a:graphicData uri="http://schemas.openxmlformats.org/drawingml/2006/table">
@@ -44805,6 +46134,44 @@
           </a:graphicData>
         </a:graphic>
       </p:graphicFrame>
+      <p:sp>
+        <p:nvSpPr>
+          <p:cNvPr id="2" name="Slide Number Placeholder 1">
+            <a:extLst>
+              <a:ext uri="{FF2B5EF4-FFF2-40B4-BE49-F238E27FC236}">
+                <a16:creationId xmlns:a16="http://schemas.microsoft.com/office/drawing/2014/main" id="{ACCA8999-0EF7-1BA1-0B0F-A7917CC5000C}"/>
+              </a:ext>
+            </a:extLst>
+          </p:cNvPr>
+          <p:cNvSpPr>
+            <a:spLocks noGrp="1"/>
+          </p:cNvSpPr>
+          <p:nvPr>
+            <p:ph type="sldNum" idx="12"/>
+          </p:nvPr>
+        </p:nvSpPr>
+        <p:spPr/>
+        <p:txBody>
+          <a:bodyPr/>
+          <a:lstStyle/>
+          <a:p>
+            <a:pPr marL="0" lvl="0" indent="0" algn="r" rtl="0">
+              <a:spcBef>
+                <a:spcPts val="0"/>
+              </a:spcBef>
+              <a:spcAft>
+                <a:spcPts val="0"/>
+              </a:spcAft>
+              <a:buNone/>
+            </a:pPr>
+            <a:fld id="{00000000-1234-1234-1234-123412341234}" type="slidenum">
+              <a:rPr lang="en" smtClean="0"/>
+              <a:t>3</a:t>
+            </a:fld>
+            <a:endParaRPr lang="en"/>
+          </a:p>
+        </p:txBody>
+      </p:sp>
     </p:spTree>
   </p:cSld>
   <p:clrMapOvr>
@@ -44907,14 +46274,14 @@
               <a:buNone/>
             </a:pPr>
             <a:r>
-              <a:rPr lang="en" b="1"/>
+              <a:rPr lang="en" b="1" dirty="0"/>
               <a:t>Link-state protocols</a:t>
             </a:r>
             <a:r>
-              <a:rPr lang="en"/>
+              <a:rPr lang="en" dirty="0"/>
               <a:t>:</a:t>
             </a:r>
-            <a:endParaRPr/>
+            <a:endParaRPr dirty="0"/>
           </a:p>
           <a:p>
             <a:pPr marL="457200" lvl="0" indent="-342900" algn="l" rtl="0">
@@ -44928,10 +46295,10 @@
               <a:buAutoNum type="arabicPeriod"/>
             </a:pPr>
             <a:r>
-              <a:rPr lang="en"/>
+              <a:rPr lang="en" dirty="0"/>
               <a:t>Every router learns the full network graph.</a:t>
             </a:r>
-            <a:endParaRPr/>
+            <a:endParaRPr dirty="0"/>
           </a:p>
           <a:p>
             <a:pPr marL="457200" lvl="0" indent="-342900" algn="l" rtl="0">
@@ -44945,10 +46312,9 @@
               <a:buAutoNum type="arabicPeriod"/>
             </a:pPr>
             <a:r>
-              <a:rPr lang="en"/>
+              <a:rPr lang="en" dirty="0"/>
               <a:t>Then, each router runs a shortest-path algorithm on the graph to populate the forwarding table.</a:t>
             </a:r>
-            <a:endParaRPr/>
           </a:p>
         </p:txBody>
       </p:sp>
@@ -44987,10 +46353,10 @@
               <a:buNone/>
             </a:pPr>
             <a:r>
-              <a:rPr lang="en"/>
+              <a:rPr lang="en" dirty="0"/>
               <a:t>Distance-vector:</a:t>
             </a:r>
-            <a:endParaRPr/>
+            <a:endParaRPr dirty="0"/>
           </a:p>
           <a:p>
             <a:pPr marL="457200" lvl="0" indent="-342900" algn="l" rtl="0">
@@ -45004,14 +46370,18 @@
               <a:buChar char="●"/>
             </a:pPr>
             <a:r>
-              <a:rPr lang="en" b="1"/>
-              <a:t>Local data</a:t>
-            </a:r>
-            <a:r>
-              <a:rPr lang="en"/>
+              <a:rPr lang="en" b="1" dirty="0"/>
+              <a:t>Local </a:t>
+            </a:r>
+            <a:r>
+              <a:rPr lang="en-US" b="1" dirty="0"/>
+              <a:t>knowledge</a:t>
+            </a:r>
+            <a:r>
+              <a:rPr lang="en" dirty="0"/>
               <a:t>: Each node only knows about part of the network.</a:t>
             </a:r>
-            <a:endParaRPr b="1"/>
+            <a:endParaRPr b="1" dirty="0"/>
           </a:p>
           <a:p>
             <a:pPr marL="457200" lvl="0" indent="-342900" algn="l" rtl="0">
@@ -45025,14 +46395,14 @@
               <a:buChar char="●"/>
             </a:pPr>
             <a:r>
-              <a:rPr lang="en" b="1"/>
+              <a:rPr lang="en" b="1" dirty="0"/>
               <a:t>Global (distributed) computation</a:t>
             </a:r>
             <a:r>
-              <a:rPr lang="en"/>
+              <a:rPr lang="en" dirty="0"/>
               <a:t>: Each node computes part of the solution, working with other nodes.</a:t>
             </a:r>
-            <a:endParaRPr/>
+            <a:endParaRPr dirty="0"/>
           </a:p>
         </p:txBody>
       </p:sp>
@@ -45071,15 +46441,39 @@
               <a:buNone/>
             </a:pPr>
             <a:r>
-              <a:rPr lang="en"/>
+              <a:rPr lang="en" dirty="0"/>
               <a:t>Link-state:</a:t>
             </a:r>
-            <a:endParaRPr/>
+            <a:endParaRPr dirty="0"/>
+          </a:p>
+          <a:p>
+            <a:pPr lvl="0"/>
+            <a:r>
+              <a:rPr lang="en" b="1" dirty="0"/>
+              <a:t>Global </a:t>
+            </a:r>
+            <a:r>
+              <a:rPr lang="en-US" altLang="zh-CN" b="1" dirty="0"/>
+              <a:t>knowledge</a:t>
+            </a:r>
+            <a:r>
+              <a:rPr lang="en" dirty="0"/>
+              <a:t>: E</a:t>
+            </a:r>
+            <a:r>
+              <a:rPr lang="en-US" dirty="0"/>
+              <a:t>very node has a copy of the same </a:t>
+            </a:r>
+            <a:r>
+              <a:rPr lang="en" dirty="0"/>
+              <a:t>full network graph.</a:t>
+            </a:r>
+            <a:endParaRPr dirty="0"/>
           </a:p>
           <a:p>
             <a:pPr marL="457200" lvl="0" indent="-342900" algn="l" rtl="0">
               <a:spcBef>
-                <a:spcPts val="600"/>
+                <a:spcPts val="0"/>
               </a:spcBef>
               <a:spcAft>
                 <a:spcPts val="0"/>
@@ -45088,35 +46482,14 @@
               <a:buChar char="●"/>
             </a:pPr>
             <a:r>
-              <a:rPr lang="en" b="1"/>
-              <a:t>Global data</a:t>
-            </a:r>
-            <a:r>
-              <a:rPr lang="en"/>
-              <a:t>: Each node knows about the full network graph.</a:t>
-            </a:r>
-            <a:endParaRPr/>
-          </a:p>
-          <a:p>
-            <a:pPr marL="457200" lvl="0" indent="-342900" algn="l" rtl="0">
-              <a:spcBef>
-                <a:spcPts val="0"/>
-              </a:spcBef>
-              <a:spcAft>
-                <a:spcPts val="0"/>
-              </a:spcAft>
-              <a:buSzPts val="1800"/>
-              <a:buChar char="●"/>
-            </a:pPr>
-            <a:r>
-              <a:rPr lang="en" b="1"/>
+              <a:rPr lang="en" b="1" dirty="0"/>
               <a:t>Local computation</a:t>
             </a:r>
             <a:r>
-              <a:rPr lang="en"/>
+              <a:rPr lang="en" dirty="0"/>
               <a:t>: Each node computes the full solution by itself.</a:t>
             </a:r>
-            <a:endParaRPr/>
+            <a:endParaRPr dirty="0"/>
           </a:p>
         </p:txBody>
       </p:sp>
@@ -45288,6 +46661,44 @@
           </a:p>
         </p:txBody>
       </p:sp>
+      <p:sp>
+        <p:nvSpPr>
+          <p:cNvPr id="2" name="Slide Number Placeholder 1">
+            <a:extLst>
+              <a:ext uri="{FF2B5EF4-FFF2-40B4-BE49-F238E27FC236}">
+                <a16:creationId xmlns:a16="http://schemas.microsoft.com/office/drawing/2014/main" id="{9FC75741-9D22-DCCA-26F9-EAF912B96489}"/>
+              </a:ext>
+            </a:extLst>
+          </p:cNvPr>
+          <p:cNvSpPr>
+            <a:spLocks noGrp="1"/>
+          </p:cNvSpPr>
+          <p:nvPr>
+            <p:ph type="sldNum" idx="12"/>
+          </p:nvPr>
+        </p:nvSpPr>
+        <p:spPr/>
+        <p:txBody>
+          <a:bodyPr/>
+          <a:lstStyle/>
+          <a:p>
+            <a:pPr marL="0" lvl="0" indent="0" algn="r" rtl="0">
+              <a:spcBef>
+                <a:spcPts val="0"/>
+              </a:spcBef>
+              <a:spcAft>
+                <a:spcPts val="0"/>
+              </a:spcAft>
+              <a:buNone/>
+            </a:pPr>
+            <a:fld id="{00000000-1234-1234-1234-123412341234}" type="slidenum">
+              <a:rPr lang="en" smtClean="0"/>
+              <a:t>4</a:t>
+            </a:fld>
+            <a:endParaRPr lang="en"/>
+          </a:p>
+        </p:txBody>
+      </p:sp>
     </p:spTree>
   </p:cSld>
   <p:clrMapOvr>
@@ -45390,10 +46801,10 @@
               <a:buNone/>
             </a:pPr>
             <a:r>
-              <a:rPr lang="en"/>
+              <a:rPr lang="en" dirty="0"/>
               <a:t>Suppose R3 has learned the full network graph.</a:t>
             </a:r>
-            <a:endParaRPr/>
+            <a:endParaRPr dirty="0"/>
           </a:p>
           <a:p>
             <a:pPr marL="457200" lvl="0" indent="-342900" algn="l" rtl="0">
@@ -45407,10 +46818,10 @@
               <a:buChar char="●"/>
             </a:pPr>
             <a:r>
-              <a:rPr lang="en"/>
+              <a:rPr lang="en" dirty="0"/>
               <a:t>We know all the links, their status (up or down?), and their costs.</a:t>
             </a:r>
-            <a:endParaRPr/>
+            <a:endParaRPr dirty="0"/>
           </a:p>
           <a:p>
             <a:pPr marL="457200" lvl="0" indent="-342900" algn="l" rtl="0">
@@ -45424,10 +46835,29 @@
               <a:buChar char="●"/>
             </a:pPr>
             <a:r>
-              <a:rPr lang="en"/>
+              <a:rPr lang="en" dirty="0"/>
               <a:t>We know about all the destinations.</a:t>
             </a:r>
-            <a:endParaRPr/>
+          </a:p>
+          <a:p>
+            <a:pPr lvl="0">
+              <a:spcBef>
+                <a:spcPts val="0"/>
+              </a:spcBef>
+            </a:pPr>
+            <a:r>
+              <a:rPr lang="en-US" altLang="zh-CN" dirty="0"/>
+              <a:t>Once every router has the full </a:t>
+            </a:r>
+            <a:r>
+              <a:rPr lang="en" altLang="zh-CN" dirty="0"/>
+              <a:t>network graph</a:t>
+            </a:r>
+            <a:r>
+              <a:rPr lang="en-US" altLang="zh-CN" dirty="0"/>
+              <a:t>, the routing problem becomes a pure graph problem.</a:t>
+            </a:r>
+            <a:endParaRPr dirty="0"/>
           </a:p>
           <a:p>
             <a:pPr marL="0" lvl="0" indent="0" algn="l" rtl="0">
@@ -45440,10 +46870,10 @@
               <a:buNone/>
             </a:pPr>
             <a:r>
-              <a:rPr lang="en"/>
+              <a:rPr lang="en" dirty="0"/>
               <a:t>R3 can run a graph algorithm to compute paths.</a:t>
             </a:r>
-            <a:endParaRPr/>
+            <a:endParaRPr dirty="0"/>
           </a:p>
           <a:p>
             <a:pPr marL="457200" lvl="0" indent="-342900" algn="l" rtl="0">
@@ -45457,10 +46887,10 @@
               <a:buChar char="●"/>
             </a:pPr>
             <a:r>
-              <a:rPr lang="en"/>
+              <a:rPr lang="en" dirty="0"/>
               <a:t>We can populate the forwarding table with the next-hop (in the computed path).</a:t>
             </a:r>
-            <a:endParaRPr/>
+            <a:endParaRPr dirty="0"/>
           </a:p>
         </p:txBody>
       </p:sp>
@@ -45472,7 +46902,7 @@
         </p:nvSpPr>
         <p:spPr>
           <a:xfrm>
-            <a:off x="3802938" y="3531775"/>
+            <a:off x="3754448" y="3795011"/>
             <a:ext cx="285000" cy="285000"/>
           </a:xfrm>
           <a:prstGeom prst="rect">
@@ -45532,7 +46962,7 @@
         </p:nvSpPr>
         <p:spPr>
           <a:xfrm>
-            <a:off x="4564938" y="3150775"/>
+            <a:off x="4516448" y="3414011"/>
             <a:ext cx="285000" cy="285000"/>
           </a:xfrm>
           <a:prstGeom prst="rect">
@@ -45592,7 +47022,7 @@
         </p:nvSpPr>
         <p:spPr>
           <a:xfrm>
-            <a:off x="5326938" y="2769775"/>
+            <a:off x="5278448" y="3033011"/>
             <a:ext cx="285000" cy="285000"/>
           </a:xfrm>
           <a:prstGeom prst="rect">
@@ -45652,7 +47082,7 @@
         </p:nvSpPr>
         <p:spPr>
           <a:xfrm>
-            <a:off x="5326938" y="4293775"/>
+            <a:off x="5278448" y="4557011"/>
             <a:ext cx="285000" cy="285000"/>
           </a:xfrm>
           <a:prstGeom prst="rect">
@@ -45712,7 +47142,7 @@
         </p:nvSpPr>
         <p:spPr>
           <a:xfrm>
-            <a:off x="6241338" y="3531775"/>
+            <a:off x="6192848" y="3795011"/>
             <a:ext cx="285000" cy="285000"/>
           </a:xfrm>
           <a:prstGeom prst="rect">
@@ -45774,7 +47204,7 @@
         </p:nvCxnSpPr>
         <p:spPr>
           <a:xfrm rot="10800000" flipH="1">
-            <a:off x="4853238" y="2912275"/>
+            <a:off x="4804748" y="3175511"/>
             <a:ext cx="473700" cy="292500"/>
           </a:xfrm>
           <a:prstGeom prst="straightConnector1">
@@ -45803,7 +47233,7 @@
         </p:nvCxnSpPr>
         <p:spPr>
           <a:xfrm>
-            <a:off x="4087938" y="3674275"/>
+            <a:off x="4039448" y="3937511"/>
             <a:ext cx="1239000" cy="762000"/>
           </a:xfrm>
           <a:prstGeom prst="straightConnector1">
@@ -45832,7 +47262,7 @@
         </p:nvCxnSpPr>
         <p:spPr>
           <a:xfrm rot="10800000">
-            <a:off x="5469438" y="3054775"/>
+            <a:off x="5420948" y="3318011"/>
             <a:ext cx="0" cy="1239000"/>
           </a:xfrm>
           <a:prstGeom prst="straightConnector1">
@@ -45861,7 +47291,7 @@
         </p:nvCxnSpPr>
         <p:spPr>
           <a:xfrm rot="10800000">
-            <a:off x="5611938" y="2912275"/>
+            <a:off x="5563448" y="3175511"/>
             <a:ext cx="629400" cy="762000"/>
           </a:xfrm>
           <a:prstGeom prst="straightConnector1">
@@ -45890,7 +47320,7 @@
         </p:nvCxnSpPr>
         <p:spPr>
           <a:xfrm rot="10800000" flipH="1">
-            <a:off x="5611938" y="3674275"/>
+            <a:off x="5563448" y="3937511"/>
             <a:ext cx="629400" cy="762000"/>
           </a:xfrm>
           <a:prstGeom prst="straightConnector1">
@@ -45918,7 +47348,7 @@
         </p:nvCxnSpPr>
         <p:spPr>
           <a:xfrm rot="10800000" flipH="1">
-            <a:off x="4087938" y="3380275"/>
+            <a:off x="4039448" y="3643511"/>
             <a:ext cx="478800" cy="294000"/>
           </a:xfrm>
           <a:prstGeom prst="straightConnector1">
@@ -45947,7 +47377,7 @@
         </p:nvCxnSpPr>
         <p:spPr>
           <a:xfrm>
-            <a:off x="6526338" y="3674275"/>
+            <a:off x="6477848" y="3937511"/>
             <a:ext cx="477000" cy="0"/>
           </a:xfrm>
           <a:prstGeom prst="straightConnector1">
@@ -45973,7 +47403,7 @@
         </p:nvSpPr>
         <p:spPr>
           <a:xfrm>
-            <a:off x="6652307" y="3464685"/>
+            <a:off x="6603817" y="3727921"/>
             <a:ext cx="138300" cy="215400"/>
           </a:xfrm>
           <a:prstGeom prst="rect">
@@ -46030,7 +47460,7 @@
         </p:nvSpPr>
         <p:spPr>
           <a:xfrm>
-            <a:off x="4258188" y="3283935"/>
+            <a:off x="4209698" y="3547171"/>
             <a:ext cx="138300" cy="215400"/>
           </a:xfrm>
           <a:prstGeom prst="rect">
@@ -46087,7 +47517,7 @@
         </p:nvSpPr>
         <p:spPr>
           <a:xfrm>
-            <a:off x="4950813" y="2839385"/>
+            <a:off x="4902323" y="3102621"/>
             <a:ext cx="138300" cy="215400"/>
           </a:xfrm>
           <a:prstGeom prst="rect">
@@ -46144,7 +47574,7 @@
         </p:nvSpPr>
         <p:spPr>
           <a:xfrm>
-            <a:off x="4587088" y="4078385"/>
+            <a:off x="4538598" y="4341621"/>
             <a:ext cx="138300" cy="215400"/>
           </a:xfrm>
           <a:prstGeom prst="rect">
@@ -46197,7 +47627,7 @@
         </p:nvSpPr>
         <p:spPr>
           <a:xfrm>
-            <a:off x="5524895" y="3531785"/>
+            <a:off x="5476405" y="3795021"/>
             <a:ext cx="138300" cy="215400"/>
           </a:xfrm>
           <a:prstGeom prst="rect">
@@ -46254,7 +47684,7 @@
         </p:nvSpPr>
         <p:spPr>
           <a:xfrm>
-            <a:off x="5825833" y="3827972"/>
+            <a:off x="5777343" y="4091208"/>
             <a:ext cx="138300" cy="215400"/>
           </a:xfrm>
           <a:prstGeom prst="rect">
@@ -46311,7 +47741,7 @@
         </p:nvSpPr>
         <p:spPr>
           <a:xfrm>
-            <a:off x="5938400" y="3054775"/>
+            <a:off x="5889910" y="3318011"/>
             <a:ext cx="239400" cy="215400"/>
           </a:xfrm>
           <a:prstGeom prst="rect">
@@ -46364,7 +47794,7 @@
         </p:nvSpPr>
         <p:spPr>
           <a:xfrm>
-            <a:off x="7003300" y="3531763"/>
+            <a:off x="6954810" y="3794999"/>
             <a:ext cx="285000" cy="285000"/>
           </a:xfrm>
           <a:prstGeom prst="ellipse">
@@ -46424,7 +47854,7 @@
         </p:nvSpPr>
         <p:spPr>
           <a:xfrm>
-            <a:off x="6241350" y="4293763"/>
+            <a:off x="6192860" y="4556999"/>
             <a:ext cx="285000" cy="285000"/>
           </a:xfrm>
           <a:prstGeom prst="ellipse">
@@ -46487,7 +47917,7 @@
         </p:nvCxnSpPr>
         <p:spPr>
           <a:xfrm>
-            <a:off x="5611938" y="4436275"/>
+            <a:off x="5563448" y="4699511"/>
             <a:ext cx="629400" cy="0"/>
           </a:xfrm>
           <a:prstGeom prst="straightConnector1">
@@ -46513,7 +47943,7 @@
         </p:nvSpPr>
         <p:spPr>
           <a:xfrm>
-            <a:off x="5903107" y="4429235"/>
+            <a:off x="5854617" y="4692471"/>
             <a:ext cx="138300" cy="215400"/>
           </a:xfrm>
           <a:prstGeom prst="rect">
@@ -46559,11 +47989,17 @@
         <p:nvGraphicFramePr>
           <p:cNvPr id="229" name="Google Shape;229;p28"/>
           <p:cNvGraphicFramePr/>
-          <p:nvPr/>
+          <p:nvPr>
+            <p:extLst>
+              <p:ext uri="{D42A27DB-BD31-4B8C-83A1-F6EECF244321}">
+                <p14:modId xmlns:p14="http://schemas.microsoft.com/office/powerpoint/2010/main" val="2140458732"/>
+              </p:ext>
+            </p:extLst>
+          </p:nvPr>
         </p:nvGraphicFramePr>
         <p:xfrm>
-          <a:off x="1700382" y="3170150"/>
-          <a:ext cx="3000000" cy="3000000"/>
+          <a:off x="1651892" y="3433386"/>
+          <a:ext cx="1888700" cy="938680"/>
         </p:xfrm>
         <a:graphic>
           <a:graphicData uri="http://schemas.openxmlformats.org/drawingml/2006/table">
@@ -46965,7 +48401,7 @@
         </p:nvCxnSpPr>
         <p:spPr>
           <a:xfrm flipH="1">
-            <a:off x="3927225" y="1529475"/>
+            <a:off x="3700038" y="2216576"/>
             <a:ext cx="564000" cy="117300"/>
           </a:xfrm>
           <a:prstGeom prst="straightConnector1">
@@ -46991,7 +48427,7 @@
         </p:nvSpPr>
         <p:spPr>
           <a:xfrm>
-            <a:off x="4491225" y="1429575"/>
+            <a:off x="4264038" y="2116676"/>
             <a:ext cx="2125800" cy="215400"/>
           </a:xfrm>
           <a:prstGeom prst="rect">
@@ -47018,7 +48454,7 @@
               <a:buNone/>
             </a:pPr>
             <a:r>
-              <a:rPr lang="en">
+              <a:rPr lang="en" dirty="0">
                 <a:solidFill>
                   <a:schemeClr val="accent2"/>
                 </a:solidFill>
@@ -47029,7 +48465,7 @@
               </a:rPr>
               <a:t>What algorithm do we run?</a:t>
             </a:r>
-            <a:endParaRPr>
+            <a:endParaRPr dirty="0">
               <a:solidFill>
                 <a:schemeClr val="accent2"/>
               </a:solidFill>
@@ -47038,6 +48474,44 @@
               <a:cs typeface="Roboto"/>
               <a:sym typeface="Roboto"/>
             </a:endParaRPr>
+          </a:p>
+        </p:txBody>
+      </p:sp>
+      <p:sp>
+        <p:nvSpPr>
+          <p:cNvPr id="2" name="Slide Number Placeholder 1">
+            <a:extLst>
+              <a:ext uri="{FF2B5EF4-FFF2-40B4-BE49-F238E27FC236}">
+                <a16:creationId xmlns:a16="http://schemas.microsoft.com/office/drawing/2014/main" id="{1CA1DFF8-5EED-D67D-A29C-07B4EF3903B6}"/>
+              </a:ext>
+            </a:extLst>
+          </p:cNvPr>
+          <p:cNvSpPr>
+            <a:spLocks noGrp="1"/>
+          </p:cNvSpPr>
+          <p:nvPr>
+            <p:ph type="sldNum" idx="12"/>
+          </p:nvPr>
+        </p:nvSpPr>
+        <p:spPr/>
+        <p:txBody>
+          <a:bodyPr/>
+          <a:lstStyle/>
+          <a:p>
+            <a:pPr marL="0" lvl="0" indent="0" algn="r" rtl="0">
+              <a:spcBef>
+                <a:spcPts val="0"/>
+              </a:spcBef>
+              <a:spcAft>
+                <a:spcPts val="0"/>
+              </a:spcAft>
+              <a:buNone/>
+            </a:pPr>
+            <a:fld id="{00000000-1234-1234-1234-123412341234}" type="slidenum">
+              <a:rPr lang="en" smtClean="0"/>
+              <a:t>5</a:t>
+            </a:fld>
+            <a:endParaRPr lang="en"/>
           </a:p>
         </p:txBody>
       </p:sp>
@@ -47301,6 +48775,44 @@
           </a:p>
         </p:txBody>
       </p:sp>
+      <p:sp>
+        <p:nvSpPr>
+          <p:cNvPr id="2" name="Slide Number Placeholder 1">
+            <a:extLst>
+              <a:ext uri="{FF2B5EF4-FFF2-40B4-BE49-F238E27FC236}">
+                <a16:creationId xmlns:a16="http://schemas.microsoft.com/office/drawing/2014/main" id="{10552592-B0D9-6B5C-30B6-C2229BD46895}"/>
+              </a:ext>
+            </a:extLst>
+          </p:cNvPr>
+          <p:cNvSpPr>
+            <a:spLocks noGrp="1"/>
+          </p:cNvSpPr>
+          <p:nvPr>
+            <p:ph type="sldNum" idx="12"/>
+          </p:nvPr>
+        </p:nvSpPr>
+        <p:spPr/>
+        <p:txBody>
+          <a:bodyPr/>
+          <a:lstStyle/>
+          <a:p>
+            <a:pPr marL="0" lvl="0" indent="0" algn="r" rtl="0">
+              <a:spcBef>
+                <a:spcPts val="0"/>
+              </a:spcBef>
+              <a:spcAft>
+                <a:spcPts val="0"/>
+              </a:spcAft>
+              <a:buNone/>
+            </a:pPr>
+            <a:fld id="{00000000-1234-1234-1234-123412341234}" type="slidenum">
+              <a:rPr lang="en" smtClean="0"/>
+              <a:t>6</a:t>
+            </a:fld>
+            <a:endParaRPr lang="en"/>
+          </a:p>
+        </p:txBody>
+      </p:sp>
     </p:spTree>
   </p:cSld>
   <p:clrMapOvr>
@@ -47403,10 +48915,10 @@
               <a:buNone/>
             </a:pPr>
             <a:r>
-              <a:rPr lang="en"/>
+              <a:rPr lang="en" dirty="0"/>
               <a:t>What graph algorithm do we run to compute paths?</a:t>
             </a:r>
-            <a:endParaRPr/>
+            <a:endParaRPr dirty="0"/>
           </a:p>
           <a:p>
             <a:pPr marL="0" lvl="0" indent="0" algn="l" rtl="0">
@@ -47419,145 +48931,64 @@
               <a:buNone/>
             </a:pPr>
             <a:r>
-              <a:rPr lang="en"/>
-              <a:t>Any single source shortest-path algorithm will work.</a:t>
-            </a:r>
-            <a:endParaRPr/>
-          </a:p>
-          <a:p>
-            <a:pPr marL="457200" lvl="0" indent="-342900" algn="l" rtl="0">
-              <a:spcBef>
-                <a:spcPts val="600"/>
-              </a:spcBef>
-              <a:spcAft>
-                <a:spcPts val="0"/>
-              </a:spcAft>
-              <a:buSzPts val="1800"/>
-              <a:buChar char="●"/>
-            </a:pPr>
-            <a:r>
-              <a:rPr lang="en"/>
+              <a:rPr lang="en" dirty="0"/>
               <a:t>Need to find shortest paths from a single source (the router) to every host.</a:t>
             </a:r>
-            <a:endParaRPr/>
-          </a:p>
-          <a:p>
-            <a:pPr marL="0" lvl="0" indent="0" algn="l" rtl="0">
-              <a:spcBef>
-                <a:spcPts val="600"/>
-              </a:spcBef>
-              <a:spcAft>
-                <a:spcPts val="0"/>
-              </a:spcAft>
-              <a:buNone/>
-            </a:pPr>
-            <a:r>
-              <a:rPr lang="en"/>
-              <a:t>Some possible choices:</a:t>
-            </a:r>
-            <a:endParaRPr/>
-          </a:p>
-          <a:p>
-            <a:pPr marL="457200" lvl="0" indent="-342900" algn="l" rtl="0">
-              <a:spcBef>
-                <a:spcPts val="600"/>
-              </a:spcBef>
-              <a:spcAft>
-                <a:spcPts val="0"/>
-              </a:spcAft>
-              <a:buSzPts val="1800"/>
-              <a:buChar char="●"/>
-            </a:pPr>
-            <a:r>
-              <a:rPr lang="en"/>
-              <a:t>Bellman-Ford (the original serial version).</a:t>
-            </a:r>
-            <a:endParaRPr/>
-          </a:p>
-          <a:p>
-            <a:pPr marL="457200" lvl="0" indent="-342900" algn="l" rtl="0">
-              <a:spcBef>
-                <a:spcPts val="0"/>
-              </a:spcBef>
-              <a:spcAft>
-                <a:spcPts val="0"/>
-              </a:spcAft>
-              <a:buSzPts val="1800"/>
-              <a:buChar char="●"/>
-            </a:pPr>
-            <a:r>
-              <a:rPr lang="en"/>
-              <a:t>Dijkstra's algorithm.</a:t>
-            </a:r>
-            <a:endParaRPr/>
-          </a:p>
-          <a:p>
-            <a:pPr marL="457200" lvl="0" indent="-342900" algn="l" rtl="0">
-              <a:spcBef>
-                <a:spcPts val="0"/>
-              </a:spcBef>
-              <a:spcAft>
-                <a:spcPts val="0"/>
-              </a:spcAft>
-              <a:buSzPts val="1800"/>
-              <a:buChar char="●"/>
-            </a:pPr>
-            <a:r>
-              <a:rPr lang="en"/>
-              <a:t>Breadth-first search.</a:t>
-            </a:r>
-            <a:endParaRPr/>
-          </a:p>
-          <a:p>
-            <a:pPr marL="457200" lvl="0" indent="-342900" algn="l" rtl="0">
-              <a:spcBef>
-                <a:spcPts val="0"/>
-              </a:spcBef>
-              <a:spcAft>
-                <a:spcPts val="0"/>
-              </a:spcAft>
-              <a:buSzPts val="1800"/>
-              <a:buChar char="●"/>
-            </a:pPr>
-            <a:r>
-              <a:rPr lang="en"/>
-              <a:t>Dynamic shortest path.</a:t>
-            </a:r>
-            <a:endParaRPr/>
-          </a:p>
-          <a:p>
-            <a:pPr marL="457200" lvl="0" indent="-342900" algn="l" rtl="0">
-              <a:spcBef>
-                <a:spcPts val="0"/>
-              </a:spcBef>
-              <a:spcAft>
-                <a:spcPts val="0"/>
-              </a:spcAft>
-              <a:buSzPts val="1800"/>
-              <a:buChar char="●"/>
-            </a:pPr>
-            <a:r>
-              <a:rPr lang="en"/>
-              <a:t>Approximate shortest path.</a:t>
-            </a:r>
-            <a:endParaRPr/>
-          </a:p>
-          <a:p>
-            <a:pPr marL="457200" lvl="0" indent="-342900" algn="l" rtl="0">
-              <a:spcBef>
-                <a:spcPts val="0"/>
-              </a:spcBef>
-              <a:spcAft>
-                <a:spcPts val="0"/>
-              </a:spcAft>
-              <a:buSzPts val="1800"/>
-              <a:buChar char="●"/>
-            </a:pPr>
-            <a:r>
-              <a:rPr lang="en"/>
-              <a:t>Parallel single-source shortest path.</a:t>
-            </a:r>
-            <a:endParaRPr/>
+            <a:endParaRPr dirty="0"/>
+          </a:p>
+          <a:p>
+            <a:pPr lvl="0">
+              <a:spcBef>
+                <a:spcPts val="0"/>
+              </a:spcBef>
+            </a:pPr>
+            <a:r>
+              <a:rPr lang="en" dirty="0"/>
+              <a:t>Uses Dijkstra's algorithm for </a:t>
+            </a:r>
+            <a:r>
+              <a:rPr lang="en" altLang="zh-CN" dirty="0"/>
+              <a:t>single source shortest-path algorithm</a:t>
+            </a:r>
+            <a:endParaRPr dirty="0"/>
+          </a:p>
+        </p:txBody>
+      </p:sp>
+      <p:sp>
+        <p:nvSpPr>
+          <p:cNvPr id="2" name="Slide Number Placeholder 1">
+            <a:extLst>
+              <a:ext uri="{FF2B5EF4-FFF2-40B4-BE49-F238E27FC236}">
+                <a16:creationId xmlns:a16="http://schemas.microsoft.com/office/drawing/2014/main" id="{3AB2034D-57E5-62CC-7748-FF0009C25255}"/>
+              </a:ext>
+            </a:extLst>
+          </p:cNvPr>
+          <p:cNvSpPr>
+            <a:spLocks noGrp="1"/>
+          </p:cNvSpPr>
+          <p:nvPr>
+            <p:ph type="sldNum" idx="12"/>
+          </p:nvPr>
+        </p:nvSpPr>
+        <p:spPr/>
+        <p:txBody>
+          <a:bodyPr/>
+          <a:lstStyle/>
+          <a:p>
+            <a:pPr marL="0" lvl="0" indent="0" algn="r" rtl="0">
+              <a:spcBef>
+                <a:spcPts val="0"/>
+              </a:spcBef>
+              <a:spcAft>
+                <a:spcPts val="0"/>
+              </a:spcAft>
+              <a:buNone/>
+            </a:pPr>
+            <a:fld id="{00000000-1234-1234-1234-123412341234}" type="slidenum">
+              <a:rPr lang="en" smtClean="0"/>
+              <a:t>7</a:t>
+            </a:fld>
+            <a:endParaRPr lang="en"/>
           </a:p>
         </p:txBody>
       </p:sp>
@@ -49130,6 +50561,44 @@
           </a:p>
         </p:txBody>
       </p:sp>
+      <p:sp>
+        <p:nvSpPr>
+          <p:cNvPr id="2" name="Slide Number Placeholder 1">
+            <a:extLst>
+              <a:ext uri="{FF2B5EF4-FFF2-40B4-BE49-F238E27FC236}">
+                <a16:creationId xmlns:a16="http://schemas.microsoft.com/office/drawing/2014/main" id="{57D6D695-3738-FA19-52B4-C4E6C8E3E2BD}"/>
+              </a:ext>
+            </a:extLst>
+          </p:cNvPr>
+          <p:cNvSpPr>
+            <a:spLocks noGrp="1"/>
+          </p:cNvSpPr>
+          <p:nvPr>
+            <p:ph type="sldNum" idx="12"/>
+          </p:nvPr>
+        </p:nvSpPr>
+        <p:spPr/>
+        <p:txBody>
+          <a:bodyPr/>
+          <a:lstStyle/>
+          <a:p>
+            <a:pPr marL="0" lvl="0" indent="0" algn="r" rtl="0">
+              <a:spcBef>
+                <a:spcPts val="0"/>
+              </a:spcBef>
+              <a:spcAft>
+                <a:spcPts val="0"/>
+              </a:spcAft>
+              <a:buNone/>
+            </a:pPr>
+            <a:fld id="{00000000-1234-1234-1234-123412341234}" type="slidenum">
+              <a:rPr lang="en" smtClean="0"/>
+              <a:t>8</a:t>
+            </a:fld>
+            <a:endParaRPr lang="en"/>
+          </a:p>
+        </p:txBody>
+      </p:sp>
     </p:spTree>
   </p:cSld>
   <p:clrMapOvr>
@@ -49232,10 +50701,10 @@
               <a:buNone/>
             </a:pPr>
             <a:r>
-              <a:rPr lang="en"/>
+              <a:rPr lang="en" dirty="0"/>
               <a:t>Requirements for routers to produce valid, compatible decisions:</a:t>
             </a:r>
-            <a:endParaRPr/>
+            <a:endParaRPr dirty="0"/>
           </a:p>
           <a:p>
             <a:pPr marL="457200" lvl="0" indent="-342900" algn="l" rtl="0">
@@ -49249,10 +50718,10 @@
               <a:buAutoNum type="arabicPeriod"/>
             </a:pPr>
             <a:r>
-              <a:rPr lang="en"/>
+              <a:rPr lang="en" dirty="0"/>
               <a:t>Everyone agrees on the network topology.</a:t>
             </a:r>
-            <a:endParaRPr/>
+            <a:endParaRPr dirty="0"/>
           </a:p>
           <a:p>
             <a:pPr marL="457200" lvl="0" indent="-342900" algn="l" rtl="0">
@@ -49266,10 +50735,10 @@
               <a:buAutoNum type="arabicPeriod"/>
             </a:pPr>
             <a:r>
-              <a:rPr lang="en"/>
+              <a:rPr lang="en" dirty="0"/>
               <a:t>Everyone is minimizing the same cost metric.</a:t>
             </a:r>
-            <a:endParaRPr/>
+            <a:endParaRPr dirty="0"/>
           </a:p>
           <a:p>
             <a:pPr marL="457200" lvl="0" indent="-342900" algn="l" rtl="0">
@@ -49283,10 +50752,10 @@
               <a:buAutoNum type="arabicPeriod"/>
             </a:pPr>
             <a:r>
-              <a:rPr lang="en"/>
+              <a:rPr lang="en" dirty="0"/>
               <a:t>All costs are positive.</a:t>
             </a:r>
-            <a:endParaRPr/>
+            <a:endParaRPr dirty="0"/>
           </a:p>
           <a:p>
             <a:pPr marL="457200" lvl="0" indent="-342900" algn="l" rtl="0">
@@ -49300,55 +50769,81 @@
               <a:buAutoNum type="arabicPeriod"/>
             </a:pPr>
             <a:r>
-              <a:rPr lang="en"/>
-              <a:t>All routers use the same tie-breaking rules.</a:t>
-            </a:r>
-            <a:endParaRPr/>
-          </a:p>
-          <a:p>
-            <a:pPr marL="0" lvl="0" indent="0" algn="l" rtl="0">
-              <a:spcBef>
-                <a:spcPts val="600"/>
-              </a:spcBef>
-              <a:spcAft>
-                <a:spcPts val="0"/>
-              </a:spcAft>
-              <a:buNone/>
-            </a:pPr>
-            <a:endParaRPr/>
-          </a:p>
-          <a:p>
-            <a:pPr marL="0" lvl="0" indent="0" algn="l" rtl="0">
-              <a:spcBef>
-                <a:spcPts val="600"/>
-              </a:spcBef>
-              <a:spcAft>
-                <a:spcPts val="0"/>
-              </a:spcAft>
-              <a:buNone/>
-            </a:pPr>
-            <a:r>
-              <a:rPr lang="en"/>
-              <a:t>Routers don't necessarily need to use the same shortest-path algorithm, as long as they follow these rules.</a:t>
-            </a:r>
-            <a:endParaRPr/>
-          </a:p>
-          <a:p>
-            <a:pPr marL="457200" lvl="0" indent="-342900" algn="l" rtl="0">
-              <a:spcBef>
-                <a:spcPts val="600"/>
+              <a:rPr lang="en" dirty="0"/>
+              <a:t>All routers use the same tie-breaking rules. </a:t>
+            </a:r>
+            <a:r>
+              <a:rPr lang="en-US" altLang="zh-CN" dirty="0"/>
+              <a:t>If tie-breaking differs, routers can compute equally short but incompatible paths, causing loops</a:t>
+            </a:r>
+          </a:p>
+          <a:p>
+            <a:pPr marL="114300" lvl="0" indent="0" algn="l" rtl="0">
+              <a:spcBef>
+                <a:spcPts val="0"/>
               </a:spcBef>
               <a:spcAft>
                 <a:spcPts val="0"/>
               </a:spcAft>
               <a:buSzPts val="1800"/>
-              <a:buChar char="●"/>
-            </a:pPr>
-            <a:r>
-              <a:rPr lang="en"/>
-              <a:t>In practice, easier to have everyone use the same algorithm.</a:t>
-            </a:r>
-            <a:endParaRPr/>
+              <a:buNone/>
+            </a:pPr>
+            <a:endParaRPr lang="en-US" dirty="0"/>
+          </a:p>
+          <a:p>
+            <a:pPr marL="114300" lvl="0" indent="0" algn="l" rtl="0">
+              <a:spcBef>
+                <a:spcPts val="0"/>
+              </a:spcBef>
+              <a:spcAft>
+                <a:spcPts val="0"/>
+              </a:spcAft>
+              <a:buSzPts val="1800"/>
+              <a:buNone/>
+            </a:pPr>
+            <a:r>
+              <a:rPr lang="en" dirty="0"/>
+              <a:t>In practice, Dijkstra’s algorithm is used by all routers with the same tie-breaking rules.</a:t>
+            </a:r>
+            <a:endParaRPr dirty="0"/>
+          </a:p>
+        </p:txBody>
+      </p:sp>
+      <p:sp>
+        <p:nvSpPr>
+          <p:cNvPr id="2" name="Slide Number Placeholder 1">
+            <a:extLst>
+              <a:ext uri="{FF2B5EF4-FFF2-40B4-BE49-F238E27FC236}">
+                <a16:creationId xmlns:a16="http://schemas.microsoft.com/office/drawing/2014/main" id="{FDF702C3-C417-0CE3-DC61-3F8BE0611938}"/>
+              </a:ext>
+            </a:extLst>
+          </p:cNvPr>
+          <p:cNvSpPr>
+            <a:spLocks noGrp="1"/>
+          </p:cNvSpPr>
+          <p:nvPr>
+            <p:ph type="sldNum" idx="12"/>
+          </p:nvPr>
+        </p:nvSpPr>
+        <p:spPr/>
+        <p:txBody>
+          <a:bodyPr/>
+          <a:lstStyle/>
+          <a:p>
+            <a:pPr marL="0" lvl="0" indent="0" algn="r" rtl="0">
+              <a:spcBef>
+                <a:spcPts val="0"/>
+              </a:spcBef>
+              <a:spcAft>
+                <a:spcPts val="0"/>
+              </a:spcAft>
+              <a:buNone/>
+            </a:pPr>
+            <a:fld id="{00000000-1234-1234-1234-123412341234}" type="slidenum">
+              <a:rPr lang="en" smtClean="0"/>
+              <a:t>9</a:t>
+            </a:fld>
+            <a:endParaRPr lang="en"/>
           </a:p>
         </p:txBody>
       </p:sp>

--- a/PPTs/Lecture 5.3 - Link-State.pptx
+++ b/PPTs/Lecture 5.3 - Link-State.pptx
@@ -5,7 +5,7 @@
     <p:sldMasterId id="2147483670" r:id="rId1"/>
   </p:sldMasterIdLst>
   <p:notesMasterIdLst>
-    <p:notesMasterId r:id="rId23"/>
+    <p:notesMasterId r:id="rId22"/>
   </p:notesMasterIdLst>
   <p:sldIdLst>
     <p:sldId id="256" r:id="rId2"/>
@@ -15,44 +15,43 @@
     <p:sldId id="260" r:id="rId6"/>
     <p:sldId id="261" r:id="rId7"/>
     <p:sldId id="262" r:id="rId8"/>
-    <p:sldId id="263" r:id="rId9"/>
-    <p:sldId id="264" r:id="rId10"/>
-    <p:sldId id="265" r:id="rId11"/>
-    <p:sldId id="266" r:id="rId12"/>
-    <p:sldId id="267" r:id="rId13"/>
-    <p:sldId id="268" r:id="rId14"/>
-    <p:sldId id="269" r:id="rId15"/>
-    <p:sldId id="270" r:id="rId16"/>
-    <p:sldId id="271" r:id="rId17"/>
-    <p:sldId id="272" r:id="rId18"/>
-    <p:sldId id="273" r:id="rId19"/>
-    <p:sldId id="274" r:id="rId20"/>
-    <p:sldId id="275" r:id="rId21"/>
-    <p:sldId id="500" r:id="rId22"/>
+    <p:sldId id="264" r:id="rId9"/>
+    <p:sldId id="265" r:id="rId10"/>
+    <p:sldId id="266" r:id="rId11"/>
+    <p:sldId id="267" r:id="rId12"/>
+    <p:sldId id="268" r:id="rId13"/>
+    <p:sldId id="269" r:id="rId14"/>
+    <p:sldId id="270" r:id="rId15"/>
+    <p:sldId id="271" r:id="rId16"/>
+    <p:sldId id="272" r:id="rId17"/>
+    <p:sldId id="273" r:id="rId18"/>
+    <p:sldId id="274" r:id="rId19"/>
+    <p:sldId id="275" r:id="rId20"/>
+    <p:sldId id="500" r:id="rId21"/>
   </p:sldIdLst>
   <p:sldSz cx="9144000" cy="5143500" type="screen16x9"/>
   <p:notesSz cx="6858000" cy="9144000"/>
   <p:embeddedFontLst>
     <p:embeddedFont>
       <p:font typeface="Roboto" panose="02000000000000000000" pitchFamily="2" charset="0"/>
-      <p:regular r:id="rId24"/>
-      <p:bold r:id="rId25"/>
-      <p:italic r:id="rId26"/>
-      <p:boldItalic r:id="rId27"/>
+      <p:regular r:id="rId23"/>
+      <p:bold r:id="rId24"/>
+      <p:italic r:id="rId25"/>
+      <p:boldItalic r:id="rId26"/>
     </p:embeddedFont>
     <p:embeddedFont>
       <p:font typeface="Roboto Light" panose="02000000000000000000" pitchFamily="2" charset="0"/>
-      <p:regular r:id="rId28"/>
-      <p:bold r:id="rId29"/>
-      <p:italic r:id="rId30"/>
-      <p:boldItalic r:id="rId31"/>
+      <p:regular r:id="rId27"/>
+      <p:bold r:id="rId28"/>
+      <p:italic r:id="rId29"/>
+      <p:boldItalic r:id="rId30"/>
     </p:embeddedFont>
     <p:embeddedFont>
       <p:font typeface="Roboto Medium" panose="02000000000000000000" pitchFamily="2" charset="0"/>
-      <p:regular r:id="rId32"/>
-      <p:bold r:id="rId33"/>
-      <p:italic r:id="rId34"/>
-      <p:boldItalic r:id="rId35"/>
+      <p:regular r:id="rId31"/>
+      <p:bold r:id="rId32"/>
+      <p:italic r:id="rId33"/>
+      <p:boldItalic r:id="rId34"/>
     </p:embeddedFont>
   </p:embeddedFontLst>
   <p:defaultTextStyle>
@@ -1410,320 +1409,6 @@
   <p:cSld>
     <p:spTree>
       <p:nvGrpSpPr>
-        <p:cNvPr id="1" name="Shape 291"/>
-        <p:cNvGrpSpPr/>
-        <p:nvPr/>
-      </p:nvGrpSpPr>
-      <p:grpSpPr>
-        <a:xfrm>
-          <a:off x="0" y="0"/>
-          <a:ext cx="0" cy="0"/>
-          <a:chOff x="0" y="0"/>
-          <a:chExt cx="0" cy="0"/>
-        </a:xfrm>
-      </p:grpSpPr>
-      <p:sp>
-        <p:nvSpPr>
-          <p:cNvPr id="292" name="Google Shape;292;g27879dbf297_0_475:notes"/>
-          <p:cNvSpPr>
-            <a:spLocks noGrp="1" noRot="1" noChangeAspect="1"/>
-          </p:cNvSpPr>
-          <p:nvPr>
-            <p:ph type="sldImg" idx="2"/>
-          </p:nvPr>
-        </p:nvSpPr>
-        <p:spPr>
-          <a:xfrm>
-            <a:off x="381000" y="685800"/>
-            <a:ext cx="6096000" cy="3429000"/>
-          </a:xfrm>
-          <a:custGeom>
-            <a:avLst/>
-            <a:gdLst/>
-            <a:ahLst/>
-            <a:cxnLst/>
-            <a:rect l="l" t="t" r="r" b="b"/>
-            <a:pathLst>
-              <a:path w="120000" h="120000" extrusionOk="0">
-                <a:moveTo>
-                  <a:pt x="0" y="0"/>
-                </a:moveTo>
-                <a:lnTo>
-                  <a:pt x="120000" y="0"/>
-                </a:lnTo>
-                <a:lnTo>
-                  <a:pt x="120000" y="120000"/>
-                </a:lnTo>
-                <a:lnTo>
-                  <a:pt x="0" y="120000"/>
-                </a:lnTo>
-                <a:close/>
-              </a:path>
-            </a:pathLst>
-          </a:custGeom>
-        </p:spPr>
-      </p:sp>
-      <p:sp>
-        <p:nvSpPr>
-          <p:cNvPr id="293" name="Google Shape;293;g27879dbf297_0_475:notes"/>
-          <p:cNvSpPr txBox="1">
-            <a:spLocks noGrp="1"/>
-          </p:cNvSpPr>
-          <p:nvPr>
-            <p:ph type="body" idx="1"/>
-          </p:nvPr>
-        </p:nvSpPr>
-        <p:spPr>
-          <a:xfrm>
-            <a:off x="685800" y="4343400"/>
-            <a:ext cx="5486400" cy="4114800"/>
-          </a:xfrm>
-          <a:prstGeom prst="rect">
-            <a:avLst/>
-          </a:prstGeom>
-        </p:spPr>
-        <p:txBody>
-          <a:bodyPr spcFirstLastPara="1" wrap="square" lIns="91425" tIns="91425" rIns="91425" bIns="91425" anchor="t" anchorCtr="0">
-            <a:noAutofit/>
-          </a:bodyPr>
-          <a:lstStyle/>
-          <a:p>
-            <a:pPr marL="0" lvl="0" indent="0" algn="l" rtl="0">
-              <a:spcBef>
-                <a:spcPts val="0"/>
-              </a:spcBef>
-              <a:spcAft>
-                <a:spcPts val="0"/>
-              </a:spcAft>
-              <a:buClr>
-                <a:schemeClr val="dk1"/>
-              </a:buClr>
-              <a:buSzPts val="1100"/>
-              <a:buFont typeface="Arial"/>
-              <a:buNone/>
-            </a:pPr>
-            <a:r>
-              <a:rPr lang="en"/>
-              <a:t>10:40</a:t>
-            </a:r>
-            <a:endParaRPr/>
-          </a:p>
-          <a:p>
-            <a:pPr marL="0" lvl="0" indent="0" algn="l" rtl="0">
-              <a:spcBef>
-                <a:spcPts val="0"/>
-              </a:spcBef>
-              <a:spcAft>
-                <a:spcPts val="0"/>
-              </a:spcAft>
-              <a:buClr>
-                <a:schemeClr val="dk1"/>
-              </a:buClr>
-              <a:buSzPts val="1100"/>
-              <a:buFont typeface="Arial"/>
-              <a:buNone/>
-            </a:pPr>
-            <a:r>
-              <a:rPr lang="en"/>
-              <a:t>everyone's running the exact same copy of dyra algorithm and that makes it easier for all the routers to be</a:t>
-            </a:r>
-            <a:endParaRPr/>
-          </a:p>
-          <a:p>
-            <a:pPr marL="0" lvl="0" indent="0" algn="l" rtl="0">
-              <a:spcBef>
-                <a:spcPts val="0"/>
-              </a:spcBef>
-              <a:spcAft>
-                <a:spcPts val="0"/>
-              </a:spcAft>
-              <a:buClr>
-                <a:schemeClr val="dk1"/>
-              </a:buClr>
-              <a:buSzPts val="1100"/>
-              <a:buFont typeface="Arial"/>
-              <a:buNone/>
-            </a:pPr>
-            <a:r>
-              <a:rPr lang="en"/>
-              <a:t>10:46</a:t>
-            </a:r>
-            <a:endParaRPr/>
-          </a:p>
-          <a:p>
-            <a:pPr marL="0" lvl="0" indent="0" algn="l" rtl="0">
-              <a:spcBef>
-                <a:spcPts val="0"/>
-              </a:spcBef>
-              <a:spcAft>
-                <a:spcPts val="0"/>
-              </a:spcAft>
-              <a:buClr>
-                <a:schemeClr val="dk1"/>
-              </a:buClr>
-              <a:buSzPts val="1100"/>
-              <a:buFont typeface="Arial"/>
-              <a:buNone/>
-            </a:pPr>
-            <a:r>
-              <a:rPr lang="en"/>
-              <a:t>compatible with each other well that's it we finished step</a:t>
-            </a:r>
-            <a:endParaRPr/>
-          </a:p>
-          <a:p>
-            <a:pPr marL="0" lvl="0" indent="0" algn="l" rtl="0">
-              <a:spcBef>
-                <a:spcPts val="0"/>
-              </a:spcBef>
-              <a:spcAft>
-                <a:spcPts val="0"/>
-              </a:spcAft>
-              <a:buClr>
-                <a:schemeClr val="dk1"/>
-              </a:buClr>
-              <a:buSzPts val="1100"/>
-              <a:buFont typeface="Arial"/>
-              <a:buNone/>
-            </a:pPr>
-            <a:r>
-              <a:rPr lang="en"/>
-              <a:t>10:52</a:t>
-            </a:r>
-            <a:endParaRPr/>
-          </a:p>
-          <a:p>
-            <a:pPr marL="0" lvl="0" indent="0" algn="l" rtl="0">
-              <a:spcBef>
-                <a:spcPts val="0"/>
-              </a:spcBef>
-              <a:spcAft>
-                <a:spcPts val="0"/>
-              </a:spcAft>
-              <a:buClr>
-                <a:schemeClr val="dk1"/>
-              </a:buClr>
-              <a:buSzPts val="1100"/>
-              <a:buFont typeface="Arial"/>
-              <a:buNone/>
-            </a:pPr>
-            <a:r>
-              <a:rPr lang="en"/>
-              <a:t>one now we know how to compute paths to the network use any favorite shortest paths algorithm subject to certain</a:t>
-            </a:r>
-            <a:endParaRPr/>
-          </a:p>
-          <a:p>
-            <a:pPr marL="0" lvl="0" indent="0" algn="l" rtl="0">
-              <a:spcBef>
-                <a:spcPts val="0"/>
-              </a:spcBef>
-              <a:spcAft>
-                <a:spcPts val="0"/>
-              </a:spcAft>
-              <a:buClr>
-                <a:schemeClr val="dk1"/>
-              </a:buClr>
-              <a:buSzPts val="1100"/>
-              <a:buFont typeface="Arial"/>
-              <a:buNone/>
-            </a:pPr>
-            <a:r>
-              <a:rPr lang="en"/>
-              <a:t>10:58</a:t>
-            </a:r>
-            <a:endParaRPr/>
-          </a:p>
-          <a:p>
-            <a:pPr marL="0" lvl="0" indent="0" algn="l" rtl="0">
-              <a:spcBef>
-                <a:spcPts val="0"/>
-              </a:spcBef>
-              <a:spcAft>
-                <a:spcPts val="0"/>
-              </a:spcAft>
-              <a:buClr>
-                <a:schemeClr val="dk1"/>
-              </a:buClr>
-              <a:buSzPts val="1100"/>
-              <a:buFont typeface="Arial"/>
-              <a:buNone/>
-            </a:pPr>
-            <a:r>
-              <a:rPr lang="en"/>
-              <a:t>compatibility constraints so the second thing we have to do is we need to let every router know about the full Network</a:t>
-            </a:r>
-            <a:endParaRPr/>
-          </a:p>
-          <a:p>
-            <a:pPr marL="0" lvl="0" indent="0" algn="l" rtl="0">
-              <a:spcBef>
-                <a:spcPts val="0"/>
-              </a:spcBef>
-              <a:spcAft>
-                <a:spcPts val="0"/>
-              </a:spcAft>
-              <a:buClr>
-                <a:schemeClr val="dk1"/>
-              </a:buClr>
-              <a:buSzPts val="1100"/>
-              <a:buFont typeface="Arial"/>
-              <a:buNone/>
-            </a:pPr>
-            <a:r>
-              <a:rPr lang="en"/>
-              <a:t>11:05</a:t>
-            </a:r>
-            <a:endParaRPr/>
-          </a:p>
-          <a:p>
-            <a:pPr marL="0" lvl="0" indent="0" algn="l" rtl="0">
-              <a:spcBef>
-                <a:spcPts val="0"/>
-              </a:spcBef>
-              <a:spcAft>
-                <a:spcPts val="0"/>
-              </a:spcAft>
-              <a:buClr>
-                <a:schemeClr val="dk1"/>
-              </a:buClr>
-              <a:buSzPts val="1100"/>
-              <a:buFont typeface="Arial"/>
-              <a:buNone/>
-            </a:pPr>
-            <a:r>
-              <a:rPr lang="en"/>
-              <a:t>graph</a:t>
-            </a:r>
-            <a:endParaRPr/>
-          </a:p>
-          <a:p>
-            <a:pPr marL="0" lvl="0" indent="0" algn="l" rtl="0">
-              <a:spcBef>
-                <a:spcPts val="0"/>
-              </a:spcBef>
-              <a:spcAft>
-                <a:spcPts val="0"/>
-              </a:spcAft>
-              <a:buNone/>
-            </a:pPr>
-            <a:endParaRPr/>
-          </a:p>
-        </p:txBody>
-      </p:sp>
-    </p:spTree>
-  </p:cSld>
-  <p:clrMapOvr>
-    <a:masterClrMapping/>
-  </p:clrMapOvr>
-</p:notes>
-</file>
-
-<file path=ppt/notesSlides/notesSlide11.xml><?xml version="1.0" encoding="utf-8"?>
-<p:notes xmlns:a="http://schemas.openxmlformats.org/drawingml/2006/main" xmlns:r="http://schemas.openxmlformats.org/officeDocument/2006/relationships" xmlns:p="http://schemas.openxmlformats.org/presentationml/2006/main" showMasterSp="0" showMasterPhAnim="0">
-  <p:cSld>
-    <p:spTree>
-      <p:nvGrpSpPr>
         <p:cNvPr id="1" name="Shape 298"/>
         <p:cNvGrpSpPr/>
         <p:nvPr/>
@@ -1869,7 +1554,7 @@
 </p:notes>
 </file>
 
-<file path=ppt/notesSlides/notesSlide12.xml><?xml version="1.0" encoding="utf-8"?>
+<file path=ppt/notesSlides/notesSlide11.xml><?xml version="1.0" encoding="utf-8"?>
 <p:notes xmlns:a="http://schemas.openxmlformats.org/drawingml/2006/main" xmlns:r="http://schemas.openxmlformats.org/officeDocument/2006/relationships" xmlns:p="http://schemas.openxmlformats.org/presentationml/2006/main" showMasterSp="0" showMasterPhAnim="0">
   <p:cSld>
     <p:spTree>
@@ -2773,7 +2458,7 @@
 </p:notes>
 </file>
 
-<file path=ppt/notesSlides/notesSlide13.xml><?xml version="1.0" encoding="utf-8"?>
+<file path=ppt/notesSlides/notesSlide12.xml><?xml version="1.0" encoding="utf-8"?>
 <p:notes xmlns:a="http://schemas.openxmlformats.org/drawingml/2006/main" xmlns:r="http://schemas.openxmlformats.org/officeDocument/2006/relationships" xmlns:p="http://schemas.openxmlformats.org/presentationml/2006/main" showMasterSp="0" showMasterPhAnim="0">
   <p:cSld>
     <p:spTree>
@@ -3486,7 +3171,7 @@
 </p:notes>
 </file>
 
-<file path=ppt/notesSlides/notesSlide14.xml><?xml version="1.0" encoding="utf-8"?>
+<file path=ppt/notesSlides/notesSlide13.xml><?xml version="1.0" encoding="utf-8"?>
 <p:notes xmlns:a="http://schemas.openxmlformats.org/drawingml/2006/main" xmlns:r="http://schemas.openxmlformats.org/officeDocument/2006/relationships" xmlns:p="http://schemas.openxmlformats.org/presentationml/2006/main" showMasterSp="0" showMasterPhAnim="0">
   <p:cSld>
     <p:spTree>
@@ -3989,7 +3674,7 @@
 </p:notes>
 </file>
 
-<file path=ppt/notesSlides/notesSlide15.xml><?xml version="1.0" encoding="utf-8"?>
+<file path=ppt/notesSlides/notesSlide14.xml><?xml version="1.0" encoding="utf-8"?>
 <p:notes xmlns:a="http://schemas.openxmlformats.org/drawingml/2006/main" xmlns:r="http://schemas.openxmlformats.org/officeDocument/2006/relationships" xmlns:p="http://schemas.openxmlformats.org/presentationml/2006/main" showMasterSp="0" showMasterPhAnim="0">
   <p:cSld>
     <p:spTree>
@@ -4828,7 +4513,7 @@
 </p:notes>
 </file>
 
-<file path=ppt/notesSlides/notesSlide16.xml><?xml version="1.0" encoding="utf-8"?>
+<file path=ppt/notesSlides/notesSlide15.xml><?xml version="1.0" encoding="utf-8"?>
 <p:notes xmlns:a="http://schemas.openxmlformats.org/drawingml/2006/main" xmlns:r="http://schemas.openxmlformats.org/officeDocument/2006/relationships" xmlns:p="http://schemas.openxmlformats.org/presentationml/2006/main" showMasterSp="0" showMasterPhAnim="0">
   <p:cSld>
     <p:spTree>
@@ -5356,7 +5041,7 @@
 </p:notes>
 </file>
 
-<file path=ppt/notesSlides/notesSlide17.xml><?xml version="1.0" encoding="utf-8"?>
+<file path=ppt/notesSlides/notesSlide16.xml><?xml version="1.0" encoding="utf-8"?>
 <p:notes xmlns:a="http://schemas.openxmlformats.org/drawingml/2006/main" xmlns:r="http://schemas.openxmlformats.org/officeDocument/2006/relationships" xmlns:p="http://schemas.openxmlformats.org/presentationml/2006/main" showMasterSp="0" showMasterPhAnim="0">
   <p:cSld>
     <p:spTree>
@@ -5924,7 +5609,7 @@
 </p:notes>
 </file>
 
-<file path=ppt/notesSlides/notesSlide18.xml><?xml version="1.0" encoding="utf-8"?>
+<file path=ppt/notesSlides/notesSlide17.xml><?xml version="1.0" encoding="utf-8"?>
 <p:notes xmlns:a="http://schemas.openxmlformats.org/drawingml/2006/main" xmlns:r="http://schemas.openxmlformats.org/officeDocument/2006/relationships" xmlns:p="http://schemas.openxmlformats.org/presentationml/2006/main" showMasterSp="0" showMasterPhAnim="0">
   <p:cSld>
     <p:spTree>
@@ -6595,7 +6280,7 @@
 </p:notes>
 </file>
 
-<file path=ppt/notesSlides/notesSlide19.xml><?xml version="1.0" encoding="utf-8"?>
+<file path=ppt/notesSlides/notesSlide18.xml><?xml version="1.0" encoding="utf-8"?>
 <p:notes xmlns:a="http://schemas.openxmlformats.org/drawingml/2006/main" xmlns:r="http://schemas.openxmlformats.org/officeDocument/2006/relationships" xmlns:p="http://schemas.openxmlformats.org/presentationml/2006/main" showMasterSp="0" showMasterPhAnim="0">
   <p:cSld>
     <p:spTree>
@@ -7444,6 +7129,1374 @@
               <a:buNone/>
             </a:pPr>
             <a:endParaRPr dirty="0"/>
+          </a:p>
+        </p:txBody>
+      </p:sp>
+    </p:spTree>
+  </p:cSld>
+  <p:clrMapOvr>
+    <a:masterClrMapping/>
+  </p:clrMapOvr>
+</p:notes>
+</file>
+
+<file path=ppt/notesSlides/notesSlide19.xml><?xml version="1.0" encoding="utf-8"?>
+<p:notes xmlns:a="http://schemas.openxmlformats.org/drawingml/2006/main" xmlns:r="http://schemas.openxmlformats.org/officeDocument/2006/relationships" xmlns:p="http://schemas.openxmlformats.org/presentationml/2006/main" showMasterSp="0" showMasterPhAnim="0">
+  <p:cSld>
+    <p:spTree>
+      <p:nvGrpSpPr>
+        <p:cNvPr id="1" name="Shape 578"/>
+        <p:cNvGrpSpPr/>
+        <p:nvPr/>
+      </p:nvGrpSpPr>
+      <p:grpSpPr>
+        <a:xfrm>
+          <a:off x="0" y="0"/>
+          <a:ext cx="0" cy="0"/>
+          <a:chOff x="0" y="0"/>
+          <a:chExt cx="0" cy="0"/>
+        </a:xfrm>
+      </p:grpSpPr>
+      <p:sp>
+        <p:nvSpPr>
+          <p:cNvPr id="579" name="Google Shape;579;g2787eb72cc9_0_37:notes"/>
+          <p:cNvSpPr>
+            <a:spLocks noGrp="1" noRot="1" noChangeAspect="1"/>
+          </p:cNvSpPr>
+          <p:nvPr>
+            <p:ph type="sldImg" idx="2"/>
+          </p:nvPr>
+        </p:nvSpPr>
+        <p:spPr>
+          <a:xfrm>
+            <a:off x="381000" y="685800"/>
+            <a:ext cx="6096000" cy="3429000"/>
+          </a:xfrm>
+          <a:custGeom>
+            <a:avLst/>
+            <a:gdLst/>
+            <a:ahLst/>
+            <a:cxnLst/>
+            <a:rect l="l" t="t" r="r" b="b"/>
+            <a:pathLst>
+              <a:path w="120000" h="120000" extrusionOk="0">
+                <a:moveTo>
+                  <a:pt x="0" y="0"/>
+                </a:moveTo>
+                <a:lnTo>
+                  <a:pt x="120000" y="0"/>
+                </a:lnTo>
+                <a:lnTo>
+                  <a:pt x="120000" y="120000"/>
+                </a:lnTo>
+                <a:lnTo>
+                  <a:pt x="0" y="120000"/>
+                </a:lnTo>
+                <a:close/>
+              </a:path>
+            </a:pathLst>
+          </a:custGeom>
+        </p:spPr>
+      </p:sp>
+      <p:sp>
+        <p:nvSpPr>
+          <p:cNvPr id="580" name="Google Shape;580;g2787eb72cc9_0_37:notes"/>
+          <p:cNvSpPr txBox="1">
+            <a:spLocks noGrp="1"/>
+          </p:cNvSpPr>
+          <p:nvPr>
+            <p:ph type="body" idx="1"/>
+          </p:nvPr>
+        </p:nvSpPr>
+        <p:spPr>
+          <a:xfrm>
+            <a:off x="685800" y="4343400"/>
+            <a:ext cx="5486400" cy="4114800"/>
+          </a:xfrm>
+          <a:prstGeom prst="rect">
+            <a:avLst/>
+          </a:prstGeom>
+        </p:spPr>
+        <p:txBody>
+          <a:bodyPr spcFirstLastPara="1" wrap="square" lIns="91425" tIns="91425" rIns="91425" bIns="91425" anchor="t" anchorCtr="0">
+            <a:noAutofit/>
+          </a:bodyPr>
+          <a:lstStyle/>
+          <a:p>
+            <a:pPr marL="0" lvl="0" indent="0" algn="l" rtl="0">
+              <a:spcBef>
+                <a:spcPts val="0"/>
+              </a:spcBef>
+              <a:spcAft>
+                <a:spcPts val="0"/>
+              </a:spcAft>
+              <a:buClr>
+                <a:schemeClr val="dk1"/>
+              </a:buClr>
+              <a:buSzPts val="1100"/>
+              <a:buFont typeface="Arial"/>
+              <a:buNone/>
+            </a:pPr>
+            <a:r>
+              <a:rPr lang="en"/>
+              <a:t>so to quickly summarize link State versus dist inspector link State I would</a:t>
+            </a:r>
+            <a:endParaRPr/>
+          </a:p>
+          <a:p>
+            <a:pPr marL="0" lvl="0" indent="0" algn="l" rtl="0">
+              <a:spcBef>
+                <a:spcPts val="0"/>
+              </a:spcBef>
+              <a:spcAft>
+                <a:spcPts val="0"/>
+              </a:spcAft>
+              <a:buClr>
+                <a:schemeClr val="dk1"/>
+              </a:buClr>
+              <a:buSzPts val="1100"/>
+              <a:buFont typeface="Arial"/>
+              <a:buNone/>
+            </a:pPr>
+            <a:r>
+              <a:rPr lang="en"/>
+              <a:t>24:53</a:t>
+            </a:r>
+            <a:endParaRPr/>
+          </a:p>
+          <a:p>
+            <a:pPr marL="0" lvl="0" indent="0" algn="l" rtl="0">
+              <a:spcBef>
+                <a:spcPts val="0"/>
+              </a:spcBef>
+              <a:spcAft>
+                <a:spcPts val="0"/>
+              </a:spcAft>
+              <a:buClr>
+                <a:schemeClr val="dk1"/>
+              </a:buClr>
+              <a:buSzPts val="1100"/>
+              <a:buFont typeface="Arial"/>
+              <a:buNone/>
+            </a:pPr>
+            <a:r>
+              <a:rPr lang="en"/>
+              <a:t>say is probably the simpler of the two protocols if you think about how long it took us to explain one distance Vector</a:t>
+            </a:r>
+            <a:endParaRPr/>
+          </a:p>
+          <a:p>
+            <a:pPr marL="0" lvl="0" indent="0" algn="l" rtl="0">
+              <a:spcBef>
+                <a:spcPts val="0"/>
+              </a:spcBef>
+              <a:spcAft>
+                <a:spcPts val="0"/>
+              </a:spcAft>
+              <a:buClr>
+                <a:schemeClr val="dk1"/>
+              </a:buClr>
+              <a:buSzPts val="1100"/>
+              <a:buFont typeface="Arial"/>
+              <a:buNone/>
+            </a:pPr>
+            <a:r>
+              <a:rPr lang="en"/>
+              <a:t>24:59</a:t>
+            </a:r>
+            <a:endParaRPr/>
+          </a:p>
+          <a:p>
+            <a:pPr marL="0" lvl="0" indent="0" algn="l" rtl="0">
+              <a:spcBef>
+                <a:spcPts val="0"/>
+              </a:spcBef>
+              <a:spcAft>
+                <a:spcPts val="0"/>
+              </a:spcAft>
+              <a:buClr>
+                <a:schemeClr val="dk1"/>
+              </a:buClr>
+              <a:buSzPts val="1100"/>
+              <a:buFont typeface="Arial"/>
+              <a:buNone/>
+            </a:pPr>
+            <a:r>
+              <a:rPr lang="en"/>
+              <a:t>took like two hours to explain link state has taken 25 minutes in counting</a:t>
+            </a:r>
+            <a:endParaRPr/>
+          </a:p>
+          <a:p>
+            <a:pPr marL="0" lvl="0" indent="0" algn="l" rtl="0">
+              <a:spcBef>
+                <a:spcPts val="0"/>
+              </a:spcBef>
+              <a:spcAft>
+                <a:spcPts val="0"/>
+              </a:spcAft>
+              <a:buClr>
+                <a:schemeClr val="dk1"/>
+              </a:buClr>
+              <a:buSzPts val="1100"/>
+              <a:buFont typeface="Arial"/>
+              <a:buNone/>
+            </a:pPr>
+            <a:r>
+              <a:rPr lang="en"/>
+              <a:t>25:05</a:t>
+            </a:r>
+            <a:endParaRPr/>
+          </a:p>
+          <a:p>
+            <a:pPr marL="0" lvl="0" indent="0" algn="l" rtl="0">
+              <a:spcBef>
+                <a:spcPts val="0"/>
+              </a:spcBef>
+              <a:spcAft>
+                <a:spcPts val="0"/>
+              </a:spcAft>
+              <a:buClr>
+                <a:schemeClr val="dk1"/>
+              </a:buClr>
+              <a:buSzPts val="1100"/>
+              <a:buFont typeface="Arial"/>
+              <a:buNone/>
+            </a:pPr>
+            <a:r>
+              <a:rPr lang="en"/>
+              <a:t>so I think it's somewhat simpler there are some details though to make sure that it actually works and that you</a:t>
+            </a:r>
+            <a:endParaRPr/>
+          </a:p>
+          <a:p>
+            <a:pPr marL="0" lvl="0" indent="0" algn="l" rtl="0">
+              <a:spcBef>
+                <a:spcPts val="0"/>
+              </a:spcBef>
+              <a:spcAft>
+                <a:spcPts val="0"/>
+              </a:spcAft>
+              <a:buClr>
+                <a:schemeClr val="dk1"/>
+              </a:buClr>
+              <a:buSzPts val="1100"/>
+              <a:buFont typeface="Arial"/>
+              <a:buNone/>
+            </a:pPr>
+            <a:r>
+              <a:rPr lang="en"/>
+              <a:t>25:11</a:t>
+            </a:r>
+            <a:endParaRPr/>
+          </a:p>
+          <a:p>
+            <a:pPr marL="0" lvl="0" indent="0" algn="l" rtl="0">
+              <a:spcBef>
+                <a:spcPts val="0"/>
+              </a:spcBef>
+              <a:spcAft>
+                <a:spcPts val="0"/>
+              </a:spcAft>
+              <a:buClr>
+                <a:schemeClr val="dk1"/>
+              </a:buClr>
+              <a:buSzPts val="1100"/>
+              <a:buFont typeface="Arial"/>
+              <a:buNone/>
+            </a:pPr>
+            <a:r>
+              <a:rPr lang="en"/>
+              <a:t>don't run into bugs like infinite advertisements but at a very high level everyone floods the information that</a:t>
+            </a:r>
+            <a:endParaRPr/>
+          </a:p>
+          <a:p>
+            <a:pPr marL="0" lvl="0" indent="0" algn="l" rtl="0">
+              <a:spcBef>
+                <a:spcPts val="0"/>
+              </a:spcBef>
+              <a:spcAft>
+                <a:spcPts val="0"/>
+              </a:spcAft>
+              <a:buClr>
+                <a:schemeClr val="dk1"/>
+              </a:buClr>
+              <a:buSzPts val="1100"/>
+              <a:buFont typeface="Arial"/>
+              <a:buNone/>
+            </a:pPr>
+            <a:r>
+              <a:rPr lang="en"/>
+              <a:t>25:17</a:t>
+            </a:r>
+            <a:endParaRPr/>
+          </a:p>
+          <a:p>
+            <a:pPr marL="0" lvl="0" indent="0" algn="l" rtl="0">
+              <a:spcBef>
+                <a:spcPts val="0"/>
+              </a:spcBef>
+              <a:spcAft>
+                <a:spcPts val="0"/>
+              </a:spcAft>
+              <a:buClr>
+                <a:schemeClr val="dk1"/>
+              </a:buClr>
+              <a:buSzPts val="1100"/>
+              <a:buFont typeface="Arial"/>
+              <a:buNone/>
+            </a:pPr>
+            <a:r>
+              <a:rPr lang="en"/>
+              <a:t>they receive this gives everyone a global map of the network and everyone independently runs their own shortest</a:t>
+            </a:r>
+            <a:endParaRPr/>
+          </a:p>
+          <a:p>
+            <a:pPr marL="0" lvl="0" indent="0" algn="l" rtl="0">
+              <a:spcBef>
+                <a:spcPts val="0"/>
+              </a:spcBef>
+              <a:spcAft>
+                <a:spcPts val="0"/>
+              </a:spcAft>
+              <a:buClr>
+                <a:schemeClr val="dk1"/>
+              </a:buClr>
+              <a:buSzPts val="1100"/>
+              <a:buFont typeface="Arial"/>
+              <a:buNone/>
+            </a:pPr>
+            <a:r>
+              <a:rPr lang="en"/>
+              <a:t>25:24</a:t>
+            </a:r>
+            <a:endParaRPr/>
+          </a:p>
+          <a:p>
+            <a:pPr marL="0" lvl="0" indent="0" algn="l" rtl="0">
+              <a:spcBef>
+                <a:spcPts val="0"/>
+              </a:spcBef>
+              <a:spcAft>
+                <a:spcPts val="0"/>
+              </a:spcAft>
+              <a:buClr>
+                <a:schemeClr val="dk1"/>
+              </a:buClr>
+              <a:buSzPts val="1100"/>
+              <a:buFont typeface="Arial"/>
+              <a:buNone/>
+            </a:pPr>
+            <a:r>
+              <a:rPr lang="en"/>
+              <a:t>path algorithm to compute the next tops and to compare which which one is better</a:t>
+            </a:r>
+            <a:endParaRPr/>
+          </a:p>
+          <a:p>
+            <a:pPr marL="0" lvl="0" indent="0" algn="l" rtl="0">
+              <a:spcBef>
+                <a:spcPts val="0"/>
+              </a:spcBef>
+              <a:spcAft>
+                <a:spcPts val="0"/>
+              </a:spcAft>
+              <a:buClr>
+                <a:schemeClr val="dk1"/>
+              </a:buClr>
+              <a:buSzPts val="1100"/>
+              <a:buFont typeface="Arial"/>
+              <a:buNone/>
+            </a:pPr>
+            <a:r>
+              <a:rPr lang="en"/>
+              <a:t>25:29</a:t>
+            </a:r>
+            <a:endParaRPr/>
+          </a:p>
+          <a:p>
+            <a:pPr marL="0" lvl="0" indent="0" algn="l" rtl="0">
+              <a:spcBef>
+                <a:spcPts val="0"/>
+              </a:spcBef>
+              <a:spcAft>
+                <a:spcPts val="0"/>
+              </a:spcAft>
+              <a:buClr>
+                <a:schemeClr val="dk1"/>
+              </a:buClr>
+              <a:buSzPts val="1100"/>
+              <a:buFont typeface="Arial"/>
+              <a:buNone/>
+            </a:pPr>
+            <a:r>
+              <a:rPr lang="en"/>
+              <a:t>which one you might want to use here are some reasons why you might want to choose one over the other so one thing</a:t>
+            </a:r>
+            <a:endParaRPr/>
+          </a:p>
+          <a:p>
+            <a:pPr marL="0" lvl="0" indent="0" algn="l" rtl="0">
+              <a:spcBef>
+                <a:spcPts val="0"/>
+              </a:spcBef>
+              <a:spcAft>
+                <a:spcPts val="0"/>
+              </a:spcAft>
+              <a:buClr>
+                <a:schemeClr val="dk1"/>
+              </a:buClr>
+              <a:buSzPts val="1100"/>
+              <a:buFont typeface="Arial"/>
+              <a:buNone/>
+            </a:pPr>
+            <a:r>
+              <a:rPr lang="en"/>
+              <a:t>25:35</a:t>
+            </a:r>
+            <a:endParaRPr/>
+          </a:p>
+          <a:p>
+            <a:pPr marL="0" lvl="0" indent="0" algn="l" rtl="0">
+              <a:spcBef>
+                <a:spcPts val="0"/>
+              </a:spcBef>
+              <a:spcAft>
+                <a:spcPts val="0"/>
+              </a:spcAft>
+              <a:buClr>
+                <a:schemeClr val="dk1"/>
+              </a:buClr>
+              <a:buSzPts val="1100"/>
+              <a:buFont typeface="Arial"/>
+              <a:buNone/>
+            </a:pPr>
+            <a:r>
+              <a:rPr lang="en"/>
+              <a:t>that's nice about link state is that routers have a bit of control over the path that they choose so for example if</a:t>
+            </a:r>
+            <a:endParaRPr/>
+          </a:p>
+          <a:p>
+            <a:pPr marL="0" lvl="0" indent="0" algn="l" rtl="0">
+              <a:spcBef>
+                <a:spcPts val="0"/>
+              </a:spcBef>
+              <a:spcAft>
+                <a:spcPts val="0"/>
+              </a:spcAft>
+              <a:buClr>
+                <a:schemeClr val="dk1"/>
+              </a:buClr>
+              <a:buSzPts val="1100"/>
+              <a:buFont typeface="Arial"/>
+              <a:buNone/>
+            </a:pPr>
+            <a:r>
+              <a:rPr lang="en"/>
+              <a:t>25:42</a:t>
+            </a:r>
+            <a:endParaRPr/>
+          </a:p>
+          <a:p>
+            <a:pPr marL="0" lvl="0" indent="0" algn="l" rtl="0">
+              <a:spcBef>
+                <a:spcPts val="0"/>
+              </a:spcBef>
+              <a:spcAft>
+                <a:spcPts val="0"/>
+              </a:spcAft>
+              <a:buClr>
+                <a:schemeClr val="dk1"/>
+              </a:buClr>
+              <a:buSzPts val="1100"/>
+              <a:buFont typeface="Arial"/>
+              <a:buNone/>
+            </a:pPr>
+            <a:r>
+              <a:rPr lang="en"/>
+              <a:t>you really dislike R2 for some reason not sure why you would but if R1 thinks</a:t>
+            </a:r>
+            <a:endParaRPr/>
+          </a:p>
+          <a:p>
+            <a:pPr marL="0" lvl="0" indent="0" algn="l" rtl="0">
+              <a:spcBef>
+                <a:spcPts val="0"/>
+              </a:spcBef>
+              <a:spcAft>
+                <a:spcPts val="0"/>
+              </a:spcAft>
+              <a:buClr>
+                <a:schemeClr val="dk1"/>
+              </a:buClr>
+              <a:buSzPts val="1100"/>
+              <a:buFont typeface="Arial"/>
+              <a:buNone/>
+            </a:pPr>
+            <a:r>
+              <a:rPr lang="en"/>
+              <a:t>25:47</a:t>
+            </a:r>
+            <a:endParaRPr/>
+          </a:p>
+          <a:p>
+            <a:pPr marL="0" lvl="0" indent="0" algn="l" rtl="0">
+              <a:spcBef>
+                <a:spcPts val="0"/>
+              </a:spcBef>
+              <a:spcAft>
+                <a:spcPts val="0"/>
+              </a:spcAft>
+              <a:buClr>
+                <a:schemeClr val="dk1"/>
+              </a:buClr>
+              <a:buSzPts val="1100"/>
+              <a:buFont typeface="Arial"/>
+              <a:buNone/>
+            </a:pPr>
+            <a:r>
+              <a:rPr lang="en"/>
+              <a:t>I really hate R2 it can just send packets using R3 because it has a full picture of the network by contrast in</a:t>
+            </a:r>
+            <a:endParaRPr/>
+          </a:p>
+          <a:p>
+            <a:pPr marL="0" lvl="0" indent="0" algn="l" rtl="0">
+              <a:spcBef>
+                <a:spcPts val="0"/>
+              </a:spcBef>
+              <a:spcAft>
+                <a:spcPts val="0"/>
+              </a:spcAft>
+              <a:buClr>
+                <a:schemeClr val="dk1"/>
+              </a:buClr>
+              <a:buSzPts val="1100"/>
+              <a:buFont typeface="Arial"/>
+              <a:buNone/>
+            </a:pPr>
+            <a:r>
+              <a:rPr lang="en"/>
+              <a:t>25:55</a:t>
+            </a:r>
+            <a:endParaRPr/>
+          </a:p>
+          <a:p>
+            <a:pPr marL="0" lvl="0" indent="0" algn="l" rtl="0">
+              <a:spcBef>
+                <a:spcPts val="0"/>
+              </a:spcBef>
+              <a:spcAft>
+                <a:spcPts val="0"/>
+              </a:spcAft>
+              <a:buClr>
+                <a:schemeClr val="dk1"/>
+              </a:buClr>
+              <a:buSzPts val="1100"/>
+              <a:buFont typeface="Arial"/>
+              <a:buNone/>
+            </a:pPr>
+            <a:r>
+              <a:rPr lang="en"/>
+              <a:t>distance Vector you have to trust what your neighbor says if your neighbor says I can reach with path two but I can</a:t>
+            </a:r>
+            <a:endParaRPr/>
+          </a:p>
+          <a:p>
+            <a:pPr marL="0" lvl="0" indent="0" algn="l" rtl="0">
+              <a:spcBef>
+                <a:spcPts val="0"/>
+              </a:spcBef>
+              <a:spcAft>
+                <a:spcPts val="0"/>
+              </a:spcAft>
+              <a:buClr>
+                <a:schemeClr val="dk1"/>
+              </a:buClr>
+              <a:buSzPts val="1100"/>
+              <a:buFont typeface="Arial"/>
+              <a:buNone/>
+            </a:pPr>
+            <a:r>
+              <a:rPr lang="en"/>
+              <a:t>26:01</a:t>
+            </a:r>
+            <a:endParaRPr/>
+          </a:p>
+          <a:p>
+            <a:pPr marL="0" lvl="0" indent="0" algn="l" rtl="0">
+              <a:spcBef>
+                <a:spcPts val="0"/>
+              </a:spcBef>
+              <a:spcAft>
+                <a:spcPts val="0"/>
+              </a:spcAft>
+              <a:buClr>
+                <a:schemeClr val="dk1"/>
+              </a:buClr>
+              <a:buSzPts val="1100"/>
+              <a:buFont typeface="Arial"/>
+              <a:buNone/>
+            </a:pPr>
+            <a:r>
+              <a:rPr lang="en"/>
+              <a:t>reach a with cost two you have to trust what they say maybe they have a bug that</a:t>
+            </a:r>
+            <a:endParaRPr/>
+          </a:p>
+          <a:p>
+            <a:pPr marL="0" lvl="0" indent="0" algn="l" rtl="0">
+              <a:spcBef>
+                <a:spcPts val="0"/>
+              </a:spcBef>
+              <a:spcAft>
+                <a:spcPts val="0"/>
+              </a:spcAft>
+              <a:buClr>
+                <a:schemeClr val="dk1"/>
+              </a:buClr>
+              <a:buSzPts val="1100"/>
+              <a:buFont typeface="Arial"/>
+              <a:buNone/>
+            </a:pPr>
+            <a:r>
+              <a:rPr lang="en"/>
+              <a:t>26:06</a:t>
+            </a:r>
+            <a:endParaRPr/>
+          </a:p>
+          <a:p>
+            <a:pPr marL="0" lvl="0" indent="0" algn="l" rtl="0">
+              <a:spcBef>
+                <a:spcPts val="0"/>
+              </a:spcBef>
+              <a:spcAft>
+                <a:spcPts val="0"/>
+              </a:spcAft>
+              <a:buClr>
+                <a:schemeClr val="dk1"/>
+              </a:buClr>
+              <a:buSzPts val="1100"/>
+              <a:buFont typeface="Arial"/>
+              <a:buNone/>
+            </a:pPr>
+            <a:r>
+              <a:rPr lang="en"/>
+              <a:t>gets introduced and now you're stuck using incorrect information you don't know what path they're using so link</a:t>
+            </a:r>
+            <a:endParaRPr/>
+          </a:p>
+          <a:p>
+            <a:pPr marL="0" lvl="0" indent="0" algn="l" rtl="0">
+              <a:spcBef>
+                <a:spcPts val="0"/>
+              </a:spcBef>
+              <a:spcAft>
+                <a:spcPts val="0"/>
+              </a:spcAft>
+              <a:buClr>
+                <a:schemeClr val="dk1"/>
+              </a:buClr>
+              <a:buSzPts val="1100"/>
+              <a:buFont typeface="Arial"/>
+              <a:buNone/>
+            </a:pPr>
+            <a:r>
+              <a:rPr lang="en"/>
+              <a:t>26:12</a:t>
+            </a:r>
+            <a:endParaRPr/>
+          </a:p>
+          <a:p>
+            <a:pPr marL="0" lvl="0" indent="0" algn="l" rtl="0">
+              <a:spcBef>
+                <a:spcPts val="0"/>
+              </a:spcBef>
+              <a:spcAft>
+                <a:spcPts val="0"/>
+              </a:spcAft>
+              <a:buClr>
+                <a:schemeClr val="dk1"/>
+              </a:buClr>
+              <a:buSzPts val="1100"/>
+              <a:buFont typeface="Arial"/>
+              <a:buNone/>
+            </a:pPr>
+            <a:r>
+              <a:rPr lang="en"/>
+              <a:t>State because you have a global picture of the network you get a little bit more control over what path you want to</a:t>
+            </a:r>
+            <a:endParaRPr/>
+          </a:p>
+          <a:p>
+            <a:pPr marL="0" lvl="0" indent="0" algn="l" rtl="0">
+              <a:spcBef>
+                <a:spcPts val="0"/>
+              </a:spcBef>
+              <a:spcAft>
+                <a:spcPts val="0"/>
+              </a:spcAft>
+              <a:buClr>
+                <a:schemeClr val="dk1"/>
+              </a:buClr>
+              <a:buSzPts val="1100"/>
+              <a:buFont typeface="Arial"/>
+              <a:buNone/>
+            </a:pPr>
+            <a:r>
+              <a:rPr lang="en"/>
+              <a:t>26:19</a:t>
+            </a:r>
+            <a:endParaRPr/>
+          </a:p>
+          <a:p>
+            <a:pPr marL="0" lvl="0" indent="0" algn="l" rtl="0">
+              <a:spcBef>
+                <a:spcPts val="0"/>
+              </a:spcBef>
+              <a:spcAft>
+                <a:spcPts val="0"/>
+              </a:spcAft>
+              <a:buClr>
+                <a:schemeClr val="dk1"/>
+              </a:buClr>
+              <a:buSzPts val="1100"/>
+              <a:buFont typeface="Arial"/>
+              <a:buNone/>
+            </a:pPr>
+            <a:r>
+              <a:rPr lang="en"/>
+              <a:t>choose and compare with distance Vector where you receive advertisements from your neighbors you're not sure if</a:t>
+            </a:r>
+            <a:endParaRPr/>
+          </a:p>
+          <a:p>
+            <a:pPr marL="0" lvl="0" indent="0" algn="l" rtl="0">
+              <a:spcBef>
+                <a:spcPts val="0"/>
+              </a:spcBef>
+              <a:spcAft>
+                <a:spcPts val="0"/>
+              </a:spcAft>
+              <a:buClr>
+                <a:schemeClr val="dk1"/>
+              </a:buClr>
+              <a:buSzPts val="1100"/>
+              <a:buFont typeface="Arial"/>
+              <a:buNone/>
+            </a:pPr>
+            <a:r>
+              <a:rPr lang="en"/>
+              <a:t>26:24</a:t>
+            </a:r>
+            <a:endParaRPr/>
+          </a:p>
+          <a:p>
+            <a:pPr marL="0" lvl="0" indent="0" algn="l" rtl="0">
+              <a:spcBef>
+                <a:spcPts val="0"/>
+              </a:spcBef>
+              <a:spcAft>
+                <a:spcPts val="0"/>
+              </a:spcAft>
+              <a:buClr>
+                <a:schemeClr val="dk1"/>
+              </a:buClr>
+              <a:buSzPts val="1100"/>
+              <a:buFont typeface="Arial"/>
+              <a:buNone/>
+            </a:pPr>
+            <a:r>
+              <a:rPr lang="en"/>
+              <a:t>they're accurate or not you're not sure exactly what happens to the packet after the next top you just have to trust what</a:t>
+            </a:r>
+            <a:endParaRPr/>
+          </a:p>
+          <a:p>
+            <a:pPr marL="0" lvl="0" indent="0" algn="l" rtl="0">
+              <a:spcBef>
+                <a:spcPts val="0"/>
+              </a:spcBef>
+              <a:spcAft>
+                <a:spcPts val="0"/>
+              </a:spcAft>
+              <a:buClr>
+                <a:schemeClr val="dk1"/>
+              </a:buClr>
+              <a:buSzPts val="1100"/>
+              <a:buFont typeface="Arial"/>
+              <a:buNone/>
+            </a:pPr>
+            <a:r>
+              <a:rPr lang="en"/>
+              <a:t>26:30</a:t>
+            </a:r>
+            <a:endParaRPr/>
+          </a:p>
+          <a:p>
+            <a:pPr marL="0" lvl="0" indent="0" algn="l" rtl="0">
+              <a:spcBef>
+                <a:spcPts val="0"/>
+              </a:spcBef>
+              <a:spcAft>
+                <a:spcPts val="0"/>
+              </a:spcAft>
+              <a:buClr>
+                <a:schemeClr val="dk1"/>
+              </a:buClr>
+              <a:buSzPts val="1100"/>
+              <a:buFont typeface="Arial"/>
+              <a:buNone/>
+            </a:pPr>
+            <a:r>
+              <a:rPr lang="en"/>
+              <a:t>they say and pick whatever you think is best and arguably this one is kind of</a:t>
+            </a:r>
+            <a:endParaRPr/>
+          </a:p>
+          <a:p>
+            <a:pPr marL="0" lvl="0" indent="0" algn="l" rtl="0">
+              <a:spcBef>
+                <a:spcPts val="0"/>
+              </a:spcBef>
+              <a:spcAft>
+                <a:spcPts val="0"/>
+              </a:spcAft>
+              <a:buClr>
+                <a:schemeClr val="dk1"/>
+              </a:buClr>
+              <a:buSzPts val="1100"/>
+              <a:buFont typeface="Arial"/>
+              <a:buNone/>
+            </a:pPr>
+            <a:r>
+              <a:rPr lang="en"/>
+              <a:t>26:35</a:t>
+            </a:r>
+            <a:endParaRPr/>
+          </a:p>
+          <a:p>
+            <a:pPr marL="0" lvl="0" indent="0" algn="l" rtl="0">
+              <a:spcBef>
+                <a:spcPts val="0"/>
+              </a:spcBef>
+              <a:spcAft>
+                <a:spcPts val="0"/>
+              </a:spcAft>
+              <a:buClr>
+                <a:schemeClr val="dk1"/>
+              </a:buClr>
+              <a:buSzPts val="1100"/>
+              <a:buFont typeface="Arial"/>
+              <a:buNone/>
+            </a:pPr>
+            <a:r>
+              <a:rPr lang="en"/>
+              <a:t>debatable and depends on your network topology there are some cases where links made is a little bit better at</a:t>
+            </a:r>
+            <a:endParaRPr/>
+          </a:p>
+          <a:p>
+            <a:pPr marL="0" lvl="0" indent="0" algn="l" rtl="0">
+              <a:spcBef>
+                <a:spcPts val="0"/>
+              </a:spcBef>
+              <a:spcAft>
+                <a:spcPts val="0"/>
+              </a:spcAft>
+              <a:buClr>
+                <a:schemeClr val="dk1"/>
+              </a:buClr>
+              <a:buSzPts val="1100"/>
+              <a:buFont typeface="Arial"/>
+              <a:buNone/>
+            </a:pPr>
+            <a:r>
+              <a:rPr lang="en"/>
+              <a:t>26:40</a:t>
+            </a:r>
+            <a:endParaRPr/>
+          </a:p>
+          <a:p>
+            <a:pPr marL="0" lvl="0" indent="0" algn="l" rtl="0">
+              <a:spcBef>
+                <a:spcPts val="0"/>
+              </a:spcBef>
+              <a:spcAft>
+                <a:spcPts val="0"/>
+              </a:spcAft>
+              <a:buClr>
+                <a:schemeClr val="dk1"/>
+              </a:buClr>
+              <a:buSzPts val="1100"/>
+              <a:buFont typeface="Arial"/>
+              <a:buNone/>
+            </a:pPr>
+            <a:r>
+              <a:rPr lang="en"/>
+              <a:t>converging and the idea would be that in distance Vector the propagation involves computation at every single step so you</a:t>
+            </a:r>
+            <a:endParaRPr/>
+          </a:p>
+          <a:p>
+            <a:pPr marL="0" lvl="0" indent="0" algn="l" rtl="0">
+              <a:spcBef>
+                <a:spcPts val="0"/>
+              </a:spcBef>
+              <a:spcAft>
+                <a:spcPts val="0"/>
+              </a:spcAft>
+              <a:buClr>
+                <a:schemeClr val="dk1"/>
+              </a:buClr>
+              <a:buSzPts val="1100"/>
+              <a:buFont typeface="Arial"/>
+              <a:buNone/>
+            </a:pPr>
+            <a:r>
+              <a:rPr lang="en"/>
+              <a:t>26:48</a:t>
+            </a:r>
+            <a:endParaRPr/>
+          </a:p>
+          <a:p>
+            <a:pPr marL="0" lvl="0" indent="0" algn="l" rtl="0">
+              <a:spcBef>
+                <a:spcPts val="0"/>
+              </a:spcBef>
+              <a:spcAft>
+                <a:spcPts val="0"/>
+              </a:spcAft>
+              <a:buClr>
+                <a:schemeClr val="dk1"/>
+              </a:buClr>
+              <a:buSzPts val="1100"/>
+              <a:buFont typeface="Arial"/>
+              <a:buNone/>
+            </a:pPr>
+            <a:r>
+              <a:rPr lang="en"/>
+              <a:t>propagate information that a link has gone down you send poison and you have to wait a little bit for everyone to</a:t>
+            </a:r>
+            <a:endParaRPr/>
+          </a:p>
+          <a:p>
+            <a:pPr marL="0" lvl="0" indent="0" algn="l" rtl="0">
+              <a:spcBef>
+                <a:spcPts val="0"/>
+              </a:spcBef>
+              <a:spcAft>
+                <a:spcPts val="0"/>
+              </a:spcAft>
+              <a:buClr>
+                <a:schemeClr val="dk1"/>
+              </a:buClr>
+              <a:buSzPts val="1100"/>
+              <a:buFont typeface="Arial"/>
+              <a:buNone/>
+            </a:pPr>
+            <a:r>
+              <a:rPr lang="en"/>
+              <a:t>26:54</a:t>
+            </a:r>
+            <a:endParaRPr/>
+          </a:p>
+          <a:p>
+            <a:pPr marL="0" lvl="0" indent="0" algn="l" rtl="0">
+              <a:spcBef>
+                <a:spcPts val="0"/>
+              </a:spcBef>
+              <a:spcAft>
+                <a:spcPts val="0"/>
+              </a:spcAft>
+              <a:buClr>
+                <a:schemeClr val="dk1"/>
+              </a:buClr>
+              <a:buSzPts val="1100"/>
+              <a:buFont typeface="Arial"/>
+              <a:buNone/>
+            </a:pPr>
+            <a:r>
+              <a:rPr lang="en"/>
+              <a:t>compute and update their forwarding tables with a new poison and then they send out that that poison we have to</a:t>
+            </a:r>
+            <a:endParaRPr/>
+          </a:p>
+          <a:p>
+            <a:pPr marL="0" lvl="0" indent="0" algn="l" rtl="0">
+              <a:spcBef>
+                <a:spcPts val="0"/>
+              </a:spcBef>
+              <a:spcAft>
+                <a:spcPts val="0"/>
+              </a:spcAft>
+              <a:buClr>
+                <a:schemeClr val="dk1"/>
+              </a:buClr>
+              <a:buSzPts val="1100"/>
+              <a:buFont typeface="Arial"/>
+              <a:buNone/>
+            </a:pPr>
+            <a:r>
+              <a:rPr lang="en"/>
+              <a:t>26:59</a:t>
+            </a:r>
+            <a:endParaRPr/>
+          </a:p>
+          <a:p>
+            <a:pPr marL="0" lvl="0" indent="0" algn="l" rtl="0">
+              <a:spcBef>
+                <a:spcPts val="0"/>
+              </a:spcBef>
+              <a:spcAft>
+                <a:spcPts val="0"/>
+              </a:spcAft>
+              <a:buClr>
+                <a:schemeClr val="dk1"/>
+              </a:buClr>
+              <a:buSzPts val="1100"/>
+              <a:buFont typeface="Arial"/>
+              <a:buNone/>
+            </a:pPr>
+            <a:r>
+              <a:rPr lang="en"/>
+              <a:t>wait a little bit for all those routers to accept the poison change their forwarding tables and send out more</a:t>
+            </a:r>
+            <a:endParaRPr/>
+          </a:p>
+          <a:p>
+            <a:pPr marL="0" lvl="0" indent="0" algn="l" rtl="0">
+              <a:spcBef>
+                <a:spcPts val="0"/>
+              </a:spcBef>
+              <a:spcAft>
+                <a:spcPts val="0"/>
+              </a:spcAft>
+              <a:buClr>
+                <a:schemeClr val="dk1"/>
+              </a:buClr>
+              <a:buSzPts val="1100"/>
+              <a:buFont typeface="Arial"/>
+              <a:buNone/>
+            </a:pPr>
+            <a:r>
+              <a:rPr lang="en"/>
+              <a:t>27:05</a:t>
+            </a:r>
+            <a:endParaRPr/>
+          </a:p>
+          <a:p>
+            <a:pPr marL="0" lvl="0" indent="0" algn="l" rtl="0">
+              <a:spcBef>
+                <a:spcPts val="0"/>
+              </a:spcBef>
+              <a:spcAft>
+                <a:spcPts val="0"/>
+              </a:spcAft>
+              <a:buClr>
+                <a:schemeClr val="dk1"/>
+              </a:buClr>
+              <a:buSzPts val="1100"/>
+              <a:buFont typeface="Arial"/>
+              <a:buNone/>
+            </a:pPr>
+            <a:r>
+              <a:rPr lang="en"/>
+              <a:t>poison so there's a bit of computation and depending on how slow your routers are maybe that computation slows down</a:t>
+            </a:r>
+            <a:endParaRPr/>
+          </a:p>
+          <a:p>
+            <a:pPr marL="0" lvl="0" indent="0" algn="l" rtl="0">
+              <a:spcBef>
+                <a:spcPts val="0"/>
+              </a:spcBef>
+              <a:spcAft>
+                <a:spcPts val="0"/>
+              </a:spcAft>
+              <a:buClr>
+                <a:schemeClr val="dk1"/>
+              </a:buClr>
+              <a:buSzPts val="1100"/>
+              <a:buFont typeface="Arial"/>
+              <a:buNone/>
+            </a:pPr>
+            <a:r>
+              <a:rPr lang="en"/>
+              <a:t>27:12</a:t>
+            </a:r>
+            <a:endParaRPr/>
+          </a:p>
+          <a:p>
+            <a:pPr marL="0" lvl="0" indent="0" algn="l" rtl="0">
+              <a:spcBef>
+                <a:spcPts val="0"/>
+              </a:spcBef>
+              <a:spcAft>
+                <a:spcPts val="0"/>
+              </a:spcAft>
+              <a:buClr>
+                <a:schemeClr val="dk1"/>
+              </a:buClr>
+              <a:buSzPts val="1100"/>
+              <a:buFont typeface="Arial"/>
+              <a:buNone/>
+            </a:pPr>
+            <a:r>
+              <a:rPr lang="en"/>
+              <a:t>the propagation and by contrast in link State when something goes down that information can propagate faster because</a:t>
+            </a:r>
+            <a:endParaRPr/>
+          </a:p>
+          <a:p>
+            <a:pPr marL="0" lvl="0" indent="0" algn="l" rtl="0">
+              <a:spcBef>
+                <a:spcPts val="0"/>
+              </a:spcBef>
+              <a:spcAft>
+                <a:spcPts val="0"/>
+              </a:spcAft>
+              <a:buClr>
+                <a:schemeClr val="dk1"/>
+              </a:buClr>
+              <a:buSzPts val="1100"/>
+              <a:buFont typeface="Arial"/>
+              <a:buNone/>
+            </a:pPr>
+            <a:r>
+              <a:rPr lang="en"/>
+              <a:t>27:18</a:t>
+            </a:r>
+            <a:endParaRPr/>
+          </a:p>
+          <a:p>
+            <a:pPr marL="0" lvl="0" indent="0" algn="l" rtl="0">
+              <a:spcBef>
+                <a:spcPts val="0"/>
+              </a:spcBef>
+              <a:spcAft>
+                <a:spcPts val="0"/>
+              </a:spcAft>
+              <a:buClr>
+                <a:schemeClr val="dk1"/>
+              </a:buClr>
+              <a:buSzPts val="1100"/>
+              <a:buFont typeface="Arial"/>
+              <a:buNone/>
+            </a:pPr>
+            <a:r>
+              <a:rPr lang="en"/>
+              <a:t>you just say links down and the next router says oh links down let me tell my friends links down and they receive</a:t>
+            </a:r>
+            <a:endParaRPr/>
+          </a:p>
+          <a:p>
+            <a:pPr marL="0" lvl="0" indent="0" algn="l" rtl="0">
+              <a:spcBef>
+                <a:spcPts val="0"/>
+              </a:spcBef>
+              <a:spcAft>
+                <a:spcPts val="0"/>
+              </a:spcAft>
+              <a:buClr>
+                <a:schemeClr val="dk1"/>
+              </a:buClr>
+              <a:buSzPts val="1100"/>
+              <a:buFont typeface="Arial"/>
+              <a:buNone/>
+            </a:pPr>
+            <a:r>
+              <a:rPr lang="en"/>
+              <a:t>27:26</a:t>
+            </a:r>
+            <a:endParaRPr/>
+          </a:p>
+          <a:p>
+            <a:pPr marL="0" lvl="0" indent="0" algn="l" rtl="0">
+              <a:spcBef>
+                <a:spcPts val="0"/>
+              </a:spcBef>
+              <a:spcAft>
+                <a:spcPts val="0"/>
+              </a:spcAft>
+              <a:buClr>
+                <a:schemeClr val="dk1"/>
+              </a:buClr>
+              <a:buSzPts val="1100"/>
+              <a:buFont typeface="Arial"/>
+              <a:buNone/>
+            </a:pPr>
+            <a:r>
+              <a:rPr lang="en"/>
+              <a:t>links down message and they tell their friends so forth so they don't have to stop and compute things before they tell their neighbors</a:t>
+            </a:r>
+            <a:endParaRPr/>
+          </a:p>
+          <a:p>
+            <a:pPr marL="0" lvl="0" indent="0" algn="l" rtl="0">
+              <a:spcBef>
+                <a:spcPts val="0"/>
+              </a:spcBef>
+              <a:spcAft>
+                <a:spcPts val="0"/>
+              </a:spcAft>
+              <a:buClr>
+                <a:schemeClr val="dk1"/>
+              </a:buClr>
+              <a:buSzPts val="1100"/>
+              <a:buFont typeface="Arial"/>
+              <a:buNone/>
+            </a:pPr>
+            <a:r>
+              <a:rPr lang="en"/>
+              <a:t>27:32</a:t>
+            </a:r>
+            <a:endParaRPr/>
+          </a:p>
+          <a:p>
+            <a:pPr marL="0" lvl="0" indent="0" algn="l" rtl="0">
+              <a:spcBef>
+                <a:spcPts val="0"/>
+              </a:spcBef>
+              <a:spcAft>
+                <a:spcPts val="0"/>
+              </a:spcAft>
+              <a:buClr>
+                <a:schemeClr val="dk1"/>
+              </a:buClr>
+              <a:buSzPts val="1100"/>
+              <a:buFont typeface="Arial"/>
+              <a:buNone/>
+            </a:pPr>
+            <a:r>
+              <a:rPr lang="en"/>
+              <a:t>again not always true kind of depends on how fast your routers are at Computing New Paths but under certain assumptions</a:t>
+            </a:r>
+            <a:endParaRPr/>
+          </a:p>
+          <a:p>
+            <a:pPr marL="0" lvl="0" indent="0" algn="l" rtl="0">
+              <a:spcBef>
+                <a:spcPts val="0"/>
+              </a:spcBef>
+              <a:spcAft>
+                <a:spcPts val="0"/>
+              </a:spcAft>
+              <a:buClr>
+                <a:schemeClr val="dk1"/>
+              </a:buClr>
+              <a:buSzPts val="1100"/>
+              <a:buFont typeface="Arial"/>
+              <a:buNone/>
+            </a:pPr>
+            <a:r>
+              <a:rPr lang="en"/>
+              <a:t>27:38</a:t>
+            </a:r>
+            <a:endParaRPr/>
+          </a:p>
+          <a:p>
+            <a:pPr marL="0" lvl="0" indent="0" algn="l" rtl="0">
+              <a:spcBef>
+                <a:spcPts val="0"/>
+              </a:spcBef>
+              <a:spcAft>
+                <a:spcPts val="0"/>
+              </a:spcAft>
+              <a:buClr>
+                <a:schemeClr val="dk1"/>
+              </a:buClr>
+              <a:buSzPts val="1100"/>
+              <a:buFont typeface="Arial"/>
+              <a:buNone/>
+            </a:pPr>
+            <a:r>
+              <a:rPr lang="en"/>
+              <a:t>it could be the case that link state is a little bit more efficient in real life which do people use turns out it's often</a:t>
+            </a:r>
+            <a:endParaRPr/>
+          </a:p>
+          <a:p>
+            <a:pPr marL="0" lvl="0" indent="0" algn="l" rtl="0">
+              <a:spcBef>
+                <a:spcPts val="0"/>
+              </a:spcBef>
+              <a:spcAft>
+                <a:spcPts val="0"/>
+              </a:spcAft>
+              <a:buClr>
+                <a:schemeClr val="dk1"/>
+              </a:buClr>
+              <a:buSzPts val="1100"/>
+              <a:buFont typeface="Arial"/>
+              <a:buNone/>
+            </a:pPr>
+            <a:r>
+              <a:rPr lang="en"/>
+              <a:t>27:45</a:t>
+            </a:r>
+            <a:endParaRPr/>
+          </a:p>
+          <a:p>
+            <a:pPr marL="0" lvl="0" indent="0" algn="l" rtl="0">
+              <a:spcBef>
+                <a:spcPts val="0"/>
+              </a:spcBef>
+              <a:spcAft>
+                <a:spcPts val="0"/>
+              </a:spcAft>
+              <a:buClr>
+                <a:schemeClr val="dk1"/>
+              </a:buClr>
+              <a:buSzPts val="1100"/>
+              <a:buFont typeface="Arial"/>
+              <a:buNone/>
+            </a:pPr>
+            <a:r>
+              <a:rPr lang="en"/>
+              <a:t>a mixture of both some networks use one some networks use the other there are some protocols that sort of sit in the</a:t>
+            </a:r>
+            <a:endParaRPr/>
+          </a:p>
+          <a:p>
+            <a:pPr marL="0" lvl="0" indent="0" algn="l" rtl="0">
+              <a:spcBef>
+                <a:spcPts val="0"/>
+              </a:spcBef>
+              <a:spcAft>
+                <a:spcPts val="0"/>
+              </a:spcAft>
+              <a:buClr>
+                <a:schemeClr val="dk1"/>
+              </a:buClr>
+              <a:buSzPts val="1100"/>
+              <a:buFont typeface="Arial"/>
+              <a:buNone/>
+            </a:pPr>
+            <a:r>
+              <a:rPr lang="en"/>
+              <a:t>27:50</a:t>
+            </a:r>
+            <a:endParaRPr/>
+          </a:p>
+          <a:p>
+            <a:pPr marL="0" lvl="0" indent="0" algn="l" rtl="0">
+              <a:spcBef>
+                <a:spcPts val="0"/>
+              </a:spcBef>
+              <a:spcAft>
+                <a:spcPts val="0"/>
+              </a:spcAft>
+              <a:buNone/>
+            </a:pPr>
+            <a:r>
+              <a:rPr lang="en"/>
+              <a:t>middle between these two that you can use so you have a bit of a choice </a:t>
+            </a:r>
+            <a:endParaRPr/>
           </a:p>
         </p:txBody>
       </p:sp>
@@ -7606,1374 +8659,6 @@
 </file>
 
 <file path=ppt/notesSlides/notesSlide20.xml><?xml version="1.0" encoding="utf-8"?>
-<p:notes xmlns:a="http://schemas.openxmlformats.org/drawingml/2006/main" xmlns:r="http://schemas.openxmlformats.org/officeDocument/2006/relationships" xmlns:p="http://schemas.openxmlformats.org/presentationml/2006/main" showMasterSp="0" showMasterPhAnim="0">
-  <p:cSld>
-    <p:spTree>
-      <p:nvGrpSpPr>
-        <p:cNvPr id="1" name="Shape 578"/>
-        <p:cNvGrpSpPr/>
-        <p:nvPr/>
-      </p:nvGrpSpPr>
-      <p:grpSpPr>
-        <a:xfrm>
-          <a:off x="0" y="0"/>
-          <a:ext cx="0" cy="0"/>
-          <a:chOff x="0" y="0"/>
-          <a:chExt cx="0" cy="0"/>
-        </a:xfrm>
-      </p:grpSpPr>
-      <p:sp>
-        <p:nvSpPr>
-          <p:cNvPr id="579" name="Google Shape;579;g2787eb72cc9_0_37:notes"/>
-          <p:cNvSpPr>
-            <a:spLocks noGrp="1" noRot="1" noChangeAspect="1"/>
-          </p:cNvSpPr>
-          <p:nvPr>
-            <p:ph type="sldImg" idx="2"/>
-          </p:nvPr>
-        </p:nvSpPr>
-        <p:spPr>
-          <a:xfrm>
-            <a:off x="381000" y="685800"/>
-            <a:ext cx="6096000" cy="3429000"/>
-          </a:xfrm>
-          <a:custGeom>
-            <a:avLst/>
-            <a:gdLst/>
-            <a:ahLst/>
-            <a:cxnLst/>
-            <a:rect l="l" t="t" r="r" b="b"/>
-            <a:pathLst>
-              <a:path w="120000" h="120000" extrusionOk="0">
-                <a:moveTo>
-                  <a:pt x="0" y="0"/>
-                </a:moveTo>
-                <a:lnTo>
-                  <a:pt x="120000" y="0"/>
-                </a:lnTo>
-                <a:lnTo>
-                  <a:pt x="120000" y="120000"/>
-                </a:lnTo>
-                <a:lnTo>
-                  <a:pt x="0" y="120000"/>
-                </a:lnTo>
-                <a:close/>
-              </a:path>
-            </a:pathLst>
-          </a:custGeom>
-        </p:spPr>
-      </p:sp>
-      <p:sp>
-        <p:nvSpPr>
-          <p:cNvPr id="580" name="Google Shape;580;g2787eb72cc9_0_37:notes"/>
-          <p:cNvSpPr txBox="1">
-            <a:spLocks noGrp="1"/>
-          </p:cNvSpPr>
-          <p:nvPr>
-            <p:ph type="body" idx="1"/>
-          </p:nvPr>
-        </p:nvSpPr>
-        <p:spPr>
-          <a:xfrm>
-            <a:off x="685800" y="4343400"/>
-            <a:ext cx="5486400" cy="4114800"/>
-          </a:xfrm>
-          <a:prstGeom prst="rect">
-            <a:avLst/>
-          </a:prstGeom>
-        </p:spPr>
-        <p:txBody>
-          <a:bodyPr spcFirstLastPara="1" wrap="square" lIns="91425" tIns="91425" rIns="91425" bIns="91425" anchor="t" anchorCtr="0">
-            <a:noAutofit/>
-          </a:bodyPr>
-          <a:lstStyle/>
-          <a:p>
-            <a:pPr marL="0" lvl="0" indent="0" algn="l" rtl="0">
-              <a:spcBef>
-                <a:spcPts val="0"/>
-              </a:spcBef>
-              <a:spcAft>
-                <a:spcPts val="0"/>
-              </a:spcAft>
-              <a:buClr>
-                <a:schemeClr val="dk1"/>
-              </a:buClr>
-              <a:buSzPts val="1100"/>
-              <a:buFont typeface="Arial"/>
-              <a:buNone/>
-            </a:pPr>
-            <a:r>
-              <a:rPr lang="en"/>
-              <a:t>so to quickly summarize link State versus dist inspector link State I would</a:t>
-            </a:r>
-            <a:endParaRPr/>
-          </a:p>
-          <a:p>
-            <a:pPr marL="0" lvl="0" indent="0" algn="l" rtl="0">
-              <a:spcBef>
-                <a:spcPts val="0"/>
-              </a:spcBef>
-              <a:spcAft>
-                <a:spcPts val="0"/>
-              </a:spcAft>
-              <a:buClr>
-                <a:schemeClr val="dk1"/>
-              </a:buClr>
-              <a:buSzPts val="1100"/>
-              <a:buFont typeface="Arial"/>
-              <a:buNone/>
-            </a:pPr>
-            <a:r>
-              <a:rPr lang="en"/>
-              <a:t>24:53</a:t>
-            </a:r>
-            <a:endParaRPr/>
-          </a:p>
-          <a:p>
-            <a:pPr marL="0" lvl="0" indent="0" algn="l" rtl="0">
-              <a:spcBef>
-                <a:spcPts val="0"/>
-              </a:spcBef>
-              <a:spcAft>
-                <a:spcPts val="0"/>
-              </a:spcAft>
-              <a:buClr>
-                <a:schemeClr val="dk1"/>
-              </a:buClr>
-              <a:buSzPts val="1100"/>
-              <a:buFont typeface="Arial"/>
-              <a:buNone/>
-            </a:pPr>
-            <a:r>
-              <a:rPr lang="en"/>
-              <a:t>say is probably the simpler of the two protocols if you think about how long it took us to explain one distance Vector</a:t>
-            </a:r>
-            <a:endParaRPr/>
-          </a:p>
-          <a:p>
-            <a:pPr marL="0" lvl="0" indent="0" algn="l" rtl="0">
-              <a:spcBef>
-                <a:spcPts val="0"/>
-              </a:spcBef>
-              <a:spcAft>
-                <a:spcPts val="0"/>
-              </a:spcAft>
-              <a:buClr>
-                <a:schemeClr val="dk1"/>
-              </a:buClr>
-              <a:buSzPts val="1100"/>
-              <a:buFont typeface="Arial"/>
-              <a:buNone/>
-            </a:pPr>
-            <a:r>
-              <a:rPr lang="en"/>
-              <a:t>24:59</a:t>
-            </a:r>
-            <a:endParaRPr/>
-          </a:p>
-          <a:p>
-            <a:pPr marL="0" lvl="0" indent="0" algn="l" rtl="0">
-              <a:spcBef>
-                <a:spcPts val="0"/>
-              </a:spcBef>
-              <a:spcAft>
-                <a:spcPts val="0"/>
-              </a:spcAft>
-              <a:buClr>
-                <a:schemeClr val="dk1"/>
-              </a:buClr>
-              <a:buSzPts val="1100"/>
-              <a:buFont typeface="Arial"/>
-              <a:buNone/>
-            </a:pPr>
-            <a:r>
-              <a:rPr lang="en"/>
-              <a:t>took like two hours to explain link state has taken 25 minutes in counting</a:t>
-            </a:r>
-            <a:endParaRPr/>
-          </a:p>
-          <a:p>
-            <a:pPr marL="0" lvl="0" indent="0" algn="l" rtl="0">
-              <a:spcBef>
-                <a:spcPts val="0"/>
-              </a:spcBef>
-              <a:spcAft>
-                <a:spcPts val="0"/>
-              </a:spcAft>
-              <a:buClr>
-                <a:schemeClr val="dk1"/>
-              </a:buClr>
-              <a:buSzPts val="1100"/>
-              <a:buFont typeface="Arial"/>
-              <a:buNone/>
-            </a:pPr>
-            <a:r>
-              <a:rPr lang="en"/>
-              <a:t>25:05</a:t>
-            </a:r>
-            <a:endParaRPr/>
-          </a:p>
-          <a:p>
-            <a:pPr marL="0" lvl="0" indent="0" algn="l" rtl="0">
-              <a:spcBef>
-                <a:spcPts val="0"/>
-              </a:spcBef>
-              <a:spcAft>
-                <a:spcPts val="0"/>
-              </a:spcAft>
-              <a:buClr>
-                <a:schemeClr val="dk1"/>
-              </a:buClr>
-              <a:buSzPts val="1100"/>
-              <a:buFont typeface="Arial"/>
-              <a:buNone/>
-            </a:pPr>
-            <a:r>
-              <a:rPr lang="en"/>
-              <a:t>so I think it's somewhat simpler there are some details though to make sure that it actually works and that you</a:t>
-            </a:r>
-            <a:endParaRPr/>
-          </a:p>
-          <a:p>
-            <a:pPr marL="0" lvl="0" indent="0" algn="l" rtl="0">
-              <a:spcBef>
-                <a:spcPts val="0"/>
-              </a:spcBef>
-              <a:spcAft>
-                <a:spcPts val="0"/>
-              </a:spcAft>
-              <a:buClr>
-                <a:schemeClr val="dk1"/>
-              </a:buClr>
-              <a:buSzPts val="1100"/>
-              <a:buFont typeface="Arial"/>
-              <a:buNone/>
-            </a:pPr>
-            <a:r>
-              <a:rPr lang="en"/>
-              <a:t>25:11</a:t>
-            </a:r>
-            <a:endParaRPr/>
-          </a:p>
-          <a:p>
-            <a:pPr marL="0" lvl="0" indent="0" algn="l" rtl="0">
-              <a:spcBef>
-                <a:spcPts val="0"/>
-              </a:spcBef>
-              <a:spcAft>
-                <a:spcPts val="0"/>
-              </a:spcAft>
-              <a:buClr>
-                <a:schemeClr val="dk1"/>
-              </a:buClr>
-              <a:buSzPts val="1100"/>
-              <a:buFont typeface="Arial"/>
-              <a:buNone/>
-            </a:pPr>
-            <a:r>
-              <a:rPr lang="en"/>
-              <a:t>don't run into bugs like infinite advertisements but at a very high level everyone floods the information that</a:t>
-            </a:r>
-            <a:endParaRPr/>
-          </a:p>
-          <a:p>
-            <a:pPr marL="0" lvl="0" indent="0" algn="l" rtl="0">
-              <a:spcBef>
-                <a:spcPts val="0"/>
-              </a:spcBef>
-              <a:spcAft>
-                <a:spcPts val="0"/>
-              </a:spcAft>
-              <a:buClr>
-                <a:schemeClr val="dk1"/>
-              </a:buClr>
-              <a:buSzPts val="1100"/>
-              <a:buFont typeface="Arial"/>
-              <a:buNone/>
-            </a:pPr>
-            <a:r>
-              <a:rPr lang="en"/>
-              <a:t>25:17</a:t>
-            </a:r>
-            <a:endParaRPr/>
-          </a:p>
-          <a:p>
-            <a:pPr marL="0" lvl="0" indent="0" algn="l" rtl="0">
-              <a:spcBef>
-                <a:spcPts val="0"/>
-              </a:spcBef>
-              <a:spcAft>
-                <a:spcPts val="0"/>
-              </a:spcAft>
-              <a:buClr>
-                <a:schemeClr val="dk1"/>
-              </a:buClr>
-              <a:buSzPts val="1100"/>
-              <a:buFont typeface="Arial"/>
-              <a:buNone/>
-            </a:pPr>
-            <a:r>
-              <a:rPr lang="en"/>
-              <a:t>they receive this gives everyone a global map of the network and everyone independently runs their own shortest</a:t>
-            </a:r>
-            <a:endParaRPr/>
-          </a:p>
-          <a:p>
-            <a:pPr marL="0" lvl="0" indent="0" algn="l" rtl="0">
-              <a:spcBef>
-                <a:spcPts val="0"/>
-              </a:spcBef>
-              <a:spcAft>
-                <a:spcPts val="0"/>
-              </a:spcAft>
-              <a:buClr>
-                <a:schemeClr val="dk1"/>
-              </a:buClr>
-              <a:buSzPts val="1100"/>
-              <a:buFont typeface="Arial"/>
-              <a:buNone/>
-            </a:pPr>
-            <a:r>
-              <a:rPr lang="en"/>
-              <a:t>25:24</a:t>
-            </a:r>
-            <a:endParaRPr/>
-          </a:p>
-          <a:p>
-            <a:pPr marL="0" lvl="0" indent="0" algn="l" rtl="0">
-              <a:spcBef>
-                <a:spcPts val="0"/>
-              </a:spcBef>
-              <a:spcAft>
-                <a:spcPts val="0"/>
-              </a:spcAft>
-              <a:buClr>
-                <a:schemeClr val="dk1"/>
-              </a:buClr>
-              <a:buSzPts val="1100"/>
-              <a:buFont typeface="Arial"/>
-              <a:buNone/>
-            </a:pPr>
-            <a:r>
-              <a:rPr lang="en"/>
-              <a:t>path algorithm to compute the next tops and to compare which which one is better</a:t>
-            </a:r>
-            <a:endParaRPr/>
-          </a:p>
-          <a:p>
-            <a:pPr marL="0" lvl="0" indent="0" algn="l" rtl="0">
-              <a:spcBef>
-                <a:spcPts val="0"/>
-              </a:spcBef>
-              <a:spcAft>
-                <a:spcPts val="0"/>
-              </a:spcAft>
-              <a:buClr>
-                <a:schemeClr val="dk1"/>
-              </a:buClr>
-              <a:buSzPts val="1100"/>
-              <a:buFont typeface="Arial"/>
-              <a:buNone/>
-            </a:pPr>
-            <a:r>
-              <a:rPr lang="en"/>
-              <a:t>25:29</a:t>
-            </a:r>
-            <a:endParaRPr/>
-          </a:p>
-          <a:p>
-            <a:pPr marL="0" lvl="0" indent="0" algn="l" rtl="0">
-              <a:spcBef>
-                <a:spcPts val="0"/>
-              </a:spcBef>
-              <a:spcAft>
-                <a:spcPts val="0"/>
-              </a:spcAft>
-              <a:buClr>
-                <a:schemeClr val="dk1"/>
-              </a:buClr>
-              <a:buSzPts val="1100"/>
-              <a:buFont typeface="Arial"/>
-              <a:buNone/>
-            </a:pPr>
-            <a:r>
-              <a:rPr lang="en"/>
-              <a:t>which one you might want to use here are some reasons why you might want to choose one over the other so one thing</a:t>
-            </a:r>
-            <a:endParaRPr/>
-          </a:p>
-          <a:p>
-            <a:pPr marL="0" lvl="0" indent="0" algn="l" rtl="0">
-              <a:spcBef>
-                <a:spcPts val="0"/>
-              </a:spcBef>
-              <a:spcAft>
-                <a:spcPts val="0"/>
-              </a:spcAft>
-              <a:buClr>
-                <a:schemeClr val="dk1"/>
-              </a:buClr>
-              <a:buSzPts val="1100"/>
-              <a:buFont typeface="Arial"/>
-              <a:buNone/>
-            </a:pPr>
-            <a:r>
-              <a:rPr lang="en"/>
-              <a:t>25:35</a:t>
-            </a:r>
-            <a:endParaRPr/>
-          </a:p>
-          <a:p>
-            <a:pPr marL="0" lvl="0" indent="0" algn="l" rtl="0">
-              <a:spcBef>
-                <a:spcPts val="0"/>
-              </a:spcBef>
-              <a:spcAft>
-                <a:spcPts val="0"/>
-              </a:spcAft>
-              <a:buClr>
-                <a:schemeClr val="dk1"/>
-              </a:buClr>
-              <a:buSzPts val="1100"/>
-              <a:buFont typeface="Arial"/>
-              <a:buNone/>
-            </a:pPr>
-            <a:r>
-              <a:rPr lang="en"/>
-              <a:t>that's nice about link state is that routers have a bit of control over the path that they choose so for example if</a:t>
-            </a:r>
-            <a:endParaRPr/>
-          </a:p>
-          <a:p>
-            <a:pPr marL="0" lvl="0" indent="0" algn="l" rtl="0">
-              <a:spcBef>
-                <a:spcPts val="0"/>
-              </a:spcBef>
-              <a:spcAft>
-                <a:spcPts val="0"/>
-              </a:spcAft>
-              <a:buClr>
-                <a:schemeClr val="dk1"/>
-              </a:buClr>
-              <a:buSzPts val="1100"/>
-              <a:buFont typeface="Arial"/>
-              <a:buNone/>
-            </a:pPr>
-            <a:r>
-              <a:rPr lang="en"/>
-              <a:t>25:42</a:t>
-            </a:r>
-            <a:endParaRPr/>
-          </a:p>
-          <a:p>
-            <a:pPr marL="0" lvl="0" indent="0" algn="l" rtl="0">
-              <a:spcBef>
-                <a:spcPts val="0"/>
-              </a:spcBef>
-              <a:spcAft>
-                <a:spcPts val="0"/>
-              </a:spcAft>
-              <a:buClr>
-                <a:schemeClr val="dk1"/>
-              </a:buClr>
-              <a:buSzPts val="1100"/>
-              <a:buFont typeface="Arial"/>
-              <a:buNone/>
-            </a:pPr>
-            <a:r>
-              <a:rPr lang="en"/>
-              <a:t>you really dislike R2 for some reason not sure why you would but if R1 thinks</a:t>
-            </a:r>
-            <a:endParaRPr/>
-          </a:p>
-          <a:p>
-            <a:pPr marL="0" lvl="0" indent="0" algn="l" rtl="0">
-              <a:spcBef>
-                <a:spcPts val="0"/>
-              </a:spcBef>
-              <a:spcAft>
-                <a:spcPts val="0"/>
-              </a:spcAft>
-              <a:buClr>
-                <a:schemeClr val="dk1"/>
-              </a:buClr>
-              <a:buSzPts val="1100"/>
-              <a:buFont typeface="Arial"/>
-              <a:buNone/>
-            </a:pPr>
-            <a:r>
-              <a:rPr lang="en"/>
-              <a:t>25:47</a:t>
-            </a:r>
-            <a:endParaRPr/>
-          </a:p>
-          <a:p>
-            <a:pPr marL="0" lvl="0" indent="0" algn="l" rtl="0">
-              <a:spcBef>
-                <a:spcPts val="0"/>
-              </a:spcBef>
-              <a:spcAft>
-                <a:spcPts val="0"/>
-              </a:spcAft>
-              <a:buClr>
-                <a:schemeClr val="dk1"/>
-              </a:buClr>
-              <a:buSzPts val="1100"/>
-              <a:buFont typeface="Arial"/>
-              <a:buNone/>
-            </a:pPr>
-            <a:r>
-              <a:rPr lang="en"/>
-              <a:t>I really hate R2 it can just send packets using R3 because it has a full picture of the network by contrast in</a:t>
-            </a:r>
-            <a:endParaRPr/>
-          </a:p>
-          <a:p>
-            <a:pPr marL="0" lvl="0" indent="0" algn="l" rtl="0">
-              <a:spcBef>
-                <a:spcPts val="0"/>
-              </a:spcBef>
-              <a:spcAft>
-                <a:spcPts val="0"/>
-              </a:spcAft>
-              <a:buClr>
-                <a:schemeClr val="dk1"/>
-              </a:buClr>
-              <a:buSzPts val="1100"/>
-              <a:buFont typeface="Arial"/>
-              <a:buNone/>
-            </a:pPr>
-            <a:r>
-              <a:rPr lang="en"/>
-              <a:t>25:55</a:t>
-            </a:r>
-            <a:endParaRPr/>
-          </a:p>
-          <a:p>
-            <a:pPr marL="0" lvl="0" indent="0" algn="l" rtl="0">
-              <a:spcBef>
-                <a:spcPts val="0"/>
-              </a:spcBef>
-              <a:spcAft>
-                <a:spcPts val="0"/>
-              </a:spcAft>
-              <a:buClr>
-                <a:schemeClr val="dk1"/>
-              </a:buClr>
-              <a:buSzPts val="1100"/>
-              <a:buFont typeface="Arial"/>
-              <a:buNone/>
-            </a:pPr>
-            <a:r>
-              <a:rPr lang="en"/>
-              <a:t>distance Vector you have to trust what your neighbor says if your neighbor says I can reach with path two but I can</a:t>
-            </a:r>
-            <a:endParaRPr/>
-          </a:p>
-          <a:p>
-            <a:pPr marL="0" lvl="0" indent="0" algn="l" rtl="0">
-              <a:spcBef>
-                <a:spcPts val="0"/>
-              </a:spcBef>
-              <a:spcAft>
-                <a:spcPts val="0"/>
-              </a:spcAft>
-              <a:buClr>
-                <a:schemeClr val="dk1"/>
-              </a:buClr>
-              <a:buSzPts val="1100"/>
-              <a:buFont typeface="Arial"/>
-              <a:buNone/>
-            </a:pPr>
-            <a:r>
-              <a:rPr lang="en"/>
-              <a:t>26:01</a:t>
-            </a:r>
-            <a:endParaRPr/>
-          </a:p>
-          <a:p>
-            <a:pPr marL="0" lvl="0" indent="0" algn="l" rtl="0">
-              <a:spcBef>
-                <a:spcPts val="0"/>
-              </a:spcBef>
-              <a:spcAft>
-                <a:spcPts val="0"/>
-              </a:spcAft>
-              <a:buClr>
-                <a:schemeClr val="dk1"/>
-              </a:buClr>
-              <a:buSzPts val="1100"/>
-              <a:buFont typeface="Arial"/>
-              <a:buNone/>
-            </a:pPr>
-            <a:r>
-              <a:rPr lang="en"/>
-              <a:t>reach a with cost two you have to trust what they say maybe they have a bug that</a:t>
-            </a:r>
-            <a:endParaRPr/>
-          </a:p>
-          <a:p>
-            <a:pPr marL="0" lvl="0" indent="0" algn="l" rtl="0">
-              <a:spcBef>
-                <a:spcPts val="0"/>
-              </a:spcBef>
-              <a:spcAft>
-                <a:spcPts val="0"/>
-              </a:spcAft>
-              <a:buClr>
-                <a:schemeClr val="dk1"/>
-              </a:buClr>
-              <a:buSzPts val="1100"/>
-              <a:buFont typeface="Arial"/>
-              <a:buNone/>
-            </a:pPr>
-            <a:r>
-              <a:rPr lang="en"/>
-              <a:t>26:06</a:t>
-            </a:r>
-            <a:endParaRPr/>
-          </a:p>
-          <a:p>
-            <a:pPr marL="0" lvl="0" indent="0" algn="l" rtl="0">
-              <a:spcBef>
-                <a:spcPts val="0"/>
-              </a:spcBef>
-              <a:spcAft>
-                <a:spcPts val="0"/>
-              </a:spcAft>
-              <a:buClr>
-                <a:schemeClr val="dk1"/>
-              </a:buClr>
-              <a:buSzPts val="1100"/>
-              <a:buFont typeface="Arial"/>
-              <a:buNone/>
-            </a:pPr>
-            <a:r>
-              <a:rPr lang="en"/>
-              <a:t>gets introduced and now you're stuck using incorrect information you don't know what path they're using so link</a:t>
-            </a:r>
-            <a:endParaRPr/>
-          </a:p>
-          <a:p>
-            <a:pPr marL="0" lvl="0" indent="0" algn="l" rtl="0">
-              <a:spcBef>
-                <a:spcPts val="0"/>
-              </a:spcBef>
-              <a:spcAft>
-                <a:spcPts val="0"/>
-              </a:spcAft>
-              <a:buClr>
-                <a:schemeClr val="dk1"/>
-              </a:buClr>
-              <a:buSzPts val="1100"/>
-              <a:buFont typeface="Arial"/>
-              <a:buNone/>
-            </a:pPr>
-            <a:r>
-              <a:rPr lang="en"/>
-              <a:t>26:12</a:t>
-            </a:r>
-            <a:endParaRPr/>
-          </a:p>
-          <a:p>
-            <a:pPr marL="0" lvl="0" indent="0" algn="l" rtl="0">
-              <a:spcBef>
-                <a:spcPts val="0"/>
-              </a:spcBef>
-              <a:spcAft>
-                <a:spcPts val="0"/>
-              </a:spcAft>
-              <a:buClr>
-                <a:schemeClr val="dk1"/>
-              </a:buClr>
-              <a:buSzPts val="1100"/>
-              <a:buFont typeface="Arial"/>
-              <a:buNone/>
-            </a:pPr>
-            <a:r>
-              <a:rPr lang="en"/>
-              <a:t>State because you have a global picture of the network you get a little bit more control over what path you want to</a:t>
-            </a:r>
-            <a:endParaRPr/>
-          </a:p>
-          <a:p>
-            <a:pPr marL="0" lvl="0" indent="0" algn="l" rtl="0">
-              <a:spcBef>
-                <a:spcPts val="0"/>
-              </a:spcBef>
-              <a:spcAft>
-                <a:spcPts val="0"/>
-              </a:spcAft>
-              <a:buClr>
-                <a:schemeClr val="dk1"/>
-              </a:buClr>
-              <a:buSzPts val="1100"/>
-              <a:buFont typeface="Arial"/>
-              <a:buNone/>
-            </a:pPr>
-            <a:r>
-              <a:rPr lang="en"/>
-              <a:t>26:19</a:t>
-            </a:r>
-            <a:endParaRPr/>
-          </a:p>
-          <a:p>
-            <a:pPr marL="0" lvl="0" indent="0" algn="l" rtl="0">
-              <a:spcBef>
-                <a:spcPts val="0"/>
-              </a:spcBef>
-              <a:spcAft>
-                <a:spcPts val="0"/>
-              </a:spcAft>
-              <a:buClr>
-                <a:schemeClr val="dk1"/>
-              </a:buClr>
-              <a:buSzPts val="1100"/>
-              <a:buFont typeface="Arial"/>
-              <a:buNone/>
-            </a:pPr>
-            <a:r>
-              <a:rPr lang="en"/>
-              <a:t>choose and compare with distance Vector where you receive advertisements from your neighbors you're not sure if</a:t>
-            </a:r>
-            <a:endParaRPr/>
-          </a:p>
-          <a:p>
-            <a:pPr marL="0" lvl="0" indent="0" algn="l" rtl="0">
-              <a:spcBef>
-                <a:spcPts val="0"/>
-              </a:spcBef>
-              <a:spcAft>
-                <a:spcPts val="0"/>
-              </a:spcAft>
-              <a:buClr>
-                <a:schemeClr val="dk1"/>
-              </a:buClr>
-              <a:buSzPts val="1100"/>
-              <a:buFont typeface="Arial"/>
-              <a:buNone/>
-            </a:pPr>
-            <a:r>
-              <a:rPr lang="en"/>
-              <a:t>26:24</a:t>
-            </a:r>
-            <a:endParaRPr/>
-          </a:p>
-          <a:p>
-            <a:pPr marL="0" lvl="0" indent="0" algn="l" rtl="0">
-              <a:spcBef>
-                <a:spcPts val="0"/>
-              </a:spcBef>
-              <a:spcAft>
-                <a:spcPts val="0"/>
-              </a:spcAft>
-              <a:buClr>
-                <a:schemeClr val="dk1"/>
-              </a:buClr>
-              <a:buSzPts val="1100"/>
-              <a:buFont typeface="Arial"/>
-              <a:buNone/>
-            </a:pPr>
-            <a:r>
-              <a:rPr lang="en"/>
-              <a:t>they're accurate or not you're not sure exactly what happens to the packet after the next top you just have to trust what</a:t>
-            </a:r>
-            <a:endParaRPr/>
-          </a:p>
-          <a:p>
-            <a:pPr marL="0" lvl="0" indent="0" algn="l" rtl="0">
-              <a:spcBef>
-                <a:spcPts val="0"/>
-              </a:spcBef>
-              <a:spcAft>
-                <a:spcPts val="0"/>
-              </a:spcAft>
-              <a:buClr>
-                <a:schemeClr val="dk1"/>
-              </a:buClr>
-              <a:buSzPts val="1100"/>
-              <a:buFont typeface="Arial"/>
-              <a:buNone/>
-            </a:pPr>
-            <a:r>
-              <a:rPr lang="en"/>
-              <a:t>26:30</a:t>
-            </a:r>
-            <a:endParaRPr/>
-          </a:p>
-          <a:p>
-            <a:pPr marL="0" lvl="0" indent="0" algn="l" rtl="0">
-              <a:spcBef>
-                <a:spcPts val="0"/>
-              </a:spcBef>
-              <a:spcAft>
-                <a:spcPts val="0"/>
-              </a:spcAft>
-              <a:buClr>
-                <a:schemeClr val="dk1"/>
-              </a:buClr>
-              <a:buSzPts val="1100"/>
-              <a:buFont typeface="Arial"/>
-              <a:buNone/>
-            </a:pPr>
-            <a:r>
-              <a:rPr lang="en"/>
-              <a:t>they say and pick whatever you think is best and arguably this one is kind of</a:t>
-            </a:r>
-            <a:endParaRPr/>
-          </a:p>
-          <a:p>
-            <a:pPr marL="0" lvl="0" indent="0" algn="l" rtl="0">
-              <a:spcBef>
-                <a:spcPts val="0"/>
-              </a:spcBef>
-              <a:spcAft>
-                <a:spcPts val="0"/>
-              </a:spcAft>
-              <a:buClr>
-                <a:schemeClr val="dk1"/>
-              </a:buClr>
-              <a:buSzPts val="1100"/>
-              <a:buFont typeface="Arial"/>
-              <a:buNone/>
-            </a:pPr>
-            <a:r>
-              <a:rPr lang="en"/>
-              <a:t>26:35</a:t>
-            </a:r>
-            <a:endParaRPr/>
-          </a:p>
-          <a:p>
-            <a:pPr marL="0" lvl="0" indent="0" algn="l" rtl="0">
-              <a:spcBef>
-                <a:spcPts val="0"/>
-              </a:spcBef>
-              <a:spcAft>
-                <a:spcPts val="0"/>
-              </a:spcAft>
-              <a:buClr>
-                <a:schemeClr val="dk1"/>
-              </a:buClr>
-              <a:buSzPts val="1100"/>
-              <a:buFont typeface="Arial"/>
-              <a:buNone/>
-            </a:pPr>
-            <a:r>
-              <a:rPr lang="en"/>
-              <a:t>debatable and depends on your network topology there are some cases where links made is a little bit better at</a:t>
-            </a:r>
-            <a:endParaRPr/>
-          </a:p>
-          <a:p>
-            <a:pPr marL="0" lvl="0" indent="0" algn="l" rtl="0">
-              <a:spcBef>
-                <a:spcPts val="0"/>
-              </a:spcBef>
-              <a:spcAft>
-                <a:spcPts val="0"/>
-              </a:spcAft>
-              <a:buClr>
-                <a:schemeClr val="dk1"/>
-              </a:buClr>
-              <a:buSzPts val="1100"/>
-              <a:buFont typeface="Arial"/>
-              <a:buNone/>
-            </a:pPr>
-            <a:r>
-              <a:rPr lang="en"/>
-              <a:t>26:40</a:t>
-            </a:r>
-            <a:endParaRPr/>
-          </a:p>
-          <a:p>
-            <a:pPr marL="0" lvl="0" indent="0" algn="l" rtl="0">
-              <a:spcBef>
-                <a:spcPts val="0"/>
-              </a:spcBef>
-              <a:spcAft>
-                <a:spcPts val="0"/>
-              </a:spcAft>
-              <a:buClr>
-                <a:schemeClr val="dk1"/>
-              </a:buClr>
-              <a:buSzPts val="1100"/>
-              <a:buFont typeface="Arial"/>
-              <a:buNone/>
-            </a:pPr>
-            <a:r>
-              <a:rPr lang="en"/>
-              <a:t>converging and the idea would be that in distance Vector the propagation involves computation at every single step so you</a:t>
-            </a:r>
-            <a:endParaRPr/>
-          </a:p>
-          <a:p>
-            <a:pPr marL="0" lvl="0" indent="0" algn="l" rtl="0">
-              <a:spcBef>
-                <a:spcPts val="0"/>
-              </a:spcBef>
-              <a:spcAft>
-                <a:spcPts val="0"/>
-              </a:spcAft>
-              <a:buClr>
-                <a:schemeClr val="dk1"/>
-              </a:buClr>
-              <a:buSzPts val="1100"/>
-              <a:buFont typeface="Arial"/>
-              <a:buNone/>
-            </a:pPr>
-            <a:r>
-              <a:rPr lang="en"/>
-              <a:t>26:48</a:t>
-            </a:r>
-            <a:endParaRPr/>
-          </a:p>
-          <a:p>
-            <a:pPr marL="0" lvl="0" indent="0" algn="l" rtl="0">
-              <a:spcBef>
-                <a:spcPts val="0"/>
-              </a:spcBef>
-              <a:spcAft>
-                <a:spcPts val="0"/>
-              </a:spcAft>
-              <a:buClr>
-                <a:schemeClr val="dk1"/>
-              </a:buClr>
-              <a:buSzPts val="1100"/>
-              <a:buFont typeface="Arial"/>
-              <a:buNone/>
-            </a:pPr>
-            <a:r>
-              <a:rPr lang="en"/>
-              <a:t>propagate information that a link has gone down you send poison and you have to wait a little bit for everyone to</a:t>
-            </a:r>
-            <a:endParaRPr/>
-          </a:p>
-          <a:p>
-            <a:pPr marL="0" lvl="0" indent="0" algn="l" rtl="0">
-              <a:spcBef>
-                <a:spcPts val="0"/>
-              </a:spcBef>
-              <a:spcAft>
-                <a:spcPts val="0"/>
-              </a:spcAft>
-              <a:buClr>
-                <a:schemeClr val="dk1"/>
-              </a:buClr>
-              <a:buSzPts val="1100"/>
-              <a:buFont typeface="Arial"/>
-              <a:buNone/>
-            </a:pPr>
-            <a:r>
-              <a:rPr lang="en"/>
-              <a:t>26:54</a:t>
-            </a:r>
-            <a:endParaRPr/>
-          </a:p>
-          <a:p>
-            <a:pPr marL="0" lvl="0" indent="0" algn="l" rtl="0">
-              <a:spcBef>
-                <a:spcPts val="0"/>
-              </a:spcBef>
-              <a:spcAft>
-                <a:spcPts val="0"/>
-              </a:spcAft>
-              <a:buClr>
-                <a:schemeClr val="dk1"/>
-              </a:buClr>
-              <a:buSzPts val="1100"/>
-              <a:buFont typeface="Arial"/>
-              <a:buNone/>
-            </a:pPr>
-            <a:r>
-              <a:rPr lang="en"/>
-              <a:t>compute and update their forwarding tables with a new poison and then they send out that that poison we have to</a:t>
-            </a:r>
-            <a:endParaRPr/>
-          </a:p>
-          <a:p>
-            <a:pPr marL="0" lvl="0" indent="0" algn="l" rtl="0">
-              <a:spcBef>
-                <a:spcPts val="0"/>
-              </a:spcBef>
-              <a:spcAft>
-                <a:spcPts val="0"/>
-              </a:spcAft>
-              <a:buClr>
-                <a:schemeClr val="dk1"/>
-              </a:buClr>
-              <a:buSzPts val="1100"/>
-              <a:buFont typeface="Arial"/>
-              <a:buNone/>
-            </a:pPr>
-            <a:r>
-              <a:rPr lang="en"/>
-              <a:t>26:59</a:t>
-            </a:r>
-            <a:endParaRPr/>
-          </a:p>
-          <a:p>
-            <a:pPr marL="0" lvl="0" indent="0" algn="l" rtl="0">
-              <a:spcBef>
-                <a:spcPts val="0"/>
-              </a:spcBef>
-              <a:spcAft>
-                <a:spcPts val="0"/>
-              </a:spcAft>
-              <a:buClr>
-                <a:schemeClr val="dk1"/>
-              </a:buClr>
-              <a:buSzPts val="1100"/>
-              <a:buFont typeface="Arial"/>
-              <a:buNone/>
-            </a:pPr>
-            <a:r>
-              <a:rPr lang="en"/>
-              <a:t>wait a little bit for all those routers to accept the poison change their forwarding tables and send out more</a:t>
-            </a:r>
-            <a:endParaRPr/>
-          </a:p>
-          <a:p>
-            <a:pPr marL="0" lvl="0" indent="0" algn="l" rtl="0">
-              <a:spcBef>
-                <a:spcPts val="0"/>
-              </a:spcBef>
-              <a:spcAft>
-                <a:spcPts val="0"/>
-              </a:spcAft>
-              <a:buClr>
-                <a:schemeClr val="dk1"/>
-              </a:buClr>
-              <a:buSzPts val="1100"/>
-              <a:buFont typeface="Arial"/>
-              <a:buNone/>
-            </a:pPr>
-            <a:r>
-              <a:rPr lang="en"/>
-              <a:t>27:05</a:t>
-            </a:r>
-            <a:endParaRPr/>
-          </a:p>
-          <a:p>
-            <a:pPr marL="0" lvl="0" indent="0" algn="l" rtl="0">
-              <a:spcBef>
-                <a:spcPts val="0"/>
-              </a:spcBef>
-              <a:spcAft>
-                <a:spcPts val="0"/>
-              </a:spcAft>
-              <a:buClr>
-                <a:schemeClr val="dk1"/>
-              </a:buClr>
-              <a:buSzPts val="1100"/>
-              <a:buFont typeface="Arial"/>
-              <a:buNone/>
-            </a:pPr>
-            <a:r>
-              <a:rPr lang="en"/>
-              <a:t>poison so there's a bit of computation and depending on how slow your routers are maybe that computation slows down</a:t>
-            </a:r>
-            <a:endParaRPr/>
-          </a:p>
-          <a:p>
-            <a:pPr marL="0" lvl="0" indent="0" algn="l" rtl="0">
-              <a:spcBef>
-                <a:spcPts val="0"/>
-              </a:spcBef>
-              <a:spcAft>
-                <a:spcPts val="0"/>
-              </a:spcAft>
-              <a:buClr>
-                <a:schemeClr val="dk1"/>
-              </a:buClr>
-              <a:buSzPts val="1100"/>
-              <a:buFont typeface="Arial"/>
-              <a:buNone/>
-            </a:pPr>
-            <a:r>
-              <a:rPr lang="en"/>
-              <a:t>27:12</a:t>
-            </a:r>
-            <a:endParaRPr/>
-          </a:p>
-          <a:p>
-            <a:pPr marL="0" lvl="0" indent="0" algn="l" rtl="0">
-              <a:spcBef>
-                <a:spcPts val="0"/>
-              </a:spcBef>
-              <a:spcAft>
-                <a:spcPts val="0"/>
-              </a:spcAft>
-              <a:buClr>
-                <a:schemeClr val="dk1"/>
-              </a:buClr>
-              <a:buSzPts val="1100"/>
-              <a:buFont typeface="Arial"/>
-              <a:buNone/>
-            </a:pPr>
-            <a:r>
-              <a:rPr lang="en"/>
-              <a:t>the propagation and by contrast in link State when something goes down that information can propagate faster because</a:t>
-            </a:r>
-            <a:endParaRPr/>
-          </a:p>
-          <a:p>
-            <a:pPr marL="0" lvl="0" indent="0" algn="l" rtl="0">
-              <a:spcBef>
-                <a:spcPts val="0"/>
-              </a:spcBef>
-              <a:spcAft>
-                <a:spcPts val="0"/>
-              </a:spcAft>
-              <a:buClr>
-                <a:schemeClr val="dk1"/>
-              </a:buClr>
-              <a:buSzPts val="1100"/>
-              <a:buFont typeface="Arial"/>
-              <a:buNone/>
-            </a:pPr>
-            <a:r>
-              <a:rPr lang="en"/>
-              <a:t>27:18</a:t>
-            </a:r>
-            <a:endParaRPr/>
-          </a:p>
-          <a:p>
-            <a:pPr marL="0" lvl="0" indent="0" algn="l" rtl="0">
-              <a:spcBef>
-                <a:spcPts val="0"/>
-              </a:spcBef>
-              <a:spcAft>
-                <a:spcPts val="0"/>
-              </a:spcAft>
-              <a:buClr>
-                <a:schemeClr val="dk1"/>
-              </a:buClr>
-              <a:buSzPts val="1100"/>
-              <a:buFont typeface="Arial"/>
-              <a:buNone/>
-            </a:pPr>
-            <a:r>
-              <a:rPr lang="en"/>
-              <a:t>you just say links down and the next router says oh links down let me tell my friends links down and they receive</a:t>
-            </a:r>
-            <a:endParaRPr/>
-          </a:p>
-          <a:p>
-            <a:pPr marL="0" lvl="0" indent="0" algn="l" rtl="0">
-              <a:spcBef>
-                <a:spcPts val="0"/>
-              </a:spcBef>
-              <a:spcAft>
-                <a:spcPts val="0"/>
-              </a:spcAft>
-              <a:buClr>
-                <a:schemeClr val="dk1"/>
-              </a:buClr>
-              <a:buSzPts val="1100"/>
-              <a:buFont typeface="Arial"/>
-              <a:buNone/>
-            </a:pPr>
-            <a:r>
-              <a:rPr lang="en"/>
-              <a:t>27:26</a:t>
-            </a:r>
-            <a:endParaRPr/>
-          </a:p>
-          <a:p>
-            <a:pPr marL="0" lvl="0" indent="0" algn="l" rtl="0">
-              <a:spcBef>
-                <a:spcPts val="0"/>
-              </a:spcBef>
-              <a:spcAft>
-                <a:spcPts val="0"/>
-              </a:spcAft>
-              <a:buClr>
-                <a:schemeClr val="dk1"/>
-              </a:buClr>
-              <a:buSzPts val="1100"/>
-              <a:buFont typeface="Arial"/>
-              <a:buNone/>
-            </a:pPr>
-            <a:r>
-              <a:rPr lang="en"/>
-              <a:t>links down message and they tell their friends so forth so they don't have to stop and compute things before they tell their neighbors</a:t>
-            </a:r>
-            <a:endParaRPr/>
-          </a:p>
-          <a:p>
-            <a:pPr marL="0" lvl="0" indent="0" algn="l" rtl="0">
-              <a:spcBef>
-                <a:spcPts val="0"/>
-              </a:spcBef>
-              <a:spcAft>
-                <a:spcPts val="0"/>
-              </a:spcAft>
-              <a:buClr>
-                <a:schemeClr val="dk1"/>
-              </a:buClr>
-              <a:buSzPts val="1100"/>
-              <a:buFont typeface="Arial"/>
-              <a:buNone/>
-            </a:pPr>
-            <a:r>
-              <a:rPr lang="en"/>
-              <a:t>27:32</a:t>
-            </a:r>
-            <a:endParaRPr/>
-          </a:p>
-          <a:p>
-            <a:pPr marL="0" lvl="0" indent="0" algn="l" rtl="0">
-              <a:spcBef>
-                <a:spcPts val="0"/>
-              </a:spcBef>
-              <a:spcAft>
-                <a:spcPts val="0"/>
-              </a:spcAft>
-              <a:buClr>
-                <a:schemeClr val="dk1"/>
-              </a:buClr>
-              <a:buSzPts val="1100"/>
-              <a:buFont typeface="Arial"/>
-              <a:buNone/>
-            </a:pPr>
-            <a:r>
-              <a:rPr lang="en"/>
-              <a:t>again not always true kind of depends on how fast your routers are at Computing New Paths but under certain assumptions</a:t>
-            </a:r>
-            <a:endParaRPr/>
-          </a:p>
-          <a:p>
-            <a:pPr marL="0" lvl="0" indent="0" algn="l" rtl="0">
-              <a:spcBef>
-                <a:spcPts val="0"/>
-              </a:spcBef>
-              <a:spcAft>
-                <a:spcPts val="0"/>
-              </a:spcAft>
-              <a:buClr>
-                <a:schemeClr val="dk1"/>
-              </a:buClr>
-              <a:buSzPts val="1100"/>
-              <a:buFont typeface="Arial"/>
-              <a:buNone/>
-            </a:pPr>
-            <a:r>
-              <a:rPr lang="en"/>
-              <a:t>27:38</a:t>
-            </a:r>
-            <a:endParaRPr/>
-          </a:p>
-          <a:p>
-            <a:pPr marL="0" lvl="0" indent="0" algn="l" rtl="0">
-              <a:spcBef>
-                <a:spcPts val="0"/>
-              </a:spcBef>
-              <a:spcAft>
-                <a:spcPts val="0"/>
-              </a:spcAft>
-              <a:buClr>
-                <a:schemeClr val="dk1"/>
-              </a:buClr>
-              <a:buSzPts val="1100"/>
-              <a:buFont typeface="Arial"/>
-              <a:buNone/>
-            </a:pPr>
-            <a:r>
-              <a:rPr lang="en"/>
-              <a:t>it could be the case that link state is a little bit more efficient in real life which do people use turns out it's often</a:t>
-            </a:r>
-            <a:endParaRPr/>
-          </a:p>
-          <a:p>
-            <a:pPr marL="0" lvl="0" indent="0" algn="l" rtl="0">
-              <a:spcBef>
-                <a:spcPts val="0"/>
-              </a:spcBef>
-              <a:spcAft>
-                <a:spcPts val="0"/>
-              </a:spcAft>
-              <a:buClr>
-                <a:schemeClr val="dk1"/>
-              </a:buClr>
-              <a:buSzPts val="1100"/>
-              <a:buFont typeface="Arial"/>
-              <a:buNone/>
-            </a:pPr>
-            <a:r>
-              <a:rPr lang="en"/>
-              <a:t>27:45</a:t>
-            </a:r>
-            <a:endParaRPr/>
-          </a:p>
-          <a:p>
-            <a:pPr marL="0" lvl="0" indent="0" algn="l" rtl="0">
-              <a:spcBef>
-                <a:spcPts val="0"/>
-              </a:spcBef>
-              <a:spcAft>
-                <a:spcPts val="0"/>
-              </a:spcAft>
-              <a:buClr>
-                <a:schemeClr val="dk1"/>
-              </a:buClr>
-              <a:buSzPts val="1100"/>
-              <a:buFont typeface="Arial"/>
-              <a:buNone/>
-            </a:pPr>
-            <a:r>
-              <a:rPr lang="en"/>
-              <a:t>a mixture of both some networks use one some networks use the other there are some protocols that sort of sit in the</a:t>
-            </a:r>
-            <a:endParaRPr/>
-          </a:p>
-          <a:p>
-            <a:pPr marL="0" lvl="0" indent="0" algn="l" rtl="0">
-              <a:spcBef>
-                <a:spcPts val="0"/>
-              </a:spcBef>
-              <a:spcAft>
-                <a:spcPts val="0"/>
-              </a:spcAft>
-              <a:buClr>
-                <a:schemeClr val="dk1"/>
-              </a:buClr>
-              <a:buSzPts val="1100"/>
-              <a:buFont typeface="Arial"/>
-              <a:buNone/>
-            </a:pPr>
-            <a:r>
-              <a:rPr lang="en"/>
-              <a:t>27:50</a:t>
-            </a:r>
-            <a:endParaRPr/>
-          </a:p>
-          <a:p>
-            <a:pPr marL="0" lvl="0" indent="0" algn="l" rtl="0">
-              <a:spcBef>
-                <a:spcPts val="0"/>
-              </a:spcBef>
-              <a:spcAft>
-                <a:spcPts val="0"/>
-              </a:spcAft>
-              <a:buNone/>
-            </a:pPr>
-            <a:r>
-              <a:rPr lang="en"/>
-              <a:t>middle between these two that you can use so you have a bit of a choice </a:t>
-            </a:r>
-            <a:endParaRPr/>
-          </a:p>
-        </p:txBody>
-      </p:sp>
-    </p:spTree>
-  </p:cSld>
-  <p:clrMapOvr>
-    <a:masterClrMapping/>
-  </p:clrMapOvr>
-</p:notes>
-</file>
-
-<file path=ppt/notesSlides/notesSlide21.xml><?xml version="1.0" encoding="utf-8"?>
 <p:notes xmlns:a="http://schemas.openxmlformats.org/drawingml/2006/main" xmlns:r="http://schemas.openxmlformats.org/officeDocument/2006/relationships" xmlns:p="http://schemas.openxmlformats.org/presentationml/2006/main">
   <p:cSld>
     <p:spTree>
@@ -12041,954 +11726,6 @@
   <p:cSld>
     <p:spTree>
       <p:nvGrpSpPr>
-        <p:cNvPr id="1" name="Shape 247"/>
-        <p:cNvGrpSpPr/>
-        <p:nvPr/>
-      </p:nvGrpSpPr>
-      <p:grpSpPr>
-        <a:xfrm>
-          <a:off x="0" y="0"/>
-          <a:ext cx="0" cy="0"/>
-          <a:chOff x="0" y="0"/>
-          <a:chExt cx="0" cy="0"/>
-        </a:xfrm>
-      </p:grpSpPr>
-      <p:sp>
-        <p:nvSpPr>
-          <p:cNvPr id="248" name="Google Shape;248;g27879dbf297_0_368:notes"/>
-          <p:cNvSpPr>
-            <a:spLocks noGrp="1" noRot="1" noChangeAspect="1"/>
-          </p:cNvSpPr>
-          <p:nvPr>
-            <p:ph type="sldImg" idx="2"/>
-          </p:nvPr>
-        </p:nvSpPr>
-        <p:spPr>
-          <a:xfrm>
-            <a:off x="381000" y="685800"/>
-            <a:ext cx="6096000" cy="3429000"/>
-          </a:xfrm>
-          <a:custGeom>
-            <a:avLst/>
-            <a:gdLst/>
-            <a:ahLst/>
-            <a:cxnLst/>
-            <a:rect l="l" t="t" r="r" b="b"/>
-            <a:pathLst>
-              <a:path w="120000" h="120000" extrusionOk="0">
-                <a:moveTo>
-                  <a:pt x="0" y="0"/>
-                </a:moveTo>
-                <a:lnTo>
-                  <a:pt x="120000" y="0"/>
-                </a:lnTo>
-                <a:lnTo>
-                  <a:pt x="120000" y="120000"/>
-                </a:lnTo>
-                <a:lnTo>
-                  <a:pt x="0" y="120000"/>
-                </a:lnTo>
-                <a:close/>
-              </a:path>
-            </a:pathLst>
-          </a:custGeom>
-        </p:spPr>
-      </p:sp>
-      <p:sp>
-        <p:nvSpPr>
-          <p:cNvPr id="249" name="Google Shape;249;g27879dbf297_0_368:notes"/>
-          <p:cNvSpPr txBox="1">
-            <a:spLocks noGrp="1"/>
-          </p:cNvSpPr>
-          <p:nvPr>
-            <p:ph type="body" idx="1"/>
-          </p:nvPr>
-        </p:nvSpPr>
-        <p:spPr>
-          <a:xfrm>
-            <a:off x="685800" y="4343400"/>
-            <a:ext cx="5486400" cy="4114800"/>
-          </a:xfrm>
-          <a:prstGeom prst="rect">
-            <a:avLst/>
-          </a:prstGeom>
-        </p:spPr>
-        <p:txBody>
-          <a:bodyPr spcFirstLastPara="1" wrap="square" lIns="91425" tIns="91425" rIns="91425" bIns="91425" anchor="t" anchorCtr="0">
-            <a:noAutofit/>
-          </a:bodyPr>
-          <a:lstStyle/>
-          <a:p>
-            <a:pPr marL="0" lvl="0" indent="0" algn="l" rtl="0">
-              <a:spcBef>
-                <a:spcPts val="0"/>
-              </a:spcBef>
-              <a:spcAft>
-                <a:spcPts val="0"/>
-              </a:spcAft>
-              <a:buClr>
-                <a:schemeClr val="dk1"/>
-              </a:buClr>
-              <a:buSzPts val="1100"/>
-              <a:buFont typeface="Arial"/>
-              <a:buNone/>
-            </a:pPr>
-            <a:r>
-              <a:rPr lang="en"/>
-              <a:t>one thing to notice though is even</a:t>
-            </a:r>
-            <a:endParaRPr/>
-          </a:p>
-          <a:p>
-            <a:pPr marL="0" lvl="0" indent="0" algn="l" rtl="0">
-              <a:spcBef>
-                <a:spcPts val="0"/>
-              </a:spcBef>
-              <a:spcAft>
-                <a:spcPts val="0"/>
-              </a:spcAft>
-              <a:buClr>
-                <a:schemeClr val="dk1"/>
-              </a:buClr>
-              <a:buSzPts val="1100"/>
-              <a:buFont typeface="Arial"/>
-              <a:buNone/>
-            </a:pPr>
-            <a:r>
-              <a:rPr lang="en"/>
-              <a:t>6:45</a:t>
-            </a:r>
-            <a:endParaRPr/>
-          </a:p>
-          <a:p>
-            <a:pPr marL="0" lvl="0" indent="0" algn="l" rtl="0">
-              <a:spcBef>
-                <a:spcPts val="0"/>
-              </a:spcBef>
-              <a:spcAft>
-                <a:spcPts val="0"/>
-              </a:spcAft>
-              <a:buClr>
-                <a:schemeClr val="dk1"/>
-              </a:buClr>
-              <a:buSzPts val="1100"/>
-              <a:buFont typeface="Arial"/>
-              <a:buNone/>
-            </a:pPr>
-            <a:r>
-              <a:rPr lang="en"/>
-              <a:t>though you compute the entire path to the host that is R3 with the full</a:t>
-            </a:r>
-            <a:endParaRPr/>
-          </a:p>
-          <a:p>
-            <a:pPr marL="0" lvl="0" indent="0" algn="l" rtl="0">
-              <a:spcBef>
-                <a:spcPts val="0"/>
-              </a:spcBef>
-              <a:spcAft>
-                <a:spcPts val="0"/>
-              </a:spcAft>
-              <a:buClr>
-                <a:schemeClr val="dk1"/>
-              </a:buClr>
-              <a:buSzPts val="1100"/>
-              <a:buFont typeface="Arial"/>
-              <a:buNone/>
-            </a:pPr>
-            <a:r>
-              <a:rPr lang="en"/>
-              <a:t>6:51</a:t>
-            </a:r>
-            <a:endParaRPr/>
-          </a:p>
-          <a:p>
-            <a:pPr marL="0" lvl="0" indent="0" algn="l" rtl="0">
-              <a:spcBef>
-                <a:spcPts val="0"/>
-              </a:spcBef>
-              <a:spcAft>
-                <a:spcPts val="0"/>
-              </a:spcAft>
-              <a:buClr>
-                <a:schemeClr val="dk1"/>
-              </a:buClr>
-              <a:buSzPts val="1100"/>
-              <a:buFont typeface="Arial"/>
-              <a:buNone/>
-            </a:pPr>
-            <a:r>
-              <a:rPr lang="en"/>
-              <a:t>picture of the network it computes the entire blue path you cannot influence what other routers do so even though you</a:t>
-            </a:r>
-            <a:endParaRPr/>
-          </a:p>
-          <a:p>
-            <a:pPr marL="0" lvl="0" indent="0" algn="l" rtl="0">
-              <a:spcBef>
-                <a:spcPts val="0"/>
-              </a:spcBef>
-              <a:spcAft>
-                <a:spcPts val="0"/>
-              </a:spcAft>
-              <a:buClr>
-                <a:schemeClr val="dk1"/>
-              </a:buClr>
-              <a:buSzPts val="1100"/>
-              <a:buFont typeface="Arial"/>
-              <a:buNone/>
-            </a:pPr>
-            <a:r>
-              <a:rPr lang="en"/>
-              <a:t>6:58</a:t>
-            </a:r>
-            <a:endParaRPr/>
-          </a:p>
-          <a:p>
-            <a:pPr marL="0" lvl="0" indent="0" algn="l" rtl="0">
-              <a:spcBef>
-                <a:spcPts val="0"/>
-              </a:spcBef>
-              <a:spcAft>
-                <a:spcPts val="0"/>
-              </a:spcAft>
-              <a:buClr>
-                <a:schemeClr val="dk1"/>
-              </a:buClr>
-              <a:buSzPts val="1100"/>
-              <a:buFont typeface="Arial"/>
-              <a:buNone/>
-            </a:pPr>
-            <a:r>
-              <a:rPr lang="en"/>
-              <a:t>compute this blue path you can't go to R1 and say hey your next top should be this link in blue it doesn't know you're</a:t>
-            </a:r>
-            <a:endParaRPr/>
-          </a:p>
-          <a:p>
-            <a:pPr marL="0" lvl="0" indent="0" algn="l" rtl="0">
-              <a:spcBef>
-                <a:spcPts val="0"/>
-              </a:spcBef>
-              <a:spcAft>
-                <a:spcPts val="0"/>
-              </a:spcAft>
-              <a:buClr>
-                <a:schemeClr val="dk1"/>
-              </a:buClr>
-              <a:buSzPts val="1100"/>
-              <a:buFont typeface="Arial"/>
-              <a:buNone/>
-            </a:pPr>
-            <a:r>
-              <a:rPr lang="en"/>
-              <a:t>7:04</a:t>
-            </a:r>
-            <a:endParaRPr/>
-          </a:p>
-          <a:p>
-            <a:pPr marL="0" lvl="0" indent="0" algn="l" rtl="0">
-              <a:spcBef>
-                <a:spcPts val="0"/>
-              </a:spcBef>
-              <a:spcAft>
-                <a:spcPts val="0"/>
-              </a:spcAft>
-              <a:buClr>
-                <a:schemeClr val="dk1"/>
-              </a:buClr>
-              <a:buSzPts val="1100"/>
-              <a:buFont typeface="Arial"/>
-              <a:buNone/>
-            </a:pPr>
-            <a:r>
-              <a:rPr lang="en"/>
-              <a:t>only responsible for your own forwarding table so even though you went through all the work of computing this blue path</a:t>
-            </a:r>
-            <a:endParaRPr/>
-          </a:p>
-          <a:p>
-            <a:pPr marL="0" lvl="0" indent="0" algn="l" rtl="0">
-              <a:spcBef>
-                <a:spcPts val="0"/>
-              </a:spcBef>
-              <a:spcAft>
-                <a:spcPts val="0"/>
-              </a:spcAft>
-              <a:buClr>
-                <a:schemeClr val="dk1"/>
-              </a:buClr>
-              <a:buSzPts val="1100"/>
-              <a:buFont typeface="Arial"/>
-              <a:buNone/>
-            </a:pPr>
-            <a:r>
-              <a:rPr lang="en"/>
-              <a:t>7:11</a:t>
-            </a:r>
-            <a:endParaRPr/>
-          </a:p>
-          <a:p>
-            <a:pPr marL="0" lvl="0" indent="0" algn="l" rtl="0">
-              <a:spcBef>
-                <a:spcPts val="0"/>
-              </a:spcBef>
-              <a:spcAft>
-                <a:spcPts val="0"/>
-              </a:spcAft>
-              <a:buClr>
-                <a:schemeClr val="dk1"/>
-              </a:buClr>
-              <a:buSzPts val="1100"/>
-              <a:buFont typeface="Arial"/>
-              <a:buNone/>
-            </a:pPr>
-            <a:r>
-              <a:rPr lang="en"/>
-              <a:t>the only piece of information that goes into your forwarding table is just my next top to a is R2 that's it you don't</a:t>
-            </a:r>
-            <a:endParaRPr/>
-          </a:p>
-          <a:p>
-            <a:pPr marL="0" lvl="0" indent="0" algn="l" rtl="0">
-              <a:spcBef>
-                <a:spcPts val="0"/>
-              </a:spcBef>
-              <a:spcAft>
-                <a:spcPts val="0"/>
-              </a:spcAft>
-              <a:buClr>
-                <a:schemeClr val="dk1"/>
-              </a:buClr>
-              <a:buSzPts val="1100"/>
-              <a:buFont typeface="Arial"/>
-              <a:buNone/>
-            </a:pPr>
-            <a:r>
-              <a:rPr lang="en"/>
-              <a:t>7:19</a:t>
-            </a:r>
-            <a:endParaRPr/>
-          </a:p>
-          <a:p>
-            <a:pPr marL="0" lvl="0" indent="0" algn="l" rtl="0">
-              <a:spcBef>
-                <a:spcPts val="0"/>
-              </a:spcBef>
-              <a:spcAft>
-                <a:spcPts val="0"/>
-              </a:spcAft>
-              <a:buClr>
-                <a:schemeClr val="dk1"/>
-              </a:buClr>
-              <a:buSzPts val="1100"/>
-              <a:buFont typeface="Arial"/>
-              <a:buNone/>
-            </a:pPr>
-            <a:r>
-              <a:rPr lang="en"/>
-              <a:t>need to store anything else you don't need to store the rest of the path you don't need to care about what R5 does</a:t>
-            </a:r>
-            <a:endParaRPr/>
-          </a:p>
-          <a:p>
-            <a:pPr marL="0" lvl="0" indent="0" algn="l" rtl="0">
-              <a:spcBef>
-                <a:spcPts val="0"/>
-              </a:spcBef>
-              <a:spcAft>
-                <a:spcPts val="0"/>
-              </a:spcAft>
-              <a:buClr>
-                <a:schemeClr val="dk1"/>
-              </a:buClr>
-              <a:buSzPts val="1100"/>
-              <a:buFont typeface="Arial"/>
-              <a:buNone/>
-            </a:pPr>
-            <a:r>
-              <a:rPr lang="en"/>
-              <a:t>7:25</a:t>
-            </a:r>
-            <a:endParaRPr/>
-          </a:p>
-          <a:p>
-            <a:pPr marL="0" lvl="0" indent="0" algn="l" rtl="0">
-              <a:spcBef>
-                <a:spcPts val="0"/>
-              </a:spcBef>
-              <a:spcAft>
-                <a:spcPts val="0"/>
-              </a:spcAft>
-              <a:buClr>
-                <a:schemeClr val="dk1"/>
-              </a:buClr>
-              <a:buSzPts val="1100"/>
-              <a:buFont typeface="Arial"/>
-              <a:buNone/>
-            </a:pPr>
-            <a:r>
-              <a:rPr lang="en"/>
-              <a:t>with the packet so even though you've done all the work of calculating the path the only part of the answer you</a:t>
-            </a:r>
-            <a:endParaRPr/>
-          </a:p>
-          <a:p>
-            <a:pPr marL="0" lvl="0" indent="0" algn="l" rtl="0">
-              <a:spcBef>
-                <a:spcPts val="0"/>
-              </a:spcBef>
-              <a:spcAft>
-                <a:spcPts val="0"/>
-              </a:spcAft>
-              <a:buClr>
-                <a:schemeClr val="dk1"/>
-              </a:buClr>
-              <a:buSzPts val="1100"/>
-              <a:buFont typeface="Arial"/>
-              <a:buNone/>
-            </a:pPr>
-            <a:r>
-              <a:rPr lang="en"/>
-              <a:t>7:30</a:t>
-            </a:r>
-            <a:endParaRPr/>
-          </a:p>
-          <a:p>
-            <a:pPr marL="0" lvl="0" indent="0" algn="l" rtl="0">
-              <a:spcBef>
-                <a:spcPts val="0"/>
-              </a:spcBef>
-              <a:spcAft>
-                <a:spcPts val="0"/>
-              </a:spcAft>
-              <a:buClr>
-                <a:schemeClr val="dk1"/>
-              </a:buClr>
-              <a:buSzPts val="1100"/>
-              <a:buFont typeface="Arial"/>
-              <a:buNone/>
-            </a:pPr>
-            <a:r>
-              <a:rPr lang="en"/>
-              <a:t>need and you can throw the rest away it's just the next top that's the only thing you as R3 have control over you</a:t>
-            </a:r>
-            <a:endParaRPr/>
-          </a:p>
-          <a:p>
-            <a:pPr marL="0" lvl="0" indent="0" algn="l" rtl="0">
-              <a:spcBef>
-                <a:spcPts val="0"/>
-              </a:spcBef>
-              <a:spcAft>
-                <a:spcPts val="0"/>
-              </a:spcAft>
-              <a:buClr>
-                <a:schemeClr val="dk1"/>
-              </a:buClr>
-              <a:buSzPts val="1100"/>
-              <a:buFont typeface="Arial"/>
-              <a:buNone/>
-            </a:pPr>
-            <a:r>
-              <a:rPr lang="en"/>
-              <a:t>7:37</a:t>
-            </a:r>
-            <a:endParaRPr/>
-          </a:p>
-          <a:p>
-            <a:pPr marL="0" lvl="0" indent="0" algn="l" rtl="0">
-              <a:spcBef>
-                <a:spcPts val="0"/>
-              </a:spcBef>
-              <a:spcAft>
-                <a:spcPts val="0"/>
-              </a:spcAft>
-              <a:buClr>
-                <a:schemeClr val="dk1"/>
-              </a:buClr>
-              <a:buSzPts val="1100"/>
-              <a:buFont typeface="Arial"/>
-              <a:buNone/>
-            </a:pPr>
-            <a:r>
-              <a:rPr lang="en"/>
-              <a:t>don't have control over what happens after R2 gets the packet and this</a:t>
-            </a:r>
-            <a:endParaRPr/>
-          </a:p>
-          <a:p>
-            <a:pPr marL="0" lvl="0" indent="0" algn="l" rtl="0">
-              <a:spcBef>
-                <a:spcPts val="0"/>
-              </a:spcBef>
-              <a:spcAft>
-                <a:spcPts val="0"/>
-              </a:spcAft>
-              <a:buClr>
-                <a:schemeClr val="dk1"/>
-              </a:buClr>
-              <a:buSzPts val="1100"/>
-              <a:buFont typeface="Arial"/>
-              <a:buNone/>
-            </a:pPr>
-            <a:r>
-              <a:rPr lang="en"/>
-              <a:t>7:43</a:t>
-            </a:r>
-            <a:endParaRPr/>
-          </a:p>
-          <a:p>
-            <a:pPr marL="0" lvl="0" indent="0" algn="l" rtl="0">
-              <a:spcBef>
-                <a:spcPts val="0"/>
-              </a:spcBef>
-              <a:spcAft>
-                <a:spcPts val="0"/>
-              </a:spcAft>
-              <a:buClr>
-                <a:schemeClr val="dk1"/>
-              </a:buClr>
-              <a:buSzPts val="1100"/>
-              <a:buFont typeface="Arial"/>
-              <a:buNone/>
-            </a:pPr>
-            <a:r>
-              <a:rPr lang="en"/>
-              <a:t>actually opens up a problem and the problem is that different routers might compute different paths so check out</a:t>
-            </a:r>
-            <a:endParaRPr/>
-          </a:p>
-          <a:p>
-            <a:pPr marL="0" lvl="0" indent="0" algn="l" rtl="0">
-              <a:spcBef>
-                <a:spcPts val="0"/>
-              </a:spcBef>
-              <a:spcAft>
-                <a:spcPts val="0"/>
-              </a:spcAft>
-              <a:buClr>
-                <a:schemeClr val="dk1"/>
-              </a:buClr>
-              <a:buSzPts val="1100"/>
-              <a:buFont typeface="Arial"/>
-              <a:buNone/>
-            </a:pPr>
-            <a:r>
-              <a:rPr lang="en"/>
-              <a:t>7:49</a:t>
-            </a:r>
-            <a:endParaRPr/>
-          </a:p>
-          <a:p>
-            <a:pPr marL="0" lvl="0" indent="0" algn="l" rtl="0">
-              <a:spcBef>
-                <a:spcPts val="0"/>
-              </a:spcBef>
-              <a:spcAft>
-                <a:spcPts val="0"/>
-              </a:spcAft>
-              <a:buClr>
-                <a:schemeClr val="dk1"/>
-              </a:buClr>
-              <a:buSzPts val="1100"/>
-              <a:buFont typeface="Arial"/>
-              <a:buNone/>
-            </a:pPr>
-            <a:r>
-              <a:rPr lang="en"/>
-              <a:t>this example where R3 armed with all the information about the network computes this blue path throws away all the</a:t>
-            </a:r>
-            <a:endParaRPr/>
-          </a:p>
-          <a:p>
-            <a:pPr marL="0" lvl="0" indent="0" algn="l" rtl="0">
-              <a:spcBef>
-                <a:spcPts val="0"/>
-              </a:spcBef>
-              <a:spcAft>
-                <a:spcPts val="0"/>
-              </a:spcAft>
-              <a:buClr>
-                <a:schemeClr val="dk1"/>
-              </a:buClr>
-              <a:buSzPts val="1100"/>
-              <a:buFont typeface="Arial"/>
-              <a:buNone/>
-            </a:pPr>
-            <a:r>
-              <a:rPr lang="en"/>
-              <a:t>7:56</a:t>
-            </a:r>
-            <a:endParaRPr/>
-          </a:p>
-          <a:p>
-            <a:pPr marL="0" lvl="0" indent="0" algn="l" rtl="0">
-              <a:spcBef>
-                <a:spcPts val="0"/>
-              </a:spcBef>
-              <a:spcAft>
-                <a:spcPts val="0"/>
-              </a:spcAft>
-              <a:buClr>
-                <a:schemeClr val="dk1"/>
-              </a:buClr>
-              <a:buSzPts val="1100"/>
-              <a:buFont typeface="Arial"/>
-              <a:buNone/>
-            </a:pPr>
-            <a:r>
-              <a:rPr lang="en"/>
-              <a:t>unnecessary information and just writes down that packets for a should be forwarded via</a:t>
-            </a:r>
-            <a:endParaRPr/>
-          </a:p>
-          <a:p>
-            <a:pPr marL="0" lvl="0" indent="0" algn="l" rtl="0">
-              <a:spcBef>
-                <a:spcPts val="0"/>
-              </a:spcBef>
-              <a:spcAft>
-                <a:spcPts val="0"/>
-              </a:spcAft>
-              <a:buClr>
-                <a:schemeClr val="dk1"/>
-              </a:buClr>
-              <a:buSzPts val="1100"/>
-              <a:buFont typeface="Arial"/>
-              <a:buNone/>
-            </a:pPr>
-            <a:r>
-              <a:rPr lang="en"/>
-              <a:t>8:02</a:t>
-            </a:r>
-            <a:endParaRPr/>
-          </a:p>
-          <a:p>
-            <a:pPr marL="0" lvl="0" indent="0" algn="l" rtl="0">
-              <a:spcBef>
-                <a:spcPts val="0"/>
-              </a:spcBef>
-              <a:spcAft>
-                <a:spcPts val="0"/>
-              </a:spcAft>
-              <a:buClr>
-                <a:schemeClr val="dk1"/>
-              </a:buClr>
-              <a:buSzPts val="1100"/>
-              <a:buFont typeface="Arial"/>
-              <a:buNone/>
-            </a:pPr>
-            <a:r>
-              <a:rPr lang="en"/>
-              <a:t>R2 and by contrast here we have R2 which also has a full picture of the network</a:t>
-            </a:r>
-            <a:endParaRPr/>
-          </a:p>
-          <a:p>
-            <a:pPr marL="0" lvl="0" indent="0" algn="l" rtl="0">
-              <a:spcBef>
-                <a:spcPts val="0"/>
-              </a:spcBef>
-              <a:spcAft>
-                <a:spcPts val="0"/>
-              </a:spcAft>
-              <a:buClr>
-                <a:schemeClr val="dk1"/>
-              </a:buClr>
-              <a:buSzPts val="1100"/>
-              <a:buFont typeface="Arial"/>
-              <a:buNone/>
-            </a:pPr>
-            <a:r>
-              <a:rPr lang="en"/>
-              <a:t>8:08</a:t>
-            </a:r>
-            <a:endParaRPr/>
-          </a:p>
-          <a:p>
-            <a:pPr marL="0" lvl="0" indent="0" algn="l" rtl="0">
-              <a:spcBef>
-                <a:spcPts val="0"/>
-              </a:spcBef>
-              <a:spcAft>
-                <a:spcPts val="0"/>
-              </a:spcAft>
-              <a:buClr>
-                <a:schemeClr val="dk1"/>
-              </a:buClr>
-              <a:buSzPts val="1100"/>
-              <a:buFont typeface="Arial"/>
-              <a:buNone/>
-            </a:pPr>
-            <a:r>
-              <a:rPr lang="en"/>
-              <a:t>and it also calculates path through the network and somehow it calculates that this red path is the shortest path to a</a:t>
-            </a:r>
-            <a:endParaRPr/>
-          </a:p>
-          <a:p>
-            <a:pPr marL="0" lvl="0" indent="0" algn="l" rtl="0">
-              <a:spcBef>
-                <a:spcPts val="0"/>
-              </a:spcBef>
-              <a:spcAft>
-                <a:spcPts val="0"/>
-              </a:spcAft>
-              <a:buClr>
-                <a:schemeClr val="dk1"/>
-              </a:buClr>
-              <a:buSzPts val="1100"/>
-              <a:buFont typeface="Arial"/>
-              <a:buNone/>
-            </a:pPr>
-            <a:r>
-              <a:rPr lang="en"/>
-              <a:t>8:14</a:t>
-            </a:r>
-            <a:endParaRPr/>
-          </a:p>
-          <a:p>
-            <a:pPr marL="0" lvl="0" indent="0" algn="l" rtl="0">
-              <a:spcBef>
-                <a:spcPts val="0"/>
-              </a:spcBef>
-              <a:spcAft>
-                <a:spcPts val="0"/>
-              </a:spcAft>
-              <a:buClr>
-                <a:schemeClr val="dk1"/>
-              </a:buClr>
-              <a:buSzPts val="1100"/>
-              <a:buFont typeface="Arial"/>
-              <a:buNone/>
-            </a:pPr>
-            <a:r>
-              <a:rPr lang="en"/>
-              <a:t>and it throws away the unnecessary information and just writes down that my next hop to a is</a:t>
-            </a:r>
-            <a:endParaRPr/>
-          </a:p>
-          <a:p>
-            <a:pPr marL="0" lvl="0" indent="0" algn="l" rtl="0">
-              <a:spcBef>
-                <a:spcPts val="0"/>
-              </a:spcBef>
-              <a:spcAft>
-                <a:spcPts val="0"/>
-              </a:spcAft>
-              <a:buClr>
-                <a:schemeClr val="dk1"/>
-              </a:buClr>
-              <a:buSzPts val="1100"/>
-              <a:buFont typeface="Arial"/>
-              <a:buNone/>
-            </a:pPr>
-            <a:r>
-              <a:rPr lang="en"/>
-              <a:t>8:20</a:t>
-            </a:r>
-            <a:endParaRPr/>
-          </a:p>
-          <a:p>
-            <a:pPr marL="0" lvl="0" indent="0" algn="l" rtl="0">
-              <a:spcBef>
-                <a:spcPts val="0"/>
-              </a:spcBef>
-              <a:spcAft>
-                <a:spcPts val="0"/>
-              </a:spcAft>
-              <a:buClr>
-                <a:schemeClr val="dk1"/>
-              </a:buClr>
-              <a:buSzPts val="1100"/>
-              <a:buFont typeface="Arial"/>
-              <a:buNone/>
-            </a:pPr>
-            <a:r>
-              <a:rPr lang="en"/>
-              <a:t>R3 wait a minute R3 is forwarding packets to R2 R2 is forwarding packets to R3 they have formed a routing Loop so</a:t>
-            </a:r>
-            <a:endParaRPr/>
-          </a:p>
-          <a:p>
-            <a:pPr marL="0" lvl="0" indent="0" algn="l" rtl="0">
-              <a:spcBef>
-                <a:spcPts val="0"/>
-              </a:spcBef>
-              <a:spcAft>
-                <a:spcPts val="0"/>
-              </a:spcAft>
-              <a:buClr>
-                <a:schemeClr val="dk1"/>
-              </a:buClr>
-              <a:buSzPts val="1100"/>
-              <a:buFont typeface="Arial"/>
-              <a:buNone/>
-            </a:pPr>
-            <a:r>
-              <a:rPr lang="en"/>
-              <a:t>8:28</a:t>
-            </a:r>
-            <a:endParaRPr/>
-          </a:p>
-          <a:p>
-            <a:pPr marL="0" lvl="0" indent="0" algn="l" rtl="0">
-              <a:spcBef>
-                <a:spcPts val="0"/>
-              </a:spcBef>
-              <a:spcAft>
-                <a:spcPts val="0"/>
-              </a:spcAft>
-              <a:buClr>
-                <a:schemeClr val="dk1"/>
-              </a:buClr>
-              <a:buSzPts val="1100"/>
-              <a:buFont typeface="Arial"/>
-              <a:buNone/>
-            </a:pPr>
-            <a:r>
-              <a:rPr lang="en"/>
-              <a:t>if we are not careful and different routers are being incompatible in some way it's possible</a:t>
-            </a:r>
-            <a:endParaRPr/>
-          </a:p>
-          <a:p>
-            <a:pPr marL="0" lvl="0" indent="0" algn="l" rtl="0">
-              <a:spcBef>
-                <a:spcPts val="0"/>
-              </a:spcBef>
-              <a:spcAft>
-                <a:spcPts val="0"/>
-              </a:spcAft>
-              <a:buClr>
-                <a:schemeClr val="dk1"/>
-              </a:buClr>
-              <a:buSzPts val="1100"/>
-              <a:buFont typeface="Arial"/>
-              <a:buNone/>
-            </a:pPr>
-            <a:r>
-              <a:rPr lang="en"/>
-              <a:t>8:34</a:t>
-            </a:r>
-            <a:endParaRPr/>
-          </a:p>
-          <a:p>
-            <a:pPr marL="0" lvl="0" indent="0" algn="l" rtl="0">
-              <a:spcBef>
-                <a:spcPts val="0"/>
-              </a:spcBef>
-              <a:spcAft>
-                <a:spcPts val="0"/>
-              </a:spcAft>
-              <a:buClr>
-                <a:schemeClr val="dk1"/>
-              </a:buClr>
-              <a:buSzPts val="1100"/>
-              <a:buFont typeface="Arial"/>
-              <a:buNone/>
-            </a:pPr>
-            <a:r>
-              <a:rPr lang="en"/>
-              <a:t>that link State protocols introduce unwanted routing Loops like we see here so somehow we need to make sure all the</a:t>
-            </a:r>
-            <a:endParaRPr/>
-          </a:p>
-          <a:p>
-            <a:pPr marL="0" lvl="0" indent="0" algn="l" rtl="0">
-              <a:spcBef>
-                <a:spcPts val="0"/>
-              </a:spcBef>
-              <a:spcAft>
-                <a:spcPts val="0"/>
-              </a:spcAft>
-              <a:buClr>
-                <a:schemeClr val="dk1"/>
-              </a:buClr>
-              <a:buSzPts val="1100"/>
-              <a:buFont typeface="Arial"/>
-              <a:buNone/>
-            </a:pPr>
-            <a:r>
-              <a:rPr lang="en"/>
-              <a:t>8:41</a:t>
-            </a:r>
-            <a:endParaRPr/>
-          </a:p>
-          <a:p>
-            <a:pPr marL="0" lvl="0" indent="0" algn="l" rtl="0">
-              <a:spcBef>
-                <a:spcPts val="0"/>
-              </a:spcBef>
-              <a:spcAft>
-                <a:spcPts val="0"/>
-              </a:spcAft>
-              <a:buClr>
-                <a:schemeClr val="dk1"/>
-              </a:buClr>
-              <a:buSzPts val="1100"/>
-              <a:buFont typeface="Arial"/>
-              <a:buNone/>
-            </a:pPr>
-            <a:r>
-              <a:rPr lang="en"/>
-              <a:t>routers are thinking about the same thing so that we avoid scenarios like</a:t>
-            </a:r>
-            <a:endParaRPr/>
-          </a:p>
-          <a:p>
-            <a:pPr marL="0" lvl="0" indent="0" algn="l" rtl="0">
-              <a:spcBef>
-                <a:spcPts val="0"/>
-              </a:spcBef>
-              <a:spcAft>
-                <a:spcPts val="0"/>
-              </a:spcAft>
-              <a:buClr>
-                <a:schemeClr val="dk1"/>
-              </a:buClr>
-              <a:buSzPts val="1100"/>
-              <a:buFont typeface="Arial"/>
-              <a:buNone/>
-            </a:pPr>
-            <a:r>
-              <a:rPr lang="en"/>
-              <a:t>8:47</a:t>
-            </a:r>
-            <a:endParaRPr/>
-          </a:p>
-          <a:p>
-            <a:pPr marL="0" lvl="0" indent="0" algn="l" rtl="0">
-              <a:spcBef>
-                <a:spcPts val="0"/>
-              </a:spcBef>
-              <a:spcAft>
-                <a:spcPts val="0"/>
-              </a:spcAft>
-              <a:buNone/>
-            </a:pPr>
-            <a:r>
-              <a:rPr lang="en"/>
-              <a:t>this </a:t>
-            </a:r>
-            <a:endParaRPr/>
-          </a:p>
-        </p:txBody>
-      </p:sp>
-    </p:spTree>
-  </p:cSld>
-  <p:clrMapOvr>
-    <a:masterClrMapping/>
-  </p:clrMapOvr>
-</p:notes>
-</file>
-
-<file path=ppt/notesSlides/notesSlide9.xml><?xml version="1.0" encoding="utf-8"?>
-<p:notes xmlns:a="http://schemas.openxmlformats.org/drawingml/2006/main" xmlns:r="http://schemas.openxmlformats.org/officeDocument/2006/relationships" xmlns:p="http://schemas.openxmlformats.org/presentationml/2006/main" showMasterSp="0" showMasterPhAnim="0">
-  <p:cSld>
-    <p:spTree>
-      <p:nvGrpSpPr>
         <p:cNvPr id="1" name="Shape 285"/>
         <p:cNvGrpSpPr/>
         <p:nvPr/>
@@ -13720,6 +12457,320 @@
               <a:buFont typeface="Arial"/>
               <a:buNone/>
             </a:pPr>
+            <a:endParaRPr/>
+          </a:p>
+          <a:p>
+            <a:pPr marL="0" lvl="0" indent="0" algn="l" rtl="0">
+              <a:spcBef>
+                <a:spcPts val="0"/>
+              </a:spcBef>
+              <a:spcAft>
+                <a:spcPts val="0"/>
+              </a:spcAft>
+              <a:buNone/>
+            </a:pPr>
+            <a:endParaRPr/>
+          </a:p>
+        </p:txBody>
+      </p:sp>
+    </p:spTree>
+  </p:cSld>
+  <p:clrMapOvr>
+    <a:masterClrMapping/>
+  </p:clrMapOvr>
+</p:notes>
+</file>
+
+<file path=ppt/notesSlides/notesSlide9.xml><?xml version="1.0" encoding="utf-8"?>
+<p:notes xmlns:a="http://schemas.openxmlformats.org/drawingml/2006/main" xmlns:r="http://schemas.openxmlformats.org/officeDocument/2006/relationships" xmlns:p="http://schemas.openxmlformats.org/presentationml/2006/main" showMasterSp="0" showMasterPhAnim="0">
+  <p:cSld>
+    <p:spTree>
+      <p:nvGrpSpPr>
+        <p:cNvPr id="1" name="Shape 291"/>
+        <p:cNvGrpSpPr/>
+        <p:nvPr/>
+      </p:nvGrpSpPr>
+      <p:grpSpPr>
+        <a:xfrm>
+          <a:off x="0" y="0"/>
+          <a:ext cx="0" cy="0"/>
+          <a:chOff x="0" y="0"/>
+          <a:chExt cx="0" cy="0"/>
+        </a:xfrm>
+      </p:grpSpPr>
+      <p:sp>
+        <p:nvSpPr>
+          <p:cNvPr id="292" name="Google Shape;292;g27879dbf297_0_475:notes"/>
+          <p:cNvSpPr>
+            <a:spLocks noGrp="1" noRot="1" noChangeAspect="1"/>
+          </p:cNvSpPr>
+          <p:nvPr>
+            <p:ph type="sldImg" idx="2"/>
+          </p:nvPr>
+        </p:nvSpPr>
+        <p:spPr>
+          <a:xfrm>
+            <a:off x="381000" y="685800"/>
+            <a:ext cx="6096000" cy="3429000"/>
+          </a:xfrm>
+          <a:custGeom>
+            <a:avLst/>
+            <a:gdLst/>
+            <a:ahLst/>
+            <a:cxnLst/>
+            <a:rect l="l" t="t" r="r" b="b"/>
+            <a:pathLst>
+              <a:path w="120000" h="120000" extrusionOk="0">
+                <a:moveTo>
+                  <a:pt x="0" y="0"/>
+                </a:moveTo>
+                <a:lnTo>
+                  <a:pt x="120000" y="0"/>
+                </a:lnTo>
+                <a:lnTo>
+                  <a:pt x="120000" y="120000"/>
+                </a:lnTo>
+                <a:lnTo>
+                  <a:pt x="0" y="120000"/>
+                </a:lnTo>
+                <a:close/>
+              </a:path>
+            </a:pathLst>
+          </a:custGeom>
+        </p:spPr>
+      </p:sp>
+      <p:sp>
+        <p:nvSpPr>
+          <p:cNvPr id="293" name="Google Shape;293;g27879dbf297_0_475:notes"/>
+          <p:cNvSpPr txBox="1">
+            <a:spLocks noGrp="1"/>
+          </p:cNvSpPr>
+          <p:nvPr>
+            <p:ph type="body" idx="1"/>
+          </p:nvPr>
+        </p:nvSpPr>
+        <p:spPr>
+          <a:xfrm>
+            <a:off x="685800" y="4343400"/>
+            <a:ext cx="5486400" cy="4114800"/>
+          </a:xfrm>
+          <a:prstGeom prst="rect">
+            <a:avLst/>
+          </a:prstGeom>
+        </p:spPr>
+        <p:txBody>
+          <a:bodyPr spcFirstLastPara="1" wrap="square" lIns="91425" tIns="91425" rIns="91425" bIns="91425" anchor="t" anchorCtr="0">
+            <a:noAutofit/>
+          </a:bodyPr>
+          <a:lstStyle/>
+          <a:p>
+            <a:pPr marL="0" lvl="0" indent="0" algn="l" rtl="0">
+              <a:spcBef>
+                <a:spcPts val="0"/>
+              </a:spcBef>
+              <a:spcAft>
+                <a:spcPts val="0"/>
+              </a:spcAft>
+              <a:buClr>
+                <a:schemeClr val="dk1"/>
+              </a:buClr>
+              <a:buSzPts val="1100"/>
+              <a:buFont typeface="Arial"/>
+              <a:buNone/>
+            </a:pPr>
+            <a:r>
+              <a:rPr lang="en"/>
+              <a:t>10:40</a:t>
+            </a:r>
+            <a:endParaRPr/>
+          </a:p>
+          <a:p>
+            <a:pPr marL="0" lvl="0" indent="0" algn="l" rtl="0">
+              <a:spcBef>
+                <a:spcPts val="0"/>
+              </a:spcBef>
+              <a:spcAft>
+                <a:spcPts val="0"/>
+              </a:spcAft>
+              <a:buClr>
+                <a:schemeClr val="dk1"/>
+              </a:buClr>
+              <a:buSzPts val="1100"/>
+              <a:buFont typeface="Arial"/>
+              <a:buNone/>
+            </a:pPr>
+            <a:r>
+              <a:rPr lang="en"/>
+              <a:t>everyone's running the exact same copy of dyra algorithm and that makes it easier for all the routers to be</a:t>
+            </a:r>
+            <a:endParaRPr/>
+          </a:p>
+          <a:p>
+            <a:pPr marL="0" lvl="0" indent="0" algn="l" rtl="0">
+              <a:spcBef>
+                <a:spcPts val="0"/>
+              </a:spcBef>
+              <a:spcAft>
+                <a:spcPts val="0"/>
+              </a:spcAft>
+              <a:buClr>
+                <a:schemeClr val="dk1"/>
+              </a:buClr>
+              <a:buSzPts val="1100"/>
+              <a:buFont typeface="Arial"/>
+              <a:buNone/>
+            </a:pPr>
+            <a:r>
+              <a:rPr lang="en"/>
+              <a:t>10:46</a:t>
+            </a:r>
+            <a:endParaRPr/>
+          </a:p>
+          <a:p>
+            <a:pPr marL="0" lvl="0" indent="0" algn="l" rtl="0">
+              <a:spcBef>
+                <a:spcPts val="0"/>
+              </a:spcBef>
+              <a:spcAft>
+                <a:spcPts val="0"/>
+              </a:spcAft>
+              <a:buClr>
+                <a:schemeClr val="dk1"/>
+              </a:buClr>
+              <a:buSzPts val="1100"/>
+              <a:buFont typeface="Arial"/>
+              <a:buNone/>
+            </a:pPr>
+            <a:r>
+              <a:rPr lang="en"/>
+              <a:t>compatible with each other well that's it we finished step</a:t>
+            </a:r>
+            <a:endParaRPr/>
+          </a:p>
+          <a:p>
+            <a:pPr marL="0" lvl="0" indent="0" algn="l" rtl="0">
+              <a:spcBef>
+                <a:spcPts val="0"/>
+              </a:spcBef>
+              <a:spcAft>
+                <a:spcPts val="0"/>
+              </a:spcAft>
+              <a:buClr>
+                <a:schemeClr val="dk1"/>
+              </a:buClr>
+              <a:buSzPts val="1100"/>
+              <a:buFont typeface="Arial"/>
+              <a:buNone/>
+            </a:pPr>
+            <a:r>
+              <a:rPr lang="en"/>
+              <a:t>10:52</a:t>
+            </a:r>
+            <a:endParaRPr/>
+          </a:p>
+          <a:p>
+            <a:pPr marL="0" lvl="0" indent="0" algn="l" rtl="0">
+              <a:spcBef>
+                <a:spcPts val="0"/>
+              </a:spcBef>
+              <a:spcAft>
+                <a:spcPts val="0"/>
+              </a:spcAft>
+              <a:buClr>
+                <a:schemeClr val="dk1"/>
+              </a:buClr>
+              <a:buSzPts val="1100"/>
+              <a:buFont typeface="Arial"/>
+              <a:buNone/>
+            </a:pPr>
+            <a:r>
+              <a:rPr lang="en"/>
+              <a:t>one now we know how to compute paths to the network use any favorite shortest paths algorithm subject to certain</a:t>
+            </a:r>
+            <a:endParaRPr/>
+          </a:p>
+          <a:p>
+            <a:pPr marL="0" lvl="0" indent="0" algn="l" rtl="0">
+              <a:spcBef>
+                <a:spcPts val="0"/>
+              </a:spcBef>
+              <a:spcAft>
+                <a:spcPts val="0"/>
+              </a:spcAft>
+              <a:buClr>
+                <a:schemeClr val="dk1"/>
+              </a:buClr>
+              <a:buSzPts val="1100"/>
+              <a:buFont typeface="Arial"/>
+              <a:buNone/>
+            </a:pPr>
+            <a:r>
+              <a:rPr lang="en"/>
+              <a:t>10:58</a:t>
+            </a:r>
+            <a:endParaRPr/>
+          </a:p>
+          <a:p>
+            <a:pPr marL="0" lvl="0" indent="0" algn="l" rtl="0">
+              <a:spcBef>
+                <a:spcPts val="0"/>
+              </a:spcBef>
+              <a:spcAft>
+                <a:spcPts val="0"/>
+              </a:spcAft>
+              <a:buClr>
+                <a:schemeClr val="dk1"/>
+              </a:buClr>
+              <a:buSzPts val="1100"/>
+              <a:buFont typeface="Arial"/>
+              <a:buNone/>
+            </a:pPr>
+            <a:r>
+              <a:rPr lang="en"/>
+              <a:t>compatibility constraints so the second thing we have to do is we need to let every router know about the full Network</a:t>
+            </a:r>
+            <a:endParaRPr/>
+          </a:p>
+          <a:p>
+            <a:pPr marL="0" lvl="0" indent="0" algn="l" rtl="0">
+              <a:spcBef>
+                <a:spcPts val="0"/>
+              </a:spcBef>
+              <a:spcAft>
+                <a:spcPts val="0"/>
+              </a:spcAft>
+              <a:buClr>
+                <a:schemeClr val="dk1"/>
+              </a:buClr>
+              <a:buSzPts val="1100"/>
+              <a:buFont typeface="Arial"/>
+              <a:buNone/>
+            </a:pPr>
+            <a:r>
+              <a:rPr lang="en"/>
+              <a:t>11:05</a:t>
+            </a:r>
+            <a:endParaRPr/>
+          </a:p>
+          <a:p>
+            <a:pPr marL="0" lvl="0" indent="0" algn="l" rtl="0">
+              <a:spcBef>
+                <a:spcPts val="0"/>
+              </a:spcBef>
+              <a:spcAft>
+                <a:spcPts val="0"/>
+              </a:spcAft>
+              <a:buClr>
+                <a:schemeClr val="dk1"/>
+              </a:buClr>
+              <a:buSzPts val="1100"/>
+              <a:buFont typeface="Arial"/>
+              <a:buNone/>
+            </a:pPr>
+            <a:r>
+              <a:rPr lang="en"/>
+              <a:t>graph</a:t>
+            </a:r>
             <a:endParaRPr/>
           </a:p>
           <a:p>
@@ -27637,468 +26688,6 @@
   <p:cSld>
     <p:spTree>
       <p:nvGrpSpPr>
-        <p:cNvPr id="1" name="Shape 294"/>
-        <p:cNvGrpSpPr/>
-        <p:nvPr/>
-      </p:nvGrpSpPr>
-      <p:grpSpPr>
-        <a:xfrm>
-          <a:off x="0" y="0"/>
-          <a:ext cx="0" cy="0"/>
-          <a:chOff x="0" y="0"/>
-          <a:chExt cx="0" cy="0"/>
-        </a:xfrm>
-      </p:grpSpPr>
-      <p:sp>
-        <p:nvSpPr>
-          <p:cNvPr id="295" name="Google Shape;295;p33"/>
-          <p:cNvSpPr txBox="1">
-            <a:spLocks noGrp="1"/>
-          </p:cNvSpPr>
-          <p:nvPr>
-            <p:ph type="body" idx="1"/>
-          </p:nvPr>
-        </p:nvSpPr>
-        <p:spPr>
-          <a:xfrm>
-            <a:off x="4812375" y="402200"/>
-            <a:ext cx="4038000" cy="4260900"/>
-          </a:xfrm>
-          <a:prstGeom prst="rect">
-            <a:avLst/>
-          </a:prstGeom>
-        </p:spPr>
-        <p:txBody>
-          <a:bodyPr spcFirstLastPara="1" wrap="square" lIns="91425" tIns="91425" rIns="91425" bIns="91425" anchor="ctr" anchorCtr="0">
-            <a:noAutofit/>
-          </a:bodyPr>
-          <a:lstStyle/>
-          <a:p>
-            <a:pPr marL="0" lvl="0" indent="0" algn="l" rtl="0">
-              <a:spcBef>
-                <a:spcPts val="600"/>
-              </a:spcBef>
-              <a:spcAft>
-                <a:spcPts val="0"/>
-              </a:spcAft>
-              <a:buNone/>
-            </a:pPr>
-            <a:r>
-              <a:rPr lang="en" b="1">
-                <a:solidFill>
-                  <a:schemeClr val="accent3"/>
-                </a:solidFill>
-                <a:latin typeface="Roboto"/>
-                <a:ea typeface="Roboto"/>
-                <a:cs typeface="Roboto"/>
-                <a:sym typeface="Roboto"/>
-              </a:rPr>
-              <a:t>Link-State Protocols</a:t>
-            </a:r>
-            <a:endParaRPr b="1">
-              <a:solidFill>
-                <a:schemeClr val="accent3"/>
-              </a:solidFill>
-              <a:latin typeface="Roboto"/>
-              <a:ea typeface="Roboto"/>
-              <a:cs typeface="Roboto"/>
-              <a:sym typeface="Roboto"/>
-            </a:endParaRPr>
-          </a:p>
-          <a:p>
-            <a:pPr marL="457200" lvl="0" indent="-342900" algn="l" rtl="0">
-              <a:spcBef>
-                <a:spcPts val="600"/>
-              </a:spcBef>
-              <a:spcAft>
-                <a:spcPts val="0"/>
-              </a:spcAft>
-              <a:buClr>
-                <a:srgbClr val="B7B7B7"/>
-              </a:buClr>
-              <a:buSzPts val="1800"/>
-              <a:buChar char="•"/>
-            </a:pPr>
-            <a:r>
-              <a:rPr lang="en">
-                <a:solidFill>
-                  <a:srgbClr val="B7B7B7"/>
-                </a:solidFill>
-              </a:rPr>
-              <a:t>Overview</a:t>
-            </a:r>
-            <a:endParaRPr>
-              <a:solidFill>
-                <a:srgbClr val="B7B7B7"/>
-              </a:solidFill>
-            </a:endParaRPr>
-          </a:p>
-          <a:p>
-            <a:pPr marL="457200" lvl="0" indent="-342900" algn="l" rtl="0">
-              <a:spcBef>
-                <a:spcPts val="0"/>
-              </a:spcBef>
-              <a:spcAft>
-                <a:spcPts val="0"/>
-              </a:spcAft>
-              <a:buClr>
-                <a:srgbClr val="B7B7B7"/>
-              </a:buClr>
-              <a:buSzPts val="1800"/>
-              <a:buChar char="•"/>
-            </a:pPr>
-            <a:r>
-              <a:rPr lang="en">
-                <a:solidFill>
-                  <a:srgbClr val="B7B7B7"/>
-                </a:solidFill>
-              </a:rPr>
-              <a:t>Computing Paths</a:t>
-            </a:r>
-            <a:endParaRPr>
-              <a:solidFill>
-                <a:srgbClr val="B7B7B7"/>
-              </a:solidFill>
-            </a:endParaRPr>
-          </a:p>
-          <a:p>
-            <a:pPr marL="457200" lvl="0" indent="-342900" algn="l" rtl="0">
-              <a:spcBef>
-                <a:spcPts val="0"/>
-              </a:spcBef>
-              <a:spcAft>
-                <a:spcPts val="0"/>
-              </a:spcAft>
-              <a:buClr>
-                <a:schemeClr val="accent3"/>
-              </a:buClr>
-              <a:buSzPts val="1800"/>
-              <a:buFont typeface="Roboto"/>
-              <a:buChar char="•"/>
-            </a:pPr>
-            <a:r>
-              <a:rPr lang="en" b="1">
-                <a:solidFill>
-                  <a:schemeClr val="accent3"/>
-                </a:solidFill>
-                <a:latin typeface="Roboto"/>
-                <a:ea typeface="Roboto"/>
-                <a:cs typeface="Roboto"/>
-                <a:sym typeface="Roboto"/>
-              </a:rPr>
-              <a:t>Learning Graph Topology</a:t>
-            </a:r>
-            <a:endParaRPr b="1">
-              <a:solidFill>
-                <a:schemeClr val="accent3"/>
-              </a:solidFill>
-              <a:latin typeface="Roboto"/>
-              <a:ea typeface="Roboto"/>
-              <a:cs typeface="Roboto"/>
-              <a:sym typeface="Roboto"/>
-            </a:endParaRPr>
-          </a:p>
-          <a:p>
-            <a:pPr marL="0" lvl="0" indent="0" algn="l" rtl="0">
-              <a:spcBef>
-                <a:spcPts val="600"/>
-              </a:spcBef>
-              <a:spcAft>
-                <a:spcPts val="0"/>
-              </a:spcAft>
-              <a:buNone/>
-            </a:pPr>
-            <a:r>
-              <a:rPr lang="en">
-                <a:solidFill>
-                  <a:srgbClr val="B7B7B7"/>
-                </a:solidFill>
-              </a:rPr>
-              <a:t>IP Addressing</a:t>
-            </a:r>
-            <a:endParaRPr>
-              <a:solidFill>
-                <a:srgbClr val="B7B7B7"/>
-              </a:solidFill>
-            </a:endParaRPr>
-          </a:p>
-          <a:p>
-            <a:pPr marL="457200" lvl="0" indent="-342900" algn="l" rtl="0">
-              <a:spcBef>
-                <a:spcPts val="600"/>
-              </a:spcBef>
-              <a:spcAft>
-                <a:spcPts val="0"/>
-              </a:spcAft>
-              <a:buClr>
-                <a:srgbClr val="B7B7B7"/>
-              </a:buClr>
-              <a:buSzPts val="1800"/>
-              <a:buChar char="•"/>
-            </a:pPr>
-            <a:r>
-              <a:rPr lang="en">
-                <a:solidFill>
-                  <a:srgbClr val="B7B7B7"/>
-                </a:solidFill>
-              </a:rPr>
-              <a:t>Hierarchical Addressing</a:t>
-            </a:r>
-            <a:endParaRPr>
-              <a:solidFill>
-                <a:srgbClr val="B7B7B7"/>
-              </a:solidFill>
-            </a:endParaRPr>
-          </a:p>
-          <a:p>
-            <a:pPr marL="457200" lvl="0" indent="-342900" algn="l" rtl="0">
-              <a:spcBef>
-                <a:spcPts val="0"/>
-              </a:spcBef>
-              <a:spcAft>
-                <a:spcPts val="0"/>
-              </a:spcAft>
-              <a:buClr>
-                <a:srgbClr val="B7B7B7"/>
-              </a:buClr>
-              <a:buSzPts val="1800"/>
-              <a:buChar char="•"/>
-            </a:pPr>
-            <a:r>
-              <a:rPr lang="en">
-                <a:solidFill>
-                  <a:srgbClr val="B7B7B7"/>
-                </a:solidFill>
-              </a:rPr>
-              <a:t>Assigning Addresses</a:t>
-            </a:r>
-            <a:endParaRPr>
-              <a:solidFill>
-                <a:srgbClr val="B7B7B7"/>
-              </a:solidFill>
-            </a:endParaRPr>
-          </a:p>
-          <a:p>
-            <a:pPr marL="457200" lvl="0" indent="-342900" algn="l" rtl="0">
-              <a:spcBef>
-                <a:spcPts val="0"/>
-              </a:spcBef>
-              <a:spcAft>
-                <a:spcPts val="0"/>
-              </a:spcAft>
-              <a:buClr>
-                <a:srgbClr val="B7B7B7"/>
-              </a:buClr>
-              <a:buSzPts val="1800"/>
-              <a:buChar char="•"/>
-            </a:pPr>
-            <a:r>
-              <a:rPr lang="en">
-                <a:solidFill>
-                  <a:srgbClr val="B7B7B7"/>
-                </a:solidFill>
-              </a:rPr>
-              <a:t>Writing Addresses</a:t>
-            </a:r>
-            <a:endParaRPr>
-              <a:solidFill>
-                <a:srgbClr val="B7B7B7"/>
-              </a:solidFill>
-            </a:endParaRPr>
-          </a:p>
-          <a:p>
-            <a:pPr marL="457200" lvl="0" indent="-342900" algn="l" rtl="0">
-              <a:spcBef>
-                <a:spcPts val="0"/>
-              </a:spcBef>
-              <a:spcAft>
-                <a:spcPts val="0"/>
-              </a:spcAft>
-              <a:buClr>
-                <a:srgbClr val="B7B7B7"/>
-              </a:buClr>
-              <a:buSzPts val="1800"/>
-              <a:buChar char="•"/>
-            </a:pPr>
-            <a:r>
-              <a:rPr lang="en">
-                <a:solidFill>
-                  <a:srgbClr val="B7B7B7"/>
-                </a:solidFill>
-              </a:rPr>
-              <a:t>Aggregating Routes</a:t>
-            </a:r>
-            <a:endParaRPr>
-              <a:solidFill>
-                <a:srgbClr val="B7B7B7"/>
-              </a:solidFill>
-            </a:endParaRPr>
-          </a:p>
-          <a:p>
-            <a:pPr marL="457200" lvl="0" indent="-342900" algn="l" rtl="0">
-              <a:spcBef>
-                <a:spcPts val="0"/>
-              </a:spcBef>
-              <a:spcAft>
-                <a:spcPts val="0"/>
-              </a:spcAft>
-              <a:buClr>
-                <a:srgbClr val="B7B7B7"/>
-              </a:buClr>
-              <a:buSzPts val="1800"/>
-              <a:buChar char="•"/>
-            </a:pPr>
-            <a:r>
-              <a:rPr lang="en">
-                <a:solidFill>
-                  <a:srgbClr val="B7B7B7"/>
-                </a:solidFill>
-              </a:rPr>
-              <a:t>IPv6 Changes</a:t>
-            </a:r>
-            <a:endParaRPr>
-              <a:solidFill>
-                <a:srgbClr val="B7B7B7"/>
-              </a:solidFill>
-            </a:endParaRPr>
-          </a:p>
-        </p:txBody>
-      </p:sp>
-      <p:sp>
-        <p:nvSpPr>
-          <p:cNvPr id="296" name="Google Shape;296;p33"/>
-          <p:cNvSpPr txBox="1">
-            <a:spLocks noGrp="1"/>
-          </p:cNvSpPr>
-          <p:nvPr>
-            <p:ph type="title"/>
-          </p:nvPr>
-        </p:nvSpPr>
-        <p:spPr>
-          <a:xfrm>
-            <a:off x="177925" y="2003300"/>
-            <a:ext cx="4038000" cy="2037900"/>
-          </a:xfrm>
-          <a:prstGeom prst="rect">
-            <a:avLst/>
-          </a:prstGeom>
-        </p:spPr>
-        <p:txBody>
-          <a:bodyPr spcFirstLastPara="1" wrap="square" lIns="91425" tIns="91425" rIns="91425" bIns="91425" anchor="b" anchorCtr="0">
-            <a:noAutofit/>
-          </a:bodyPr>
-          <a:lstStyle/>
-          <a:p>
-            <a:pPr marL="0" lvl="0" indent="0" algn="l" rtl="0">
-              <a:spcBef>
-                <a:spcPts val="0"/>
-              </a:spcBef>
-              <a:spcAft>
-                <a:spcPts val="0"/>
-              </a:spcAft>
-              <a:buNone/>
-            </a:pPr>
-            <a:r>
-              <a:rPr lang="en"/>
-              <a:t>Learning Graph Topology</a:t>
-            </a:r>
-            <a:endParaRPr/>
-          </a:p>
-        </p:txBody>
-      </p:sp>
-      <p:sp>
-        <p:nvSpPr>
-          <p:cNvPr id="297" name="Google Shape;297;p33"/>
-          <p:cNvSpPr txBox="1">
-            <a:spLocks noGrp="1"/>
-          </p:cNvSpPr>
-          <p:nvPr>
-            <p:ph type="subTitle" idx="2"/>
-          </p:nvPr>
-        </p:nvSpPr>
-        <p:spPr>
-          <a:xfrm>
-            <a:off x="177925" y="4068000"/>
-            <a:ext cx="4158000" cy="393600"/>
-          </a:xfrm>
-          <a:prstGeom prst="rect">
-            <a:avLst/>
-          </a:prstGeom>
-        </p:spPr>
-        <p:txBody>
-          <a:bodyPr spcFirstLastPara="1" wrap="square" lIns="91425" tIns="91425" rIns="91425" bIns="91425" anchor="ctr" anchorCtr="0">
-            <a:noAutofit/>
-          </a:bodyPr>
-          <a:lstStyle/>
-          <a:p>
-            <a:pPr marL="0" lvl="0" indent="0" algn="l" rtl="0">
-              <a:spcBef>
-                <a:spcPts val="600"/>
-              </a:spcBef>
-              <a:spcAft>
-                <a:spcPts val="0"/>
-              </a:spcAft>
-              <a:buNone/>
-            </a:pPr>
-            <a:r>
-              <a:rPr lang="en-US" dirty="0"/>
-              <a:t>Lecture 5.3, Spring 2026</a:t>
-            </a:r>
-            <a:endParaRPr dirty="0"/>
-          </a:p>
-        </p:txBody>
-      </p:sp>
-      <p:sp>
-        <p:nvSpPr>
-          <p:cNvPr id="2" name="Slide Number Placeholder 1">
-            <a:extLst>
-              <a:ext uri="{FF2B5EF4-FFF2-40B4-BE49-F238E27FC236}">
-                <a16:creationId xmlns:a16="http://schemas.microsoft.com/office/drawing/2014/main" id="{8FEE7685-1350-59D7-F57B-04382E1FF876}"/>
-              </a:ext>
-            </a:extLst>
-          </p:cNvPr>
-          <p:cNvSpPr>
-            <a:spLocks noGrp="1"/>
-          </p:cNvSpPr>
-          <p:nvPr>
-            <p:ph type="sldNum" idx="12"/>
-          </p:nvPr>
-        </p:nvSpPr>
-        <p:spPr/>
-        <p:txBody>
-          <a:bodyPr/>
-          <a:lstStyle/>
-          <a:p>
-            <a:pPr marL="0" lvl="0" indent="0" algn="r" rtl="0">
-              <a:spcBef>
-                <a:spcPts val="0"/>
-              </a:spcBef>
-              <a:spcAft>
-                <a:spcPts val="0"/>
-              </a:spcAft>
-              <a:buNone/>
-            </a:pPr>
-            <a:fld id="{00000000-1234-1234-1234-123412341234}" type="slidenum">
-              <a:rPr lang="en" smtClean="0"/>
-              <a:t>10</a:t>
-            </a:fld>
-            <a:endParaRPr lang="en"/>
-          </a:p>
-        </p:txBody>
-      </p:sp>
-    </p:spTree>
-  </p:cSld>
-  <p:clrMapOvr>
-    <a:masterClrMapping/>
-  </p:clrMapOvr>
-</p:sld>
-</file>
-
-<file path=ppt/slides/slide11.xml><?xml version="1.0" encoding="utf-8"?>
-<p:sld xmlns:a="http://schemas.openxmlformats.org/drawingml/2006/main" xmlns:r="http://schemas.openxmlformats.org/officeDocument/2006/relationships" xmlns:p="http://schemas.openxmlformats.org/presentationml/2006/main">
-  <p:cSld>
-    <p:spTree>
-      <p:nvGrpSpPr>
         <p:cNvPr id="1" name="Shape 301"/>
         <p:cNvGrpSpPr/>
         <p:nvPr/>
@@ -28188,10 +26777,10 @@
               <a:buNone/>
             </a:pPr>
             <a:r>
-              <a:rPr lang="en"/>
+              <a:rPr lang="en" dirty="0"/>
               <a:t>Link-state protocols:</a:t>
             </a:r>
-            <a:endParaRPr/>
+            <a:endParaRPr dirty="0"/>
           </a:p>
           <a:p>
             <a:pPr marL="457200" lvl="0" indent="-342900" algn="l" rtl="0">
@@ -28205,10 +26794,10 @@
               <a:buAutoNum type="arabicPeriod"/>
             </a:pPr>
             <a:r>
-              <a:rPr lang="en"/>
+              <a:rPr lang="en" dirty="0"/>
               <a:t>Every router learns the full network graph.</a:t>
             </a:r>
-            <a:endParaRPr/>
+            <a:endParaRPr dirty="0"/>
           </a:p>
           <a:p>
             <a:pPr marL="914400" lvl="1" indent="-342900" algn="l" rtl="0">
@@ -28222,10 +26811,10 @@
               <a:buChar char="●"/>
             </a:pPr>
             <a:r>
-              <a:rPr lang="en"/>
+              <a:rPr lang="en" dirty="0"/>
               <a:t>Step 1A: Discover my neighbors.</a:t>
             </a:r>
-            <a:endParaRPr/>
+            <a:endParaRPr dirty="0"/>
           </a:p>
           <a:p>
             <a:pPr marL="914400" lvl="1" indent="-342900" algn="l" rtl="0">
@@ -28239,10 +26828,10 @@
               <a:buChar char="●"/>
             </a:pPr>
             <a:r>
-              <a:rPr lang="en"/>
+              <a:rPr lang="en" dirty="0"/>
               <a:t>Step 1B: Tell everybody about my neighbors.</a:t>
             </a:r>
-            <a:endParaRPr/>
+            <a:endParaRPr dirty="0"/>
           </a:p>
           <a:p>
             <a:pPr marL="457200" lvl="0" indent="-342900" algn="l" rtl="0">
@@ -28259,14 +26848,14 @@
               <a:buAutoNum type="arabicPeriod"/>
             </a:pPr>
             <a:r>
-              <a:rPr lang="en">
+              <a:rPr lang="en" dirty="0">
                 <a:solidFill>
                   <a:srgbClr val="B7B7B7"/>
                 </a:solidFill>
               </a:rPr>
-              <a:t>Then, each router runs a shortest-path algorithm on the graph to populate the forwarding table.</a:t>
-            </a:r>
-            <a:endParaRPr>
+              <a:t>Then, each router runs Dijkstra’s algorithm on the graph to populate the forwarding table.</a:t>
+            </a:r>
+            <a:endParaRPr dirty="0">
               <a:solidFill>
                 <a:srgbClr val="000000"/>
               </a:solidFill>
@@ -28390,7 +26979,7 @@
             </a:pPr>
             <a:fld id="{00000000-1234-1234-1234-123412341234}" type="slidenum">
               <a:rPr lang="en" smtClean="0"/>
-              <a:t>11</a:t>
+              <a:t>10</a:t>
             </a:fld>
             <a:endParaRPr lang="en"/>
           </a:p>
@@ -28404,7 +26993,7 @@
 </p:sld>
 </file>
 
-<file path=ppt/slides/slide12.xml><?xml version="1.0" encoding="utf-8"?>
+<file path=ppt/slides/slide11.xml><?xml version="1.0" encoding="utf-8"?>
 <p:sld xmlns:a="http://schemas.openxmlformats.org/drawingml/2006/main" xmlns:r="http://schemas.openxmlformats.org/officeDocument/2006/relationships" xmlns:p="http://schemas.openxmlformats.org/presentationml/2006/main">
   <p:cSld>
     <p:spTree>
@@ -28669,10 +27258,10 @@
               <a:buNone/>
             </a:pPr>
             <a:r>
-              <a:rPr lang="en"/>
+              <a:rPr lang="en" dirty="0"/>
               <a:t>How do we discover who is adjacent to us and their identity? Say hello!</a:t>
             </a:r>
-            <a:endParaRPr/>
+            <a:endParaRPr dirty="0"/>
           </a:p>
           <a:p>
             <a:pPr marL="457200" lvl="0" indent="-342900" algn="l" rtl="0">
@@ -28686,18 +27275,26 @@
               <a:buChar char="●"/>
             </a:pPr>
             <a:r>
-              <a:rPr lang="en"/>
+              <a:rPr lang="en" dirty="0"/>
               <a:t>Routers periodically send </a:t>
             </a:r>
             <a:r>
-              <a:rPr lang="en" i="1"/>
+              <a:rPr lang="en-US" dirty="0"/>
+              <a:t>Link-State Advertisements </a:t>
+            </a:r>
+            <a:r>
+              <a:rPr lang="en" dirty="0"/>
+              <a:t>(LSAs) (</a:t>
+            </a:r>
+            <a:r>
+              <a:rPr lang="en" i="1" dirty="0"/>
               <a:t>hello</a:t>
             </a:r>
             <a:r>
-              <a:rPr lang="en"/>
-              <a:t> messages to their neighbors.</a:t>
-            </a:r>
-            <a:endParaRPr/>
+              <a:rPr lang="en" dirty="0"/>
+              <a:t> messages) to their neighbors.</a:t>
+            </a:r>
+            <a:endParaRPr dirty="0"/>
           </a:p>
           <a:p>
             <a:pPr marL="457200" lvl="0" indent="-342900" algn="l" rtl="0">
@@ -28711,10 +27308,10 @@
               <a:buChar char="●"/>
             </a:pPr>
             <a:r>
-              <a:rPr lang="en"/>
+              <a:rPr lang="en" dirty="0"/>
               <a:t>If they stop saying hello, assume that they disappeared.</a:t>
             </a:r>
-            <a:endParaRPr/>
+            <a:endParaRPr dirty="0"/>
           </a:p>
           <a:p>
             <a:pPr marL="457200" lvl="0" indent="-342900" algn="l" rtl="0">
@@ -28728,10 +27325,10 @@
               <a:buChar char="●"/>
             </a:pPr>
             <a:r>
-              <a:rPr lang="en"/>
+              <a:rPr lang="en" dirty="0"/>
               <a:t>This helps us learn about our direct neighbors, but not the whole network.</a:t>
             </a:r>
-            <a:endParaRPr/>
+            <a:endParaRPr dirty="0"/>
           </a:p>
           <a:p>
             <a:pPr marL="914400" lvl="1" indent="-342900" algn="l" rtl="0">
@@ -28745,10 +27342,10 @@
               <a:buChar char="○"/>
             </a:pPr>
             <a:r>
-              <a:rPr lang="en"/>
+              <a:rPr lang="en" dirty="0"/>
               <a:t>R1 does not know about the rest of the network (e.g. R3).</a:t>
             </a:r>
-            <a:endParaRPr/>
+            <a:endParaRPr dirty="0"/>
           </a:p>
         </p:txBody>
       </p:sp>
@@ -29416,7 +28013,7 @@
             </a:pPr>
             <a:fld id="{00000000-1234-1234-1234-123412341234}" type="slidenum">
               <a:rPr lang="en" smtClean="0"/>
-              <a:t>12</a:t>
+              <a:t>11</a:t>
             </a:fld>
             <a:endParaRPr lang="en"/>
           </a:p>
@@ -29865,7 +28462,7 @@
 </p:sld>
 </file>
 
-<file path=ppt/slides/slide13.xml><?xml version="1.0" encoding="utf-8"?>
+<file path=ppt/slides/slide12.xml><?xml version="1.0" encoding="utf-8"?>
 <p:sld xmlns:a="http://schemas.openxmlformats.org/drawingml/2006/main" xmlns:r="http://schemas.openxmlformats.org/officeDocument/2006/relationships" xmlns:p="http://schemas.openxmlformats.org/presentationml/2006/main">
   <p:cSld>
     <p:spTree>
@@ -31003,7 +29600,7 @@
             </a:pPr>
             <a:fld id="{00000000-1234-1234-1234-123412341234}" type="slidenum">
               <a:rPr lang="en" smtClean="0"/>
-              <a:t>13</a:t>
+              <a:t>12</a:t>
             </a:fld>
             <a:endParaRPr lang="en"/>
           </a:p>
@@ -31182,7 +29779,7 @@
 </p:sld>
 </file>
 
-<file path=ppt/slides/slide14.xml><?xml version="1.0" encoding="utf-8"?>
+<file path=ppt/slides/slide13.xml><?xml version="1.0" encoding="utf-8"?>
 <p:sld xmlns:a="http://schemas.openxmlformats.org/drawingml/2006/main" xmlns:r="http://schemas.openxmlformats.org/officeDocument/2006/relationships" xmlns:p="http://schemas.openxmlformats.org/presentationml/2006/main">
   <p:cSld>
     <p:spTree>
@@ -31932,7 +30529,7 @@
             </a:pPr>
             <a:fld id="{00000000-1234-1234-1234-123412341234}" type="slidenum">
               <a:rPr lang="en" smtClean="0"/>
-              <a:t>14</a:t>
+              <a:t>13</a:t>
             </a:fld>
             <a:endParaRPr lang="en"/>
           </a:p>
@@ -32336,7 +30933,7 @@
 </p:sld>
 </file>
 
-<file path=ppt/slides/slide15.xml><?xml version="1.0" encoding="utf-8"?>
+<file path=ppt/slides/slide14.xml><?xml version="1.0" encoding="utf-8"?>
 <p:sld xmlns:a="http://schemas.openxmlformats.org/drawingml/2006/main" xmlns:r="http://schemas.openxmlformats.org/officeDocument/2006/relationships" xmlns:p="http://schemas.openxmlformats.org/presentationml/2006/main">
   <p:cSld>
     <p:spTree>
@@ -32439,10 +31036,10 @@
               <a:buNone/>
             </a:pPr>
             <a:r>
-              <a:rPr lang="en"/>
+              <a:rPr lang="en" dirty="0"/>
               <a:t>Amplification: When there's a loop, copies of the same message get multiplied.</a:t>
             </a:r>
-            <a:endParaRPr/>
+            <a:endParaRPr dirty="0"/>
           </a:p>
         </p:txBody>
       </p:sp>
@@ -33519,7 +32116,7 @@
             </a:pPr>
             <a:fld id="{00000000-1234-1234-1234-123412341234}" type="slidenum">
               <a:rPr lang="en" smtClean="0"/>
-              <a:t>15</a:t>
+              <a:t>14</a:t>
             </a:fld>
             <a:endParaRPr lang="en"/>
           </a:p>
@@ -34643,7 +33240,7 @@
 </p:sld>
 </file>
 
-<file path=ppt/slides/slide16.xml><?xml version="1.0" encoding="utf-8"?>
+<file path=ppt/slides/slide15.xml><?xml version="1.0" encoding="utf-8"?>
 <p:sld xmlns:a="http://schemas.openxmlformats.org/drawingml/2006/main" xmlns:r="http://schemas.openxmlformats.org/officeDocument/2006/relationships" xmlns:p="http://schemas.openxmlformats.org/presentationml/2006/main">
   <p:cSld>
     <p:spTree>
@@ -38638,7 +37235,7 @@
             </a:pPr>
             <a:fld id="{00000000-1234-1234-1234-123412341234}" type="slidenum">
               <a:rPr lang="en" smtClean="0"/>
-              <a:t>16</a:t>
+              <a:t>15</a:t>
             </a:fld>
             <a:endParaRPr lang="en"/>
           </a:p>
@@ -41409,7 +40006,7 @@
 </p:sld>
 </file>
 
-<file path=ppt/slides/slide17.xml><?xml version="1.0" encoding="utf-8"?>
+<file path=ppt/slides/slide16.xml><?xml version="1.0" encoding="utf-8"?>
 <p:sld xmlns:a="http://schemas.openxmlformats.org/drawingml/2006/main" xmlns:r="http://schemas.openxmlformats.org/officeDocument/2006/relationships" xmlns:p="http://schemas.openxmlformats.org/presentationml/2006/main">
   <p:cSld>
     <p:spTree>
@@ -42240,7 +40837,7 @@
             </a:pPr>
             <a:fld id="{00000000-1234-1234-1234-123412341234}" type="slidenum">
               <a:rPr lang="en" smtClean="0"/>
-              <a:t>17</a:t>
+              <a:t>16</a:t>
             </a:fld>
             <a:endParaRPr lang="en"/>
           </a:p>
@@ -42635,7 +41232,7 @@
 </p:sld>
 </file>
 
-<file path=ppt/slides/slide18.xml><?xml version="1.0" encoding="utf-8"?>
+<file path=ppt/slides/slide17.xml><?xml version="1.0" encoding="utf-8"?>
 <p:sld xmlns:a="http://schemas.openxmlformats.org/drawingml/2006/main" xmlns:r="http://schemas.openxmlformats.org/officeDocument/2006/relationships" xmlns:p="http://schemas.openxmlformats.org/presentationml/2006/main">
   <p:cSld>
     <p:spTree>
@@ -42805,7 +41402,7 @@
             </a:pPr>
             <a:fld id="{00000000-1234-1234-1234-123412341234}" type="slidenum">
               <a:rPr lang="en" smtClean="0"/>
-              <a:t>18</a:t>
+              <a:t>17</a:t>
             </a:fld>
             <a:endParaRPr lang="en"/>
           </a:p>
@@ -42819,7 +41416,7 @@
 </p:sld>
 </file>
 
-<file path=ppt/slides/slide19.xml><?xml version="1.0" encoding="utf-8"?>
+<file path=ppt/slides/slide18.xml><?xml version="1.0" encoding="utf-8"?>
 <p:sld xmlns:a="http://schemas.openxmlformats.org/drawingml/2006/main" xmlns:r="http://schemas.openxmlformats.org/officeDocument/2006/relationships" xmlns:p="http://schemas.openxmlformats.org/presentationml/2006/main">
   <p:cSld>
     <p:spTree>
@@ -43245,7 +41842,7 @@
         <p:spPr>
           <a:xfrm>
             <a:off x="864159" y="4361900"/>
-            <a:ext cx="3155182" cy="559127"/>
+            <a:ext cx="3155182" cy="774571"/>
           </a:xfrm>
           <a:prstGeom prst="rect">
             <a:avLst/>
@@ -43280,7 +41877,7 @@
                 <a:cs typeface="Roboto"/>
                 <a:sym typeface="Roboto"/>
               </a:rPr>
-              <a:t>A-R3 Link is down, but R1 doesn't know!</a:t>
+              <a:t>A-R3 Link is down, but R1 doesn't know it yet</a:t>
             </a:r>
             <a:endParaRPr dirty="0">
               <a:solidFill>
@@ -43370,7 +41967,7 @@
                 <a:cs typeface="Roboto"/>
                 <a:sym typeface="Roboto"/>
               </a:rPr>
-              <a:t>R3 knows about the link failure!</a:t>
+              <a:t>R3 knows about the link failure</a:t>
             </a:r>
             <a:endParaRPr dirty="0">
               <a:solidFill>
@@ -43902,6 +42499,320 @@
             <a:extLst>
               <a:ext uri="{FF2B5EF4-FFF2-40B4-BE49-F238E27FC236}">
                 <a16:creationId xmlns:a16="http://schemas.microsoft.com/office/drawing/2014/main" id="{F30F1865-688C-2703-F915-62D030926A6A}"/>
+              </a:ext>
+            </a:extLst>
+          </p:cNvPr>
+          <p:cNvSpPr>
+            <a:spLocks noGrp="1"/>
+          </p:cNvSpPr>
+          <p:nvPr>
+            <p:ph type="sldNum" idx="12"/>
+          </p:nvPr>
+        </p:nvSpPr>
+        <p:spPr/>
+        <p:txBody>
+          <a:bodyPr/>
+          <a:lstStyle/>
+          <a:p>
+            <a:pPr marL="0" lvl="0" indent="0" algn="r" rtl="0">
+              <a:spcBef>
+                <a:spcPts val="0"/>
+              </a:spcBef>
+              <a:spcAft>
+                <a:spcPts val="0"/>
+              </a:spcAft>
+              <a:buNone/>
+            </a:pPr>
+            <a:fld id="{00000000-1234-1234-1234-123412341234}" type="slidenum">
+              <a:rPr lang="en" smtClean="0"/>
+              <a:t>18</a:t>
+            </a:fld>
+            <a:endParaRPr lang="en"/>
+          </a:p>
+        </p:txBody>
+      </p:sp>
+    </p:spTree>
+  </p:cSld>
+  <p:clrMapOvr>
+    <a:masterClrMapping/>
+  </p:clrMapOvr>
+</p:sld>
+</file>
+
+<file path=ppt/slides/slide19.xml><?xml version="1.0" encoding="utf-8"?>
+<p:sld xmlns:a="http://schemas.openxmlformats.org/drawingml/2006/main" xmlns:r="http://schemas.openxmlformats.org/officeDocument/2006/relationships" xmlns:p="http://schemas.openxmlformats.org/presentationml/2006/main">
+  <p:cSld>
+    <p:spTree>
+      <p:nvGrpSpPr>
+        <p:cNvPr id="1" name="Shape 581"/>
+        <p:cNvGrpSpPr/>
+        <p:nvPr/>
+      </p:nvGrpSpPr>
+      <p:grpSpPr>
+        <a:xfrm>
+          <a:off x="0" y="0"/>
+          <a:ext cx="0" cy="0"/>
+          <a:chOff x="0" y="0"/>
+          <a:chExt cx="0" cy="0"/>
+        </a:xfrm>
+      </p:grpSpPr>
+      <p:sp>
+        <p:nvSpPr>
+          <p:cNvPr id="582" name="Google Shape;582;p43"/>
+          <p:cNvSpPr txBox="1">
+            <a:spLocks noGrp="1"/>
+          </p:cNvSpPr>
+          <p:nvPr>
+            <p:ph type="title"/>
+          </p:nvPr>
+        </p:nvSpPr>
+        <p:spPr>
+          <a:xfrm>
+            <a:off x="0" y="0"/>
+            <a:ext cx="9144000" cy="393600"/>
+          </a:xfrm>
+          <a:prstGeom prst="rect">
+            <a:avLst/>
+          </a:prstGeom>
+        </p:spPr>
+        <p:txBody>
+          <a:bodyPr spcFirstLastPara="1" wrap="square" lIns="91425" tIns="91425" rIns="91425" bIns="91425" anchor="t" anchorCtr="0">
+            <a:noAutofit/>
+          </a:bodyPr>
+          <a:lstStyle/>
+          <a:p>
+            <a:pPr marL="0" lvl="0" indent="0" algn="l" rtl="0">
+              <a:spcBef>
+                <a:spcPts val="0"/>
+              </a:spcBef>
+              <a:spcAft>
+                <a:spcPts val="0"/>
+              </a:spcAft>
+              <a:buNone/>
+            </a:pPr>
+            <a:r>
+              <a:rPr lang="en" dirty="0"/>
+              <a:t>Link-State vs. Distance-Vector</a:t>
+            </a:r>
+            <a:endParaRPr dirty="0"/>
+          </a:p>
+        </p:txBody>
+      </p:sp>
+      <p:sp>
+        <p:nvSpPr>
+          <p:cNvPr id="583" name="Google Shape;583;p43"/>
+          <p:cNvSpPr txBox="1">
+            <a:spLocks noGrp="1"/>
+          </p:cNvSpPr>
+          <p:nvPr>
+            <p:ph type="body" idx="1"/>
+          </p:nvPr>
+        </p:nvSpPr>
+        <p:spPr>
+          <a:xfrm>
+            <a:off x="107050" y="402200"/>
+            <a:ext cx="8909700" cy="4635300"/>
+          </a:xfrm>
+          <a:prstGeom prst="rect">
+            <a:avLst/>
+          </a:prstGeom>
+        </p:spPr>
+        <p:txBody>
+          <a:bodyPr spcFirstLastPara="1" wrap="square" lIns="91425" tIns="91425" rIns="91425" bIns="91425" anchor="t" anchorCtr="0">
+            <a:noAutofit/>
+          </a:bodyPr>
+          <a:lstStyle/>
+          <a:p>
+            <a:pPr marL="0" lvl="0" indent="0" algn="l" rtl="0">
+              <a:spcBef>
+                <a:spcPts val="600"/>
+              </a:spcBef>
+              <a:spcAft>
+                <a:spcPts val="0"/>
+              </a:spcAft>
+              <a:buNone/>
+            </a:pPr>
+            <a:r>
+              <a:rPr lang="en" dirty="0"/>
+              <a:t>Link-state is relatively simple. </a:t>
+            </a:r>
+            <a:endParaRPr lang="en-US" dirty="0"/>
+          </a:p>
+          <a:p>
+            <a:pPr marL="457200" lvl="0" indent="-342900" algn="l" rtl="0">
+              <a:spcBef>
+                <a:spcPts val="600"/>
+              </a:spcBef>
+              <a:spcAft>
+                <a:spcPts val="0"/>
+              </a:spcAft>
+              <a:buSzPts val="1800"/>
+              <a:buChar char="●"/>
+            </a:pPr>
+            <a:r>
+              <a:rPr lang="en-US" dirty="0"/>
+              <a:t>Everyone floods link/destination information.</a:t>
+            </a:r>
+          </a:p>
+          <a:p>
+            <a:pPr marL="457200" lvl="0" indent="-342900" algn="l" rtl="0">
+              <a:spcBef>
+                <a:spcPts val="0"/>
+              </a:spcBef>
+              <a:spcAft>
+                <a:spcPts val="0"/>
+              </a:spcAft>
+              <a:buSzPts val="1800"/>
+              <a:buChar char="●"/>
+            </a:pPr>
+            <a:r>
+              <a:rPr lang="en" dirty="0"/>
+              <a:t>Everyone has a global map of the network.</a:t>
+            </a:r>
+            <a:endParaRPr dirty="0"/>
+          </a:p>
+          <a:p>
+            <a:pPr marL="457200" lvl="0" indent="-342900" algn="l" rtl="0">
+              <a:spcBef>
+                <a:spcPts val="0"/>
+              </a:spcBef>
+              <a:spcAft>
+                <a:spcPts val="0"/>
+              </a:spcAft>
+              <a:buSzPts val="1800"/>
+              <a:buChar char="●"/>
+            </a:pPr>
+            <a:r>
+              <a:rPr lang="en" dirty="0"/>
+              <a:t>Everyone independently computes next-hops.</a:t>
+            </a:r>
+            <a:endParaRPr dirty="0"/>
+          </a:p>
+          <a:p>
+            <a:pPr marL="0" lvl="0" indent="0" algn="l" rtl="0">
+              <a:spcBef>
+                <a:spcPts val="600"/>
+              </a:spcBef>
+              <a:spcAft>
+                <a:spcPts val="0"/>
+              </a:spcAft>
+              <a:buNone/>
+            </a:pPr>
+            <a:r>
+              <a:rPr lang="en" dirty="0"/>
+              <a:t>Why might we want to use link-state over distance-vector?</a:t>
+            </a:r>
+            <a:endParaRPr dirty="0"/>
+          </a:p>
+          <a:p>
+            <a:pPr marL="457200" lvl="0" indent="-342900" algn="l" rtl="0">
+              <a:spcBef>
+                <a:spcPts val="600"/>
+              </a:spcBef>
+              <a:spcAft>
+                <a:spcPts val="0"/>
+              </a:spcAft>
+              <a:buSzPts val="1800"/>
+              <a:buChar char="●"/>
+            </a:pPr>
+            <a:r>
+              <a:rPr lang="en" dirty="0"/>
+              <a:t>Link-state gives routers more control over the path they choose.</a:t>
+            </a:r>
+            <a:endParaRPr dirty="0"/>
+          </a:p>
+          <a:p>
+            <a:pPr marL="914400" lvl="1" indent="-342900" algn="l" rtl="0">
+              <a:spcBef>
+                <a:spcPts val="0"/>
+              </a:spcBef>
+              <a:spcAft>
+                <a:spcPts val="0"/>
+              </a:spcAft>
+              <a:buSzPts val="1800"/>
+              <a:buChar char="○"/>
+            </a:pPr>
+            <a:r>
+              <a:rPr lang="en" dirty="0"/>
+              <a:t>Distance-vector: We have to trust what our neighbor says, and we don't know the path they're using.</a:t>
+            </a:r>
+            <a:endParaRPr dirty="0"/>
+          </a:p>
+          <a:p>
+            <a:pPr marL="457200" lvl="0" indent="-342900" algn="l" rtl="0">
+              <a:spcBef>
+                <a:spcPts val="0"/>
+              </a:spcBef>
+              <a:spcAft>
+                <a:spcPts val="0"/>
+              </a:spcAft>
+              <a:buSzPts val="1800"/>
+              <a:buChar char="●"/>
+            </a:pPr>
+            <a:r>
+              <a:rPr lang="en" dirty="0"/>
+              <a:t>Link-state might converge faster.</a:t>
+            </a:r>
+            <a:endParaRPr dirty="0"/>
+          </a:p>
+          <a:p>
+            <a:pPr marL="914400" lvl="1" indent="-342900" algn="l" rtl="0">
+              <a:spcBef>
+                <a:spcPts val="0"/>
+              </a:spcBef>
+              <a:spcAft>
+                <a:spcPts val="0"/>
+              </a:spcAft>
+              <a:buSzPts val="1800"/>
+              <a:buChar char="○"/>
+            </a:pPr>
+            <a:r>
+              <a:rPr lang="en" dirty="0"/>
+              <a:t>Distance-vector: Wait for neighbor to recompute and re-advertise path.</a:t>
+            </a:r>
+            <a:endParaRPr dirty="0"/>
+          </a:p>
+          <a:p>
+            <a:pPr marL="914400" lvl="1" indent="-342900" algn="l" rtl="0">
+              <a:spcBef>
+                <a:spcPts val="0"/>
+              </a:spcBef>
+              <a:spcAft>
+                <a:spcPts val="0"/>
+              </a:spcAft>
+              <a:buSzPts val="1800"/>
+              <a:buChar char="○"/>
+            </a:pPr>
+            <a:r>
+              <a:rPr lang="en" dirty="0"/>
+              <a:t>Link-state: Flood information before recomputing.</a:t>
+            </a:r>
+            <a:endParaRPr dirty="0"/>
+          </a:p>
+          <a:p>
+            <a:pPr marL="0" lvl="0" indent="0" algn="l" rtl="0">
+              <a:spcBef>
+                <a:spcPts val="600"/>
+              </a:spcBef>
+              <a:spcAft>
+                <a:spcPts val="0"/>
+              </a:spcAft>
+              <a:buNone/>
+            </a:pPr>
+            <a:r>
+              <a:rPr lang="en" dirty="0"/>
+              <a:t>Real networks often use a combination of path/distance-vector and link-state.</a:t>
+            </a:r>
+            <a:endParaRPr dirty="0"/>
+          </a:p>
+        </p:txBody>
+      </p:sp>
+      <p:sp>
+        <p:nvSpPr>
+          <p:cNvPr id="2" name="Slide Number Placeholder 1">
+            <a:extLst>
+              <a:ext uri="{FF2B5EF4-FFF2-40B4-BE49-F238E27FC236}">
+                <a16:creationId xmlns:a16="http://schemas.microsoft.com/office/drawing/2014/main" id="{70971501-1DAD-60CD-1A44-C3462DAB7688}"/>
               </a:ext>
             </a:extLst>
           </p:cNvPr>
@@ -44409,320 +43320,6 @@
   <p:cSld>
     <p:spTree>
       <p:nvGrpSpPr>
-        <p:cNvPr id="1" name="Shape 581"/>
-        <p:cNvGrpSpPr/>
-        <p:nvPr/>
-      </p:nvGrpSpPr>
-      <p:grpSpPr>
-        <a:xfrm>
-          <a:off x="0" y="0"/>
-          <a:ext cx="0" cy="0"/>
-          <a:chOff x="0" y="0"/>
-          <a:chExt cx="0" cy="0"/>
-        </a:xfrm>
-      </p:grpSpPr>
-      <p:sp>
-        <p:nvSpPr>
-          <p:cNvPr id="582" name="Google Shape;582;p43"/>
-          <p:cNvSpPr txBox="1">
-            <a:spLocks noGrp="1"/>
-          </p:cNvSpPr>
-          <p:nvPr>
-            <p:ph type="title"/>
-          </p:nvPr>
-        </p:nvSpPr>
-        <p:spPr>
-          <a:xfrm>
-            <a:off x="0" y="0"/>
-            <a:ext cx="9144000" cy="393600"/>
-          </a:xfrm>
-          <a:prstGeom prst="rect">
-            <a:avLst/>
-          </a:prstGeom>
-        </p:spPr>
-        <p:txBody>
-          <a:bodyPr spcFirstLastPara="1" wrap="square" lIns="91425" tIns="91425" rIns="91425" bIns="91425" anchor="t" anchorCtr="0">
-            <a:noAutofit/>
-          </a:bodyPr>
-          <a:lstStyle/>
-          <a:p>
-            <a:pPr marL="0" lvl="0" indent="0" algn="l" rtl="0">
-              <a:spcBef>
-                <a:spcPts val="0"/>
-              </a:spcBef>
-              <a:spcAft>
-                <a:spcPts val="0"/>
-              </a:spcAft>
-              <a:buNone/>
-            </a:pPr>
-            <a:r>
-              <a:rPr lang="en" dirty="0"/>
-              <a:t>Link-State vs. Distance-Vector</a:t>
-            </a:r>
-            <a:endParaRPr dirty="0"/>
-          </a:p>
-        </p:txBody>
-      </p:sp>
-      <p:sp>
-        <p:nvSpPr>
-          <p:cNvPr id="583" name="Google Shape;583;p43"/>
-          <p:cNvSpPr txBox="1">
-            <a:spLocks noGrp="1"/>
-          </p:cNvSpPr>
-          <p:nvPr>
-            <p:ph type="body" idx="1"/>
-          </p:nvPr>
-        </p:nvSpPr>
-        <p:spPr>
-          <a:xfrm>
-            <a:off x="107050" y="402200"/>
-            <a:ext cx="8909700" cy="4635300"/>
-          </a:xfrm>
-          <a:prstGeom prst="rect">
-            <a:avLst/>
-          </a:prstGeom>
-        </p:spPr>
-        <p:txBody>
-          <a:bodyPr spcFirstLastPara="1" wrap="square" lIns="91425" tIns="91425" rIns="91425" bIns="91425" anchor="t" anchorCtr="0">
-            <a:noAutofit/>
-          </a:bodyPr>
-          <a:lstStyle/>
-          <a:p>
-            <a:pPr marL="0" lvl="0" indent="0" algn="l" rtl="0">
-              <a:spcBef>
-                <a:spcPts val="600"/>
-              </a:spcBef>
-              <a:spcAft>
-                <a:spcPts val="0"/>
-              </a:spcAft>
-              <a:buNone/>
-            </a:pPr>
-            <a:r>
-              <a:rPr lang="en" dirty="0"/>
-              <a:t>Link-state is relatively simple. </a:t>
-            </a:r>
-            <a:endParaRPr lang="en-US" dirty="0"/>
-          </a:p>
-          <a:p>
-            <a:pPr marL="457200" lvl="0" indent="-342900" algn="l" rtl="0">
-              <a:spcBef>
-                <a:spcPts val="600"/>
-              </a:spcBef>
-              <a:spcAft>
-                <a:spcPts val="0"/>
-              </a:spcAft>
-              <a:buSzPts val="1800"/>
-              <a:buChar char="●"/>
-            </a:pPr>
-            <a:r>
-              <a:rPr lang="en-US" dirty="0"/>
-              <a:t>Everyone floods link/destination information.</a:t>
-            </a:r>
-          </a:p>
-          <a:p>
-            <a:pPr marL="457200" lvl="0" indent="-342900" algn="l" rtl="0">
-              <a:spcBef>
-                <a:spcPts val="0"/>
-              </a:spcBef>
-              <a:spcAft>
-                <a:spcPts val="0"/>
-              </a:spcAft>
-              <a:buSzPts val="1800"/>
-              <a:buChar char="●"/>
-            </a:pPr>
-            <a:r>
-              <a:rPr lang="en" dirty="0"/>
-              <a:t>Everyone has a global map of the network.</a:t>
-            </a:r>
-            <a:endParaRPr dirty="0"/>
-          </a:p>
-          <a:p>
-            <a:pPr marL="457200" lvl="0" indent="-342900" algn="l" rtl="0">
-              <a:spcBef>
-                <a:spcPts val="0"/>
-              </a:spcBef>
-              <a:spcAft>
-                <a:spcPts val="0"/>
-              </a:spcAft>
-              <a:buSzPts val="1800"/>
-              <a:buChar char="●"/>
-            </a:pPr>
-            <a:r>
-              <a:rPr lang="en" dirty="0"/>
-              <a:t>Everyone independently computes next-hops.</a:t>
-            </a:r>
-            <a:endParaRPr dirty="0"/>
-          </a:p>
-          <a:p>
-            <a:pPr marL="0" lvl="0" indent="0" algn="l" rtl="0">
-              <a:spcBef>
-                <a:spcPts val="600"/>
-              </a:spcBef>
-              <a:spcAft>
-                <a:spcPts val="0"/>
-              </a:spcAft>
-              <a:buNone/>
-            </a:pPr>
-            <a:r>
-              <a:rPr lang="en" dirty="0"/>
-              <a:t>Why might we want to use link-state over distance-vector?</a:t>
-            </a:r>
-            <a:endParaRPr dirty="0"/>
-          </a:p>
-          <a:p>
-            <a:pPr marL="457200" lvl="0" indent="-342900" algn="l" rtl="0">
-              <a:spcBef>
-                <a:spcPts val="600"/>
-              </a:spcBef>
-              <a:spcAft>
-                <a:spcPts val="0"/>
-              </a:spcAft>
-              <a:buSzPts val="1800"/>
-              <a:buChar char="●"/>
-            </a:pPr>
-            <a:r>
-              <a:rPr lang="en" dirty="0"/>
-              <a:t>Link-state gives routers more control over the path they choose.</a:t>
-            </a:r>
-            <a:endParaRPr dirty="0"/>
-          </a:p>
-          <a:p>
-            <a:pPr marL="914400" lvl="1" indent="-342900" algn="l" rtl="0">
-              <a:spcBef>
-                <a:spcPts val="0"/>
-              </a:spcBef>
-              <a:spcAft>
-                <a:spcPts val="0"/>
-              </a:spcAft>
-              <a:buSzPts val="1800"/>
-              <a:buChar char="○"/>
-            </a:pPr>
-            <a:r>
-              <a:rPr lang="en" dirty="0"/>
-              <a:t>Distance-vector: We have to trust what our neighbor says, and we don't know the path they're using.</a:t>
-            </a:r>
-            <a:endParaRPr dirty="0"/>
-          </a:p>
-          <a:p>
-            <a:pPr marL="457200" lvl="0" indent="-342900" algn="l" rtl="0">
-              <a:spcBef>
-                <a:spcPts val="0"/>
-              </a:spcBef>
-              <a:spcAft>
-                <a:spcPts val="0"/>
-              </a:spcAft>
-              <a:buSzPts val="1800"/>
-              <a:buChar char="●"/>
-            </a:pPr>
-            <a:r>
-              <a:rPr lang="en" dirty="0"/>
-              <a:t>Link-state might be better at converging.</a:t>
-            </a:r>
-            <a:endParaRPr dirty="0"/>
-          </a:p>
-          <a:p>
-            <a:pPr marL="914400" lvl="1" indent="-342900" algn="l" rtl="0">
-              <a:spcBef>
-                <a:spcPts val="0"/>
-              </a:spcBef>
-              <a:spcAft>
-                <a:spcPts val="0"/>
-              </a:spcAft>
-              <a:buSzPts val="1800"/>
-              <a:buChar char="○"/>
-            </a:pPr>
-            <a:r>
-              <a:rPr lang="en" dirty="0"/>
-              <a:t>Distance-vector: Wait for neighbor to recompute and re-advertise path.</a:t>
-            </a:r>
-            <a:endParaRPr dirty="0"/>
-          </a:p>
-          <a:p>
-            <a:pPr marL="914400" lvl="1" indent="-342900" algn="l" rtl="0">
-              <a:spcBef>
-                <a:spcPts val="0"/>
-              </a:spcBef>
-              <a:spcAft>
-                <a:spcPts val="0"/>
-              </a:spcAft>
-              <a:buSzPts val="1800"/>
-              <a:buChar char="○"/>
-            </a:pPr>
-            <a:r>
-              <a:rPr lang="en" dirty="0"/>
-              <a:t>Link-state: Flood information before recomputing.</a:t>
-            </a:r>
-            <a:endParaRPr dirty="0"/>
-          </a:p>
-          <a:p>
-            <a:pPr marL="0" lvl="0" indent="0" algn="l" rtl="0">
-              <a:spcBef>
-                <a:spcPts val="600"/>
-              </a:spcBef>
-              <a:spcAft>
-                <a:spcPts val="0"/>
-              </a:spcAft>
-              <a:buNone/>
-            </a:pPr>
-            <a:r>
-              <a:rPr lang="en" dirty="0"/>
-              <a:t>Real networks often use a combination of path/distance-vector and link-state.</a:t>
-            </a:r>
-            <a:endParaRPr dirty="0"/>
-          </a:p>
-        </p:txBody>
-      </p:sp>
-      <p:sp>
-        <p:nvSpPr>
-          <p:cNvPr id="2" name="Slide Number Placeholder 1">
-            <a:extLst>
-              <a:ext uri="{FF2B5EF4-FFF2-40B4-BE49-F238E27FC236}">
-                <a16:creationId xmlns:a16="http://schemas.microsoft.com/office/drawing/2014/main" id="{70971501-1DAD-60CD-1A44-C3462DAB7688}"/>
-              </a:ext>
-            </a:extLst>
-          </p:cNvPr>
-          <p:cNvSpPr>
-            <a:spLocks noGrp="1"/>
-          </p:cNvSpPr>
-          <p:nvPr>
-            <p:ph type="sldNum" idx="12"/>
-          </p:nvPr>
-        </p:nvSpPr>
-        <p:spPr/>
-        <p:txBody>
-          <a:bodyPr/>
-          <a:lstStyle/>
-          <a:p>
-            <a:pPr marL="0" lvl="0" indent="0" algn="r" rtl="0">
-              <a:spcBef>
-                <a:spcPts val="0"/>
-              </a:spcBef>
-              <a:spcAft>
-                <a:spcPts val="0"/>
-              </a:spcAft>
-              <a:buNone/>
-            </a:pPr>
-            <a:fld id="{00000000-1234-1234-1234-123412341234}" type="slidenum">
-              <a:rPr lang="en" smtClean="0"/>
-              <a:t>20</a:t>
-            </a:fld>
-            <a:endParaRPr lang="en"/>
-          </a:p>
-        </p:txBody>
-      </p:sp>
-    </p:spTree>
-  </p:cSld>
-  <p:clrMapOvr>
-    <a:masterClrMapping/>
-  </p:clrMapOvr>
-</p:sld>
-</file>
-
-<file path=ppt/slides/slide21.xml><?xml version="1.0" encoding="utf-8"?>
-<p:sld xmlns:a="http://schemas.openxmlformats.org/drawingml/2006/main" xmlns:r="http://schemas.openxmlformats.org/officeDocument/2006/relationships" xmlns:p="http://schemas.openxmlformats.org/presentationml/2006/main">
-  <p:cSld>
-    <p:spTree>
-      <p:nvGrpSpPr>
         <p:cNvPr id="1" name=""/>
         <p:cNvGrpSpPr/>
         <p:nvPr/>
@@ -44796,7 +43393,7 @@
             </a:pPr>
             <a:fld id="{00000000-1234-1234-1234-123412341234}" type="slidenum">
               <a:rPr lang="en" smtClean="0"/>
-              <a:t>21</a:t>
+              <a:t>20</a:t>
             </a:fld>
             <a:endParaRPr lang="en"/>
           </a:p>
@@ -44817,7 +43414,7 @@
           <p:nvPr>
             <p:extLst>
               <p:ext uri="{D42A27DB-BD31-4B8C-83A1-F6EECF244321}">
-                <p14:modId xmlns:p14="http://schemas.microsoft.com/office/powerpoint/2010/main" val="2686119124"/>
+                <p14:modId xmlns:p14="http://schemas.microsoft.com/office/powerpoint/2010/main" val="2918116269"/>
               </p:ext>
             </p:extLst>
           </p:nvPr>
@@ -44865,7 +43462,7 @@
                         <a:buNone/>
                       </a:pPr>
                       <a:r>
-                        <a:rPr lang="en-US" sz="1400"/>
+                        <a:rPr lang="en-US" sz="1400" dirty="0"/>
                         <a:t>Parameter</a:t>
                       </a:r>
                     </a:p>
@@ -44928,7 +43525,7 @@
                   </a:ext>
                 </a:extLst>
               </a:tr>
-              <a:tr h="558066">
+              <a:tr h="255236">
                 <a:tc>
                   <a:txBody>
                     <a:bodyPr/>
@@ -44955,7 +43552,7 @@
                         <a:buNone/>
                       </a:pPr>
                       <a:r>
-                        <a:rPr lang="en-US" sz="1400"/>
+                        <a:rPr lang="en-US" sz="1400" dirty="0"/>
                         <a:t>Routers send distance vectors (cost to each destination) to neighbors.</a:t>
                       </a:r>
                     </a:p>
@@ -44971,8 +43568,8 @@
                         <a:buNone/>
                       </a:pPr>
                       <a:r>
-                        <a:rPr lang="en-US" sz="1400"/>
-                        <a:t>Routers flood link-state advertisements describing their directly connected links and costs.</a:t>
+                        <a:rPr lang="en-US" sz="1400" dirty="0"/>
+                        <a:t>Routers flood LSAs describing their directly connected links and costs.</a:t>
                       </a:r>
                     </a:p>
                   </a:txBody>
@@ -45487,10 +44084,10 @@
               <a:buNone/>
             </a:pPr>
             <a:r>
-              <a:rPr lang="en"/>
+              <a:rPr lang="en" dirty="0"/>
               <a:t>Routing protocols can be classified by:</a:t>
             </a:r>
-            <a:endParaRPr/>
+            <a:endParaRPr dirty="0"/>
           </a:p>
           <a:p>
             <a:pPr marL="457200" lvl="0" indent="-342900" algn="l" rtl="0">
@@ -45504,14 +44101,14 @@
               <a:buChar char="●"/>
             </a:pPr>
             <a:r>
-              <a:rPr lang="en" i="1"/>
+              <a:rPr lang="en" i="1" dirty="0"/>
               <a:t>Where</a:t>
             </a:r>
             <a:r>
-              <a:rPr lang="en"/>
+              <a:rPr lang="en" dirty="0"/>
               <a:t> they operate. (Intra-domain or inter-domain.)</a:t>
             </a:r>
-            <a:endParaRPr/>
+            <a:endParaRPr dirty="0"/>
           </a:p>
           <a:p>
             <a:pPr marL="457200" lvl="0" indent="-342900" algn="l" rtl="0">
@@ -45525,14 +44122,14 @@
               <a:buChar char="●"/>
             </a:pPr>
             <a:r>
-              <a:rPr lang="en" i="1"/>
+              <a:rPr lang="en" i="1" dirty="0"/>
               <a:t>How</a:t>
             </a:r>
             <a:r>
-              <a:rPr lang="en"/>
+              <a:rPr lang="en" dirty="0"/>
               <a:t> they operate. (Distance-vector, link-state, or path-vector.)</a:t>
             </a:r>
-            <a:endParaRPr/>
+            <a:endParaRPr dirty="0"/>
           </a:p>
           <a:p>
             <a:pPr marL="0" lvl="0" indent="0" algn="l" rtl="0">
@@ -45545,18 +44142,18 @@
               <a:buNone/>
             </a:pPr>
             <a:r>
-              <a:rPr lang="en"/>
+              <a:rPr lang="en" dirty="0"/>
               <a:t>Today, we'll look at </a:t>
             </a:r>
             <a:r>
-              <a:rPr lang="en" b="1"/>
+              <a:rPr lang="en" b="1" dirty="0"/>
               <a:t>link-state</a:t>
             </a:r>
             <a:r>
-              <a:rPr lang="en"/>
+              <a:rPr lang="en" dirty="0"/>
               <a:t> protocols.</a:t>
             </a:r>
-            <a:endParaRPr/>
+            <a:endParaRPr dirty="0"/>
           </a:p>
           <a:p>
             <a:pPr marL="457200" lvl="0" indent="-342900" algn="l" rtl="0">
@@ -45570,10 +44167,10 @@
               <a:buChar char="●"/>
             </a:pPr>
             <a:r>
-              <a:rPr lang="en"/>
+              <a:rPr lang="en" dirty="0"/>
               <a:t>Very common as an Interior Gateway Protocol.</a:t>
             </a:r>
-            <a:endParaRPr/>
+            <a:endParaRPr dirty="0"/>
           </a:p>
           <a:p>
             <a:pPr marL="457200" lvl="0" indent="-342900" algn="l" rtl="0">
@@ -45587,10 +44184,10 @@
               <a:buChar char="●"/>
             </a:pPr>
             <a:r>
-              <a:rPr lang="en"/>
+              <a:rPr lang="en" dirty="0"/>
               <a:t>Major examples:</a:t>
             </a:r>
-            <a:endParaRPr/>
+            <a:endParaRPr dirty="0"/>
           </a:p>
           <a:p>
             <a:pPr marL="914400" lvl="1" indent="-342900" algn="l" rtl="0">
@@ -45604,10 +44201,10 @@
               <a:buChar char="○"/>
             </a:pPr>
             <a:r>
-              <a:rPr lang="en"/>
+              <a:rPr lang="en" dirty="0"/>
               <a:t>IS-IS (Intermediate System to Intermediate System).</a:t>
             </a:r>
-            <a:endParaRPr/>
+            <a:endParaRPr dirty="0"/>
           </a:p>
           <a:p>
             <a:pPr marL="914400" lvl="1" indent="-342900" algn="l" rtl="0">
@@ -45621,10 +44218,10 @@
               <a:buChar char="○"/>
             </a:pPr>
             <a:r>
-              <a:rPr lang="en"/>
+              <a:rPr lang="en" dirty="0"/>
               <a:t>OSPF (Open Shortest Path First).</a:t>
             </a:r>
-            <a:endParaRPr/>
+            <a:endParaRPr dirty="0"/>
           </a:p>
         </p:txBody>
       </p:sp>
@@ -46759,10 +45356,14 @@
               <a:buNone/>
             </a:pPr>
             <a:r>
-              <a:rPr lang="en"/>
-              <a:t>Global Data</a:t>
-            </a:r>
-            <a:endParaRPr/>
+              <a:rPr lang="en" dirty="0"/>
+              <a:t>Global </a:t>
+            </a:r>
+            <a:r>
+              <a:rPr lang="en-US" dirty="0"/>
+              <a:t>Knowledge</a:t>
+            </a:r>
+            <a:endParaRPr dirty="0"/>
           </a:p>
         </p:txBody>
       </p:sp>
@@ -46838,26 +45439,7 @@
               <a:rPr lang="en" dirty="0"/>
               <a:t>We know about all the destinations.</a:t>
             </a:r>
-          </a:p>
-          <a:p>
-            <a:pPr lvl="0">
-              <a:spcBef>
-                <a:spcPts val="0"/>
-              </a:spcBef>
-            </a:pPr>
-            <a:r>
-              <a:rPr lang="en-US" altLang="zh-CN" dirty="0"/>
-              <a:t>Once every router has the full </a:t>
-            </a:r>
-            <a:r>
-              <a:rPr lang="en" altLang="zh-CN" dirty="0"/>
-              <a:t>network graph</a:t>
-            </a:r>
-            <a:r>
-              <a:rPr lang="en-US" altLang="zh-CN" dirty="0"/>
-              <a:t>, the routing problem becomes a pure graph problem.</a:t>
-            </a:r>
-            <a:endParaRPr dirty="0"/>
+            <a:endParaRPr lang="en-US" dirty="0"/>
           </a:p>
           <a:p>
             <a:pPr marL="0" lvl="0" indent="0" algn="l" rtl="0">
@@ -46869,6 +45451,10 @@
               </a:spcAft>
               <a:buNone/>
             </a:pPr>
+            <a:r>
+              <a:rPr lang="en-US" dirty="0"/>
+              <a:t>Once every router has the full network graph, the routing problem becomes a pure graph problem. </a:t>
+            </a:r>
             <a:r>
               <a:rPr lang="en" dirty="0"/>
               <a:t>R3 can run a graph algorithm to compute paths.</a:t>
@@ -48396,13 +46982,15 @@
       <p:cxnSp>
         <p:nvCxnSpPr>
           <p:cNvPr id="232" name="Google Shape;232;p28"/>
-          <p:cNvCxnSpPr/>
+          <p:cNvCxnSpPr>
+            <a:cxnSpLocks/>
+          </p:cNvCxnSpPr>
           <p:nvPr/>
         </p:nvCxnSpPr>
         <p:spPr>
           <a:xfrm flipH="1">
-            <a:off x="3700038" y="2216576"/>
-            <a:ext cx="564000" cy="117300"/>
+            <a:off x="6544800" y="2098374"/>
+            <a:ext cx="322198" cy="7812"/>
           </a:xfrm>
           <a:prstGeom prst="straightConnector1">
             <a:avLst/>
@@ -48427,7 +47015,7 @@
         </p:nvSpPr>
         <p:spPr>
           <a:xfrm>
-            <a:off x="4264038" y="2116676"/>
+            <a:off x="6866998" y="1998474"/>
             <a:ext cx="2125800" cy="215400"/>
           </a:xfrm>
           <a:prstGeom prst="rect">
@@ -49005,1613 +47593,6 @@
   <p:cSld>
     <p:spTree>
       <p:nvGrpSpPr>
-        <p:cNvPr id="1" name="Shape 250"/>
-        <p:cNvGrpSpPr/>
-        <p:nvPr/>
-      </p:nvGrpSpPr>
-      <p:grpSpPr>
-        <a:xfrm>
-          <a:off x="0" y="0"/>
-          <a:ext cx="0" cy="0"/>
-          <a:chOff x="0" y="0"/>
-          <a:chExt cx="0" cy="0"/>
-        </a:xfrm>
-      </p:grpSpPr>
-      <p:sp>
-        <p:nvSpPr>
-          <p:cNvPr id="251" name="Google Shape;251;p31"/>
-          <p:cNvSpPr txBox="1">
-            <a:spLocks noGrp="1"/>
-          </p:cNvSpPr>
-          <p:nvPr>
-            <p:ph type="title"/>
-          </p:nvPr>
-        </p:nvSpPr>
-        <p:spPr>
-          <a:xfrm>
-            <a:off x="0" y="0"/>
-            <a:ext cx="9144000" cy="393600"/>
-          </a:xfrm>
-          <a:prstGeom prst="rect">
-            <a:avLst/>
-          </a:prstGeom>
-        </p:spPr>
-        <p:txBody>
-          <a:bodyPr spcFirstLastPara="1" wrap="square" lIns="91425" tIns="91425" rIns="91425" bIns="91425" anchor="t" anchorCtr="0">
-            <a:noAutofit/>
-          </a:bodyPr>
-          <a:lstStyle/>
-          <a:p>
-            <a:pPr marL="0" lvl="0" indent="0" algn="l" rtl="0">
-              <a:spcBef>
-                <a:spcPts val="0"/>
-              </a:spcBef>
-              <a:spcAft>
-                <a:spcPts val="0"/>
-              </a:spcAft>
-              <a:buNone/>
-            </a:pPr>
-            <a:r>
-              <a:rPr lang="en"/>
-              <a:t>Ensuring Consistency</a:t>
-            </a:r>
-            <a:endParaRPr/>
-          </a:p>
-        </p:txBody>
-      </p:sp>
-      <p:sp>
-        <p:nvSpPr>
-          <p:cNvPr id="252" name="Google Shape;252;p31"/>
-          <p:cNvSpPr txBox="1">
-            <a:spLocks noGrp="1"/>
-          </p:cNvSpPr>
-          <p:nvPr>
-            <p:ph type="body" idx="1"/>
-          </p:nvPr>
-        </p:nvSpPr>
-        <p:spPr>
-          <a:xfrm>
-            <a:off x="107050" y="402200"/>
-            <a:ext cx="8909700" cy="1888500"/>
-          </a:xfrm>
-          <a:prstGeom prst="rect">
-            <a:avLst/>
-          </a:prstGeom>
-        </p:spPr>
-        <p:txBody>
-          <a:bodyPr spcFirstLastPara="1" wrap="square" lIns="91425" tIns="91425" rIns="91425" bIns="91425" anchor="t" anchorCtr="0">
-            <a:noAutofit/>
-          </a:bodyPr>
-          <a:lstStyle/>
-          <a:p>
-            <a:pPr marL="0" lvl="0" indent="0" algn="l" rtl="0">
-              <a:spcBef>
-                <a:spcPts val="600"/>
-              </a:spcBef>
-              <a:spcAft>
-                <a:spcPts val="0"/>
-              </a:spcAft>
-              <a:buNone/>
-            </a:pPr>
-            <a:r>
-              <a:rPr lang="en"/>
-              <a:t>Each router can only influence its next hop.</a:t>
-            </a:r>
-            <a:endParaRPr/>
-          </a:p>
-          <a:p>
-            <a:pPr marL="0" lvl="0" indent="0" algn="l" rtl="0">
-              <a:spcBef>
-                <a:spcPts val="600"/>
-              </a:spcBef>
-              <a:spcAft>
-                <a:spcPts val="0"/>
-              </a:spcAft>
-              <a:buNone/>
-            </a:pPr>
-            <a:r>
-              <a:rPr lang="en"/>
-              <a:t>No guarantee that routers compute the same paths!</a:t>
-            </a:r>
-            <a:endParaRPr/>
-          </a:p>
-          <a:p>
-            <a:pPr marL="0" lvl="0" indent="0" algn="l" rtl="0">
-              <a:spcBef>
-                <a:spcPts val="600"/>
-              </a:spcBef>
-              <a:spcAft>
-                <a:spcPts val="0"/>
-              </a:spcAft>
-              <a:buNone/>
-            </a:pPr>
-            <a:r>
-              <a:rPr lang="en"/>
-              <a:t>We have to ensure that every router is using a "compatible" approach.</a:t>
-            </a:r>
-            <a:endParaRPr/>
-          </a:p>
-          <a:p>
-            <a:pPr marL="0" lvl="0" indent="0" algn="l" rtl="0">
-              <a:spcBef>
-                <a:spcPts val="600"/>
-              </a:spcBef>
-              <a:spcAft>
-                <a:spcPts val="0"/>
-              </a:spcAft>
-              <a:buNone/>
-            </a:pPr>
-            <a:endParaRPr/>
-          </a:p>
-        </p:txBody>
-      </p:sp>
-      <p:sp>
-        <p:nvSpPr>
-          <p:cNvPr id="253" name="Google Shape;253;p31"/>
-          <p:cNvSpPr/>
-          <p:nvPr/>
-        </p:nvSpPr>
-        <p:spPr>
-          <a:xfrm>
-            <a:off x="797538" y="3379725"/>
-            <a:ext cx="285000" cy="285000"/>
-          </a:xfrm>
-          <a:prstGeom prst="rect">
-            <a:avLst/>
-          </a:prstGeom>
-          <a:solidFill>
-            <a:schemeClr val="lt2"/>
-          </a:solidFill>
-          <a:ln w="19050" cap="flat" cmpd="sng">
-            <a:solidFill>
-              <a:srgbClr val="000000"/>
-            </a:solidFill>
-            <a:prstDash val="solid"/>
-            <a:round/>
-            <a:headEnd type="none" w="sm" len="sm"/>
-            <a:tailEnd type="none" w="sm" len="sm"/>
-          </a:ln>
-        </p:spPr>
-        <p:txBody>
-          <a:bodyPr spcFirstLastPara="1" wrap="square" lIns="0" tIns="0" rIns="0" bIns="0" anchor="ctr" anchorCtr="0">
-            <a:noAutofit/>
-          </a:bodyPr>
-          <a:lstStyle/>
-          <a:p>
-            <a:pPr marL="0" lvl="0" indent="0" algn="ctr" rtl="0">
-              <a:spcBef>
-                <a:spcPts val="0"/>
-              </a:spcBef>
-              <a:spcAft>
-                <a:spcPts val="0"/>
-              </a:spcAft>
-              <a:buNone/>
-            </a:pPr>
-            <a:r>
-              <a:rPr lang="en">
-                <a:latin typeface="Roboto"/>
-                <a:ea typeface="Roboto"/>
-                <a:cs typeface="Roboto"/>
-                <a:sym typeface="Roboto"/>
-              </a:rPr>
-              <a:t>R3</a:t>
-            </a:r>
-            <a:endParaRPr>
-              <a:latin typeface="Roboto"/>
-              <a:ea typeface="Roboto"/>
-              <a:cs typeface="Roboto"/>
-              <a:sym typeface="Roboto"/>
-            </a:endParaRPr>
-          </a:p>
-        </p:txBody>
-      </p:sp>
-      <p:sp>
-        <p:nvSpPr>
-          <p:cNvPr id="254" name="Google Shape;254;p31"/>
-          <p:cNvSpPr/>
-          <p:nvPr/>
-        </p:nvSpPr>
-        <p:spPr>
-          <a:xfrm>
-            <a:off x="1559538" y="2998725"/>
-            <a:ext cx="285000" cy="285000"/>
-          </a:xfrm>
-          <a:prstGeom prst="rect">
-            <a:avLst/>
-          </a:prstGeom>
-          <a:solidFill>
-            <a:srgbClr val="FFFFFF"/>
-          </a:solidFill>
-          <a:ln w="19050" cap="flat" cmpd="sng">
-            <a:solidFill>
-              <a:srgbClr val="000000"/>
-            </a:solidFill>
-            <a:prstDash val="solid"/>
-            <a:round/>
-            <a:headEnd type="none" w="sm" len="sm"/>
-            <a:tailEnd type="none" w="sm" len="sm"/>
-          </a:ln>
-        </p:spPr>
-        <p:txBody>
-          <a:bodyPr spcFirstLastPara="1" wrap="square" lIns="0" tIns="0" rIns="0" bIns="0" anchor="ctr" anchorCtr="0">
-            <a:noAutofit/>
-          </a:bodyPr>
-          <a:lstStyle/>
-          <a:p>
-            <a:pPr marL="0" lvl="0" indent="0" algn="ctr" rtl="0">
-              <a:spcBef>
-                <a:spcPts val="0"/>
-              </a:spcBef>
-              <a:spcAft>
-                <a:spcPts val="0"/>
-              </a:spcAft>
-              <a:buNone/>
-            </a:pPr>
-            <a:r>
-              <a:rPr lang="en">
-                <a:latin typeface="Roboto"/>
-                <a:ea typeface="Roboto"/>
-                <a:cs typeface="Roboto"/>
-                <a:sym typeface="Roboto"/>
-              </a:rPr>
-              <a:t>R2</a:t>
-            </a:r>
-            <a:endParaRPr>
-              <a:latin typeface="Roboto"/>
-              <a:ea typeface="Roboto"/>
-              <a:cs typeface="Roboto"/>
-              <a:sym typeface="Roboto"/>
-            </a:endParaRPr>
-          </a:p>
-        </p:txBody>
-      </p:sp>
-      <p:sp>
-        <p:nvSpPr>
-          <p:cNvPr id="255" name="Google Shape;255;p31"/>
-          <p:cNvSpPr/>
-          <p:nvPr/>
-        </p:nvSpPr>
-        <p:spPr>
-          <a:xfrm>
-            <a:off x="2321538" y="2617725"/>
-            <a:ext cx="285000" cy="285000"/>
-          </a:xfrm>
-          <a:prstGeom prst="rect">
-            <a:avLst/>
-          </a:prstGeom>
-          <a:solidFill>
-            <a:srgbClr val="FFFFFF"/>
-          </a:solidFill>
-          <a:ln w="19050" cap="flat" cmpd="sng">
-            <a:solidFill>
-              <a:srgbClr val="000000"/>
-            </a:solidFill>
-            <a:prstDash val="solid"/>
-            <a:round/>
-            <a:headEnd type="none" w="sm" len="sm"/>
-            <a:tailEnd type="none" w="sm" len="sm"/>
-          </a:ln>
-        </p:spPr>
-        <p:txBody>
-          <a:bodyPr spcFirstLastPara="1" wrap="square" lIns="0" tIns="0" rIns="0" bIns="0" anchor="ctr" anchorCtr="0">
-            <a:noAutofit/>
-          </a:bodyPr>
-          <a:lstStyle/>
-          <a:p>
-            <a:pPr marL="0" lvl="0" indent="0" algn="ctr" rtl="0">
-              <a:spcBef>
-                <a:spcPts val="0"/>
-              </a:spcBef>
-              <a:spcAft>
-                <a:spcPts val="0"/>
-              </a:spcAft>
-              <a:buNone/>
-            </a:pPr>
-            <a:r>
-              <a:rPr lang="en">
-                <a:latin typeface="Roboto"/>
-                <a:ea typeface="Roboto"/>
-                <a:cs typeface="Roboto"/>
-                <a:sym typeface="Roboto"/>
-              </a:rPr>
-              <a:t>R1</a:t>
-            </a:r>
-            <a:endParaRPr>
-              <a:latin typeface="Roboto"/>
-              <a:ea typeface="Roboto"/>
-              <a:cs typeface="Roboto"/>
-              <a:sym typeface="Roboto"/>
-            </a:endParaRPr>
-          </a:p>
-        </p:txBody>
-      </p:sp>
-      <p:sp>
-        <p:nvSpPr>
-          <p:cNvPr id="256" name="Google Shape;256;p31"/>
-          <p:cNvSpPr/>
-          <p:nvPr/>
-        </p:nvSpPr>
-        <p:spPr>
-          <a:xfrm>
-            <a:off x="2321538" y="4141725"/>
-            <a:ext cx="285000" cy="285000"/>
-          </a:xfrm>
-          <a:prstGeom prst="rect">
-            <a:avLst/>
-          </a:prstGeom>
-          <a:solidFill>
-            <a:srgbClr val="FFFFFF"/>
-          </a:solidFill>
-          <a:ln w="19050" cap="flat" cmpd="sng">
-            <a:solidFill>
-              <a:srgbClr val="000000"/>
-            </a:solidFill>
-            <a:prstDash val="solid"/>
-            <a:round/>
-            <a:headEnd type="none" w="sm" len="sm"/>
-            <a:tailEnd type="none" w="sm" len="sm"/>
-          </a:ln>
-        </p:spPr>
-        <p:txBody>
-          <a:bodyPr spcFirstLastPara="1" wrap="square" lIns="0" tIns="0" rIns="0" bIns="0" anchor="ctr" anchorCtr="0">
-            <a:noAutofit/>
-          </a:bodyPr>
-          <a:lstStyle/>
-          <a:p>
-            <a:pPr marL="0" lvl="0" indent="0" algn="ctr" rtl="0">
-              <a:spcBef>
-                <a:spcPts val="0"/>
-              </a:spcBef>
-              <a:spcAft>
-                <a:spcPts val="0"/>
-              </a:spcAft>
-              <a:buNone/>
-            </a:pPr>
-            <a:r>
-              <a:rPr lang="en">
-                <a:latin typeface="Roboto"/>
-                <a:ea typeface="Roboto"/>
-                <a:cs typeface="Roboto"/>
-                <a:sym typeface="Roboto"/>
-              </a:rPr>
-              <a:t>R5</a:t>
-            </a:r>
-            <a:endParaRPr>
-              <a:latin typeface="Roboto"/>
-              <a:ea typeface="Roboto"/>
-              <a:cs typeface="Roboto"/>
-              <a:sym typeface="Roboto"/>
-            </a:endParaRPr>
-          </a:p>
-        </p:txBody>
-      </p:sp>
-      <p:sp>
-        <p:nvSpPr>
-          <p:cNvPr id="257" name="Google Shape;257;p31"/>
-          <p:cNvSpPr/>
-          <p:nvPr/>
-        </p:nvSpPr>
-        <p:spPr>
-          <a:xfrm>
-            <a:off x="3235938" y="3379725"/>
-            <a:ext cx="285000" cy="285000"/>
-          </a:xfrm>
-          <a:prstGeom prst="rect">
-            <a:avLst/>
-          </a:prstGeom>
-          <a:solidFill>
-            <a:srgbClr val="FFFFFF"/>
-          </a:solidFill>
-          <a:ln w="19050" cap="flat" cmpd="sng">
-            <a:solidFill>
-              <a:srgbClr val="000000"/>
-            </a:solidFill>
-            <a:prstDash val="solid"/>
-            <a:round/>
-            <a:headEnd type="none" w="sm" len="sm"/>
-            <a:tailEnd type="none" w="sm" len="sm"/>
-          </a:ln>
-        </p:spPr>
-        <p:txBody>
-          <a:bodyPr spcFirstLastPara="1" wrap="square" lIns="0" tIns="0" rIns="0" bIns="0" anchor="ctr" anchorCtr="0">
-            <a:noAutofit/>
-          </a:bodyPr>
-          <a:lstStyle/>
-          <a:p>
-            <a:pPr marL="0" lvl="0" indent="0" algn="ctr" rtl="0">
-              <a:spcBef>
-                <a:spcPts val="0"/>
-              </a:spcBef>
-              <a:spcAft>
-                <a:spcPts val="0"/>
-              </a:spcAft>
-              <a:buNone/>
-            </a:pPr>
-            <a:r>
-              <a:rPr lang="en">
-                <a:latin typeface="Roboto"/>
-                <a:ea typeface="Roboto"/>
-                <a:cs typeface="Roboto"/>
-                <a:sym typeface="Roboto"/>
-              </a:rPr>
-              <a:t>R4</a:t>
-            </a:r>
-            <a:endParaRPr>
-              <a:latin typeface="Roboto"/>
-              <a:ea typeface="Roboto"/>
-              <a:cs typeface="Roboto"/>
-              <a:sym typeface="Roboto"/>
-            </a:endParaRPr>
-          </a:p>
-        </p:txBody>
-      </p:sp>
-      <p:cxnSp>
-        <p:nvCxnSpPr>
-          <p:cNvPr id="258" name="Google Shape;258;p31"/>
-          <p:cNvCxnSpPr>
-            <a:endCxn id="255" idx="1"/>
-          </p:cNvCxnSpPr>
-          <p:nvPr/>
-        </p:nvCxnSpPr>
-        <p:spPr>
-          <a:xfrm rot="10800000" flipH="1">
-            <a:off x="1847838" y="2760225"/>
-            <a:ext cx="473700" cy="292500"/>
-          </a:xfrm>
-          <a:prstGeom prst="straightConnector1">
-            <a:avLst/>
-          </a:prstGeom>
-          <a:noFill/>
-          <a:ln w="28575" cap="flat" cmpd="sng">
-            <a:solidFill>
-              <a:srgbClr val="0000FF"/>
-            </a:solidFill>
-            <a:prstDash val="solid"/>
-            <a:round/>
-            <a:headEnd type="none" w="med" len="med"/>
-            <a:tailEnd type="none" w="med" len="med"/>
-          </a:ln>
-        </p:spPr>
-      </p:cxnSp>
-      <p:cxnSp>
-        <p:nvCxnSpPr>
-          <p:cNvPr id="259" name="Google Shape;259;p31"/>
-          <p:cNvCxnSpPr>
-            <a:stCxn id="253" idx="3"/>
-            <a:endCxn id="256" idx="1"/>
-          </p:cNvCxnSpPr>
-          <p:nvPr/>
-        </p:nvCxnSpPr>
-        <p:spPr>
-          <a:xfrm>
-            <a:off x="1082538" y="3522225"/>
-            <a:ext cx="1239000" cy="762000"/>
-          </a:xfrm>
-          <a:prstGeom prst="straightConnector1">
-            <a:avLst/>
-          </a:prstGeom>
-          <a:noFill/>
-          <a:ln w="19050" cap="flat" cmpd="sng">
-            <a:solidFill>
-              <a:srgbClr val="000000"/>
-            </a:solidFill>
-            <a:prstDash val="solid"/>
-            <a:round/>
-            <a:headEnd type="none" w="med" len="med"/>
-            <a:tailEnd type="none" w="med" len="med"/>
-          </a:ln>
-        </p:spPr>
-      </p:cxnSp>
-      <p:cxnSp>
-        <p:nvCxnSpPr>
-          <p:cNvPr id="260" name="Google Shape;260;p31"/>
-          <p:cNvCxnSpPr>
-            <a:stCxn id="256" idx="0"/>
-            <a:endCxn id="255" idx="2"/>
-          </p:cNvCxnSpPr>
-          <p:nvPr/>
-        </p:nvCxnSpPr>
-        <p:spPr>
-          <a:xfrm rot="10800000">
-            <a:off x="2464038" y="2902725"/>
-            <a:ext cx="0" cy="1239000"/>
-          </a:xfrm>
-          <a:prstGeom prst="straightConnector1">
-            <a:avLst/>
-          </a:prstGeom>
-          <a:noFill/>
-          <a:ln w="28575" cap="flat" cmpd="sng">
-            <a:solidFill>
-              <a:srgbClr val="0000FF"/>
-            </a:solidFill>
-            <a:prstDash val="solid"/>
-            <a:round/>
-            <a:headEnd type="none" w="med" len="med"/>
-            <a:tailEnd type="none" w="med" len="med"/>
-          </a:ln>
-        </p:spPr>
-      </p:cxnSp>
-      <p:cxnSp>
-        <p:nvCxnSpPr>
-          <p:cNvPr id="261" name="Google Shape;261;p31"/>
-          <p:cNvCxnSpPr>
-            <a:stCxn id="257" idx="1"/>
-            <a:endCxn id="255" idx="3"/>
-          </p:cNvCxnSpPr>
-          <p:nvPr/>
-        </p:nvCxnSpPr>
-        <p:spPr>
-          <a:xfrm rot="10800000">
-            <a:off x="2606538" y="2760225"/>
-            <a:ext cx="629400" cy="762000"/>
-          </a:xfrm>
-          <a:prstGeom prst="straightConnector1">
-            <a:avLst/>
-          </a:prstGeom>
-          <a:noFill/>
-          <a:ln w="19050" cap="flat" cmpd="sng">
-            <a:solidFill>
-              <a:srgbClr val="000000"/>
-            </a:solidFill>
-            <a:prstDash val="solid"/>
-            <a:round/>
-            <a:headEnd type="none" w="med" len="med"/>
-            <a:tailEnd type="none" w="med" len="med"/>
-          </a:ln>
-        </p:spPr>
-      </p:cxnSp>
-      <p:cxnSp>
-        <p:nvCxnSpPr>
-          <p:cNvPr id="262" name="Google Shape;262;p31"/>
-          <p:cNvCxnSpPr>
-            <a:stCxn id="256" idx="3"/>
-            <a:endCxn id="257" idx="1"/>
-          </p:cNvCxnSpPr>
-          <p:nvPr/>
-        </p:nvCxnSpPr>
-        <p:spPr>
-          <a:xfrm rot="10800000" flipH="1">
-            <a:off x="2606538" y="3522225"/>
-            <a:ext cx="629400" cy="762000"/>
-          </a:xfrm>
-          <a:prstGeom prst="straightConnector1">
-            <a:avLst/>
-          </a:prstGeom>
-          <a:noFill/>
-          <a:ln w="28575" cap="flat" cmpd="sng">
-            <a:solidFill>
-              <a:srgbClr val="0000FF"/>
-            </a:solidFill>
-            <a:prstDash val="solid"/>
-            <a:round/>
-            <a:headEnd type="none" w="med" len="med"/>
-            <a:tailEnd type="none" w="med" len="med"/>
-          </a:ln>
-        </p:spPr>
-      </p:cxnSp>
-      <p:cxnSp>
-        <p:nvCxnSpPr>
-          <p:cNvPr id="263" name="Google Shape;263;p31"/>
-          <p:cNvCxnSpPr>
-            <a:stCxn id="253" idx="3"/>
-          </p:cNvCxnSpPr>
-          <p:nvPr/>
-        </p:nvCxnSpPr>
-        <p:spPr>
-          <a:xfrm rot="10800000" flipH="1">
-            <a:off x="1082538" y="3228225"/>
-            <a:ext cx="478800" cy="294000"/>
-          </a:xfrm>
-          <a:prstGeom prst="straightConnector1">
-            <a:avLst/>
-          </a:prstGeom>
-          <a:noFill/>
-          <a:ln w="28575" cap="flat" cmpd="sng">
-            <a:solidFill>
-              <a:srgbClr val="0000FF"/>
-            </a:solidFill>
-            <a:prstDash val="solid"/>
-            <a:round/>
-            <a:headEnd type="none" w="med" len="med"/>
-            <a:tailEnd type="triangle" w="med" len="med"/>
-          </a:ln>
-        </p:spPr>
-      </p:cxnSp>
-      <p:cxnSp>
-        <p:nvCxnSpPr>
-          <p:cNvPr id="264" name="Google Shape;264;p31"/>
-          <p:cNvCxnSpPr>
-            <a:stCxn id="257" idx="3"/>
-            <a:endCxn id="265" idx="2"/>
-          </p:cNvCxnSpPr>
-          <p:nvPr/>
-        </p:nvCxnSpPr>
-        <p:spPr>
-          <a:xfrm>
-            <a:off x="3520938" y="3522225"/>
-            <a:ext cx="477000" cy="0"/>
-          </a:xfrm>
-          <a:prstGeom prst="straightConnector1">
-            <a:avLst/>
-          </a:prstGeom>
-          <a:noFill/>
-          <a:ln w="28575" cap="flat" cmpd="sng">
-            <a:solidFill>
-              <a:srgbClr val="0000FF"/>
-            </a:solidFill>
-            <a:prstDash val="solid"/>
-            <a:round/>
-            <a:headEnd type="none" w="med" len="med"/>
-            <a:tailEnd type="none" w="med" len="med"/>
-          </a:ln>
-        </p:spPr>
-      </p:cxnSp>
-      <p:sp>
-        <p:nvSpPr>
-          <p:cNvPr id="265" name="Google Shape;265;p31"/>
-          <p:cNvSpPr/>
-          <p:nvPr/>
-        </p:nvSpPr>
-        <p:spPr>
-          <a:xfrm>
-            <a:off x="3997900" y="3379713"/>
-            <a:ext cx="285000" cy="285000"/>
-          </a:xfrm>
-          <a:prstGeom prst="ellipse">
-            <a:avLst/>
-          </a:prstGeom>
-          <a:solidFill>
-            <a:srgbClr val="FFFFFF"/>
-          </a:solidFill>
-          <a:ln w="19050" cap="flat" cmpd="sng">
-            <a:solidFill>
-              <a:srgbClr val="000000"/>
-            </a:solidFill>
-            <a:prstDash val="solid"/>
-            <a:round/>
-            <a:headEnd type="none" w="sm" len="sm"/>
-            <a:tailEnd type="none" w="sm" len="sm"/>
-          </a:ln>
-        </p:spPr>
-        <p:txBody>
-          <a:bodyPr spcFirstLastPara="1" wrap="square" lIns="0" tIns="0" rIns="0" bIns="0" anchor="ctr" anchorCtr="0">
-            <a:noAutofit/>
-          </a:bodyPr>
-          <a:lstStyle/>
-          <a:p>
-            <a:pPr marL="0" lvl="0" indent="0" algn="ctr" rtl="0">
-              <a:spcBef>
-                <a:spcPts val="0"/>
-              </a:spcBef>
-              <a:spcAft>
-                <a:spcPts val="0"/>
-              </a:spcAft>
-              <a:buNone/>
-            </a:pPr>
-            <a:r>
-              <a:rPr lang="en">
-                <a:latin typeface="Roboto"/>
-                <a:ea typeface="Roboto"/>
-                <a:cs typeface="Roboto"/>
-                <a:sym typeface="Roboto"/>
-              </a:rPr>
-              <a:t>A</a:t>
-            </a:r>
-            <a:endParaRPr>
-              <a:latin typeface="Roboto"/>
-              <a:ea typeface="Roboto"/>
-              <a:cs typeface="Roboto"/>
-              <a:sym typeface="Roboto"/>
-            </a:endParaRPr>
-          </a:p>
-        </p:txBody>
-      </p:sp>
-      <p:sp>
-        <p:nvSpPr>
-          <p:cNvPr id="266" name="Google Shape;266;p31"/>
-          <p:cNvSpPr/>
-          <p:nvPr/>
-        </p:nvSpPr>
-        <p:spPr>
-          <a:xfrm>
-            <a:off x="3235950" y="4141713"/>
-            <a:ext cx="285000" cy="285000"/>
-          </a:xfrm>
-          <a:prstGeom prst="ellipse">
-            <a:avLst/>
-          </a:prstGeom>
-          <a:solidFill>
-            <a:srgbClr val="FFFFFF"/>
-          </a:solidFill>
-          <a:ln w="19050" cap="flat" cmpd="sng">
-            <a:solidFill>
-              <a:srgbClr val="000000"/>
-            </a:solidFill>
-            <a:prstDash val="solid"/>
-            <a:round/>
-            <a:headEnd type="none" w="sm" len="sm"/>
-            <a:tailEnd type="none" w="sm" len="sm"/>
-          </a:ln>
-        </p:spPr>
-        <p:txBody>
-          <a:bodyPr spcFirstLastPara="1" wrap="square" lIns="0" tIns="0" rIns="0" bIns="0" anchor="ctr" anchorCtr="0">
-            <a:noAutofit/>
-          </a:bodyPr>
-          <a:lstStyle/>
-          <a:p>
-            <a:pPr marL="0" lvl="0" indent="0" algn="ctr" rtl="0">
-              <a:spcBef>
-                <a:spcPts val="0"/>
-              </a:spcBef>
-              <a:spcAft>
-                <a:spcPts val="0"/>
-              </a:spcAft>
-              <a:buNone/>
-            </a:pPr>
-            <a:r>
-              <a:rPr lang="en">
-                <a:latin typeface="Roboto"/>
-                <a:ea typeface="Roboto"/>
-                <a:cs typeface="Roboto"/>
-                <a:sym typeface="Roboto"/>
-              </a:rPr>
-              <a:t>B</a:t>
-            </a:r>
-            <a:endParaRPr>
-              <a:latin typeface="Roboto"/>
-              <a:ea typeface="Roboto"/>
-              <a:cs typeface="Roboto"/>
-              <a:sym typeface="Roboto"/>
-            </a:endParaRPr>
-          </a:p>
-        </p:txBody>
-      </p:sp>
-      <p:cxnSp>
-        <p:nvCxnSpPr>
-          <p:cNvPr id="267" name="Google Shape;267;p31"/>
-          <p:cNvCxnSpPr>
-            <a:stCxn id="256" idx="3"/>
-            <a:endCxn id="266" idx="2"/>
-          </p:cNvCxnSpPr>
-          <p:nvPr/>
-        </p:nvCxnSpPr>
-        <p:spPr>
-          <a:xfrm>
-            <a:off x="2606538" y="4284225"/>
-            <a:ext cx="629400" cy="0"/>
-          </a:xfrm>
-          <a:prstGeom prst="straightConnector1">
-            <a:avLst/>
-          </a:prstGeom>
-          <a:noFill/>
-          <a:ln w="19050" cap="flat" cmpd="sng">
-            <a:solidFill>
-              <a:srgbClr val="000000"/>
-            </a:solidFill>
-            <a:prstDash val="solid"/>
-            <a:round/>
-            <a:headEnd type="none" w="med" len="med"/>
-            <a:tailEnd type="none" w="med" len="med"/>
-          </a:ln>
-        </p:spPr>
-      </p:cxnSp>
-      <p:sp>
-        <p:nvSpPr>
-          <p:cNvPr id="268" name="Google Shape;268;p31"/>
-          <p:cNvSpPr/>
-          <p:nvPr/>
-        </p:nvSpPr>
-        <p:spPr>
-          <a:xfrm>
-            <a:off x="4861088" y="3379725"/>
-            <a:ext cx="285000" cy="285000"/>
-          </a:xfrm>
-          <a:prstGeom prst="rect">
-            <a:avLst/>
-          </a:prstGeom>
-          <a:solidFill>
-            <a:srgbClr val="FFFFFF"/>
-          </a:solidFill>
-          <a:ln w="19050" cap="flat" cmpd="sng">
-            <a:solidFill>
-              <a:srgbClr val="000000"/>
-            </a:solidFill>
-            <a:prstDash val="solid"/>
-            <a:round/>
-            <a:headEnd type="none" w="sm" len="sm"/>
-            <a:tailEnd type="none" w="sm" len="sm"/>
-          </a:ln>
-        </p:spPr>
-        <p:txBody>
-          <a:bodyPr spcFirstLastPara="1" wrap="square" lIns="0" tIns="0" rIns="0" bIns="0" anchor="ctr" anchorCtr="0">
-            <a:noAutofit/>
-          </a:bodyPr>
-          <a:lstStyle/>
-          <a:p>
-            <a:pPr marL="0" lvl="0" indent="0" algn="ctr" rtl="0">
-              <a:spcBef>
-                <a:spcPts val="0"/>
-              </a:spcBef>
-              <a:spcAft>
-                <a:spcPts val="0"/>
-              </a:spcAft>
-              <a:buNone/>
-            </a:pPr>
-            <a:r>
-              <a:rPr lang="en">
-                <a:latin typeface="Roboto"/>
-                <a:ea typeface="Roboto"/>
-                <a:cs typeface="Roboto"/>
-                <a:sym typeface="Roboto"/>
-              </a:rPr>
-              <a:t>R3</a:t>
-            </a:r>
-            <a:endParaRPr>
-              <a:latin typeface="Roboto"/>
-              <a:ea typeface="Roboto"/>
-              <a:cs typeface="Roboto"/>
-              <a:sym typeface="Roboto"/>
-            </a:endParaRPr>
-          </a:p>
-        </p:txBody>
-      </p:sp>
-      <p:sp>
-        <p:nvSpPr>
-          <p:cNvPr id="269" name="Google Shape;269;p31"/>
-          <p:cNvSpPr/>
-          <p:nvPr/>
-        </p:nvSpPr>
-        <p:spPr>
-          <a:xfrm>
-            <a:off x="5623088" y="2998725"/>
-            <a:ext cx="285000" cy="285000"/>
-          </a:xfrm>
-          <a:prstGeom prst="rect">
-            <a:avLst/>
-          </a:prstGeom>
-          <a:solidFill>
-            <a:srgbClr val="F4CCCC"/>
-          </a:solidFill>
-          <a:ln w="19050" cap="flat" cmpd="sng">
-            <a:solidFill>
-              <a:srgbClr val="000000"/>
-            </a:solidFill>
-            <a:prstDash val="solid"/>
-            <a:round/>
-            <a:headEnd type="none" w="sm" len="sm"/>
-            <a:tailEnd type="none" w="sm" len="sm"/>
-          </a:ln>
-        </p:spPr>
-        <p:txBody>
-          <a:bodyPr spcFirstLastPara="1" wrap="square" lIns="0" tIns="0" rIns="0" bIns="0" anchor="ctr" anchorCtr="0">
-            <a:noAutofit/>
-          </a:bodyPr>
-          <a:lstStyle/>
-          <a:p>
-            <a:pPr marL="0" lvl="0" indent="0" algn="ctr" rtl="0">
-              <a:spcBef>
-                <a:spcPts val="0"/>
-              </a:spcBef>
-              <a:spcAft>
-                <a:spcPts val="0"/>
-              </a:spcAft>
-              <a:buNone/>
-            </a:pPr>
-            <a:r>
-              <a:rPr lang="en">
-                <a:latin typeface="Roboto"/>
-                <a:ea typeface="Roboto"/>
-                <a:cs typeface="Roboto"/>
-                <a:sym typeface="Roboto"/>
-              </a:rPr>
-              <a:t>R2</a:t>
-            </a:r>
-            <a:endParaRPr>
-              <a:latin typeface="Roboto"/>
-              <a:ea typeface="Roboto"/>
-              <a:cs typeface="Roboto"/>
-              <a:sym typeface="Roboto"/>
-            </a:endParaRPr>
-          </a:p>
-        </p:txBody>
-      </p:sp>
-      <p:sp>
-        <p:nvSpPr>
-          <p:cNvPr id="270" name="Google Shape;270;p31"/>
-          <p:cNvSpPr/>
-          <p:nvPr/>
-        </p:nvSpPr>
-        <p:spPr>
-          <a:xfrm>
-            <a:off x="6385088" y="2617725"/>
-            <a:ext cx="285000" cy="285000"/>
-          </a:xfrm>
-          <a:prstGeom prst="rect">
-            <a:avLst/>
-          </a:prstGeom>
-          <a:solidFill>
-            <a:srgbClr val="FFFFFF"/>
-          </a:solidFill>
-          <a:ln w="19050" cap="flat" cmpd="sng">
-            <a:solidFill>
-              <a:srgbClr val="000000"/>
-            </a:solidFill>
-            <a:prstDash val="solid"/>
-            <a:round/>
-            <a:headEnd type="none" w="sm" len="sm"/>
-            <a:tailEnd type="none" w="sm" len="sm"/>
-          </a:ln>
-        </p:spPr>
-        <p:txBody>
-          <a:bodyPr spcFirstLastPara="1" wrap="square" lIns="0" tIns="0" rIns="0" bIns="0" anchor="ctr" anchorCtr="0">
-            <a:noAutofit/>
-          </a:bodyPr>
-          <a:lstStyle/>
-          <a:p>
-            <a:pPr marL="0" lvl="0" indent="0" algn="ctr" rtl="0">
-              <a:spcBef>
-                <a:spcPts val="0"/>
-              </a:spcBef>
-              <a:spcAft>
-                <a:spcPts val="0"/>
-              </a:spcAft>
-              <a:buNone/>
-            </a:pPr>
-            <a:r>
-              <a:rPr lang="en">
-                <a:latin typeface="Roboto"/>
-                <a:ea typeface="Roboto"/>
-                <a:cs typeface="Roboto"/>
-                <a:sym typeface="Roboto"/>
-              </a:rPr>
-              <a:t>R1</a:t>
-            </a:r>
-            <a:endParaRPr>
-              <a:latin typeface="Roboto"/>
-              <a:ea typeface="Roboto"/>
-              <a:cs typeface="Roboto"/>
-              <a:sym typeface="Roboto"/>
-            </a:endParaRPr>
-          </a:p>
-        </p:txBody>
-      </p:sp>
-      <p:sp>
-        <p:nvSpPr>
-          <p:cNvPr id="271" name="Google Shape;271;p31"/>
-          <p:cNvSpPr/>
-          <p:nvPr/>
-        </p:nvSpPr>
-        <p:spPr>
-          <a:xfrm>
-            <a:off x="6385088" y="4141725"/>
-            <a:ext cx="285000" cy="285000"/>
-          </a:xfrm>
-          <a:prstGeom prst="rect">
-            <a:avLst/>
-          </a:prstGeom>
-          <a:solidFill>
-            <a:srgbClr val="FFFFFF"/>
-          </a:solidFill>
-          <a:ln w="19050" cap="flat" cmpd="sng">
-            <a:solidFill>
-              <a:srgbClr val="000000"/>
-            </a:solidFill>
-            <a:prstDash val="solid"/>
-            <a:round/>
-            <a:headEnd type="none" w="sm" len="sm"/>
-            <a:tailEnd type="none" w="sm" len="sm"/>
-          </a:ln>
-        </p:spPr>
-        <p:txBody>
-          <a:bodyPr spcFirstLastPara="1" wrap="square" lIns="0" tIns="0" rIns="0" bIns="0" anchor="ctr" anchorCtr="0">
-            <a:noAutofit/>
-          </a:bodyPr>
-          <a:lstStyle/>
-          <a:p>
-            <a:pPr marL="0" lvl="0" indent="0" algn="ctr" rtl="0">
-              <a:spcBef>
-                <a:spcPts val="0"/>
-              </a:spcBef>
-              <a:spcAft>
-                <a:spcPts val="0"/>
-              </a:spcAft>
-              <a:buNone/>
-            </a:pPr>
-            <a:r>
-              <a:rPr lang="en">
-                <a:latin typeface="Roboto"/>
-                <a:ea typeface="Roboto"/>
-                <a:cs typeface="Roboto"/>
-                <a:sym typeface="Roboto"/>
-              </a:rPr>
-              <a:t>R5</a:t>
-            </a:r>
-            <a:endParaRPr>
-              <a:latin typeface="Roboto"/>
-              <a:ea typeface="Roboto"/>
-              <a:cs typeface="Roboto"/>
-              <a:sym typeface="Roboto"/>
-            </a:endParaRPr>
-          </a:p>
-        </p:txBody>
-      </p:sp>
-      <p:sp>
-        <p:nvSpPr>
-          <p:cNvPr id="272" name="Google Shape;272;p31"/>
-          <p:cNvSpPr/>
-          <p:nvPr/>
-        </p:nvSpPr>
-        <p:spPr>
-          <a:xfrm>
-            <a:off x="7299488" y="3379725"/>
-            <a:ext cx="285000" cy="285000"/>
-          </a:xfrm>
-          <a:prstGeom prst="rect">
-            <a:avLst/>
-          </a:prstGeom>
-          <a:solidFill>
-            <a:srgbClr val="FFFFFF"/>
-          </a:solidFill>
-          <a:ln w="19050" cap="flat" cmpd="sng">
-            <a:solidFill>
-              <a:srgbClr val="000000"/>
-            </a:solidFill>
-            <a:prstDash val="solid"/>
-            <a:round/>
-            <a:headEnd type="none" w="sm" len="sm"/>
-            <a:tailEnd type="none" w="sm" len="sm"/>
-          </a:ln>
-        </p:spPr>
-        <p:txBody>
-          <a:bodyPr spcFirstLastPara="1" wrap="square" lIns="0" tIns="0" rIns="0" bIns="0" anchor="ctr" anchorCtr="0">
-            <a:noAutofit/>
-          </a:bodyPr>
-          <a:lstStyle/>
-          <a:p>
-            <a:pPr marL="0" lvl="0" indent="0" algn="ctr" rtl="0">
-              <a:spcBef>
-                <a:spcPts val="0"/>
-              </a:spcBef>
-              <a:spcAft>
-                <a:spcPts val="0"/>
-              </a:spcAft>
-              <a:buNone/>
-            </a:pPr>
-            <a:r>
-              <a:rPr lang="en">
-                <a:latin typeface="Roboto"/>
-                <a:ea typeface="Roboto"/>
-                <a:cs typeface="Roboto"/>
-                <a:sym typeface="Roboto"/>
-              </a:rPr>
-              <a:t>R4</a:t>
-            </a:r>
-            <a:endParaRPr>
-              <a:latin typeface="Roboto"/>
-              <a:ea typeface="Roboto"/>
-              <a:cs typeface="Roboto"/>
-              <a:sym typeface="Roboto"/>
-            </a:endParaRPr>
-          </a:p>
-        </p:txBody>
-      </p:sp>
-      <p:cxnSp>
-        <p:nvCxnSpPr>
-          <p:cNvPr id="273" name="Google Shape;273;p31"/>
-          <p:cNvCxnSpPr>
-            <a:endCxn id="270" idx="1"/>
-          </p:cNvCxnSpPr>
-          <p:nvPr/>
-        </p:nvCxnSpPr>
-        <p:spPr>
-          <a:xfrm rot="10800000" flipH="1">
-            <a:off x="5911388" y="2760225"/>
-            <a:ext cx="473700" cy="292500"/>
-          </a:xfrm>
-          <a:prstGeom prst="straightConnector1">
-            <a:avLst/>
-          </a:prstGeom>
-          <a:noFill/>
-          <a:ln w="19050" cap="flat" cmpd="sng">
-            <a:solidFill>
-              <a:srgbClr val="000000"/>
-            </a:solidFill>
-            <a:prstDash val="solid"/>
-            <a:round/>
-            <a:headEnd type="none" w="med" len="med"/>
-            <a:tailEnd type="none" w="med" len="med"/>
-          </a:ln>
-        </p:spPr>
-      </p:cxnSp>
-      <p:cxnSp>
-        <p:nvCxnSpPr>
-          <p:cNvPr id="274" name="Google Shape;274;p31"/>
-          <p:cNvCxnSpPr>
-            <a:stCxn id="268" idx="3"/>
-            <a:endCxn id="271" idx="1"/>
-          </p:cNvCxnSpPr>
-          <p:nvPr/>
-        </p:nvCxnSpPr>
-        <p:spPr>
-          <a:xfrm>
-            <a:off x="5146088" y="3522225"/>
-            <a:ext cx="1239000" cy="762000"/>
-          </a:xfrm>
-          <a:prstGeom prst="straightConnector1">
-            <a:avLst/>
-          </a:prstGeom>
-          <a:noFill/>
-          <a:ln w="28575" cap="flat" cmpd="sng">
-            <a:solidFill>
-              <a:schemeClr val="accent2"/>
-            </a:solidFill>
-            <a:prstDash val="solid"/>
-            <a:round/>
-            <a:headEnd type="none" w="med" len="med"/>
-            <a:tailEnd type="none" w="med" len="med"/>
-          </a:ln>
-        </p:spPr>
-      </p:cxnSp>
-      <p:cxnSp>
-        <p:nvCxnSpPr>
-          <p:cNvPr id="275" name="Google Shape;275;p31"/>
-          <p:cNvCxnSpPr>
-            <a:stCxn id="271" idx="0"/>
-            <a:endCxn id="270" idx="2"/>
-          </p:cNvCxnSpPr>
-          <p:nvPr/>
-        </p:nvCxnSpPr>
-        <p:spPr>
-          <a:xfrm rot="10800000">
-            <a:off x="6527588" y="2902725"/>
-            <a:ext cx="0" cy="1239000"/>
-          </a:xfrm>
-          <a:prstGeom prst="straightConnector1">
-            <a:avLst/>
-          </a:prstGeom>
-          <a:noFill/>
-          <a:ln w="19050" cap="flat" cmpd="sng">
-            <a:solidFill>
-              <a:srgbClr val="000000"/>
-            </a:solidFill>
-            <a:prstDash val="solid"/>
-            <a:round/>
-            <a:headEnd type="none" w="med" len="med"/>
-            <a:tailEnd type="none" w="med" len="med"/>
-          </a:ln>
-        </p:spPr>
-      </p:cxnSp>
-      <p:cxnSp>
-        <p:nvCxnSpPr>
-          <p:cNvPr id="276" name="Google Shape;276;p31"/>
-          <p:cNvCxnSpPr>
-            <a:stCxn id="272" idx="1"/>
-            <a:endCxn id="270" idx="3"/>
-          </p:cNvCxnSpPr>
-          <p:nvPr/>
-        </p:nvCxnSpPr>
-        <p:spPr>
-          <a:xfrm rot="10800000">
-            <a:off x="6670088" y="2760225"/>
-            <a:ext cx="629400" cy="762000"/>
-          </a:xfrm>
-          <a:prstGeom prst="straightConnector1">
-            <a:avLst/>
-          </a:prstGeom>
-          <a:noFill/>
-          <a:ln w="19050" cap="flat" cmpd="sng">
-            <a:solidFill>
-              <a:srgbClr val="000000"/>
-            </a:solidFill>
-            <a:prstDash val="solid"/>
-            <a:round/>
-            <a:headEnd type="none" w="med" len="med"/>
-            <a:tailEnd type="none" w="med" len="med"/>
-          </a:ln>
-        </p:spPr>
-      </p:cxnSp>
-      <p:cxnSp>
-        <p:nvCxnSpPr>
-          <p:cNvPr id="277" name="Google Shape;277;p31"/>
-          <p:cNvCxnSpPr>
-            <a:stCxn id="271" idx="3"/>
-            <a:endCxn id="272" idx="1"/>
-          </p:cNvCxnSpPr>
-          <p:nvPr/>
-        </p:nvCxnSpPr>
-        <p:spPr>
-          <a:xfrm rot="10800000" flipH="1">
-            <a:off x="6670088" y="3522225"/>
-            <a:ext cx="629400" cy="762000"/>
-          </a:xfrm>
-          <a:prstGeom prst="straightConnector1">
-            <a:avLst/>
-          </a:prstGeom>
-          <a:noFill/>
-          <a:ln w="28575" cap="flat" cmpd="sng">
-            <a:solidFill>
-              <a:schemeClr val="accent2"/>
-            </a:solidFill>
-            <a:prstDash val="solid"/>
-            <a:round/>
-            <a:headEnd type="none" w="med" len="med"/>
-            <a:tailEnd type="none" w="med" len="med"/>
-          </a:ln>
-        </p:spPr>
-      </p:cxnSp>
-      <p:cxnSp>
-        <p:nvCxnSpPr>
-          <p:cNvPr id="278" name="Google Shape;278;p31"/>
-          <p:cNvCxnSpPr>
-            <a:stCxn id="268" idx="3"/>
-          </p:cNvCxnSpPr>
-          <p:nvPr/>
-        </p:nvCxnSpPr>
-        <p:spPr>
-          <a:xfrm rot="10800000" flipH="1">
-            <a:off x="5146088" y="3228225"/>
-            <a:ext cx="478800" cy="294000"/>
-          </a:xfrm>
-          <a:prstGeom prst="straightConnector1">
-            <a:avLst/>
-          </a:prstGeom>
-          <a:noFill/>
-          <a:ln w="28575" cap="flat" cmpd="sng">
-            <a:solidFill>
-              <a:schemeClr val="accent2"/>
-            </a:solidFill>
-            <a:prstDash val="solid"/>
-            <a:round/>
-            <a:headEnd type="triangle" w="med" len="med"/>
-            <a:tailEnd type="none" w="med" len="med"/>
-          </a:ln>
-        </p:spPr>
-      </p:cxnSp>
-      <p:cxnSp>
-        <p:nvCxnSpPr>
-          <p:cNvPr id="279" name="Google Shape;279;p31"/>
-          <p:cNvCxnSpPr>
-            <a:stCxn id="272" idx="3"/>
-            <a:endCxn id="280" idx="2"/>
-          </p:cNvCxnSpPr>
-          <p:nvPr/>
-        </p:nvCxnSpPr>
-        <p:spPr>
-          <a:xfrm>
-            <a:off x="7584488" y="3522225"/>
-            <a:ext cx="477000" cy="0"/>
-          </a:xfrm>
-          <a:prstGeom prst="straightConnector1">
-            <a:avLst/>
-          </a:prstGeom>
-          <a:noFill/>
-          <a:ln w="28575" cap="flat" cmpd="sng">
-            <a:solidFill>
-              <a:schemeClr val="accent2"/>
-            </a:solidFill>
-            <a:prstDash val="solid"/>
-            <a:round/>
-            <a:headEnd type="none" w="med" len="med"/>
-            <a:tailEnd type="none" w="med" len="med"/>
-          </a:ln>
-        </p:spPr>
-      </p:cxnSp>
-      <p:sp>
-        <p:nvSpPr>
-          <p:cNvPr id="280" name="Google Shape;280;p31"/>
-          <p:cNvSpPr/>
-          <p:nvPr/>
-        </p:nvSpPr>
-        <p:spPr>
-          <a:xfrm>
-            <a:off x="8061450" y="3379713"/>
-            <a:ext cx="285000" cy="285000"/>
-          </a:xfrm>
-          <a:prstGeom prst="ellipse">
-            <a:avLst/>
-          </a:prstGeom>
-          <a:solidFill>
-            <a:srgbClr val="FFFFFF"/>
-          </a:solidFill>
-          <a:ln w="19050" cap="flat" cmpd="sng">
-            <a:solidFill>
-              <a:srgbClr val="000000"/>
-            </a:solidFill>
-            <a:prstDash val="solid"/>
-            <a:round/>
-            <a:headEnd type="none" w="sm" len="sm"/>
-            <a:tailEnd type="none" w="sm" len="sm"/>
-          </a:ln>
-        </p:spPr>
-        <p:txBody>
-          <a:bodyPr spcFirstLastPara="1" wrap="square" lIns="0" tIns="0" rIns="0" bIns="0" anchor="ctr" anchorCtr="0">
-            <a:noAutofit/>
-          </a:bodyPr>
-          <a:lstStyle/>
-          <a:p>
-            <a:pPr marL="0" lvl="0" indent="0" algn="ctr" rtl="0">
-              <a:spcBef>
-                <a:spcPts val="0"/>
-              </a:spcBef>
-              <a:spcAft>
-                <a:spcPts val="0"/>
-              </a:spcAft>
-              <a:buNone/>
-            </a:pPr>
-            <a:r>
-              <a:rPr lang="en">
-                <a:latin typeface="Roboto"/>
-                <a:ea typeface="Roboto"/>
-                <a:cs typeface="Roboto"/>
-                <a:sym typeface="Roboto"/>
-              </a:rPr>
-              <a:t>A</a:t>
-            </a:r>
-            <a:endParaRPr>
-              <a:latin typeface="Roboto"/>
-              <a:ea typeface="Roboto"/>
-              <a:cs typeface="Roboto"/>
-              <a:sym typeface="Roboto"/>
-            </a:endParaRPr>
-          </a:p>
-        </p:txBody>
-      </p:sp>
-      <p:sp>
-        <p:nvSpPr>
-          <p:cNvPr id="281" name="Google Shape;281;p31"/>
-          <p:cNvSpPr/>
-          <p:nvPr/>
-        </p:nvSpPr>
-        <p:spPr>
-          <a:xfrm>
-            <a:off x="7299500" y="4141713"/>
-            <a:ext cx="285000" cy="285000"/>
-          </a:xfrm>
-          <a:prstGeom prst="ellipse">
-            <a:avLst/>
-          </a:prstGeom>
-          <a:solidFill>
-            <a:srgbClr val="FFFFFF"/>
-          </a:solidFill>
-          <a:ln w="19050" cap="flat" cmpd="sng">
-            <a:solidFill>
-              <a:srgbClr val="000000"/>
-            </a:solidFill>
-            <a:prstDash val="solid"/>
-            <a:round/>
-            <a:headEnd type="none" w="sm" len="sm"/>
-            <a:tailEnd type="none" w="sm" len="sm"/>
-          </a:ln>
-        </p:spPr>
-        <p:txBody>
-          <a:bodyPr spcFirstLastPara="1" wrap="square" lIns="0" tIns="0" rIns="0" bIns="0" anchor="ctr" anchorCtr="0">
-            <a:noAutofit/>
-          </a:bodyPr>
-          <a:lstStyle/>
-          <a:p>
-            <a:pPr marL="0" lvl="0" indent="0" algn="ctr" rtl="0">
-              <a:spcBef>
-                <a:spcPts val="0"/>
-              </a:spcBef>
-              <a:spcAft>
-                <a:spcPts val="0"/>
-              </a:spcAft>
-              <a:buNone/>
-            </a:pPr>
-            <a:r>
-              <a:rPr lang="en">
-                <a:latin typeface="Roboto"/>
-                <a:ea typeface="Roboto"/>
-                <a:cs typeface="Roboto"/>
-                <a:sym typeface="Roboto"/>
-              </a:rPr>
-              <a:t>B</a:t>
-            </a:r>
-            <a:endParaRPr>
-              <a:latin typeface="Roboto"/>
-              <a:ea typeface="Roboto"/>
-              <a:cs typeface="Roboto"/>
-              <a:sym typeface="Roboto"/>
-            </a:endParaRPr>
-          </a:p>
-        </p:txBody>
-      </p:sp>
-      <p:cxnSp>
-        <p:nvCxnSpPr>
-          <p:cNvPr id="282" name="Google Shape;282;p31"/>
-          <p:cNvCxnSpPr>
-            <a:stCxn id="271" idx="3"/>
-            <a:endCxn id="281" idx="2"/>
-          </p:cNvCxnSpPr>
-          <p:nvPr/>
-        </p:nvCxnSpPr>
-        <p:spPr>
-          <a:xfrm>
-            <a:off x="6670088" y="4284225"/>
-            <a:ext cx="629400" cy="0"/>
-          </a:xfrm>
-          <a:prstGeom prst="straightConnector1">
-            <a:avLst/>
-          </a:prstGeom>
-          <a:noFill/>
-          <a:ln w="19050" cap="flat" cmpd="sng">
-            <a:solidFill>
-              <a:srgbClr val="000000"/>
-            </a:solidFill>
-            <a:prstDash val="solid"/>
-            <a:round/>
-            <a:headEnd type="none" w="med" len="med"/>
-            <a:tailEnd type="none" w="med" len="med"/>
-          </a:ln>
-        </p:spPr>
-      </p:cxnSp>
-      <p:sp>
-        <p:nvSpPr>
-          <p:cNvPr id="283" name="Google Shape;283;p31"/>
-          <p:cNvSpPr txBox="1"/>
-          <p:nvPr/>
-        </p:nvSpPr>
-        <p:spPr>
-          <a:xfrm>
-            <a:off x="5788400" y="4753725"/>
-            <a:ext cx="1478400" cy="215400"/>
-          </a:xfrm>
-          <a:prstGeom prst="rect">
-            <a:avLst/>
-          </a:prstGeom>
-          <a:noFill/>
-          <a:ln>
-            <a:noFill/>
-          </a:ln>
-        </p:spPr>
-        <p:txBody>
-          <a:bodyPr spcFirstLastPara="1" wrap="square" lIns="0" tIns="0" rIns="0" bIns="0" anchor="t" anchorCtr="0">
-            <a:spAutoFit/>
-          </a:bodyPr>
-          <a:lstStyle/>
-          <a:p>
-            <a:pPr marL="0" lvl="0" indent="0" algn="l" rtl="0">
-              <a:spcBef>
-                <a:spcPts val="0"/>
-              </a:spcBef>
-              <a:spcAft>
-                <a:spcPts val="0"/>
-              </a:spcAft>
-              <a:buNone/>
-            </a:pPr>
-            <a:r>
-              <a:rPr lang="en">
-                <a:solidFill>
-                  <a:schemeClr val="accent2"/>
-                </a:solidFill>
-                <a:latin typeface="Roboto"/>
-                <a:ea typeface="Roboto"/>
-                <a:cs typeface="Roboto"/>
-                <a:sym typeface="Roboto"/>
-              </a:rPr>
-              <a:t>R2 forwards to R3.</a:t>
-            </a:r>
-            <a:endParaRPr>
-              <a:solidFill>
-                <a:schemeClr val="accent2"/>
-              </a:solidFill>
-              <a:latin typeface="Roboto"/>
-              <a:ea typeface="Roboto"/>
-              <a:cs typeface="Roboto"/>
-              <a:sym typeface="Roboto"/>
-            </a:endParaRPr>
-          </a:p>
-        </p:txBody>
-      </p:sp>
-      <p:sp>
-        <p:nvSpPr>
-          <p:cNvPr id="284" name="Google Shape;284;p31"/>
-          <p:cNvSpPr txBox="1"/>
-          <p:nvPr/>
-        </p:nvSpPr>
-        <p:spPr>
-          <a:xfrm>
-            <a:off x="1724850" y="4753725"/>
-            <a:ext cx="1478400" cy="215400"/>
-          </a:xfrm>
-          <a:prstGeom prst="rect">
-            <a:avLst/>
-          </a:prstGeom>
-          <a:noFill/>
-          <a:ln>
-            <a:noFill/>
-          </a:ln>
-        </p:spPr>
-        <p:txBody>
-          <a:bodyPr spcFirstLastPara="1" wrap="square" lIns="0" tIns="0" rIns="0" bIns="0" anchor="t" anchorCtr="0">
-            <a:spAutoFit/>
-          </a:bodyPr>
-          <a:lstStyle/>
-          <a:p>
-            <a:pPr marL="0" lvl="0" indent="0" algn="l" rtl="0">
-              <a:spcBef>
-                <a:spcPts val="0"/>
-              </a:spcBef>
-              <a:spcAft>
-                <a:spcPts val="0"/>
-              </a:spcAft>
-              <a:buNone/>
-            </a:pPr>
-            <a:r>
-              <a:rPr lang="en">
-                <a:solidFill>
-                  <a:srgbClr val="0000FF"/>
-                </a:solidFill>
-                <a:latin typeface="Roboto"/>
-                <a:ea typeface="Roboto"/>
-                <a:cs typeface="Roboto"/>
-                <a:sym typeface="Roboto"/>
-              </a:rPr>
-              <a:t>R3 forwards to R2.</a:t>
-            </a:r>
-            <a:endParaRPr>
-              <a:solidFill>
-                <a:srgbClr val="0000FF"/>
-              </a:solidFill>
-              <a:latin typeface="Roboto"/>
-              <a:ea typeface="Roboto"/>
-              <a:cs typeface="Roboto"/>
-              <a:sym typeface="Roboto"/>
-            </a:endParaRPr>
-          </a:p>
-        </p:txBody>
-      </p:sp>
-      <p:sp>
-        <p:nvSpPr>
-          <p:cNvPr id="2" name="Slide Number Placeholder 1">
-            <a:extLst>
-              <a:ext uri="{FF2B5EF4-FFF2-40B4-BE49-F238E27FC236}">
-                <a16:creationId xmlns:a16="http://schemas.microsoft.com/office/drawing/2014/main" id="{57D6D695-3738-FA19-52B4-C4E6C8E3E2BD}"/>
-              </a:ext>
-            </a:extLst>
-          </p:cNvPr>
-          <p:cNvSpPr>
-            <a:spLocks noGrp="1"/>
-          </p:cNvSpPr>
-          <p:nvPr>
-            <p:ph type="sldNum" idx="12"/>
-          </p:nvPr>
-        </p:nvSpPr>
-        <p:spPr/>
-        <p:txBody>
-          <a:bodyPr/>
-          <a:lstStyle/>
-          <a:p>
-            <a:pPr marL="0" lvl="0" indent="0" algn="r" rtl="0">
-              <a:spcBef>
-                <a:spcPts val="0"/>
-              </a:spcBef>
-              <a:spcAft>
-                <a:spcPts val="0"/>
-              </a:spcAft>
-              <a:buNone/>
-            </a:pPr>
-            <a:fld id="{00000000-1234-1234-1234-123412341234}" type="slidenum">
-              <a:rPr lang="en" smtClean="0"/>
-              <a:t>8</a:t>
-            </a:fld>
-            <a:endParaRPr lang="en"/>
-          </a:p>
-        </p:txBody>
-      </p:sp>
-    </p:spTree>
-  </p:cSld>
-  <p:clrMapOvr>
-    <a:masterClrMapping/>
-  </p:clrMapOvr>
-</p:sld>
-</file>
-
-<file path=ppt/slides/slide9.xml><?xml version="1.0" encoding="utf-8"?>
-<p:sld xmlns:a="http://schemas.openxmlformats.org/drawingml/2006/main" xmlns:r="http://schemas.openxmlformats.org/officeDocument/2006/relationships" xmlns:p="http://schemas.openxmlformats.org/presentationml/2006/main">
-  <p:cSld>
-    <p:spTree>
-      <p:nvGrpSpPr>
         <p:cNvPr id="1" name="Shape 288"/>
         <p:cNvGrpSpPr/>
         <p:nvPr/>
@@ -50815,6 +47796,468 @@
             <a:extLst>
               <a:ext uri="{FF2B5EF4-FFF2-40B4-BE49-F238E27FC236}">
                 <a16:creationId xmlns:a16="http://schemas.microsoft.com/office/drawing/2014/main" id="{FDF702C3-C417-0CE3-DC61-3F8BE0611938}"/>
+              </a:ext>
+            </a:extLst>
+          </p:cNvPr>
+          <p:cNvSpPr>
+            <a:spLocks noGrp="1"/>
+          </p:cNvSpPr>
+          <p:nvPr>
+            <p:ph type="sldNum" idx="12"/>
+          </p:nvPr>
+        </p:nvSpPr>
+        <p:spPr/>
+        <p:txBody>
+          <a:bodyPr/>
+          <a:lstStyle/>
+          <a:p>
+            <a:pPr marL="0" lvl="0" indent="0" algn="r" rtl="0">
+              <a:spcBef>
+                <a:spcPts val="0"/>
+              </a:spcBef>
+              <a:spcAft>
+                <a:spcPts val="0"/>
+              </a:spcAft>
+              <a:buNone/>
+            </a:pPr>
+            <a:fld id="{00000000-1234-1234-1234-123412341234}" type="slidenum">
+              <a:rPr lang="en" smtClean="0"/>
+              <a:t>8</a:t>
+            </a:fld>
+            <a:endParaRPr lang="en"/>
+          </a:p>
+        </p:txBody>
+      </p:sp>
+    </p:spTree>
+  </p:cSld>
+  <p:clrMapOvr>
+    <a:masterClrMapping/>
+  </p:clrMapOvr>
+</p:sld>
+</file>
+
+<file path=ppt/slides/slide9.xml><?xml version="1.0" encoding="utf-8"?>
+<p:sld xmlns:a="http://schemas.openxmlformats.org/drawingml/2006/main" xmlns:r="http://schemas.openxmlformats.org/officeDocument/2006/relationships" xmlns:p="http://schemas.openxmlformats.org/presentationml/2006/main">
+  <p:cSld>
+    <p:spTree>
+      <p:nvGrpSpPr>
+        <p:cNvPr id="1" name="Shape 294"/>
+        <p:cNvGrpSpPr/>
+        <p:nvPr/>
+      </p:nvGrpSpPr>
+      <p:grpSpPr>
+        <a:xfrm>
+          <a:off x="0" y="0"/>
+          <a:ext cx="0" cy="0"/>
+          <a:chOff x="0" y="0"/>
+          <a:chExt cx="0" cy="0"/>
+        </a:xfrm>
+      </p:grpSpPr>
+      <p:sp>
+        <p:nvSpPr>
+          <p:cNvPr id="295" name="Google Shape;295;p33"/>
+          <p:cNvSpPr txBox="1">
+            <a:spLocks noGrp="1"/>
+          </p:cNvSpPr>
+          <p:nvPr>
+            <p:ph type="body" idx="1"/>
+          </p:nvPr>
+        </p:nvSpPr>
+        <p:spPr>
+          <a:xfrm>
+            <a:off x="4812375" y="402200"/>
+            <a:ext cx="4038000" cy="4260900"/>
+          </a:xfrm>
+          <a:prstGeom prst="rect">
+            <a:avLst/>
+          </a:prstGeom>
+        </p:spPr>
+        <p:txBody>
+          <a:bodyPr spcFirstLastPara="1" wrap="square" lIns="91425" tIns="91425" rIns="91425" bIns="91425" anchor="ctr" anchorCtr="0">
+            <a:noAutofit/>
+          </a:bodyPr>
+          <a:lstStyle/>
+          <a:p>
+            <a:pPr marL="0" lvl="0" indent="0" algn="l" rtl="0">
+              <a:spcBef>
+                <a:spcPts val="600"/>
+              </a:spcBef>
+              <a:spcAft>
+                <a:spcPts val="0"/>
+              </a:spcAft>
+              <a:buNone/>
+            </a:pPr>
+            <a:r>
+              <a:rPr lang="en" b="1">
+                <a:solidFill>
+                  <a:schemeClr val="accent3"/>
+                </a:solidFill>
+                <a:latin typeface="Roboto"/>
+                <a:ea typeface="Roboto"/>
+                <a:cs typeface="Roboto"/>
+                <a:sym typeface="Roboto"/>
+              </a:rPr>
+              <a:t>Link-State Protocols</a:t>
+            </a:r>
+            <a:endParaRPr b="1">
+              <a:solidFill>
+                <a:schemeClr val="accent3"/>
+              </a:solidFill>
+              <a:latin typeface="Roboto"/>
+              <a:ea typeface="Roboto"/>
+              <a:cs typeface="Roboto"/>
+              <a:sym typeface="Roboto"/>
+            </a:endParaRPr>
+          </a:p>
+          <a:p>
+            <a:pPr marL="457200" lvl="0" indent="-342900" algn="l" rtl="0">
+              <a:spcBef>
+                <a:spcPts val="600"/>
+              </a:spcBef>
+              <a:spcAft>
+                <a:spcPts val="0"/>
+              </a:spcAft>
+              <a:buClr>
+                <a:srgbClr val="B7B7B7"/>
+              </a:buClr>
+              <a:buSzPts val="1800"/>
+              <a:buChar char="•"/>
+            </a:pPr>
+            <a:r>
+              <a:rPr lang="en">
+                <a:solidFill>
+                  <a:srgbClr val="B7B7B7"/>
+                </a:solidFill>
+              </a:rPr>
+              <a:t>Overview</a:t>
+            </a:r>
+            <a:endParaRPr>
+              <a:solidFill>
+                <a:srgbClr val="B7B7B7"/>
+              </a:solidFill>
+            </a:endParaRPr>
+          </a:p>
+          <a:p>
+            <a:pPr marL="457200" lvl="0" indent="-342900" algn="l" rtl="0">
+              <a:spcBef>
+                <a:spcPts val="0"/>
+              </a:spcBef>
+              <a:spcAft>
+                <a:spcPts val="0"/>
+              </a:spcAft>
+              <a:buClr>
+                <a:srgbClr val="B7B7B7"/>
+              </a:buClr>
+              <a:buSzPts val="1800"/>
+              <a:buChar char="•"/>
+            </a:pPr>
+            <a:r>
+              <a:rPr lang="en">
+                <a:solidFill>
+                  <a:srgbClr val="B7B7B7"/>
+                </a:solidFill>
+              </a:rPr>
+              <a:t>Computing Paths</a:t>
+            </a:r>
+            <a:endParaRPr>
+              <a:solidFill>
+                <a:srgbClr val="B7B7B7"/>
+              </a:solidFill>
+            </a:endParaRPr>
+          </a:p>
+          <a:p>
+            <a:pPr marL="457200" lvl="0" indent="-342900" algn="l" rtl="0">
+              <a:spcBef>
+                <a:spcPts val="0"/>
+              </a:spcBef>
+              <a:spcAft>
+                <a:spcPts val="0"/>
+              </a:spcAft>
+              <a:buClr>
+                <a:schemeClr val="accent3"/>
+              </a:buClr>
+              <a:buSzPts val="1800"/>
+              <a:buFont typeface="Roboto"/>
+              <a:buChar char="•"/>
+            </a:pPr>
+            <a:r>
+              <a:rPr lang="en" b="1">
+                <a:solidFill>
+                  <a:schemeClr val="accent3"/>
+                </a:solidFill>
+                <a:latin typeface="Roboto"/>
+                <a:ea typeface="Roboto"/>
+                <a:cs typeface="Roboto"/>
+                <a:sym typeface="Roboto"/>
+              </a:rPr>
+              <a:t>Learning Graph Topology</a:t>
+            </a:r>
+            <a:endParaRPr b="1">
+              <a:solidFill>
+                <a:schemeClr val="accent3"/>
+              </a:solidFill>
+              <a:latin typeface="Roboto"/>
+              <a:ea typeface="Roboto"/>
+              <a:cs typeface="Roboto"/>
+              <a:sym typeface="Roboto"/>
+            </a:endParaRPr>
+          </a:p>
+          <a:p>
+            <a:pPr marL="0" lvl="0" indent="0" algn="l" rtl="0">
+              <a:spcBef>
+                <a:spcPts val="600"/>
+              </a:spcBef>
+              <a:spcAft>
+                <a:spcPts val="0"/>
+              </a:spcAft>
+              <a:buNone/>
+            </a:pPr>
+            <a:r>
+              <a:rPr lang="en">
+                <a:solidFill>
+                  <a:srgbClr val="B7B7B7"/>
+                </a:solidFill>
+              </a:rPr>
+              <a:t>IP Addressing</a:t>
+            </a:r>
+            <a:endParaRPr>
+              <a:solidFill>
+                <a:srgbClr val="B7B7B7"/>
+              </a:solidFill>
+            </a:endParaRPr>
+          </a:p>
+          <a:p>
+            <a:pPr marL="457200" lvl="0" indent="-342900" algn="l" rtl="0">
+              <a:spcBef>
+                <a:spcPts val="600"/>
+              </a:spcBef>
+              <a:spcAft>
+                <a:spcPts val="0"/>
+              </a:spcAft>
+              <a:buClr>
+                <a:srgbClr val="B7B7B7"/>
+              </a:buClr>
+              <a:buSzPts val="1800"/>
+              <a:buChar char="•"/>
+            </a:pPr>
+            <a:r>
+              <a:rPr lang="en">
+                <a:solidFill>
+                  <a:srgbClr val="B7B7B7"/>
+                </a:solidFill>
+              </a:rPr>
+              <a:t>Hierarchical Addressing</a:t>
+            </a:r>
+            <a:endParaRPr>
+              <a:solidFill>
+                <a:srgbClr val="B7B7B7"/>
+              </a:solidFill>
+            </a:endParaRPr>
+          </a:p>
+          <a:p>
+            <a:pPr marL="457200" lvl="0" indent="-342900" algn="l" rtl="0">
+              <a:spcBef>
+                <a:spcPts val="0"/>
+              </a:spcBef>
+              <a:spcAft>
+                <a:spcPts val="0"/>
+              </a:spcAft>
+              <a:buClr>
+                <a:srgbClr val="B7B7B7"/>
+              </a:buClr>
+              <a:buSzPts val="1800"/>
+              <a:buChar char="•"/>
+            </a:pPr>
+            <a:r>
+              <a:rPr lang="en">
+                <a:solidFill>
+                  <a:srgbClr val="B7B7B7"/>
+                </a:solidFill>
+              </a:rPr>
+              <a:t>Assigning Addresses</a:t>
+            </a:r>
+            <a:endParaRPr>
+              <a:solidFill>
+                <a:srgbClr val="B7B7B7"/>
+              </a:solidFill>
+            </a:endParaRPr>
+          </a:p>
+          <a:p>
+            <a:pPr marL="457200" lvl="0" indent="-342900" algn="l" rtl="0">
+              <a:spcBef>
+                <a:spcPts val="0"/>
+              </a:spcBef>
+              <a:spcAft>
+                <a:spcPts val="0"/>
+              </a:spcAft>
+              <a:buClr>
+                <a:srgbClr val="B7B7B7"/>
+              </a:buClr>
+              <a:buSzPts val="1800"/>
+              <a:buChar char="•"/>
+            </a:pPr>
+            <a:r>
+              <a:rPr lang="en">
+                <a:solidFill>
+                  <a:srgbClr val="B7B7B7"/>
+                </a:solidFill>
+              </a:rPr>
+              <a:t>Writing Addresses</a:t>
+            </a:r>
+            <a:endParaRPr>
+              <a:solidFill>
+                <a:srgbClr val="B7B7B7"/>
+              </a:solidFill>
+            </a:endParaRPr>
+          </a:p>
+          <a:p>
+            <a:pPr marL="457200" lvl="0" indent="-342900" algn="l" rtl="0">
+              <a:spcBef>
+                <a:spcPts val="0"/>
+              </a:spcBef>
+              <a:spcAft>
+                <a:spcPts val="0"/>
+              </a:spcAft>
+              <a:buClr>
+                <a:srgbClr val="B7B7B7"/>
+              </a:buClr>
+              <a:buSzPts val="1800"/>
+              <a:buChar char="•"/>
+            </a:pPr>
+            <a:r>
+              <a:rPr lang="en">
+                <a:solidFill>
+                  <a:srgbClr val="B7B7B7"/>
+                </a:solidFill>
+              </a:rPr>
+              <a:t>Aggregating Routes</a:t>
+            </a:r>
+            <a:endParaRPr>
+              <a:solidFill>
+                <a:srgbClr val="B7B7B7"/>
+              </a:solidFill>
+            </a:endParaRPr>
+          </a:p>
+          <a:p>
+            <a:pPr marL="457200" lvl="0" indent="-342900" algn="l" rtl="0">
+              <a:spcBef>
+                <a:spcPts val="0"/>
+              </a:spcBef>
+              <a:spcAft>
+                <a:spcPts val="0"/>
+              </a:spcAft>
+              <a:buClr>
+                <a:srgbClr val="B7B7B7"/>
+              </a:buClr>
+              <a:buSzPts val="1800"/>
+              <a:buChar char="•"/>
+            </a:pPr>
+            <a:r>
+              <a:rPr lang="en">
+                <a:solidFill>
+                  <a:srgbClr val="B7B7B7"/>
+                </a:solidFill>
+              </a:rPr>
+              <a:t>IPv6 Changes</a:t>
+            </a:r>
+            <a:endParaRPr>
+              <a:solidFill>
+                <a:srgbClr val="B7B7B7"/>
+              </a:solidFill>
+            </a:endParaRPr>
+          </a:p>
+        </p:txBody>
+      </p:sp>
+      <p:sp>
+        <p:nvSpPr>
+          <p:cNvPr id="296" name="Google Shape;296;p33"/>
+          <p:cNvSpPr txBox="1">
+            <a:spLocks noGrp="1"/>
+          </p:cNvSpPr>
+          <p:nvPr>
+            <p:ph type="title"/>
+          </p:nvPr>
+        </p:nvSpPr>
+        <p:spPr>
+          <a:xfrm>
+            <a:off x="177925" y="2003300"/>
+            <a:ext cx="4038000" cy="2037900"/>
+          </a:xfrm>
+          <a:prstGeom prst="rect">
+            <a:avLst/>
+          </a:prstGeom>
+        </p:spPr>
+        <p:txBody>
+          <a:bodyPr spcFirstLastPara="1" wrap="square" lIns="91425" tIns="91425" rIns="91425" bIns="91425" anchor="b" anchorCtr="0">
+            <a:noAutofit/>
+          </a:bodyPr>
+          <a:lstStyle/>
+          <a:p>
+            <a:pPr marL="0" lvl="0" indent="0" algn="l" rtl="0">
+              <a:spcBef>
+                <a:spcPts val="0"/>
+              </a:spcBef>
+              <a:spcAft>
+                <a:spcPts val="0"/>
+              </a:spcAft>
+              <a:buNone/>
+            </a:pPr>
+            <a:r>
+              <a:rPr lang="en"/>
+              <a:t>Learning Graph Topology</a:t>
+            </a:r>
+            <a:endParaRPr/>
+          </a:p>
+        </p:txBody>
+      </p:sp>
+      <p:sp>
+        <p:nvSpPr>
+          <p:cNvPr id="297" name="Google Shape;297;p33"/>
+          <p:cNvSpPr txBox="1">
+            <a:spLocks noGrp="1"/>
+          </p:cNvSpPr>
+          <p:nvPr>
+            <p:ph type="subTitle" idx="2"/>
+          </p:nvPr>
+        </p:nvSpPr>
+        <p:spPr>
+          <a:xfrm>
+            <a:off x="177925" y="4068000"/>
+            <a:ext cx="4158000" cy="393600"/>
+          </a:xfrm>
+          <a:prstGeom prst="rect">
+            <a:avLst/>
+          </a:prstGeom>
+        </p:spPr>
+        <p:txBody>
+          <a:bodyPr spcFirstLastPara="1" wrap="square" lIns="91425" tIns="91425" rIns="91425" bIns="91425" anchor="ctr" anchorCtr="0">
+            <a:noAutofit/>
+          </a:bodyPr>
+          <a:lstStyle/>
+          <a:p>
+            <a:pPr marL="0" lvl="0" indent="0" algn="l" rtl="0">
+              <a:spcBef>
+                <a:spcPts val="600"/>
+              </a:spcBef>
+              <a:spcAft>
+                <a:spcPts val="0"/>
+              </a:spcAft>
+              <a:buNone/>
+            </a:pPr>
+            <a:r>
+              <a:rPr lang="en-US" dirty="0"/>
+              <a:t>Lecture 5.3, Spring 2026</a:t>
+            </a:r>
+            <a:endParaRPr dirty="0"/>
+          </a:p>
+        </p:txBody>
+      </p:sp>
+      <p:sp>
+        <p:nvSpPr>
+          <p:cNvPr id="2" name="Slide Number Placeholder 1">
+            <a:extLst>
+              <a:ext uri="{FF2B5EF4-FFF2-40B4-BE49-F238E27FC236}">
+                <a16:creationId xmlns:a16="http://schemas.microsoft.com/office/drawing/2014/main" id="{8FEE7685-1350-59D7-F57B-04382E1FF876}"/>
               </a:ext>
             </a:extLst>
           </p:cNvPr>
